--- a/examples/sophisticated/deck.pptx
+++ b/examples/sophisticated/deck.pptx
@@ -8,6 +8,9 @@
     <p:sldId id="256" r:id="rId7"/>
     <p:sldId id="257" r:id="rId8"/>
     <p:sldId id="258" r:id="rId9"/>
+    <p:sldId id="259" r:id="rId10"/>
+    <p:sldId id="260" r:id="rId11"/>
+    <p:sldId id="261" r:id="rId12"/>
   </p:sldIdLst>
   <p:sldSz cx="12192000" cy="6858000" type="screen4x3"/>
   <p:notesSz cx="6858000" cy="9144000"/>
@@ -4979,6 +4982,3538 @@
                 <a:latin typeface="Inter"/>
               </a:rPr>
               <a:t>03 / 12</a:t>
+            </a:r>
+          </a:p>
+        </p:txBody>
+      </p:sp>
+    </p:spTree>
+  </p:cSld>
+  <p:clrMapOvr>
+    <a:masterClrMapping/>
+  </p:clrMapOvr>
+</p:sld>
+</file>
+
+<file path=ppt/slides/slide4.xml><?xml version="1.0" encoding="utf-8"?>
+<p:sld xmlns:a="http://schemas.openxmlformats.org/drawingml/2006/main" xmlns:p="http://schemas.openxmlformats.org/presentationml/2006/main" xmlns:r="http://schemas.openxmlformats.org/officeDocument/2006/relationships">
+  <p:cSld>
+    <p:spTree>
+      <p:nvGrpSpPr>
+        <p:cNvPr id="1" name=""/>
+        <p:cNvGrpSpPr/>
+        <p:nvPr/>
+      </p:nvGrpSpPr>
+      <p:grpSpPr/>
+      <p:sp>
+        <p:nvSpPr>
+          <p:cNvPr id="2" name="Rectangle 1"/>
+          <p:cNvSpPr/>
+          <p:nvPr/>
+        </p:nvSpPr>
+        <p:spPr>
+          <a:xfrm>
+            <a:off x="0" y="0"/>
+            <a:ext cx="12192000" cy="6858000"/>
+          </a:xfrm>
+          <a:prstGeom prst="rect">
+            <a:avLst/>
+          </a:prstGeom>
+          <a:solidFill>
+            <a:srgbClr val="070710"/>
+          </a:solidFill>
+          <a:ln>
+            <a:noFill/>
+          </a:ln>
+        </p:spPr>
+        <p:style>
+          <a:lnRef idx="1">
+            <a:schemeClr val="accent1"/>
+          </a:lnRef>
+          <a:fillRef idx="3">
+            <a:schemeClr val="accent1"/>
+          </a:fillRef>
+          <a:effectRef idx="2">
+            <a:schemeClr val="accent1"/>
+          </a:effectRef>
+          <a:fontRef idx="minor">
+            <a:schemeClr val="lt1"/>
+          </a:fontRef>
+        </p:style>
+        <p:txBody>
+          <a:bodyPr rtlCol="0" anchor="ctr"/>
+          <a:lstStyle/>
+          <a:p>
+            <a:pPr algn="ctr"/>
+          </a:p>
+        </p:txBody>
+      </p:sp>
+      <p:sp>
+        <p:nvSpPr>
+          <p:cNvPr id="3" name="TextBox 2"/>
+          <p:cNvSpPr txBox="1"/>
+          <p:nvPr/>
+        </p:nvSpPr>
+        <p:spPr>
+          <a:xfrm>
+            <a:off x="762000" y="762000"/>
+            <a:ext cx="10668000" cy="152400"/>
+          </a:xfrm>
+          <a:prstGeom prst="rect">
+            <a:avLst/>
+          </a:prstGeom>
+          <a:noFill/>
+        </p:spPr>
+        <p:txBody>
+          <a:bodyPr wrap="square" lIns="0" rIns="0" tIns="0" bIns="0">
+            <a:spAutoFit/>
+          </a:bodyPr>
+          <a:lstStyle/>
+          <a:p>
+            <a:pPr algn="l"/>
+            <a:r>
+              <a:rPr sz="975" b="1" i="0" u="none">
+                <a:solidFill>
+                  <a:srgbClr val="A78BFA"/>
+                </a:solidFill>
+                <a:latin typeface="Inter"/>
+              </a:rPr>
+              <a:t>By the numbers</a:t>
+            </a:r>
+          </a:p>
+        </p:txBody>
+      </p:sp>
+      <p:sp>
+        <p:nvSpPr>
+          <p:cNvPr id="4" name="TextBox 3"/>
+          <p:cNvSpPr txBox="1"/>
+          <p:nvPr/>
+        </p:nvSpPr>
+        <p:spPr>
+          <a:xfrm>
+            <a:off x="762000" y="1085850"/>
+            <a:ext cx="8572500" cy="959941"/>
+          </a:xfrm>
+          <a:prstGeom prst="rect">
+            <a:avLst/>
+          </a:prstGeom>
+          <a:noFill/>
+        </p:spPr>
+        <p:txBody>
+          <a:bodyPr wrap="square" lIns="0" rIns="0" tIns="0" bIns="0">
+            <a:spAutoFit/>
+          </a:bodyPr>
+          <a:lstStyle/>
+          <a:p>
+            <a:pPr algn="l"/>
+            <a:r>
+              <a:rPr sz="3600" b="1" i="0" u="none">
+                <a:solidFill>
+                  <a:srgbClr val="F5F5F7"/>
+                </a:solidFill>
+                <a:latin typeface="Inter"/>
+              </a:rPr>
+              <a:t>Editability that compounds across every deck shipped.</a:t>
+            </a:r>
+          </a:p>
+        </p:txBody>
+      </p:sp>
+      <p:sp>
+        <p:nvSpPr>
+          <p:cNvPr id="5" name="Rounded Rectangle 4"/>
+          <p:cNvSpPr/>
+          <p:nvPr/>
+        </p:nvSpPr>
+        <p:spPr>
+          <a:gradFill flip="none" rotWithShape="1">
+            <a:gsLst>
+              <a:gs pos="0">
+                <a:srgbClr val="FFFFFF">
+                  <a:alpha val="5000"/>
+                </a:srgbClr>
+              </a:gs>
+              <a:gs pos="100000">
+                <a:srgbClr val="FFFFFF">
+                  <a:alpha val="2000"/>
+                </a:srgbClr>
+              </a:gs>
+            </a:gsLst>
+            <a:lin ang="5400000" scaled="0"/>
+          </a:gradFill>
+          <a:xfrm>
+            <a:off x="762000" y="2502991"/>
+            <a:ext cx="3403550" cy="3153370"/>
+          </a:xfrm>
+          <a:prstGeom prst="roundRect">
+            <a:avLst/>
+          </a:prstGeom>
+          <a:ln w="9525">
+            <a:solidFill>
+              <a:srgbClr val="FFFFFF"/>
+            </a:solidFill>
+          </a:ln>
+          <a:effectLst>
+            <a:outerShdw blurRad="571500" dist="228600" dir="5400000" algn="ctr" rotWithShape="0">
+              <a:srgbClr val="6366F1">
+                <a:alpha val="8000"/>
+              </a:srgbClr>
+            </a:outerShdw>
+          </a:effectLst>
+        </p:spPr>
+        <p:style>
+          <a:lnRef idx="1">
+            <a:schemeClr val="accent1"/>
+          </a:lnRef>
+          <a:fillRef idx="3">
+            <a:schemeClr val="accent1"/>
+          </a:fillRef>
+          <a:effectRef idx="2">
+            <a:schemeClr val="accent1"/>
+          </a:effectRef>
+          <a:fontRef idx="minor">
+            <a:schemeClr val="lt1"/>
+          </a:fontRef>
+        </p:style>
+        <p:txBody>
+          <a:bodyPr rtlCol="0" anchor="ctr"/>
+          <a:lstStyle/>
+          <a:p>
+            <a:pPr algn="ctr"/>
+          </a:p>
+        </p:txBody>
+      </p:sp>
+      <p:sp>
+        <p:nvSpPr>
+          <p:cNvPr id="6" name="TextBox 5"/>
+          <p:cNvSpPr txBox="1"/>
+          <p:nvPr/>
+        </p:nvSpPr>
+        <p:spPr>
+          <a:xfrm>
+            <a:off x="1076325" y="2855416"/>
+            <a:ext cx="2774900" cy="152400"/>
+          </a:xfrm>
+          <a:prstGeom prst="rect">
+            <a:avLst/>
+          </a:prstGeom>
+          <a:noFill/>
+        </p:spPr>
+        <p:txBody>
+          <a:bodyPr wrap="square" lIns="0" rIns="0" tIns="0" bIns="0">
+            <a:spAutoFit/>
+          </a:bodyPr>
+          <a:lstStyle/>
+          <a:p>
+            <a:pPr algn="l"/>
+            <a:r>
+              <a:rPr sz="975" b="1" i="0" u="none">
+                <a:solidFill>
+                  <a:srgbClr val="A1A1AA"/>
+                </a:solidFill>
+                <a:latin typeface="Inter"/>
+              </a:rPr>
+              <a:t>Native area</a:t>
+            </a:r>
+          </a:p>
+        </p:txBody>
+      </p:sp>
+      <p:sp>
+        <p:nvSpPr>
+          <p:cNvPr id="7" name="TextBox 6"/>
+          <p:cNvSpPr txBox="1"/>
+          <p:nvPr/>
+        </p:nvSpPr>
+        <p:spPr>
+          <a:xfrm>
+            <a:off x="1076325" y="3141166"/>
+            <a:ext cx="2774900" cy="838200"/>
+          </a:xfrm>
+          <a:prstGeom prst="rect">
+            <a:avLst/>
+          </a:prstGeom>
+          <a:noFill/>
+        </p:spPr>
+        <p:txBody>
+          <a:bodyPr wrap="square" lIns="0" rIns="0" tIns="0" bIns="0">
+            <a:spAutoFit/>
+          </a:bodyPr>
+          <a:lstStyle/>
+          <a:p>
+            <a:pPr algn="l"/>
+            <a:r>
+              <a:rPr sz="6600" b="1" i="0" u="none">
+                <a:solidFill>
+                  <a:srgbClr val="F5F5F7"/>
+                </a:solidFill>
+                <a:latin typeface="Inter"/>
+              </a:rPr>
+              <a:t>87</a:t>
+            </a:r>
+            <a:r>
+              <a:rPr sz="3000" b="1" i="0" u="none">
+                <a:solidFill>
+                  <a:srgbClr val="A78BFA"/>
+                </a:solidFill>
+                <a:latin typeface="Inter"/>
+              </a:rPr>
+              <a:t>%</a:t>
+            </a:r>
+          </a:p>
+        </p:txBody>
+      </p:sp>
+      <p:sp>
+        <p:nvSpPr>
+          <p:cNvPr id="8" name="TextBox 7"/>
+          <p:cNvSpPr txBox="1"/>
+          <p:nvPr/>
+        </p:nvSpPr>
+        <p:spPr>
+          <a:xfrm>
+            <a:off x="1076325" y="4112716"/>
+            <a:ext cx="799207" cy="238125"/>
+          </a:xfrm>
+          <a:prstGeom prst="rect">
+            <a:avLst/>
+          </a:prstGeom>
+          <a:solidFill>
+            <a:srgbClr val="22C55E"/>
+          </a:solidFill>
+        </p:spPr>
+        <p:txBody>
+          <a:bodyPr wrap="square" lIns="0" rIns="0" tIns="0" bIns="0">
+            <a:spAutoFit/>
+          </a:bodyPr>
+          <a:lstStyle/>
+          <a:p>
+            <a:pPr algn="l"/>
+            <a:r>
+              <a:rPr sz="900" b="1" i="0" u="none">
+                <a:solidFill>
+                  <a:srgbClr val="86EFAC"/>
+                </a:solidFill>
+                <a:latin typeface="Inter"/>
+              </a:rPr>
+              <a:t>▲ +29.4%</a:t>
+            </a:r>
+          </a:p>
+        </p:txBody>
+      </p:sp>
+      <p:sp>
+        <p:nvSpPr>
+          <p:cNvPr id="9" name="TextBox 8"/>
+          <p:cNvSpPr txBox="1"/>
+          <p:nvPr/>
+        </p:nvSpPr>
+        <p:spPr>
+          <a:xfrm>
+            <a:off x="1951732" y="4160341"/>
+            <a:ext cx="774650" cy="142875"/>
+          </a:xfrm>
+          <a:prstGeom prst="rect">
+            <a:avLst/>
+          </a:prstGeom>
+          <a:noFill/>
+        </p:spPr>
+        <p:txBody>
+          <a:bodyPr wrap="square" lIns="0" rIns="0" tIns="0" bIns="0">
+            <a:spAutoFit/>
+          </a:bodyPr>
+          <a:lstStyle/>
+          <a:p>
+            <a:pPr algn="l"/>
+            <a:r>
+              <a:rPr sz="900" b="0" i="0" u="none">
+                <a:solidFill>
+                  <a:srgbClr val="52525B"/>
+                </a:solidFill>
+                <a:latin typeface="Inter"/>
+              </a:rPr>
+              <a:t>vs Q1 baseline</a:t>
+            </a:r>
+          </a:p>
+        </p:txBody>
+      </p:sp>
+      <p:sp>
+        <p:nvSpPr>
+          <p:cNvPr id="10" name="TextBox 9"/>
+          <p:cNvSpPr txBox="1"/>
+          <p:nvPr/>
+        </p:nvSpPr>
+        <p:spPr>
+          <a:xfrm>
+            <a:off x="1076325" y="4522291"/>
+            <a:ext cx="2774900" cy="781645"/>
+          </a:xfrm>
+          <a:prstGeom prst="rect">
+            <a:avLst/>
+          </a:prstGeom>
+          <a:noFill/>
+        </p:spPr>
+        <p:txBody>
+          <a:bodyPr wrap="square" lIns="0" rIns="0" tIns="0" bIns="0">
+            <a:spAutoFit/>
+          </a:bodyPr>
+          <a:lstStyle/>
+          <a:p>
+            <a:pPr algn="l"/>
+            <a:r>
+              <a:rPr sz="1050" b="0" i="0" u="none">
+                <a:solidFill>
+                  <a:srgbClr val="A1A1AA"/>
+                </a:solidFill>
+                <a:latin typeface="Inter"/>
+              </a:rPr>
+              <a:t>Average across the corpus. Tier-0 patterns landed in March; Q2 added composite recipes for stat- and feature-cards.</a:t>
+            </a:r>
+          </a:p>
+        </p:txBody>
+      </p:sp>
+      <p:sp>
+        <p:nvSpPr>
+          <p:cNvPr id="11" name="Rounded Rectangle 10"/>
+          <p:cNvSpPr/>
+          <p:nvPr/>
+        </p:nvSpPr>
+        <p:spPr>
+          <a:gradFill flip="none" rotWithShape="1">
+            <a:gsLst>
+              <a:gs pos="0">
+                <a:srgbClr val="FFFFFF">
+                  <a:alpha val="5000"/>
+                </a:srgbClr>
+              </a:gs>
+              <a:gs pos="100000">
+                <a:srgbClr val="FFFFFF">
+                  <a:alpha val="2000"/>
+                </a:srgbClr>
+              </a:gs>
+            </a:gsLst>
+            <a:lin ang="5400000" scaled="0"/>
+          </a:gradFill>
+          <a:xfrm>
+            <a:off x="4394150" y="2502991"/>
+            <a:ext cx="3403550" cy="3153370"/>
+          </a:xfrm>
+          <a:prstGeom prst="roundRect">
+            <a:avLst/>
+          </a:prstGeom>
+          <a:ln w="9525">
+            <a:solidFill>
+              <a:srgbClr val="FFFFFF"/>
+            </a:solidFill>
+          </a:ln>
+          <a:effectLst>
+            <a:outerShdw blurRad="571500" dist="228600" dir="5400000" algn="ctr" rotWithShape="0">
+              <a:srgbClr val="6366F1">
+                <a:alpha val="8000"/>
+              </a:srgbClr>
+            </a:outerShdw>
+          </a:effectLst>
+        </p:spPr>
+        <p:style>
+          <a:lnRef idx="1">
+            <a:schemeClr val="accent1"/>
+          </a:lnRef>
+          <a:fillRef idx="3">
+            <a:schemeClr val="accent1"/>
+          </a:fillRef>
+          <a:effectRef idx="2">
+            <a:schemeClr val="accent1"/>
+          </a:effectRef>
+          <a:fontRef idx="minor">
+            <a:schemeClr val="lt1"/>
+          </a:fontRef>
+        </p:style>
+        <p:txBody>
+          <a:bodyPr rtlCol="0" anchor="ctr"/>
+          <a:lstStyle/>
+          <a:p>
+            <a:pPr algn="ctr"/>
+          </a:p>
+        </p:txBody>
+      </p:sp>
+      <p:sp>
+        <p:nvSpPr>
+          <p:cNvPr id="12" name="TextBox 11"/>
+          <p:cNvSpPr txBox="1"/>
+          <p:nvPr/>
+        </p:nvSpPr>
+        <p:spPr>
+          <a:xfrm>
+            <a:off x="4708475" y="2855416"/>
+            <a:ext cx="2774900" cy="152400"/>
+          </a:xfrm>
+          <a:prstGeom prst="rect">
+            <a:avLst/>
+          </a:prstGeom>
+          <a:noFill/>
+        </p:spPr>
+        <p:txBody>
+          <a:bodyPr wrap="square" lIns="0" rIns="0" tIns="0" bIns="0">
+            <a:spAutoFit/>
+          </a:bodyPr>
+          <a:lstStyle/>
+          <a:p>
+            <a:pPr algn="l"/>
+            <a:r>
+              <a:rPr sz="975" b="1" i="0" u="none">
+                <a:solidFill>
+                  <a:srgbClr val="A1A1AA"/>
+                </a:solidFill>
+                <a:latin typeface="Inter"/>
+              </a:rPr>
+              <a:t>Per 10-slide deck</a:t>
+            </a:r>
+          </a:p>
+        </p:txBody>
+      </p:sp>
+      <p:sp>
+        <p:nvSpPr>
+          <p:cNvPr id="13" name="TextBox 12"/>
+          <p:cNvSpPr txBox="1"/>
+          <p:nvPr/>
+        </p:nvSpPr>
+        <p:spPr>
+          <a:xfrm>
+            <a:off x="4708475" y="3141166"/>
+            <a:ext cx="2774900" cy="838200"/>
+          </a:xfrm>
+          <a:prstGeom prst="rect">
+            <a:avLst/>
+          </a:prstGeom>
+          <a:noFill/>
+        </p:spPr>
+        <p:txBody>
+          <a:bodyPr wrap="square" lIns="0" rIns="0" tIns="0" bIns="0">
+            <a:spAutoFit/>
+          </a:bodyPr>
+          <a:lstStyle/>
+          <a:p>
+            <a:pPr algn="l"/>
+            <a:r>
+              <a:rPr sz="6600" b="1" i="0" u="none">
+                <a:solidFill>
+                  <a:srgbClr val="F5F5F7"/>
+                </a:solidFill>
+                <a:latin typeface="Inter"/>
+              </a:rPr>
+              <a:t>23</a:t>
+            </a:r>
+            <a:r>
+              <a:rPr sz="3000" b="1" i="0" u="none">
+                <a:solidFill>
+                  <a:srgbClr val="A78BFA"/>
+                </a:solidFill>
+                <a:latin typeface="Inter"/>
+              </a:rPr>
+              <a:t>s</a:t>
+            </a:r>
+          </a:p>
+        </p:txBody>
+      </p:sp>
+      <p:sp>
+        <p:nvSpPr>
+          <p:cNvPr id="14" name="TextBox 13"/>
+          <p:cNvSpPr txBox="1"/>
+          <p:nvPr/>
+        </p:nvSpPr>
+        <p:spPr>
+          <a:xfrm>
+            <a:off x="4708475" y="4112716"/>
+            <a:ext cx="645468" cy="238125"/>
+          </a:xfrm>
+          <a:prstGeom prst="rect">
+            <a:avLst/>
+          </a:prstGeom>
+          <a:solidFill>
+            <a:srgbClr val="F43F5E"/>
+          </a:solidFill>
+        </p:spPr>
+        <p:txBody>
+          <a:bodyPr wrap="square" lIns="0" rIns="0" tIns="0" bIns="0">
+            <a:spAutoFit/>
+          </a:bodyPr>
+          <a:lstStyle/>
+          <a:p>
+            <a:pPr algn="l"/>
+            <a:r>
+              <a:rPr sz="900" b="1" i="0" u="none">
+                <a:solidFill>
+                  <a:srgbClr val="FDA4AF"/>
+                </a:solidFill>
+                <a:latin typeface="Inter"/>
+              </a:rPr>
+              <a:t>▼ -41%</a:t>
+            </a:r>
+          </a:p>
+        </p:txBody>
+      </p:sp>
+      <p:sp>
+        <p:nvSpPr>
+          <p:cNvPr id="15" name="TextBox 14"/>
+          <p:cNvSpPr txBox="1"/>
+          <p:nvPr/>
+        </p:nvSpPr>
+        <p:spPr>
+          <a:xfrm>
+            <a:off x="5430143" y="4160341"/>
+            <a:ext cx="774650" cy="142875"/>
+          </a:xfrm>
+          <a:prstGeom prst="rect">
+            <a:avLst/>
+          </a:prstGeom>
+          <a:noFill/>
+        </p:spPr>
+        <p:txBody>
+          <a:bodyPr wrap="square" lIns="0" rIns="0" tIns="0" bIns="0">
+            <a:spAutoFit/>
+          </a:bodyPr>
+          <a:lstStyle/>
+          <a:p>
+            <a:pPr algn="l"/>
+            <a:r>
+              <a:rPr sz="900" b="0" i="0" u="none">
+                <a:solidFill>
+                  <a:srgbClr val="52525B"/>
+                </a:solidFill>
+                <a:latin typeface="Inter"/>
+              </a:rPr>
+              <a:t>vs Q1 baseline</a:t>
+            </a:r>
+          </a:p>
+        </p:txBody>
+      </p:sp>
+      <p:sp>
+        <p:nvSpPr>
+          <p:cNvPr id="16" name="TextBox 15"/>
+          <p:cNvSpPr txBox="1"/>
+          <p:nvPr/>
+        </p:nvSpPr>
+        <p:spPr>
+          <a:xfrm>
+            <a:off x="4708475" y="4522291"/>
+            <a:ext cx="2774900" cy="781645"/>
+          </a:xfrm>
+          <a:prstGeom prst="rect">
+            <a:avLst/>
+          </a:prstGeom>
+          <a:noFill/>
+        </p:spPr>
+        <p:txBody>
+          <a:bodyPr wrap="square" lIns="0" rIns="0" tIns="0" bIns="0">
+            <a:spAutoFit/>
+          </a:bodyPr>
+          <a:lstStyle/>
+          <a:p>
+            <a:pPr algn="l"/>
+            <a:r>
+              <a:rPr sz="1050" b="0" i="0" u="none">
+                <a:solidFill>
+                  <a:srgbClr val="A1A1AA"/>
+                </a:solidFill>
+                <a:latin typeface="Inter"/>
+              </a:rPr>
+              <a:t>P95 conversion time on a single 8-core box, no GPU. Bottleneck is render parallelism (Chart.js init).</a:t>
+            </a:r>
+          </a:p>
+        </p:txBody>
+      </p:sp>
+      <p:sp>
+        <p:nvSpPr>
+          <p:cNvPr id="17" name="Rounded Rectangle 16"/>
+          <p:cNvSpPr/>
+          <p:nvPr/>
+        </p:nvSpPr>
+        <p:spPr>
+          <a:gradFill flip="none" rotWithShape="1">
+            <a:gsLst>
+              <a:gs pos="0">
+                <a:srgbClr val="FFFFFF">
+                  <a:alpha val="5000"/>
+                </a:srgbClr>
+              </a:gs>
+              <a:gs pos="100000">
+                <a:srgbClr val="FFFFFF">
+                  <a:alpha val="2000"/>
+                </a:srgbClr>
+              </a:gs>
+            </a:gsLst>
+            <a:lin ang="5400000" scaled="0"/>
+          </a:gradFill>
+          <a:xfrm>
+            <a:off x="8026301" y="2502991"/>
+            <a:ext cx="3403699" cy="3153370"/>
+          </a:xfrm>
+          <a:prstGeom prst="roundRect">
+            <a:avLst/>
+          </a:prstGeom>
+          <a:ln w="9525">
+            <a:solidFill>
+              <a:srgbClr val="FFFFFF"/>
+            </a:solidFill>
+          </a:ln>
+          <a:effectLst>
+            <a:outerShdw blurRad="571500" dist="228600" dir="5400000" algn="ctr" rotWithShape="0">
+              <a:srgbClr val="6366F1">
+                <a:alpha val="8000"/>
+              </a:srgbClr>
+            </a:outerShdw>
+          </a:effectLst>
+        </p:spPr>
+        <p:style>
+          <a:lnRef idx="1">
+            <a:schemeClr val="accent1"/>
+          </a:lnRef>
+          <a:fillRef idx="3">
+            <a:schemeClr val="accent1"/>
+          </a:fillRef>
+          <a:effectRef idx="2">
+            <a:schemeClr val="accent1"/>
+          </a:effectRef>
+          <a:fontRef idx="minor">
+            <a:schemeClr val="lt1"/>
+          </a:fontRef>
+        </p:style>
+        <p:txBody>
+          <a:bodyPr rtlCol="0" anchor="ctr"/>
+          <a:lstStyle/>
+          <a:p>
+            <a:pPr algn="ctr"/>
+          </a:p>
+        </p:txBody>
+      </p:sp>
+      <p:sp>
+        <p:nvSpPr>
+          <p:cNvPr id="18" name="TextBox 17"/>
+          <p:cNvSpPr txBox="1"/>
+          <p:nvPr/>
+        </p:nvSpPr>
+        <p:spPr>
+          <a:xfrm>
+            <a:off x="8340626" y="2855416"/>
+            <a:ext cx="2775049" cy="152400"/>
+          </a:xfrm>
+          <a:prstGeom prst="rect">
+            <a:avLst/>
+          </a:prstGeom>
+          <a:noFill/>
+        </p:spPr>
+        <p:txBody>
+          <a:bodyPr wrap="square" lIns="0" rIns="0" tIns="0" bIns="0">
+            <a:spAutoFit/>
+          </a:bodyPr>
+          <a:lstStyle/>
+          <a:p>
+            <a:pPr algn="l"/>
+            <a:r>
+              <a:rPr sz="975" b="1" i="0" u="none">
+                <a:solidFill>
+                  <a:srgbClr val="A1A1AA"/>
+                </a:solidFill>
+                <a:latin typeface="Inter"/>
+              </a:rPr>
+              <a:t>LLM cost</a:t>
+            </a:r>
+          </a:p>
+        </p:txBody>
+      </p:sp>
+      <p:sp>
+        <p:nvSpPr>
+          <p:cNvPr id="19" name="TextBox 18"/>
+          <p:cNvSpPr txBox="1"/>
+          <p:nvPr/>
+        </p:nvSpPr>
+        <p:spPr>
+          <a:xfrm>
+            <a:off x="8340626" y="3141166"/>
+            <a:ext cx="2775049" cy="838200"/>
+          </a:xfrm>
+          <a:prstGeom prst="rect">
+            <a:avLst/>
+          </a:prstGeom>
+          <a:noFill/>
+        </p:spPr>
+        <p:txBody>
+          <a:bodyPr wrap="square" lIns="0" rIns="0" tIns="0" bIns="0">
+            <a:spAutoFit/>
+          </a:bodyPr>
+          <a:lstStyle/>
+          <a:p>
+            <a:pPr algn="l"/>
+            <a:r>
+              <a:rPr sz="6600" b="1" i="0" u="none">
+                <a:solidFill>
+                  <a:srgbClr val="F5F5F7"/>
+                </a:solidFill>
+                <a:latin typeface="Inter"/>
+              </a:rPr>
+              <a:t>$0.04</a:t>
+            </a:r>
+          </a:p>
+        </p:txBody>
+      </p:sp>
+      <p:sp>
+        <p:nvSpPr>
+          <p:cNvPr id="20" name="TextBox 19"/>
+          <p:cNvSpPr txBox="1"/>
+          <p:nvPr/>
+        </p:nvSpPr>
+        <p:spPr>
+          <a:xfrm>
+            <a:off x="8340626" y="4112716"/>
+            <a:ext cx="658267" cy="238125"/>
+          </a:xfrm>
+          <a:prstGeom prst="rect">
+            <a:avLst/>
+          </a:prstGeom>
+          <a:solidFill>
+            <a:srgbClr val="F43F5E"/>
+          </a:solidFill>
+        </p:spPr>
+        <p:txBody>
+          <a:bodyPr wrap="square" lIns="0" rIns="0" tIns="0" bIns="0">
+            <a:spAutoFit/>
+          </a:bodyPr>
+          <a:lstStyle/>
+          <a:p>
+            <a:pPr algn="l"/>
+            <a:r>
+              <a:rPr sz="900" b="1" i="0" u="none">
+                <a:solidFill>
+                  <a:srgbClr val="FDA4AF"/>
+                </a:solidFill>
+                <a:latin typeface="Inter"/>
+              </a:rPr>
+              <a:t>▼ -73%</a:t>
+            </a:r>
+          </a:p>
+        </p:txBody>
+      </p:sp>
+      <p:sp>
+        <p:nvSpPr>
+          <p:cNvPr id="21" name="TextBox 20"/>
+          <p:cNvSpPr txBox="1"/>
+          <p:nvPr/>
+        </p:nvSpPr>
+        <p:spPr>
+          <a:xfrm>
+            <a:off x="9075093" y="4160341"/>
+            <a:ext cx="774650" cy="142875"/>
+          </a:xfrm>
+          <a:prstGeom prst="rect">
+            <a:avLst/>
+          </a:prstGeom>
+          <a:noFill/>
+        </p:spPr>
+        <p:txBody>
+          <a:bodyPr wrap="square" lIns="0" rIns="0" tIns="0" bIns="0">
+            <a:spAutoFit/>
+          </a:bodyPr>
+          <a:lstStyle/>
+          <a:p>
+            <a:pPr algn="l"/>
+            <a:r>
+              <a:rPr sz="900" b="0" i="0" u="none">
+                <a:solidFill>
+                  <a:srgbClr val="52525B"/>
+                </a:solidFill>
+                <a:latin typeface="Inter"/>
+              </a:rPr>
+              <a:t>vs Q1 baseline</a:t>
+            </a:r>
+          </a:p>
+        </p:txBody>
+      </p:sp>
+      <p:sp>
+        <p:nvSpPr>
+          <p:cNvPr id="22" name="TextBox 21"/>
+          <p:cNvSpPr txBox="1"/>
+          <p:nvPr/>
+        </p:nvSpPr>
+        <p:spPr>
+          <a:xfrm>
+            <a:off x="8340626" y="4522291"/>
+            <a:ext cx="2775049" cy="781645"/>
+          </a:xfrm>
+          <a:prstGeom prst="rect">
+            <a:avLst/>
+          </a:prstGeom>
+          <a:noFill/>
+        </p:spPr>
+        <p:txBody>
+          <a:bodyPr wrap="square" lIns="0" rIns="0" tIns="0" bIns="0">
+            <a:spAutoFit/>
+          </a:bodyPr>
+          <a:lstStyle/>
+          <a:p>
+            <a:pPr algn="l"/>
+            <a:r>
+              <a:rPr sz="1050" b="0" i="0" u="none">
+                <a:solidFill>
+                  <a:srgbClr val="A1A1AA"/>
+                </a:solidFill>
+                <a:latin typeface="Inter"/>
+              </a:rPr>
+              <a:t>Switch to Gemini Flash + only-firing-on-the-ambiguous-tail. ≤$0.10/deck even with full Tier-3 enabled.</a:t>
+            </a:r>
+          </a:p>
+        </p:txBody>
+      </p:sp>
+      <p:sp>
+        <p:nvSpPr>
+          <p:cNvPr id="23" name="TextBox 22"/>
+          <p:cNvSpPr txBox="1"/>
+          <p:nvPr/>
+        </p:nvSpPr>
+        <p:spPr>
+          <a:xfrm>
+            <a:off x="762000" y="6400800"/>
+            <a:ext cx="3403104" cy="152400"/>
+          </a:xfrm>
+          <a:prstGeom prst="rect">
+            <a:avLst/>
+          </a:prstGeom>
+          <a:noFill/>
+        </p:spPr>
+        <p:txBody>
+          <a:bodyPr wrap="square" lIns="0" rIns="0" tIns="0" bIns="0">
+            <a:spAutoFit/>
+          </a:bodyPr>
+          <a:lstStyle/>
+          <a:p>
+            <a:pPr algn="l"/>
+            <a:r>
+              <a:rPr sz="975" b="1" i="0" u="none">
+                <a:solidFill>
+                  <a:srgbClr val="52525B"/>
+                </a:solidFill>
+                <a:latin typeface="Inter"/>
+              </a:rPr>
+              <a:t>SOURCE · Internal benchmark · April 2026</a:t>
+            </a:r>
+          </a:p>
+        </p:txBody>
+      </p:sp>
+      <p:sp>
+        <p:nvSpPr>
+          <p:cNvPr id="24" name="TextBox 23"/>
+          <p:cNvSpPr txBox="1"/>
+          <p:nvPr/>
+        </p:nvSpPr>
+        <p:spPr>
+          <a:xfrm>
+            <a:off x="10871002" y="6400800"/>
+            <a:ext cx="558998" cy="152400"/>
+          </a:xfrm>
+          <a:prstGeom prst="rect">
+            <a:avLst/>
+          </a:prstGeom>
+          <a:noFill/>
+        </p:spPr>
+        <p:txBody>
+          <a:bodyPr wrap="square" lIns="0" rIns="0" tIns="0" bIns="0">
+            <a:spAutoFit/>
+          </a:bodyPr>
+          <a:lstStyle/>
+          <a:p>
+            <a:pPr algn="l"/>
+            <a:r>
+              <a:rPr sz="975" b="1" i="0" u="none">
+                <a:solidFill>
+                  <a:srgbClr val="52525B"/>
+                </a:solidFill>
+                <a:latin typeface="Inter"/>
+              </a:rPr>
+              <a:t>04 / 12</a:t>
+            </a:r>
+          </a:p>
+        </p:txBody>
+      </p:sp>
+    </p:spTree>
+  </p:cSld>
+  <p:clrMapOvr>
+    <a:masterClrMapping/>
+  </p:clrMapOvr>
+</p:sld>
+</file>
+
+<file path=ppt/slides/slide5.xml><?xml version="1.0" encoding="utf-8"?>
+<p:sld xmlns:a="http://schemas.openxmlformats.org/drawingml/2006/main" xmlns:p="http://schemas.openxmlformats.org/presentationml/2006/main" xmlns:r="http://schemas.openxmlformats.org/officeDocument/2006/relationships">
+  <p:cSld>
+    <p:spTree>
+      <p:nvGrpSpPr>
+        <p:cNvPr id="1" name=""/>
+        <p:cNvGrpSpPr/>
+        <p:nvPr/>
+      </p:nvGrpSpPr>
+      <p:grpSpPr/>
+      <p:sp>
+        <p:nvSpPr>
+          <p:cNvPr id="2" name="Rectangle 1"/>
+          <p:cNvSpPr/>
+          <p:nvPr/>
+        </p:nvSpPr>
+        <p:spPr>
+          <a:xfrm>
+            <a:off x="0" y="0"/>
+            <a:ext cx="12192000" cy="6858000"/>
+          </a:xfrm>
+          <a:prstGeom prst="rect">
+            <a:avLst/>
+          </a:prstGeom>
+          <a:solidFill>
+            <a:srgbClr val="070710"/>
+          </a:solidFill>
+          <a:ln>
+            <a:noFill/>
+          </a:ln>
+        </p:spPr>
+        <p:style>
+          <a:lnRef idx="1">
+            <a:schemeClr val="accent1"/>
+          </a:lnRef>
+          <a:fillRef idx="3">
+            <a:schemeClr val="accent1"/>
+          </a:fillRef>
+          <a:effectRef idx="2">
+            <a:schemeClr val="accent1"/>
+          </a:effectRef>
+          <a:fontRef idx="minor">
+            <a:schemeClr val="lt1"/>
+          </a:fontRef>
+        </p:style>
+        <p:txBody>
+          <a:bodyPr rtlCol="0" anchor="ctr"/>
+          <a:lstStyle/>
+          <a:p>
+            <a:pPr algn="ctr"/>
+          </a:p>
+        </p:txBody>
+      </p:sp>
+      <p:sp>
+        <p:nvSpPr>
+          <p:cNvPr id="3" name="TextBox 2"/>
+          <p:cNvSpPr txBox="1"/>
+          <p:nvPr/>
+        </p:nvSpPr>
+        <p:spPr>
+          <a:xfrm>
+            <a:off x="762000" y="685800"/>
+            <a:ext cx="7020967" cy="439936"/>
+          </a:xfrm>
+          <a:prstGeom prst="rect">
+            <a:avLst/>
+          </a:prstGeom>
+          <a:noFill/>
+        </p:spPr>
+        <p:txBody>
+          <a:bodyPr wrap="square" lIns="0" rIns="0" tIns="0" bIns="0">
+            <a:spAutoFit/>
+          </a:bodyPr>
+          <a:lstStyle/>
+          <a:p>
+            <a:pPr algn="l"/>
+            <a:r>
+              <a:rPr sz="3300" b="1" i="0" u="none">
+                <a:solidFill>
+                  <a:srgbClr val="F5F5F7"/>
+                </a:solidFill>
+                <a:latin typeface="Inter"/>
+              </a:rPr>
+              <a:t>Six pillars of the rendering pipeline.</a:t>
+            </a:r>
+          </a:p>
+        </p:txBody>
+      </p:sp>
+      <p:sp>
+        <p:nvSpPr>
+          <p:cNvPr id="4" name="TextBox 3"/>
+          <p:cNvSpPr txBox="1"/>
+          <p:nvPr/>
+        </p:nvSpPr>
+        <p:spPr>
+          <a:xfrm>
+            <a:off x="10875466" y="973336"/>
+            <a:ext cx="554534" cy="152400"/>
+          </a:xfrm>
+          <a:prstGeom prst="rect">
+            <a:avLst/>
+          </a:prstGeom>
+          <a:noFill/>
+        </p:spPr>
+        <p:txBody>
+          <a:bodyPr wrap="square" lIns="0" rIns="0" tIns="0" bIns="0">
+            <a:spAutoFit/>
+          </a:bodyPr>
+          <a:lstStyle/>
+          <a:p>
+            <a:pPr algn="l"/>
+            <a:r>
+              <a:rPr sz="975" b="1" i="0" u="none">
+                <a:solidFill>
+                  <a:srgbClr val="71717A"/>
+                </a:solidFill>
+                <a:latin typeface="Inter"/>
+              </a:rPr>
+              <a:t>05 / 12</a:t>
+            </a:r>
+          </a:p>
+        </p:txBody>
+      </p:sp>
+      <p:sp>
+        <p:nvSpPr>
+          <p:cNvPr id="5" name="Rounded Rectangle 4"/>
+          <p:cNvSpPr/>
+          <p:nvPr/>
+        </p:nvSpPr>
+        <p:spPr>
+          <a:xfrm>
+            <a:off x="762000" y="1468636"/>
+            <a:ext cx="3429000" cy="2261443"/>
+          </a:xfrm>
+          <a:prstGeom prst="roundRect">
+            <a:avLst/>
+          </a:prstGeom>
+          <a:solidFill>
+            <a:srgbClr val="FFFFFF"/>
+          </a:solidFill>
+          <a:ln w="9525">
+            <a:solidFill>
+              <a:srgbClr val="FFFFFF"/>
+            </a:solidFill>
+          </a:ln>
+          <a:effectLst>
+            <a:outerShdw blurRad="381000" dist="114300" dir="5400000" algn="ctr" rotWithShape="0">
+              <a:srgbClr val="6366F1">
+                <a:alpha val="6000"/>
+              </a:srgbClr>
+            </a:outerShdw>
+          </a:effectLst>
+        </p:spPr>
+        <p:style>
+          <a:lnRef idx="1">
+            <a:schemeClr val="accent1"/>
+          </a:lnRef>
+          <a:fillRef idx="3">
+            <a:schemeClr val="accent1"/>
+          </a:fillRef>
+          <a:effectRef idx="2">
+            <a:schemeClr val="accent1"/>
+          </a:effectRef>
+          <a:fontRef idx="minor">
+            <a:schemeClr val="lt1"/>
+          </a:fontRef>
+        </p:style>
+        <p:txBody>
+          <a:bodyPr rtlCol="0" anchor="ctr"/>
+          <a:lstStyle/>
+          <a:p>
+            <a:pPr algn="ctr"/>
+          </a:p>
+        </p:txBody>
+      </p:sp>
+      <p:sp>
+        <p:nvSpPr>
+          <p:cNvPr id="6" name="TextBox 5"/>
+          <p:cNvSpPr txBox="1"/>
+          <p:nvPr/>
+        </p:nvSpPr>
+        <p:spPr>
+          <a:gradFill flip="none" rotWithShape="1">
+            <a:gsLst>
+              <a:gs pos="0">
+                <a:srgbClr val="6366F1"/>
+              </a:gs>
+              <a:gs pos="100000">
+                <a:srgbClr val="8B5CF6"/>
+              </a:gs>
+            </a:gsLst>
+            <a:lin ang="2700000" scaled="0"/>
+          </a:gradFill>
+          <a:xfrm>
+            <a:off x="1019175" y="1725811"/>
+            <a:ext cx="419100" cy="419100"/>
+          </a:xfrm>
+          <a:prstGeom prst="rect">
+            <a:avLst/>
+          </a:prstGeom>
+        </p:spPr>
+        <p:txBody>
+          <a:bodyPr wrap="square" lIns="0" rIns="0" tIns="0" bIns="0">
+            <a:spAutoFit/>
+          </a:bodyPr>
+          <a:lstStyle/>
+          <a:p>
+            <a:pPr algn="l"/>
+            <a:r>
+              <a:rPr sz="1650" b="1" i="0" u="none">
+                <a:solidFill>
+                  <a:srgbClr val="FFFFFF"/>
+                </a:solidFill>
+                <a:latin typeface="Inter"/>
+              </a:rPr>
+              <a:t>▦</a:t>
+            </a:r>
+          </a:p>
+        </p:txBody>
+      </p:sp>
+      <p:sp>
+        <p:nvSpPr>
+          <p:cNvPr id="7" name="TextBox 6"/>
+          <p:cNvSpPr txBox="1"/>
+          <p:nvPr/>
+        </p:nvSpPr>
+        <p:spPr>
+          <a:xfrm>
+            <a:off x="1019175" y="2373511"/>
+            <a:ext cx="2914650" cy="200025"/>
+          </a:xfrm>
+          <a:prstGeom prst="rect">
+            <a:avLst/>
+          </a:prstGeom>
+          <a:noFill/>
+        </p:spPr>
+        <p:txBody>
+          <a:bodyPr wrap="square" lIns="0" rIns="0" tIns="0" bIns="0">
+            <a:spAutoFit/>
+          </a:bodyPr>
+          <a:lstStyle/>
+          <a:p>
+            <a:pPr algn="l"/>
+            <a:r>
+              <a:rPr sz="1350" b="1" i="0" u="none">
+                <a:solidFill>
+                  <a:srgbClr val="F5F5F7"/>
+                </a:solidFill>
+                <a:latin typeface="Inter"/>
+              </a:rPr>
+              <a:t>Render before decide</a:t>
+            </a:r>
+          </a:p>
+        </p:txBody>
+      </p:sp>
+      <p:sp>
+        <p:nvSpPr>
+          <p:cNvPr id="8" name="TextBox 7"/>
+          <p:cNvSpPr txBox="1"/>
+          <p:nvPr/>
+        </p:nvSpPr>
+        <p:spPr>
+          <a:xfrm>
+            <a:off x="1019175" y="2630686"/>
+            <a:ext cx="2914650" cy="575518"/>
+          </a:xfrm>
+          <a:prstGeom prst="rect">
+            <a:avLst/>
+          </a:prstGeom>
+          <a:noFill/>
+        </p:spPr>
+        <p:txBody>
+          <a:bodyPr wrap="square" lIns="0" rIns="0" tIns="0" bIns="0">
+            <a:spAutoFit/>
+          </a:bodyPr>
+          <a:lstStyle/>
+          <a:p>
+            <a:pPr algn="l"/>
+            <a:r>
+              <a:rPr sz="975" b="0" i="0" u="none">
+                <a:solidFill>
+                  <a:srgbClr val="A1A1AA"/>
+                </a:solidFill>
+                <a:latin typeface="Inter"/>
+              </a:rPr>
+              <a:t>Real Chromium computes the layout. Static analysis cannot resolve flex / grid / flow geometry.</a:t>
+            </a:r>
+          </a:p>
+        </p:txBody>
+      </p:sp>
+      <p:sp>
+        <p:nvSpPr>
+          <p:cNvPr id="9" name="TextBox 8"/>
+          <p:cNvSpPr txBox="1"/>
+          <p:nvPr/>
+        </p:nvSpPr>
+        <p:spPr>
+          <a:xfrm>
+            <a:off x="1019175" y="3206204"/>
+            <a:ext cx="2914650" cy="266700"/>
+          </a:xfrm>
+          <a:prstGeom prst="rect">
+            <a:avLst/>
+          </a:prstGeom>
+          <a:noFill/>
+        </p:spPr>
+        <p:txBody>
+          <a:bodyPr wrap="square" lIns="0" rIns="0" tIns="0" bIns="0">
+            <a:spAutoFit/>
+          </a:bodyPr>
+          <a:lstStyle/>
+          <a:p>
+            <a:pPr algn="l"/>
+            <a:r>
+              <a:rPr sz="825" b="1" i="0" u="none">
+                <a:solidFill>
+                  <a:srgbClr val="52525B"/>
+                </a:solidFill>
+                <a:latin typeface="Inter"/>
+              </a:rPr>
+              <a:t>PLAYWRIGHT</a:t>
+            </a:r>
+          </a:p>
+        </p:txBody>
+      </p:sp>
+      <p:sp>
+        <p:nvSpPr>
+          <p:cNvPr id="10" name="Rounded Rectangle 9"/>
+          <p:cNvSpPr/>
+          <p:nvPr/>
+        </p:nvSpPr>
+        <p:spPr>
+          <a:xfrm>
+            <a:off x="4381500" y="1468636"/>
+            <a:ext cx="3429000" cy="2261443"/>
+          </a:xfrm>
+          <a:prstGeom prst="roundRect">
+            <a:avLst/>
+          </a:prstGeom>
+          <a:solidFill>
+            <a:srgbClr val="FFFFFF"/>
+          </a:solidFill>
+          <a:ln w="9525">
+            <a:solidFill>
+              <a:srgbClr val="FFFFFF"/>
+            </a:solidFill>
+          </a:ln>
+          <a:effectLst>
+            <a:outerShdw blurRad="381000" dist="114300" dir="5400000" algn="ctr" rotWithShape="0">
+              <a:srgbClr val="6366F1">
+                <a:alpha val="6000"/>
+              </a:srgbClr>
+            </a:outerShdw>
+          </a:effectLst>
+        </p:spPr>
+        <p:style>
+          <a:lnRef idx="1">
+            <a:schemeClr val="accent1"/>
+          </a:lnRef>
+          <a:fillRef idx="3">
+            <a:schemeClr val="accent1"/>
+          </a:fillRef>
+          <a:effectRef idx="2">
+            <a:schemeClr val="accent1"/>
+          </a:effectRef>
+          <a:fontRef idx="minor">
+            <a:schemeClr val="lt1"/>
+          </a:fontRef>
+        </p:style>
+        <p:txBody>
+          <a:bodyPr rtlCol="0" anchor="ctr"/>
+          <a:lstStyle/>
+          <a:p>
+            <a:pPr algn="ctr"/>
+          </a:p>
+        </p:txBody>
+      </p:sp>
+      <p:sp>
+        <p:nvSpPr>
+          <p:cNvPr id="11" name="TextBox 10"/>
+          <p:cNvSpPr txBox="1"/>
+          <p:nvPr/>
+        </p:nvSpPr>
+        <p:spPr>
+          <a:gradFill flip="none" rotWithShape="1">
+            <a:gsLst>
+              <a:gs pos="0">
+                <a:srgbClr val="8B5CF6"/>
+              </a:gs>
+              <a:gs pos="100000">
+                <a:srgbClr val="EC4899"/>
+              </a:gs>
+            </a:gsLst>
+            <a:lin ang="2700000" scaled="0"/>
+          </a:gradFill>
+          <a:xfrm>
+            <a:off x="4638675" y="1725811"/>
+            <a:ext cx="419100" cy="419100"/>
+          </a:xfrm>
+          <a:prstGeom prst="rect">
+            <a:avLst/>
+          </a:prstGeom>
+        </p:spPr>
+        <p:txBody>
+          <a:bodyPr wrap="square" lIns="0" rIns="0" tIns="0" bIns="0">
+            <a:spAutoFit/>
+          </a:bodyPr>
+          <a:lstStyle/>
+          <a:p>
+            <a:pPr algn="l"/>
+            <a:r>
+              <a:rPr sz="1650" b="1" i="0" u="none">
+                <a:solidFill>
+                  <a:srgbClr val="FFFFFF"/>
+                </a:solidFill>
+                <a:latin typeface="Inter"/>
+              </a:rPr>
+              <a:t>◈</a:t>
+            </a:r>
+          </a:p>
+        </p:txBody>
+      </p:sp>
+      <p:sp>
+        <p:nvSpPr>
+          <p:cNvPr id="12" name="TextBox 11"/>
+          <p:cNvSpPr txBox="1"/>
+          <p:nvPr/>
+        </p:nvSpPr>
+        <p:spPr>
+          <a:xfrm>
+            <a:off x="4638675" y="2373511"/>
+            <a:ext cx="2914650" cy="200025"/>
+          </a:xfrm>
+          <a:prstGeom prst="rect">
+            <a:avLst/>
+          </a:prstGeom>
+          <a:noFill/>
+        </p:spPr>
+        <p:txBody>
+          <a:bodyPr wrap="square" lIns="0" rIns="0" tIns="0" bIns="0">
+            <a:spAutoFit/>
+          </a:bodyPr>
+          <a:lstStyle/>
+          <a:p>
+            <a:pPr algn="l"/>
+            <a:r>
+              <a:rPr sz="1350" b="1" i="0" u="none">
+                <a:solidFill>
+                  <a:srgbClr val="F5F5F7"/>
+                </a:solidFill>
+                <a:latin typeface="Inter"/>
+              </a:rPr>
+              <a:t>Visual units, not DOM</a:t>
+            </a:r>
+          </a:p>
+        </p:txBody>
+      </p:sp>
+      <p:sp>
+        <p:nvSpPr>
+          <p:cNvPr id="13" name="TextBox 12"/>
+          <p:cNvSpPr txBox="1"/>
+          <p:nvPr/>
+        </p:nvSpPr>
+        <p:spPr>
+          <a:xfrm>
+            <a:off x="4638675" y="2630686"/>
+            <a:ext cx="2914650" cy="383679"/>
+          </a:xfrm>
+          <a:prstGeom prst="rect">
+            <a:avLst/>
+          </a:prstGeom>
+          <a:noFill/>
+        </p:spPr>
+        <p:txBody>
+          <a:bodyPr wrap="square" lIns="0" rIns="0" tIns="0" bIns="0">
+            <a:spAutoFit/>
+          </a:bodyPr>
+          <a:lstStyle/>
+          <a:p>
+            <a:pPr algn="l"/>
+            <a:r>
+              <a:rPr sz="975" b="0" i="0" u="none">
+                <a:solidFill>
+                  <a:srgbClr val="A1A1AA"/>
+                </a:solidFill>
+                <a:latin typeface="Inter"/>
+              </a:rPr>
+              <a:t>Classification atom is a connected visual region — a card, a bullet, a chart — not a single tag.</a:t>
+            </a:r>
+          </a:p>
+        </p:txBody>
+      </p:sp>
+      <p:sp>
+        <p:nvSpPr>
+          <p:cNvPr id="14" name="TextBox 13"/>
+          <p:cNvSpPr txBox="1"/>
+          <p:nvPr/>
+        </p:nvSpPr>
+        <p:spPr>
+          <a:xfrm>
+            <a:off x="4638675" y="3206204"/>
+            <a:ext cx="2914650" cy="266700"/>
+          </a:xfrm>
+          <a:prstGeom prst="rect">
+            <a:avLst/>
+          </a:prstGeom>
+          <a:noFill/>
+        </p:spPr>
+        <p:txBody>
+          <a:bodyPr wrap="square" lIns="0" rIns="0" tIns="0" bIns="0">
+            <a:spAutoFit/>
+          </a:bodyPr>
+          <a:lstStyle/>
+          <a:p>
+            <a:pPr algn="l"/>
+            <a:r>
+              <a:rPr sz="825" b="1" i="0" u="none">
+                <a:solidFill>
+                  <a:srgbClr val="52525B"/>
+                </a:solidFill>
+                <a:latin typeface="Inter"/>
+              </a:rPr>
+              <a:t>CLUSTERER</a:t>
+            </a:r>
+          </a:p>
+        </p:txBody>
+      </p:sp>
+      <p:sp>
+        <p:nvSpPr>
+          <p:cNvPr id="15" name="Rounded Rectangle 14"/>
+          <p:cNvSpPr/>
+          <p:nvPr/>
+        </p:nvSpPr>
+        <p:spPr>
+          <a:xfrm>
+            <a:off x="8001000" y="1468636"/>
+            <a:ext cx="3429000" cy="2261443"/>
+          </a:xfrm>
+          <a:prstGeom prst="roundRect">
+            <a:avLst/>
+          </a:prstGeom>
+          <a:solidFill>
+            <a:srgbClr val="FFFFFF"/>
+          </a:solidFill>
+          <a:ln w="9525">
+            <a:solidFill>
+              <a:srgbClr val="FFFFFF"/>
+            </a:solidFill>
+          </a:ln>
+          <a:effectLst>
+            <a:outerShdw blurRad="381000" dist="114300" dir="5400000" algn="ctr" rotWithShape="0">
+              <a:srgbClr val="6366F1">
+                <a:alpha val="6000"/>
+              </a:srgbClr>
+            </a:outerShdw>
+          </a:effectLst>
+        </p:spPr>
+        <p:style>
+          <a:lnRef idx="1">
+            <a:schemeClr val="accent1"/>
+          </a:lnRef>
+          <a:fillRef idx="3">
+            <a:schemeClr val="accent1"/>
+          </a:fillRef>
+          <a:effectRef idx="2">
+            <a:schemeClr val="accent1"/>
+          </a:effectRef>
+          <a:fontRef idx="minor">
+            <a:schemeClr val="lt1"/>
+          </a:fontRef>
+        </p:style>
+        <p:txBody>
+          <a:bodyPr rtlCol="0" anchor="ctr"/>
+          <a:lstStyle/>
+          <a:p>
+            <a:pPr algn="ctr"/>
+          </a:p>
+        </p:txBody>
+      </p:sp>
+      <p:sp>
+        <p:nvSpPr>
+          <p:cNvPr id="16" name="TextBox 15"/>
+          <p:cNvSpPr txBox="1"/>
+          <p:nvPr/>
+        </p:nvSpPr>
+        <p:spPr>
+          <a:gradFill flip="none" rotWithShape="1">
+            <a:gsLst>
+              <a:gs pos="0">
+                <a:srgbClr val="EC4899"/>
+              </a:gs>
+              <a:gs pos="100000">
+                <a:srgbClr val="F97316"/>
+              </a:gs>
+            </a:gsLst>
+            <a:lin ang="2700000" scaled="0"/>
+          </a:gradFill>
+          <a:xfrm>
+            <a:off x="8258175" y="1725811"/>
+            <a:ext cx="419100" cy="419100"/>
+          </a:xfrm>
+          <a:prstGeom prst="rect">
+            <a:avLst/>
+          </a:prstGeom>
+        </p:spPr>
+        <p:txBody>
+          <a:bodyPr wrap="square" lIns="0" rIns="0" tIns="0" bIns="0">
+            <a:spAutoFit/>
+          </a:bodyPr>
+          <a:lstStyle/>
+          <a:p>
+            <a:pPr algn="l"/>
+            <a:r>
+              <a:rPr sz="1650" b="1" i="0" u="none">
+                <a:solidFill>
+                  <a:srgbClr val="FFFFFF"/>
+                </a:solidFill>
+                <a:latin typeface="Inter"/>
+              </a:rPr>
+              <a:t>⊞</a:t>
+            </a:r>
+          </a:p>
+        </p:txBody>
+      </p:sp>
+      <p:sp>
+        <p:nvSpPr>
+          <p:cNvPr id="17" name="TextBox 16"/>
+          <p:cNvSpPr txBox="1"/>
+          <p:nvPr/>
+        </p:nvSpPr>
+        <p:spPr>
+          <a:xfrm>
+            <a:off x="8258175" y="2373511"/>
+            <a:ext cx="2914650" cy="200025"/>
+          </a:xfrm>
+          <a:prstGeom prst="rect">
+            <a:avLst/>
+          </a:prstGeom>
+          <a:noFill/>
+        </p:spPr>
+        <p:txBody>
+          <a:bodyPr wrap="square" lIns="0" rIns="0" tIns="0" bIns="0">
+            <a:spAutoFit/>
+          </a:bodyPr>
+          <a:lstStyle/>
+          <a:p>
+            <a:pPr algn="l"/>
+            <a:r>
+              <a:rPr sz="1350" b="1" i="0" u="none">
+                <a:solidFill>
+                  <a:srgbClr val="F5F5F7"/>
+                </a:solidFill>
+                <a:latin typeface="Inter"/>
+              </a:rPr>
+              <a:t>Three-tier classifier</a:t>
+            </a:r>
+          </a:p>
+        </p:txBody>
+      </p:sp>
+      <p:sp>
+        <p:nvSpPr>
+          <p:cNvPr id="18" name="TextBox 17"/>
+          <p:cNvSpPr txBox="1"/>
+          <p:nvPr/>
+        </p:nvSpPr>
+        <p:spPr>
+          <a:xfrm>
+            <a:off x="8258175" y="2630686"/>
+            <a:ext cx="2914650" cy="383679"/>
+          </a:xfrm>
+          <a:prstGeom prst="rect">
+            <a:avLst/>
+          </a:prstGeom>
+          <a:noFill/>
+        </p:spPr>
+        <p:txBody>
+          <a:bodyPr wrap="square" lIns="0" rIns="0" tIns="0" bIns="0">
+            <a:spAutoFit/>
+          </a:bodyPr>
+          <a:lstStyle/>
+          <a:p>
+            <a:pPr algn="l"/>
+            <a:r>
+              <a:rPr sz="975" b="0" i="0" u="none">
+                <a:solidFill>
+                  <a:srgbClr val="A1A1AA"/>
+                </a:solidFill>
+                <a:latin typeface="Inter"/>
+              </a:rPr>
+              <a:t>Rules → heuristics → LLM. Closed-vocabulary patterns short-circuit ~90% of decisions.</a:t>
+            </a:r>
+          </a:p>
+        </p:txBody>
+      </p:sp>
+      <p:sp>
+        <p:nvSpPr>
+          <p:cNvPr id="19" name="TextBox 18"/>
+          <p:cNvSpPr txBox="1"/>
+          <p:nvPr/>
+        </p:nvSpPr>
+        <p:spPr>
+          <a:xfrm>
+            <a:off x="8258175" y="3206204"/>
+            <a:ext cx="2914650" cy="266700"/>
+          </a:xfrm>
+          <a:prstGeom prst="rect">
+            <a:avLst/>
+          </a:prstGeom>
+          <a:noFill/>
+        </p:spPr>
+        <p:txBody>
+          <a:bodyPr wrap="square" lIns="0" rIns="0" tIns="0" bIns="0">
+            <a:spAutoFit/>
+          </a:bodyPr>
+          <a:lstStyle/>
+          <a:p>
+            <a:pPr algn="l"/>
+            <a:r>
+              <a:rPr sz="825" b="1" i="0" u="none">
+                <a:solidFill>
+                  <a:srgbClr val="52525B"/>
+                </a:solidFill>
+                <a:latin typeface="Inter"/>
+              </a:rPr>
+              <a:t>TIER 0–3</a:t>
+            </a:r>
+          </a:p>
+        </p:txBody>
+      </p:sp>
+      <p:sp>
+        <p:nvSpPr>
+          <p:cNvPr id="20" name="Rounded Rectangle 19"/>
+          <p:cNvSpPr/>
+          <p:nvPr/>
+        </p:nvSpPr>
+        <p:spPr>
+          <a:xfrm>
+            <a:off x="762000" y="3920579"/>
+            <a:ext cx="3429000" cy="2120057"/>
+          </a:xfrm>
+          <a:prstGeom prst="roundRect">
+            <a:avLst/>
+          </a:prstGeom>
+          <a:solidFill>
+            <a:srgbClr val="FFFFFF"/>
+          </a:solidFill>
+          <a:ln w="9525">
+            <a:solidFill>
+              <a:srgbClr val="FFFFFF"/>
+            </a:solidFill>
+          </a:ln>
+          <a:effectLst>
+            <a:outerShdw blurRad="381000" dist="114300" dir="5400000" algn="ctr" rotWithShape="0">
+              <a:srgbClr val="6366F1">
+                <a:alpha val="6000"/>
+              </a:srgbClr>
+            </a:outerShdw>
+          </a:effectLst>
+        </p:spPr>
+        <p:style>
+          <a:lnRef idx="1">
+            <a:schemeClr val="accent1"/>
+          </a:lnRef>
+          <a:fillRef idx="3">
+            <a:schemeClr val="accent1"/>
+          </a:fillRef>
+          <a:effectRef idx="2">
+            <a:schemeClr val="accent1"/>
+          </a:effectRef>
+          <a:fontRef idx="minor">
+            <a:schemeClr val="lt1"/>
+          </a:fontRef>
+        </p:style>
+        <p:txBody>
+          <a:bodyPr rtlCol="0" anchor="ctr"/>
+          <a:lstStyle/>
+          <a:p>
+            <a:pPr algn="ctr"/>
+          </a:p>
+        </p:txBody>
+      </p:sp>
+      <p:sp>
+        <p:nvSpPr>
+          <p:cNvPr id="21" name="TextBox 20"/>
+          <p:cNvSpPr txBox="1"/>
+          <p:nvPr/>
+        </p:nvSpPr>
+        <p:spPr>
+          <a:gradFill flip="none" rotWithShape="1">
+            <a:gsLst>
+              <a:gs pos="0">
+                <a:srgbClr val="06B6D4"/>
+              </a:gs>
+              <a:gs pos="100000">
+                <a:srgbClr val="6366F1"/>
+              </a:gs>
+            </a:gsLst>
+            <a:lin ang="2700000" scaled="0"/>
+          </a:gradFill>
+          <a:xfrm>
+            <a:off x="1019175" y="4177754"/>
+            <a:ext cx="419100" cy="419100"/>
+          </a:xfrm>
+          <a:prstGeom prst="rect">
+            <a:avLst/>
+          </a:prstGeom>
+        </p:spPr>
+        <p:txBody>
+          <a:bodyPr wrap="square" lIns="0" rIns="0" tIns="0" bIns="0">
+            <a:spAutoFit/>
+          </a:bodyPr>
+          <a:lstStyle/>
+          <a:p>
+            <a:pPr algn="l"/>
+            <a:r>
+              <a:rPr sz="1650" b="1" i="0" u="none">
+                <a:solidFill>
+                  <a:srgbClr val="FFFFFF"/>
+                </a:solidFill>
+                <a:latin typeface="Inter"/>
+              </a:rPr>
+              <a:t>◐</a:t>
+            </a:r>
+          </a:p>
+        </p:txBody>
+      </p:sp>
+      <p:sp>
+        <p:nvSpPr>
+          <p:cNvPr id="22" name="TextBox 21"/>
+          <p:cNvSpPr txBox="1"/>
+          <p:nvPr/>
+        </p:nvSpPr>
+        <p:spPr>
+          <a:xfrm>
+            <a:off x="1019175" y="4825454"/>
+            <a:ext cx="2914650" cy="200025"/>
+          </a:xfrm>
+          <a:prstGeom prst="rect">
+            <a:avLst/>
+          </a:prstGeom>
+          <a:noFill/>
+        </p:spPr>
+        <p:txBody>
+          <a:bodyPr wrap="square" lIns="0" rIns="0" tIns="0" bIns="0">
+            <a:spAutoFit/>
+          </a:bodyPr>
+          <a:lstStyle/>
+          <a:p>
+            <a:pPr algn="l"/>
+            <a:r>
+              <a:rPr sz="1350" b="1" i="0" u="none">
+                <a:solidFill>
+                  <a:srgbClr val="F5F5F7"/>
+                </a:solidFill>
+                <a:latin typeface="Inter"/>
+              </a:rPr>
+              <a:t>Confidence aware</a:t>
+            </a:r>
+          </a:p>
+        </p:txBody>
+      </p:sp>
+      <p:sp>
+        <p:nvSpPr>
+          <p:cNvPr id="23" name="TextBox 22"/>
+          <p:cNvSpPr txBox="1"/>
+          <p:nvPr/>
+        </p:nvSpPr>
+        <p:spPr>
+          <a:xfrm>
+            <a:off x="1019175" y="5082629"/>
+            <a:ext cx="2914650" cy="383679"/>
+          </a:xfrm>
+          <a:prstGeom prst="rect">
+            <a:avLst/>
+          </a:prstGeom>
+          <a:noFill/>
+        </p:spPr>
+        <p:txBody>
+          <a:bodyPr wrap="square" lIns="0" rIns="0" tIns="0" bIns="0">
+            <a:spAutoFit/>
+          </a:bodyPr>
+          <a:lstStyle/>
+          <a:p>
+            <a:pPr algn="l"/>
+            <a:r>
+              <a:rPr sz="975" b="0" i="0" u="none">
+                <a:solidFill>
+                  <a:srgbClr val="A1A1AA"/>
+                </a:solidFill>
+                <a:latin typeface="Inter"/>
+              </a:rPr>
+              <a:t>Every decision carries a confidence score. Low-confidence triggers a dual-emit safety net.</a:t>
+            </a:r>
+          </a:p>
+        </p:txBody>
+      </p:sp>
+      <p:sp>
+        <p:nvSpPr>
+          <p:cNvPr id="24" name="TextBox 23"/>
+          <p:cNvSpPr txBox="1"/>
+          <p:nvPr/>
+        </p:nvSpPr>
+        <p:spPr>
+          <a:xfrm>
+            <a:off x="1019175" y="5516761"/>
+            <a:ext cx="2914650" cy="266700"/>
+          </a:xfrm>
+          <a:prstGeom prst="rect">
+            <a:avLst/>
+          </a:prstGeom>
+          <a:noFill/>
+        </p:spPr>
+        <p:txBody>
+          <a:bodyPr wrap="square" lIns="0" rIns="0" tIns="0" bIns="0">
+            <a:spAutoFit/>
+          </a:bodyPr>
+          <a:lstStyle/>
+          <a:p>
+            <a:pPr algn="l"/>
+            <a:r>
+              <a:rPr sz="825" b="1" i="0" u="none">
+                <a:solidFill>
+                  <a:srgbClr val="52525B"/>
+                </a:solidFill>
+                <a:latin typeface="Inter"/>
+              </a:rPr>
+              <a:t>CONFIDENCE</a:t>
+            </a:r>
+          </a:p>
+        </p:txBody>
+      </p:sp>
+      <p:sp>
+        <p:nvSpPr>
+          <p:cNvPr id="25" name="Rounded Rectangle 24"/>
+          <p:cNvSpPr/>
+          <p:nvPr/>
+        </p:nvSpPr>
+        <p:spPr>
+          <a:xfrm>
+            <a:off x="4381500" y="3920579"/>
+            <a:ext cx="3429000" cy="2120057"/>
+          </a:xfrm>
+          <a:prstGeom prst="roundRect">
+            <a:avLst/>
+          </a:prstGeom>
+          <a:solidFill>
+            <a:srgbClr val="FFFFFF"/>
+          </a:solidFill>
+          <a:ln w="9525">
+            <a:solidFill>
+              <a:srgbClr val="FFFFFF"/>
+            </a:solidFill>
+          </a:ln>
+          <a:effectLst>
+            <a:outerShdw blurRad="381000" dist="114300" dir="5400000" algn="ctr" rotWithShape="0">
+              <a:srgbClr val="6366F1">
+                <a:alpha val="6000"/>
+              </a:srgbClr>
+            </a:outerShdw>
+          </a:effectLst>
+        </p:spPr>
+        <p:style>
+          <a:lnRef idx="1">
+            <a:schemeClr val="accent1"/>
+          </a:lnRef>
+          <a:fillRef idx="3">
+            <a:schemeClr val="accent1"/>
+          </a:fillRef>
+          <a:effectRef idx="2">
+            <a:schemeClr val="accent1"/>
+          </a:effectRef>
+          <a:fontRef idx="minor">
+            <a:schemeClr val="lt1"/>
+          </a:fontRef>
+        </p:style>
+        <p:txBody>
+          <a:bodyPr rtlCol="0" anchor="ctr"/>
+          <a:lstStyle/>
+          <a:p>
+            <a:pPr algn="ctr"/>
+          </a:p>
+        </p:txBody>
+      </p:sp>
+      <p:sp>
+        <p:nvSpPr>
+          <p:cNvPr id="26" name="TextBox 25"/>
+          <p:cNvSpPr txBox="1"/>
+          <p:nvPr/>
+        </p:nvSpPr>
+        <p:spPr>
+          <a:gradFill flip="none" rotWithShape="1">
+            <a:gsLst>
+              <a:gs pos="0">
+                <a:srgbClr val="22C55E"/>
+              </a:gs>
+              <a:gs pos="100000">
+                <a:srgbClr val="06B6D4"/>
+              </a:gs>
+            </a:gsLst>
+            <a:lin ang="2700000" scaled="0"/>
+          </a:gradFill>
+          <a:xfrm>
+            <a:off x="4638675" y="4177754"/>
+            <a:ext cx="419100" cy="419100"/>
+          </a:xfrm>
+          <a:prstGeom prst="rect">
+            <a:avLst/>
+          </a:prstGeom>
+        </p:spPr>
+        <p:txBody>
+          <a:bodyPr wrap="square" lIns="0" rIns="0" tIns="0" bIns="0">
+            <a:spAutoFit/>
+          </a:bodyPr>
+          <a:lstStyle/>
+          <a:p>
+            <a:pPr algn="l"/>
+            <a:r>
+              <a:rPr sz="1650" b="1" i="0" u="none">
+                <a:solidFill>
+                  <a:srgbClr val="FFFFFF"/>
+                </a:solidFill>
+                <a:latin typeface="Inter"/>
+              </a:rPr>
+              <a:t>✓</a:t>
+            </a:r>
+          </a:p>
+        </p:txBody>
+      </p:sp>
+      <p:sp>
+        <p:nvSpPr>
+          <p:cNvPr id="27" name="TextBox 26"/>
+          <p:cNvSpPr txBox="1"/>
+          <p:nvPr/>
+        </p:nvSpPr>
+        <p:spPr>
+          <a:xfrm>
+            <a:off x="4638675" y="4825454"/>
+            <a:ext cx="2914650" cy="200025"/>
+          </a:xfrm>
+          <a:prstGeom prst="rect">
+            <a:avLst/>
+          </a:prstGeom>
+          <a:noFill/>
+        </p:spPr>
+        <p:txBody>
+          <a:bodyPr wrap="square" lIns="0" rIns="0" tIns="0" bIns="0">
+            <a:spAutoFit/>
+          </a:bodyPr>
+          <a:lstStyle/>
+          <a:p>
+            <a:pPr algn="l"/>
+            <a:r>
+              <a:rPr sz="1350" b="1" i="0" u="none">
+                <a:solidFill>
+                  <a:srgbClr val="F5F5F7"/>
+                </a:solidFill>
+                <a:latin typeface="Inter"/>
+              </a:rPr>
+              <a:t>Self validating</a:t>
+            </a:r>
+          </a:p>
+        </p:txBody>
+      </p:sp>
+      <p:sp>
+        <p:nvSpPr>
+          <p:cNvPr id="28" name="TextBox 27"/>
+          <p:cNvSpPr txBox="1"/>
+          <p:nvPr/>
+        </p:nvSpPr>
+        <p:spPr>
+          <a:xfrm>
+            <a:off x="4638675" y="5082629"/>
+            <a:ext cx="2914650" cy="383679"/>
+          </a:xfrm>
+          <a:prstGeom prst="rect">
+            <a:avLst/>
+          </a:prstGeom>
+          <a:noFill/>
+        </p:spPr>
+        <p:txBody>
+          <a:bodyPr wrap="square" lIns="0" rIns="0" tIns="0" bIns="0">
+            <a:spAutoFit/>
+          </a:bodyPr>
+          <a:lstStyle/>
+          <a:p>
+            <a:pPr algn="l"/>
+            <a:r>
+              <a:rPr sz="975" b="0" i="0" u="none">
+                <a:solidFill>
+                  <a:srgbClr val="A1A1AA"/>
+                </a:solidFill>
+                <a:latin typeface="Inter"/>
+              </a:rPr>
+              <a:t>SSIM + OCR oracle catches regressions. Failing regions auto-promote to raster and re-emit.</a:t>
+            </a:r>
+          </a:p>
+        </p:txBody>
+      </p:sp>
+      <p:sp>
+        <p:nvSpPr>
+          <p:cNvPr id="29" name="TextBox 28"/>
+          <p:cNvSpPr txBox="1"/>
+          <p:nvPr/>
+        </p:nvSpPr>
+        <p:spPr>
+          <a:xfrm>
+            <a:off x="4638675" y="5516761"/>
+            <a:ext cx="2914650" cy="266700"/>
+          </a:xfrm>
+          <a:prstGeom prst="rect">
+            <a:avLst/>
+          </a:prstGeom>
+          <a:noFill/>
+        </p:spPr>
+        <p:txBody>
+          <a:bodyPr wrap="square" lIns="0" rIns="0" tIns="0" bIns="0">
+            <a:spAutoFit/>
+          </a:bodyPr>
+          <a:lstStyle/>
+          <a:p>
+            <a:pPr algn="l"/>
+            <a:r>
+              <a:rPr sz="825" b="1" i="0" u="none">
+                <a:solidFill>
+                  <a:srgbClr val="52525B"/>
+                </a:solidFill>
+                <a:latin typeface="Inter"/>
+              </a:rPr>
+              <a:t>ORACLE</a:t>
+            </a:r>
+          </a:p>
+        </p:txBody>
+      </p:sp>
+      <p:sp>
+        <p:nvSpPr>
+          <p:cNvPr id="30" name="Rounded Rectangle 29"/>
+          <p:cNvSpPr/>
+          <p:nvPr/>
+        </p:nvSpPr>
+        <p:spPr>
+          <a:xfrm>
+            <a:off x="8001000" y="3920579"/>
+            <a:ext cx="3429000" cy="2120057"/>
+          </a:xfrm>
+          <a:prstGeom prst="roundRect">
+            <a:avLst/>
+          </a:prstGeom>
+          <a:solidFill>
+            <a:srgbClr val="FFFFFF"/>
+          </a:solidFill>
+          <a:ln w="9525">
+            <a:solidFill>
+              <a:srgbClr val="FFFFFF"/>
+            </a:solidFill>
+          </a:ln>
+          <a:effectLst>
+            <a:outerShdw blurRad="381000" dist="114300" dir="5400000" algn="ctr" rotWithShape="0">
+              <a:srgbClr val="6366F1">
+                <a:alpha val="6000"/>
+              </a:srgbClr>
+            </a:outerShdw>
+          </a:effectLst>
+        </p:spPr>
+        <p:style>
+          <a:lnRef idx="1">
+            <a:schemeClr val="accent1"/>
+          </a:lnRef>
+          <a:fillRef idx="3">
+            <a:schemeClr val="accent1"/>
+          </a:fillRef>
+          <a:effectRef idx="2">
+            <a:schemeClr val="accent1"/>
+          </a:effectRef>
+          <a:fontRef idx="minor">
+            <a:schemeClr val="lt1"/>
+          </a:fontRef>
+        </p:style>
+        <p:txBody>
+          <a:bodyPr rtlCol="0" anchor="ctr"/>
+          <a:lstStyle/>
+          <a:p>
+            <a:pPr algn="ctr"/>
+          </a:p>
+        </p:txBody>
+      </p:sp>
+      <p:sp>
+        <p:nvSpPr>
+          <p:cNvPr id="31" name="TextBox 30"/>
+          <p:cNvSpPr txBox="1"/>
+          <p:nvPr/>
+        </p:nvSpPr>
+        <p:spPr>
+          <a:gradFill flip="none" rotWithShape="1">
+            <a:gsLst>
+              <a:gs pos="0">
+                <a:srgbClr val="F97316"/>
+              </a:gs>
+              <a:gs pos="100000">
+                <a:srgbClr val="FACC15"/>
+              </a:gs>
+            </a:gsLst>
+            <a:lin ang="2700000" scaled="0"/>
+          </a:gradFill>
+          <a:xfrm>
+            <a:off x="8258175" y="4177754"/>
+            <a:ext cx="419100" cy="419100"/>
+          </a:xfrm>
+          <a:prstGeom prst="rect">
+            <a:avLst/>
+          </a:prstGeom>
+        </p:spPr>
+        <p:txBody>
+          <a:bodyPr wrap="square" lIns="0" rIns="0" tIns="0" bIns="0">
+            <a:spAutoFit/>
+          </a:bodyPr>
+          <a:lstStyle/>
+          <a:p>
+            <a:pPr algn="l"/>
+            <a:r>
+              <a:rPr sz="1650" b="1" i="0" u="none">
+                <a:solidFill>
+                  <a:srgbClr val="FFFFFF"/>
+                </a:solidFill>
+                <a:latin typeface="Inter"/>
+              </a:rPr>
+              <a:t>⌘</a:t>
+            </a:r>
+          </a:p>
+        </p:txBody>
+      </p:sp>
+      <p:sp>
+        <p:nvSpPr>
+          <p:cNvPr id="32" name="TextBox 31"/>
+          <p:cNvSpPr txBox="1"/>
+          <p:nvPr/>
+        </p:nvSpPr>
+        <p:spPr>
+          <a:xfrm>
+            <a:off x="8258175" y="4825454"/>
+            <a:ext cx="2914650" cy="200025"/>
+          </a:xfrm>
+          <a:prstGeom prst="rect">
+            <a:avLst/>
+          </a:prstGeom>
+          <a:noFill/>
+        </p:spPr>
+        <p:txBody>
+          <a:bodyPr wrap="square" lIns="0" rIns="0" tIns="0" bIns="0">
+            <a:spAutoFit/>
+          </a:bodyPr>
+          <a:lstStyle/>
+          <a:p>
+            <a:pPr algn="l"/>
+            <a:r>
+              <a:rPr sz="1350" b="1" i="0" u="none">
+                <a:solidFill>
+                  <a:srgbClr val="F5F5F7"/>
+                </a:solidFill>
+                <a:latin typeface="Inter"/>
+              </a:rPr>
+              <a:t>Cache aggressively</a:t>
+            </a:r>
+          </a:p>
+        </p:txBody>
+      </p:sp>
+      <p:sp>
+        <p:nvSpPr>
+          <p:cNvPr id="33" name="TextBox 32"/>
+          <p:cNvSpPr txBox="1"/>
+          <p:nvPr/>
+        </p:nvSpPr>
+        <p:spPr>
+          <a:xfrm>
+            <a:off x="8258175" y="5082629"/>
+            <a:ext cx="2914650" cy="383679"/>
+          </a:xfrm>
+          <a:prstGeom prst="rect">
+            <a:avLst/>
+          </a:prstGeom>
+          <a:noFill/>
+        </p:spPr>
+        <p:txBody>
+          <a:bodyPr wrap="square" lIns="0" rIns="0" tIns="0" bIns="0">
+            <a:spAutoFit/>
+          </a:bodyPr>
+          <a:lstStyle/>
+          <a:p>
+            <a:pPr algn="l"/>
+            <a:r>
+              <a:rPr sz="975" b="0" i="0" u="none">
+                <a:solidFill>
+                  <a:srgbClr val="A1A1AA"/>
+                </a:solidFill>
+                <a:latin typeface="Inter"/>
+              </a:rPr>
+              <a:t>Structural-signature cache hits 60–80% within a generator after warmup. Reuse is free.</a:t>
+            </a:r>
+          </a:p>
+        </p:txBody>
+      </p:sp>
+      <p:sp>
+        <p:nvSpPr>
+          <p:cNvPr id="34" name="TextBox 33"/>
+          <p:cNvSpPr txBox="1"/>
+          <p:nvPr/>
+        </p:nvSpPr>
+        <p:spPr>
+          <a:xfrm>
+            <a:off x="8258175" y="5516761"/>
+            <a:ext cx="2914650" cy="266700"/>
+          </a:xfrm>
+          <a:prstGeom prst="rect">
+            <a:avLst/>
+          </a:prstGeom>
+          <a:noFill/>
+        </p:spPr>
+        <p:txBody>
+          <a:bodyPr wrap="square" lIns="0" rIns="0" tIns="0" bIns="0">
+            <a:spAutoFit/>
+          </a:bodyPr>
+          <a:lstStyle/>
+          <a:p>
+            <a:pPr algn="l"/>
+            <a:r>
+              <a:rPr sz="825" b="1" i="0" u="none">
+                <a:solidFill>
+                  <a:srgbClr val="52525B"/>
+                </a:solidFill>
+                <a:latin typeface="Inter"/>
+              </a:rPr>
+              <a:t>CACHE</a:t>
+            </a:r>
+          </a:p>
+        </p:txBody>
+      </p:sp>
+      <p:sp>
+        <p:nvSpPr>
+          <p:cNvPr id="35" name="TextBox 34"/>
+          <p:cNvSpPr txBox="1"/>
+          <p:nvPr/>
+        </p:nvSpPr>
+        <p:spPr>
+          <a:xfrm>
+            <a:off x="762000" y="6477000"/>
+            <a:ext cx="1411635" cy="152400"/>
+          </a:xfrm>
+          <a:prstGeom prst="rect">
+            <a:avLst/>
+          </a:prstGeom>
+          <a:noFill/>
+        </p:spPr>
+        <p:txBody>
+          <a:bodyPr wrap="square" lIns="0" rIns="0" tIns="0" bIns="0">
+            <a:spAutoFit/>
+          </a:bodyPr>
+          <a:lstStyle/>
+          <a:p>
+            <a:pPr algn="l"/>
+            <a:r>
+              <a:rPr sz="975" b="1" i="0" u="none">
+                <a:solidFill>
+                  <a:srgbClr val="52525B"/>
+                </a:solidFill>
+                <a:latin typeface="Inter"/>
+              </a:rPr>
+              <a:t>PIXELPITCH LABS</a:t>
+            </a:r>
+          </a:p>
+        </p:txBody>
+      </p:sp>
+      <p:sp>
+        <p:nvSpPr>
+          <p:cNvPr id="36" name="TextBox 35"/>
+          <p:cNvSpPr txBox="1"/>
+          <p:nvPr/>
+        </p:nvSpPr>
+        <p:spPr>
+          <a:xfrm>
+            <a:off x="10875466" y="6477000"/>
+            <a:ext cx="554534" cy="152400"/>
+          </a:xfrm>
+          <a:prstGeom prst="rect">
+            <a:avLst/>
+          </a:prstGeom>
+          <a:noFill/>
+        </p:spPr>
+        <p:txBody>
+          <a:bodyPr wrap="square" lIns="0" rIns="0" tIns="0" bIns="0">
+            <a:spAutoFit/>
+          </a:bodyPr>
+          <a:lstStyle/>
+          <a:p>
+            <a:pPr algn="l"/>
+            <a:r>
+              <a:rPr sz="975" b="1" i="0" u="none">
+                <a:solidFill>
+                  <a:srgbClr val="52525B"/>
+                </a:solidFill>
+                <a:latin typeface="Inter"/>
+              </a:rPr>
+              <a:t>05 / 12</a:t>
+            </a:r>
+          </a:p>
+        </p:txBody>
+      </p:sp>
+    </p:spTree>
+  </p:cSld>
+  <p:clrMapOvr>
+    <a:masterClrMapping/>
+  </p:clrMapOvr>
+</p:sld>
+</file>
+
+<file path=ppt/slides/slide6.xml><?xml version="1.0" encoding="utf-8"?>
+<p:sld xmlns:a="http://schemas.openxmlformats.org/drawingml/2006/main" xmlns:p="http://schemas.openxmlformats.org/presentationml/2006/main" xmlns:r="http://schemas.openxmlformats.org/officeDocument/2006/relationships">
+  <p:cSld>
+    <p:spTree>
+      <p:nvGrpSpPr>
+        <p:cNvPr id="1" name=""/>
+        <p:cNvGrpSpPr/>
+        <p:nvPr/>
+      </p:nvGrpSpPr>
+      <p:grpSpPr/>
+      <p:sp>
+        <p:nvSpPr>
+          <p:cNvPr id="2" name="Rectangle 1"/>
+          <p:cNvSpPr/>
+          <p:nvPr/>
+        </p:nvSpPr>
+        <p:spPr>
+          <a:xfrm>
+            <a:off x="0" y="0"/>
+            <a:ext cx="12192000" cy="6858000"/>
+          </a:xfrm>
+          <a:prstGeom prst="rect">
+            <a:avLst/>
+          </a:prstGeom>
+          <a:solidFill>
+            <a:srgbClr val="070710"/>
+          </a:solidFill>
+          <a:ln>
+            <a:noFill/>
+          </a:ln>
+        </p:spPr>
+        <p:style>
+          <a:lnRef idx="1">
+            <a:schemeClr val="accent1"/>
+          </a:lnRef>
+          <a:fillRef idx="3">
+            <a:schemeClr val="accent1"/>
+          </a:fillRef>
+          <a:effectRef idx="2">
+            <a:schemeClr val="accent1"/>
+          </a:effectRef>
+          <a:fontRef idx="minor">
+            <a:schemeClr val="lt1"/>
+          </a:fontRef>
+        </p:style>
+        <p:txBody>
+          <a:bodyPr rtlCol="0" anchor="ctr"/>
+          <a:lstStyle/>
+          <a:p>
+            <a:pPr algn="ctr"/>
+          </a:p>
+        </p:txBody>
+      </p:sp>
+      <p:sp>
+        <p:nvSpPr>
+          <p:cNvPr id="3" name="TextBox 2"/>
+          <p:cNvSpPr txBox="1"/>
+          <p:nvPr/>
+        </p:nvSpPr>
+        <p:spPr>
+          <a:xfrm>
+            <a:off x="762000" y="762000"/>
+            <a:ext cx="10668000" cy="152400"/>
+          </a:xfrm>
+          <a:prstGeom prst="rect">
+            <a:avLst/>
+          </a:prstGeom>
+          <a:noFill/>
+        </p:spPr>
+        <p:txBody>
+          <a:bodyPr wrap="square" lIns="0" rIns="0" tIns="0" bIns="0">
+            <a:spAutoFit/>
+          </a:bodyPr>
+          <a:lstStyle/>
+          <a:p>
+            <a:pPr algn="l"/>
+            <a:r>
+              <a:rPr sz="975" b="1" i="0" u="none">
+                <a:solidFill>
+                  <a:srgbClr val="A78BFA"/>
+                </a:solidFill>
+                <a:latin typeface="Inter"/>
+              </a:rPr>
+              <a:t>Before · After</a:t>
+            </a:r>
+          </a:p>
+        </p:txBody>
+      </p:sp>
+      <p:sp>
+        <p:nvSpPr>
+          <p:cNvPr id="4" name="TextBox 3"/>
+          <p:cNvSpPr txBox="1"/>
+          <p:nvPr/>
+        </p:nvSpPr>
+        <p:spPr>
+          <a:xfrm>
+            <a:off x="762000" y="1085850"/>
+            <a:ext cx="10668000" cy="460028"/>
+          </a:xfrm>
+          <a:prstGeom prst="rect">
+            <a:avLst/>
+          </a:prstGeom>
+          <a:noFill/>
+        </p:spPr>
+        <p:txBody>
+          <a:bodyPr wrap="square" lIns="0" rIns="0" tIns="0" bIns="0">
+            <a:spAutoFit/>
+          </a:bodyPr>
+          <a:lstStyle/>
+          <a:p>
+            <a:pPr algn="l"/>
+            <a:r>
+              <a:rPr sz="3450" b="1" i="0" u="none">
+                <a:solidFill>
+                  <a:srgbClr val="F5F5F7"/>
+                </a:solidFill>
+                <a:latin typeface="Inter"/>
+              </a:rPr>
+              <a:t>Same browser render. Two very different decks.</a:t>
+            </a:r>
+          </a:p>
+        </p:txBody>
+      </p:sp>
+      <p:sp>
+        <p:nvSpPr>
+          <p:cNvPr id="5" name="Rounded Rectangle 4"/>
+          <p:cNvSpPr/>
+          <p:nvPr/>
+        </p:nvSpPr>
+        <p:spPr>
+          <a:xfrm>
+            <a:off x="762000" y="1926878"/>
+            <a:ext cx="5200650" cy="4057650"/>
+          </a:xfrm>
+          <a:prstGeom prst="roundRect">
+            <a:avLst/>
+          </a:prstGeom>
+          <a:solidFill>
+            <a:srgbClr val="3F3F46"/>
+          </a:solidFill>
+          <a:ln w="9525">
+            <a:solidFill>
+              <a:srgbClr val="FFFFFF"/>
+            </a:solidFill>
+          </a:ln>
+        </p:spPr>
+        <p:style>
+          <a:lnRef idx="1">
+            <a:schemeClr val="accent1"/>
+          </a:lnRef>
+          <a:fillRef idx="3">
+            <a:schemeClr val="accent1"/>
+          </a:fillRef>
+          <a:effectRef idx="2">
+            <a:schemeClr val="accent1"/>
+          </a:effectRef>
+          <a:fontRef idx="minor">
+            <a:schemeClr val="lt1"/>
+          </a:fontRef>
+        </p:style>
+        <p:txBody>
+          <a:bodyPr rtlCol="0" anchor="ctr"/>
+          <a:lstStyle/>
+          <a:p>
+            <a:pPr algn="ctr"/>
+          </a:p>
+        </p:txBody>
+      </p:sp>
+      <p:sp>
+        <p:nvSpPr>
+          <p:cNvPr id="6" name="TextBox 5"/>
+          <p:cNvSpPr txBox="1"/>
+          <p:nvPr/>
+        </p:nvSpPr>
+        <p:spPr>
+          <a:xfrm>
+            <a:off x="1114425" y="2279303"/>
+            <a:ext cx="1906786" cy="276225"/>
+          </a:xfrm>
+          <a:prstGeom prst="rect">
+            <a:avLst/>
+          </a:prstGeom>
+          <a:noFill/>
+        </p:spPr>
+        <p:txBody>
+          <a:bodyPr wrap="square" lIns="0" rIns="0" tIns="0" bIns="0">
+            <a:spAutoFit/>
+          </a:bodyPr>
+          <a:lstStyle/>
+          <a:p>
+            <a:pPr algn="l"/>
+            <a:r>
+              <a:rPr sz="1800" b="1" i="0" u="none">
+                <a:solidFill>
+                  <a:srgbClr val="A1A1AA"/>
+                </a:solidFill>
+                <a:latin typeface="Inter"/>
+              </a:rPr>
+              <a:t>Naive screenshot</a:t>
+            </a:r>
+          </a:p>
+        </p:txBody>
+      </p:sp>
+      <p:sp>
+        <p:nvSpPr>
+          <p:cNvPr id="7" name="TextBox 6"/>
+          <p:cNvSpPr txBox="1"/>
+          <p:nvPr/>
+        </p:nvSpPr>
+        <p:spPr>
+          <a:xfrm>
+            <a:off x="4824412" y="2326928"/>
+            <a:ext cx="785812" cy="228600"/>
+          </a:xfrm>
+          <a:prstGeom prst="rect">
+            <a:avLst/>
+          </a:prstGeom>
+          <a:solidFill>
+            <a:srgbClr val="3F3F46"/>
+          </a:solidFill>
+        </p:spPr>
+        <p:txBody>
+          <a:bodyPr wrap="square" lIns="0" rIns="0" tIns="0" bIns="0">
+            <a:spAutoFit/>
+          </a:bodyPr>
+          <a:lstStyle/>
+          <a:p>
+            <a:pPr algn="l"/>
+            <a:r>
+              <a:rPr sz="825" b="1" i="0" u="none">
+                <a:solidFill>
+                  <a:srgbClr val="A1A1AA"/>
+                </a:solidFill>
+                <a:latin typeface="Inter"/>
+              </a:rPr>
+              <a:t>OLD WAY</a:t>
+            </a:r>
+          </a:p>
+        </p:txBody>
+      </p:sp>
+      <p:sp>
+        <p:nvSpPr>
+          <p:cNvPr id="8" name="TextBox 7"/>
+          <p:cNvSpPr txBox="1"/>
+          <p:nvPr/>
+        </p:nvSpPr>
+        <p:spPr>
+          <a:xfrm>
+            <a:off x="1114425" y="3107978"/>
+            <a:ext cx="209550" cy="209550"/>
+          </a:xfrm>
+          <a:prstGeom prst="rect">
+            <a:avLst/>
+          </a:prstGeom>
+          <a:solidFill>
+            <a:srgbClr val="F43F5E"/>
+          </a:solidFill>
+        </p:spPr>
+        <p:txBody>
+          <a:bodyPr wrap="square" lIns="0" rIns="0" tIns="0" bIns="0">
+            <a:spAutoFit/>
+          </a:bodyPr>
+          <a:lstStyle/>
+          <a:p>
+            <a:pPr algn="l"/>
+            <a:r>
+              <a:rPr sz="975" b="1" i="0" u="none">
+                <a:solidFill>
+                  <a:srgbClr val="FDA4AF"/>
+                </a:solidFill>
+                <a:latin typeface="Inter"/>
+              </a:rPr>
+              <a:t>×</a:t>
+            </a:r>
+          </a:p>
+        </p:txBody>
+      </p:sp>
+      <p:sp>
+        <p:nvSpPr>
+          <p:cNvPr id="9" name="TextBox 8"/>
+          <p:cNvSpPr txBox="1"/>
+          <p:nvPr/>
+        </p:nvSpPr>
+        <p:spPr>
+          <a:xfrm>
+            <a:off x="1457325" y="3107978"/>
+            <a:ext cx="3343721" cy="214312"/>
+          </a:xfrm>
+          <a:prstGeom prst="rect">
+            <a:avLst/>
+          </a:prstGeom>
+          <a:noFill/>
+        </p:spPr>
+        <p:txBody>
+          <a:bodyPr wrap="square" lIns="0" rIns="0" tIns="0" bIns="0">
+            <a:spAutoFit/>
+          </a:bodyPr>
+          <a:lstStyle/>
+          <a:p>
+            <a:pPr algn="l"/>
+            <a:r>
+              <a:rPr sz="1125" b="0" i="0" u="none">
+                <a:solidFill>
+                  <a:srgbClr val="A1A1AA"/>
+                </a:solidFill>
+                <a:latin typeface="Inter"/>
+              </a:rPr>
+              <a:t>Every slide is a 50 MB PNG embedded into PPTX.</a:t>
+            </a:r>
+          </a:p>
+        </p:txBody>
+      </p:sp>
+      <p:sp>
+        <p:nvSpPr>
+          <p:cNvPr id="10" name="TextBox 9"/>
+          <p:cNvSpPr txBox="1"/>
+          <p:nvPr/>
+        </p:nvSpPr>
+        <p:spPr>
+          <a:xfrm>
+            <a:off x="1114425" y="3598515"/>
+            <a:ext cx="209550" cy="209550"/>
+          </a:xfrm>
+          <a:prstGeom prst="rect">
+            <a:avLst/>
+          </a:prstGeom>
+          <a:solidFill>
+            <a:srgbClr val="F43F5E"/>
+          </a:solidFill>
+        </p:spPr>
+        <p:txBody>
+          <a:bodyPr wrap="square" lIns="0" rIns="0" tIns="0" bIns="0">
+            <a:spAutoFit/>
+          </a:bodyPr>
+          <a:lstStyle/>
+          <a:p>
+            <a:pPr algn="l"/>
+            <a:r>
+              <a:rPr sz="975" b="1" i="0" u="none">
+                <a:solidFill>
+                  <a:srgbClr val="FDA4AF"/>
+                </a:solidFill>
+                <a:latin typeface="Inter"/>
+              </a:rPr>
+              <a:t>×</a:t>
+            </a:r>
+          </a:p>
+        </p:txBody>
+      </p:sp>
+      <p:sp>
+        <p:nvSpPr>
+          <p:cNvPr id="11" name="TextBox 10"/>
+          <p:cNvSpPr txBox="1"/>
+          <p:nvPr/>
+        </p:nvSpPr>
+        <p:spPr>
+          <a:xfrm>
+            <a:off x="1457325" y="3598515"/>
+            <a:ext cx="3033564" cy="214312"/>
+          </a:xfrm>
+          <a:prstGeom prst="rect">
+            <a:avLst/>
+          </a:prstGeom>
+          <a:noFill/>
+        </p:spPr>
+        <p:txBody>
+          <a:bodyPr wrap="square" lIns="0" rIns="0" tIns="0" bIns="0">
+            <a:spAutoFit/>
+          </a:bodyPr>
+          <a:lstStyle/>
+          <a:p>
+            <a:pPr algn="l"/>
+            <a:r>
+              <a:rPr sz="1125" b="0" i="0" u="none">
+                <a:solidFill>
+                  <a:srgbClr val="A1A1AA"/>
+                </a:solidFill>
+                <a:latin typeface="Inter"/>
+              </a:rPr>
+              <a:t>No text is searchable, selectable, or editable.</a:t>
+            </a:r>
+          </a:p>
+        </p:txBody>
+      </p:sp>
+      <p:sp>
+        <p:nvSpPr>
+          <p:cNvPr id="12" name="TextBox 11"/>
+          <p:cNvSpPr txBox="1"/>
+          <p:nvPr/>
+        </p:nvSpPr>
+        <p:spPr>
+          <a:xfrm>
+            <a:off x="1114425" y="4089053"/>
+            <a:ext cx="209550" cy="209550"/>
+          </a:xfrm>
+          <a:prstGeom prst="rect">
+            <a:avLst/>
+          </a:prstGeom>
+          <a:solidFill>
+            <a:srgbClr val="F43F5E"/>
+          </a:solidFill>
+        </p:spPr>
+        <p:txBody>
+          <a:bodyPr wrap="square" lIns="0" rIns="0" tIns="0" bIns="0">
+            <a:spAutoFit/>
+          </a:bodyPr>
+          <a:lstStyle/>
+          <a:p>
+            <a:pPr algn="l"/>
+            <a:r>
+              <a:rPr sz="975" b="1" i="0" u="none">
+                <a:solidFill>
+                  <a:srgbClr val="FDA4AF"/>
+                </a:solidFill>
+                <a:latin typeface="Inter"/>
+              </a:rPr>
+              <a:t>×</a:t>
+            </a:r>
+          </a:p>
+        </p:txBody>
+      </p:sp>
+      <p:sp>
+        <p:nvSpPr>
+          <p:cNvPr id="13" name="TextBox 12"/>
+          <p:cNvSpPr txBox="1"/>
+          <p:nvPr/>
+        </p:nvSpPr>
+        <p:spPr>
+          <a:xfrm>
+            <a:off x="1457325" y="4089053"/>
+            <a:ext cx="3863727" cy="214312"/>
+          </a:xfrm>
+          <a:prstGeom prst="rect">
+            <a:avLst/>
+          </a:prstGeom>
+          <a:noFill/>
+        </p:spPr>
+        <p:txBody>
+          <a:bodyPr wrap="square" lIns="0" rIns="0" tIns="0" bIns="0">
+            <a:spAutoFit/>
+          </a:bodyPr>
+          <a:lstStyle/>
+          <a:p>
+            <a:r>
+              <a:rPr sz="1125" b="0">
+                <a:solidFill>
+                  <a:srgbClr val="A1A1AA"/>
+                </a:solidFill>
+                <a:latin typeface="Inter"/>
+              </a:rPr>
+              <a:t>• Brand-color swap requires re-running the whole pipeline.</a:t>
+            </a:r>
+          </a:p>
+        </p:txBody>
+      </p:sp>
+      <p:sp>
+        <p:nvSpPr>
+          <p:cNvPr id="14" name="TextBox 13"/>
+          <p:cNvSpPr txBox="1"/>
+          <p:nvPr/>
+        </p:nvSpPr>
+        <p:spPr>
+          <a:xfrm>
+            <a:off x="1114425" y="4579590"/>
+            <a:ext cx="209550" cy="209550"/>
+          </a:xfrm>
+          <a:prstGeom prst="rect">
+            <a:avLst/>
+          </a:prstGeom>
+          <a:solidFill>
+            <a:srgbClr val="F43F5E"/>
+          </a:solidFill>
+        </p:spPr>
+        <p:txBody>
+          <a:bodyPr wrap="square" lIns="0" rIns="0" tIns="0" bIns="0">
+            <a:spAutoFit/>
+          </a:bodyPr>
+          <a:lstStyle/>
+          <a:p>
+            <a:pPr algn="l"/>
+            <a:r>
+              <a:rPr sz="975" b="1" i="0" u="none">
+                <a:solidFill>
+                  <a:srgbClr val="FDA4AF"/>
+                </a:solidFill>
+                <a:latin typeface="Inter"/>
+              </a:rPr>
+              <a:t>×</a:t>
+            </a:r>
+          </a:p>
+        </p:txBody>
+      </p:sp>
+      <p:sp>
+        <p:nvSpPr>
+          <p:cNvPr id="15" name="TextBox 14"/>
+          <p:cNvSpPr txBox="1"/>
+          <p:nvPr/>
+        </p:nvSpPr>
+        <p:spPr>
+          <a:xfrm>
+            <a:off x="1457325" y="4579590"/>
+            <a:ext cx="3637806" cy="214312"/>
+          </a:xfrm>
+          <a:prstGeom prst="rect">
+            <a:avLst/>
+          </a:prstGeom>
+          <a:noFill/>
+        </p:spPr>
+        <p:txBody>
+          <a:bodyPr wrap="square" lIns="0" rIns="0" tIns="0" bIns="0">
+            <a:spAutoFit/>
+          </a:bodyPr>
+          <a:lstStyle/>
+          <a:p>
+            <a:pPr algn="l"/>
+            <a:r>
+              <a:rPr sz="1125" b="0" i="0" u="none">
+                <a:solidFill>
+                  <a:srgbClr val="A1A1AA"/>
+                </a:solidFill>
+                <a:latin typeface="Inter"/>
+              </a:rPr>
+              <a:t>Resizing degrades pixel-by-pixel, especially on retina.</a:t>
+            </a:r>
+          </a:p>
+        </p:txBody>
+      </p:sp>
+      <p:sp>
+        <p:nvSpPr>
+          <p:cNvPr id="16" name="TextBox 15"/>
+          <p:cNvSpPr txBox="1"/>
+          <p:nvPr/>
+        </p:nvSpPr>
+        <p:spPr>
+          <a:xfrm>
+            <a:off x="1114425" y="5070128"/>
+            <a:ext cx="209550" cy="209550"/>
+          </a:xfrm>
+          <a:prstGeom prst="rect">
+            <a:avLst/>
+          </a:prstGeom>
+          <a:solidFill>
+            <a:srgbClr val="F43F5E"/>
+          </a:solidFill>
+        </p:spPr>
+        <p:txBody>
+          <a:bodyPr wrap="square" lIns="0" rIns="0" tIns="0" bIns="0">
+            <a:spAutoFit/>
+          </a:bodyPr>
+          <a:lstStyle/>
+          <a:p>
+            <a:pPr algn="l"/>
+            <a:r>
+              <a:rPr sz="975" b="1" i="0" u="none">
+                <a:solidFill>
+                  <a:srgbClr val="FDA4AF"/>
+                </a:solidFill>
+                <a:latin typeface="Inter"/>
+              </a:rPr>
+              <a:t>×</a:t>
+            </a:r>
+          </a:p>
+        </p:txBody>
+      </p:sp>
+      <p:sp>
+        <p:nvSpPr>
+          <p:cNvPr id="17" name="TextBox 16"/>
+          <p:cNvSpPr txBox="1"/>
+          <p:nvPr/>
+        </p:nvSpPr>
+        <p:spPr>
+          <a:xfrm>
+            <a:off x="1457325" y="5070128"/>
+            <a:ext cx="3885158" cy="214312"/>
+          </a:xfrm>
+          <a:prstGeom prst="rect">
+            <a:avLst/>
+          </a:prstGeom>
+          <a:noFill/>
+        </p:spPr>
+        <p:txBody>
+          <a:bodyPr wrap="square" lIns="0" rIns="0" tIns="0" bIns="0">
+            <a:spAutoFit/>
+          </a:bodyPr>
+          <a:lstStyle/>
+          <a:p>
+            <a:r>
+              <a:rPr sz="1125" b="0">
+                <a:solidFill>
+                  <a:srgbClr val="A1A1AA"/>
+                </a:solidFill>
+                <a:latin typeface="Inter"/>
+              </a:rPr>
+              <a:t>• Translation requires a second model run plus paste-back.</a:t>
+            </a:r>
+          </a:p>
+        </p:txBody>
+      </p:sp>
+      <p:sp>
+        <p:nvSpPr>
+          <p:cNvPr id="18" name="Rounded Rectangle 17"/>
+          <p:cNvSpPr/>
+          <p:nvPr/>
+        </p:nvSpPr>
+        <p:spPr>
+          <a:gradFill flip="none" rotWithShape="1">
+            <a:gsLst>
+              <a:gs pos="0">
+                <a:srgbClr val="6366F1">
+                  <a:alpha val="18000"/>
+                </a:srgbClr>
+              </a:gs>
+              <a:gs pos="100000">
+                <a:srgbClr val="EC4899">
+                  <a:alpha val="10000"/>
+                </a:srgbClr>
+              </a:gs>
+            </a:gsLst>
+            <a:lin ang="4200000" scaled="0"/>
+          </a:gradFill>
+          <a:xfrm>
+            <a:off x="6229350" y="1926878"/>
+            <a:ext cx="5200650" cy="4057650"/>
+          </a:xfrm>
+          <a:prstGeom prst="roundRect">
+            <a:avLst/>
+          </a:prstGeom>
+          <a:ln w="9525">
+            <a:solidFill>
+              <a:srgbClr val="A78BFA"/>
+            </a:solidFill>
+          </a:ln>
+          <a:effectLst>
+            <a:outerShdw blurRad="762000" dist="0" dir="0" algn="ctr" rotWithShape="0">
+              <a:srgbClr val="8B5CF6">
+                <a:alpha val="20000"/>
+              </a:srgbClr>
+            </a:outerShdw>
+          </a:effectLst>
+        </p:spPr>
+        <p:style>
+          <a:lnRef idx="1">
+            <a:schemeClr val="accent1"/>
+          </a:lnRef>
+          <a:fillRef idx="3">
+            <a:schemeClr val="accent1"/>
+          </a:fillRef>
+          <a:effectRef idx="2">
+            <a:schemeClr val="accent1"/>
+          </a:effectRef>
+          <a:fontRef idx="minor">
+            <a:schemeClr val="lt1"/>
+          </a:fontRef>
+        </p:style>
+        <p:txBody>
+          <a:bodyPr rtlCol="0" anchor="ctr"/>
+          <a:lstStyle/>
+          <a:p>
+            <a:pPr algn="ctr"/>
+          </a:p>
+        </p:txBody>
+      </p:sp>
+      <p:sp>
+        <p:nvSpPr>
+          <p:cNvPr id="19" name="TextBox 18"/>
+          <p:cNvSpPr txBox="1"/>
+          <p:nvPr/>
+        </p:nvSpPr>
+        <p:spPr>
+          <a:xfrm>
+            <a:off x="6581775" y="2279303"/>
+            <a:ext cx="674043" cy="276225"/>
+          </a:xfrm>
+          <a:prstGeom prst="rect">
+            <a:avLst/>
+          </a:prstGeom>
+          <a:noFill/>
+        </p:spPr>
+        <p:txBody>
+          <a:bodyPr wrap="square" lIns="0" rIns="0" tIns="0" bIns="0">
+            <a:spAutoFit/>
+          </a:bodyPr>
+          <a:lstStyle/>
+          <a:p>
+            <a:pPr algn="l"/>
+            <a:r>
+              <a:rPr sz="1800" b="1" i="0" u="none">
+                <a:solidFill>
+                  <a:srgbClr val="F5F5F7"/>
+                </a:solidFill>
+                <a:latin typeface="Inter"/>
+              </a:rPr>
+              <a:t>slidify</a:t>
+            </a:r>
+          </a:p>
+        </p:txBody>
+      </p:sp>
+      <p:sp>
+        <p:nvSpPr>
+          <p:cNvPr id="20" name="TextBox 19"/>
+          <p:cNvSpPr txBox="1"/>
+          <p:nvPr/>
+        </p:nvSpPr>
+        <p:spPr>
+          <a:gradFill flip="none" rotWithShape="1">
+            <a:gsLst>
+              <a:gs pos="0">
+                <a:srgbClr val="818CF8"/>
+              </a:gs>
+              <a:gs pos="100000">
+                <a:srgbClr val="F472B6"/>
+              </a:gs>
+            </a:gsLst>
+            <a:lin ang="2700000" scaled="0"/>
+          </a:gradFill>
+          <a:xfrm>
+            <a:off x="10255151" y="2326928"/>
+            <a:ext cx="822424" cy="228600"/>
+          </a:xfrm>
+          <a:prstGeom prst="rect">
+            <a:avLst/>
+          </a:prstGeom>
+        </p:spPr>
+        <p:txBody>
+          <a:bodyPr wrap="square" lIns="0" rIns="0" tIns="0" bIns="0">
+            <a:spAutoFit/>
+          </a:bodyPr>
+          <a:lstStyle/>
+          <a:p>
+            <a:pPr algn="l"/>
+            <a:r>
+              <a:rPr sz="825" b="1" i="0" u="none">
+                <a:solidFill>
+                  <a:srgbClr val="0A0A0F"/>
+                </a:solidFill>
+                <a:latin typeface="Inter"/>
+              </a:rPr>
+              <a:t>NEW WAY</a:t>
+            </a:r>
+          </a:p>
+        </p:txBody>
+      </p:sp>
+      <p:sp>
+        <p:nvSpPr>
+          <p:cNvPr id="21" name="TextBox 20"/>
+          <p:cNvSpPr txBox="1"/>
+          <p:nvPr/>
+        </p:nvSpPr>
+        <p:spPr>
+          <a:xfrm>
+            <a:off x="6581775" y="3107978"/>
+            <a:ext cx="209550" cy="209550"/>
+          </a:xfrm>
+          <a:prstGeom prst="rect">
+            <a:avLst/>
+          </a:prstGeom>
+          <a:solidFill>
+            <a:srgbClr val="22C55E"/>
+          </a:solidFill>
+        </p:spPr>
+        <p:txBody>
+          <a:bodyPr wrap="square" lIns="0" rIns="0" tIns="0" bIns="0">
+            <a:spAutoFit/>
+          </a:bodyPr>
+          <a:lstStyle/>
+          <a:p>
+            <a:pPr algn="l"/>
+            <a:r>
+              <a:rPr sz="975" b="1" i="0" u="none">
+                <a:solidFill>
+                  <a:srgbClr val="86EFAC"/>
+                </a:solidFill>
+                <a:latin typeface="Inter"/>
+              </a:rPr>
+              <a:t>✓</a:t>
+            </a:r>
+          </a:p>
+        </p:txBody>
+      </p:sp>
+      <p:sp>
+        <p:nvSpPr>
+          <p:cNvPr id="22" name="TextBox 21"/>
+          <p:cNvSpPr txBox="1"/>
+          <p:nvPr/>
+        </p:nvSpPr>
+        <p:spPr>
+          <a:xfrm>
+            <a:off x="6924675" y="3107978"/>
+            <a:ext cx="3670548" cy="214312"/>
+          </a:xfrm>
+          <a:prstGeom prst="rect">
+            <a:avLst/>
+          </a:prstGeom>
+          <a:noFill/>
+        </p:spPr>
+        <p:txBody>
+          <a:bodyPr wrap="square" lIns="0" rIns="0" tIns="0" bIns="0">
+            <a:spAutoFit/>
+          </a:bodyPr>
+          <a:lstStyle/>
+          <a:p>
+            <a:r>
+              <a:rPr sz="1125" b="0">
+                <a:solidFill>
+                  <a:srgbClr val="E4E4E7"/>
+                </a:solidFill>
+                <a:latin typeface="Inter"/>
+              </a:rPr>
+              <a:t>• Headlines, body copy, and bullets are real text frames.</a:t>
+            </a:r>
+          </a:p>
+        </p:txBody>
+      </p:sp>
+      <p:sp>
+        <p:nvSpPr>
+          <p:cNvPr id="23" name="TextBox 22"/>
+          <p:cNvSpPr txBox="1"/>
+          <p:nvPr/>
+        </p:nvSpPr>
+        <p:spPr>
+          <a:xfrm>
+            <a:off x="6581775" y="3598515"/>
+            <a:ext cx="209550" cy="209550"/>
+          </a:xfrm>
+          <a:prstGeom prst="rect">
+            <a:avLst/>
+          </a:prstGeom>
+          <a:solidFill>
+            <a:srgbClr val="22C55E"/>
+          </a:solidFill>
+        </p:spPr>
+        <p:txBody>
+          <a:bodyPr wrap="square" lIns="0" rIns="0" tIns="0" bIns="0">
+            <a:spAutoFit/>
+          </a:bodyPr>
+          <a:lstStyle/>
+          <a:p>
+            <a:pPr algn="l"/>
+            <a:r>
+              <a:rPr sz="975" b="1" i="0" u="none">
+                <a:solidFill>
+                  <a:srgbClr val="86EFAC"/>
+                </a:solidFill>
+                <a:latin typeface="Inter"/>
+              </a:rPr>
+              <a:t>✓</a:t>
+            </a:r>
+          </a:p>
+        </p:txBody>
+      </p:sp>
+      <p:sp>
+        <p:nvSpPr>
+          <p:cNvPr id="24" name="TextBox 23"/>
+          <p:cNvSpPr txBox="1"/>
+          <p:nvPr/>
+        </p:nvSpPr>
+        <p:spPr>
+          <a:xfrm>
+            <a:off x="6924675" y="3598515"/>
+            <a:ext cx="3698825" cy="214312"/>
+          </a:xfrm>
+          <a:prstGeom prst="rect">
+            <a:avLst/>
+          </a:prstGeom>
+          <a:noFill/>
+        </p:spPr>
+        <p:txBody>
+          <a:bodyPr wrap="square" lIns="0" rIns="0" tIns="0" bIns="0">
+            <a:spAutoFit/>
+          </a:bodyPr>
+          <a:lstStyle/>
+          <a:p>
+            <a:r>
+              <a:rPr sz="1125" b="0">
+                <a:solidFill>
+                  <a:srgbClr val="E4E4E7"/>
+                </a:solidFill>
+                <a:latin typeface="Inter"/>
+              </a:rPr>
+              <a:t>• Cards, dividers, badges are native rounded rectangles.</a:t>
+            </a:r>
+          </a:p>
+        </p:txBody>
+      </p:sp>
+      <p:sp>
+        <p:nvSpPr>
+          <p:cNvPr id="25" name="TextBox 24"/>
+          <p:cNvSpPr txBox="1"/>
+          <p:nvPr/>
+        </p:nvSpPr>
+        <p:spPr>
+          <a:xfrm>
+            <a:off x="6581775" y="4089053"/>
+            <a:ext cx="209550" cy="209550"/>
+          </a:xfrm>
+          <a:prstGeom prst="rect">
+            <a:avLst/>
+          </a:prstGeom>
+          <a:solidFill>
+            <a:srgbClr val="22C55E"/>
+          </a:solidFill>
+        </p:spPr>
+        <p:txBody>
+          <a:bodyPr wrap="square" lIns="0" rIns="0" tIns="0" bIns="0">
+            <a:spAutoFit/>
+          </a:bodyPr>
+          <a:lstStyle/>
+          <a:p>
+            <a:pPr algn="l"/>
+            <a:r>
+              <a:rPr sz="975" b="1" i="0" u="none">
+                <a:solidFill>
+                  <a:srgbClr val="86EFAC"/>
+                </a:solidFill>
+                <a:latin typeface="Inter"/>
+              </a:rPr>
+              <a:t>✓</a:t>
+            </a:r>
+          </a:p>
+        </p:txBody>
+      </p:sp>
+      <p:sp>
+        <p:nvSpPr>
+          <p:cNvPr id="26" name="TextBox 25"/>
+          <p:cNvSpPr txBox="1"/>
+          <p:nvPr/>
+        </p:nvSpPr>
+        <p:spPr>
+          <a:xfrm>
+            <a:off x="6924675" y="4089053"/>
+            <a:ext cx="4137868" cy="214312"/>
+          </a:xfrm>
+          <a:prstGeom prst="rect">
+            <a:avLst/>
+          </a:prstGeom>
+          <a:noFill/>
+        </p:spPr>
+        <p:txBody>
+          <a:bodyPr wrap="square" lIns="0" rIns="0" tIns="0" bIns="0">
+            <a:spAutoFit/>
+          </a:bodyPr>
+          <a:lstStyle/>
+          <a:p>
+            <a:r>
+              <a:rPr sz="1125" b="0">
+                <a:solidFill>
+                  <a:srgbClr val="E4E4E7"/>
+                </a:solidFill>
+                <a:latin typeface="Inter"/>
+              </a:rPr>
+              <a:t>• Designers edit fonts, colors, alignment in PowerPoint directly.</a:t>
+            </a:r>
+          </a:p>
+        </p:txBody>
+      </p:sp>
+      <p:sp>
+        <p:nvSpPr>
+          <p:cNvPr id="27" name="TextBox 26"/>
+          <p:cNvSpPr txBox="1"/>
+          <p:nvPr/>
+        </p:nvSpPr>
+        <p:spPr>
+          <a:xfrm>
+            <a:off x="6581775" y="4579590"/>
+            <a:ext cx="209550" cy="209550"/>
+          </a:xfrm>
+          <a:prstGeom prst="rect">
+            <a:avLst/>
+          </a:prstGeom>
+          <a:solidFill>
+            <a:srgbClr val="22C55E"/>
+          </a:solidFill>
+        </p:spPr>
+        <p:txBody>
+          <a:bodyPr wrap="square" lIns="0" rIns="0" tIns="0" bIns="0">
+            <a:spAutoFit/>
+          </a:bodyPr>
+          <a:lstStyle/>
+          <a:p>
+            <a:pPr algn="l"/>
+            <a:r>
+              <a:rPr sz="975" b="1" i="0" u="none">
+                <a:solidFill>
+                  <a:srgbClr val="86EFAC"/>
+                </a:solidFill>
+                <a:latin typeface="Inter"/>
+              </a:rPr>
+              <a:t>✓</a:t>
+            </a:r>
+          </a:p>
+        </p:txBody>
+      </p:sp>
+      <p:sp>
+        <p:nvSpPr>
+          <p:cNvPr id="28" name="TextBox 27"/>
+          <p:cNvSpPr txBox="1"/>
+          <p:nvPr/>
+        </p:nvSpPr>
+        <p:spPr>
+          <a:xfrm>
+            <a:off x="6924675" y="4579590"/>
+            <a:ext cx="3611761" cy="214312"/>
+          </a:xfrm>
+          <a:prstGeom prst="rect">
+            <a:avLst/>
+          </a:prstGeom>
+          <a:noFill/>
+        </p:spPr>
+        <p:txBody>
+          <a:bodyPr wrap="square" lIns="0" rIns="0" tIns="0" bIns="0">
+            <a:spAutoFit/>
+          </a:bodyPr>
+          <a:lstStyle/>
+          <a:p>
+            <a:pPr algn="l"/>
+            <a:r>
+              <a:rPr sz="1125" b="0" i="0" u="none">
+                <a:solidFill>
+                  <a:srgbClr val="E4E4E7"/>
+                </a:solidFill>
+                <a:latin typeface="Inter"/>
+              </a:rPr>
+              <a:t>Only complex visuals (Chart.js, blur effects) rasterize.</a:t>
+            </a:r>
+          </a:p>
+        </p:txBody>
+      </p:sp>
+      <p:sp>
+        <p:nvSpPr>
+          <p:cNvPr id="29" name="TextBox 28"/>
+          <p:cNvSpPr txBox="1"/>
+          <p:nvPr/>
+        </p:nvSpPr>
+        <p:spPr>
+          <a:xfrm>
+            <a:off x="6581775" y="5070128"/>
+            <a:ext cx="209550" cy="209550"/>
+          </a:xfrm>
+          <a:prstGeom prst="rect">
+            <a:avLst/>
+          </a:prstGeom>
+          <a:solidFill>
+            <a:srgbClr val="22C55E"/>
+          </a:solidFill>
+        </p:spPr>
+        <p:txBody>
+          <a:bodyPr wrap="square" lIns="0" rIns="0" tIns="0" bIns="0">
+            <a:spAutoFit/>
+          </a:bodyPr>
+          <a:lstStyle/>
+          <a:p>
+            <a:pPr algn="l"/>
+            <a:r>
+              <a:rPr sz="975" b="1" i="0" u="none">
+                <a:solidFill>
+                  <a:srgbClr val="86EFAC"/>
+                </a:solidFill>
+                <a:latin typeface="Inter"/>
+              </a:rPr>
+              <a:t>✓</a:t>
+            </a:r>
+          </a:p>
+        </p:txBody>
+      </p:sp>
+      <p:sp>
+        <p:nvSpPr>
+          <p:cNvPr id="30" name="TextBox 29"/>
+          <p:cNvSpPr txBox="1"/>
+          <p:nvPr/>
+        </p:nvSpPr>
+        <p:spPr>
+          <a:xfrm>
+            <a:off x="6924675" y="5070128"/>
+            <a:ext cx="4152900" cy="428625"/>
+          </a:xfrm>
+          <a:prstGeom prst="rect">
+            <a:avLst/>
+          </a:prstGeom>
+          <a:noFill/>
+        </p:spPr>
+        <p:txBody>
+          <a:bodyPr wrap="square" lIns="0" rIns="0" tIns="0" bIns="0">
+            <a:spAutoFit/>
+          </a:bodyPr>
+          <a:lstStyle/>
+          <a:p>
+            <a:pPr algn="l"/>
+            <a:r>
+              <a:rPr sz="1125" b="0" i="0" u="none">
+                <a:solidFill>
+                  <a:srgbClr val="E4E4E7"/>
+                </a:solidFill>
+                <a:latin typeface="Inter"/>
+              </a:rPr>
+              <a:t>Output is 4 MB instead of 50 MB. Email-friendly out of the box.</a:t>
+            </a:r>
+          </a:p>
+        </p:txBody>
+      </p:sp>
+      <p:sp>
+        <p:nvSpPr>
+          <p:cNvPr id="31" name="TextBox 30"/>
+          <p:cNvSpPr txBox="1"/>
+          <p:nvPr/>
+        </p:nvSpPr>
+        <p:spPr>
+          <a:xfrm>
+            <a:off x="762000" y="6400800"/>
+            <a:ext cx="1411635" cy="152400"/>
+          </a:xfrm>
+          <a:prstGeom prst="rect">
+            <a:avLst/>
+          </a:prstGeom>
+          <a:noFill/>
+        </p:spPr>
+        <p:txBody>
+          <a:bodyPr wrap="square" lIns="0" rIns="0" tIns="0" bIns="0">
+            <a:spAutoFit/>
+          </a:bodyPr>
+          <a:lstStyle/>
+          <a:p>
+            <a:pPr algn="l"/>
+            <a:r>
+              <a:rPr sz="975" b="1" i="0" u="none">
+                <a:solidFill>
+                  <a:srgbClr val="52525B"/>
+                </a:solidFill>
+                <a:latin typeface="Inter"/>
+              </a:rPr>
+              <a:t>PIXELPITCH LABS</a:t>
+            </a:r>
+          </a:p>
+        </p:txBody>
+      </p:sp>
+      <p:sp>
+        <p:nvSpPr>
+          <p:cNvPr id="32" name="TextBox 31"/>
+          <p:cNvSpPr txBox="1"/>
+          <p:nvPr/>
+        </p:nvSpPr>
+        <p:spPr>
+          <a:xfrm>
+            <a:off x="10874127" y="6400800"/>
+            <a:ext cx="555873" cy="152400"/>
+          </a:xfrm>
+          <a:prstGeom prst="rect">
+            <a:avLst/>
+          </a:prstGeom>
+          <a:noFill/>
+        </p:spPr>
+        <p:txBody>
+          <a:bodyPr wrap="square" lIns="0" rIns="0" tIns="0" bIns="0">
+            <a:spAutoFit/>
+          </a:bodyPr>
+          <a:lstStyle/>
+          <a:p>
+            <a:pPr algn="l"/>
+            <a:r>
+              <a:rPr sz="975" b="1" i="0" u="none">
+                <a:solidFill>
+                  <a:srgbClr val="52525B"/>
+                </a:solidFill>
+                <a:latin typeface="Inter"/>
+              </a:rPr>
+              <a:t>06 / 12</a:t>
             </a:r>
           </a:p>
         </p:txBody>

--- a/examples/sophisticated/deck.pptx
+++ b/examples/sophisticated/deck.pptx
@@ -11,6 +11,9 @@
     <p:sldId id="259" r:id="rId10"/>
     <p:sldId id="260" r:id="rId11"/>
     <p:sldId id="261" r:id="rId12"/>
+    <p:sldId id="262" r:id="rId13"/>
+    <p:sldId id="263" r:id="rId14"/>
+    <p:sldId id="264" r:id="rId15"/>
   </p:sldIdLst>
   <p:sldSz cx="12192000" cy="6858000" type="screen4x3"/>
   <p:notesSz cx="6858000" cy="9144000"/>
@@ -8514,6 +8517,3546 @@
                 <a:latin typeface="Inter"/>
               </a:rPr>
               <a:t>06 / 12</a:t>
+            </a:r>
+          </a:p>
+        </p:txBody>
+      </p:sp>
+    </p:spTree>
+  </p:cSld>
+  <p:clrMapOvr>
+    <a:masterClrMapping/>
+  </p:clrMapOvr>
+</p:sld>
+</file>
+
+<file path=ppt/slides/slide7.xml><?xml version="1.0" encoding="utf-8"?>
+<p:sld xmlns:a="http://schemas.openxmlformats.org/drawingml/2006/main" xmlns:p="http://schemas.openxmlformats.org/presentationml/2006/main" xmlns:r="http://schemas.openxmlformats.org/officeDocument/2006/relationships">
+  <p:cSld>
+    <p:spTree>
+      <p:nvGrpSpPr>
+        <p:cNvPr id="1" name=""/>
+        <p:cNvGrpSpPr/>
+        <p:nvPr/>
+      </p:nvGrpSpPr>
+      <p:grpSpPr/>
+      <p:sp>
+        <p:nvSpPr>
+          <p:cNvPr id="2" name="Rectangle 1"/>
+          <p:cNvSpPr/>
+          <p:nvPr/>
+        </p:nvSpPr>
+        <p:spPr>
+          <a:xfrm>
+            <a:off x="0" y="0"/>
+            <a:ext cx="12192000" cy="6858000"/>
+          </a:xfrm>
+          <a:prstGeom prst="rect">
+            <a:avLst/>
+          </a:prstGeom>
+          <a:solidFill>
+            <a:srgbClr val="070710"/>
+          </a:solidFill>
+          <a:ln>
+            <a:noFill/>
+          </a:ln>
+        </p:spPr>
+        <p:style>
+          <a:lnRef idx="1">
+            <a:schemeClr val="accent1"/>
+          </a:lnRef>
+          <a:fillRef idx="3">
+            <a:schemeClr val="accent1"/>
+          </a:fillRef>
+          <a:effectRef idx="2">
+            <a:schemeClr val="accent1"/>
+          </a:effectRef>
+          <a:fontRef idx="minor">
+            <a:schemeClr val="lt1"/>
+          </a:fontRef>
+        </p:style>
+        <p:txBody>
+          <a:bodyPr rtlCol="0" anchor="ctr"/>
+          <a:lstStyle/>
+          <a:p>
+            <a:pPr algn="ctr"/>
+          </a:p>
+        </p:txBody>
+      </p:sp>
+      <p:sp>
+        <p:nvSpPr>
+          <p:cNvPr id="3" name="TextBox 2"/>
+          <p:cNvSpPr txBox="1"/>
+          <p:nvPr/>
+        </p:nvSpPr>
+        <p:spPr>
+          <a:xfrm>
+            <a:off x="762000" y="762000"/>
+            <a:ext cx="10668000" cy="152400"/>
+          </a:xfrm>
+          <a:prstGeom prst="rect">
+            <a:avLst/>
+          </a:prstGeom>
+          <a:noFill/>
+        </p:spPr>
+        <p:txBody>
+          <a:bodyPr wrap="square" lIns="0" rIns="0" tIns="0" bIns="0">
+            <a:spAutoFit/>
+          </a:bodyPr>
+          <a:lstStyle/>
+          <a:p>
+            <a:pPr algn="l"/>
+            <a:r>
+              <a:rPr sz="975" b="1" i="0" u="none">
+                <a:solidFill>
+                  <a:srgbClr val="A78BFA"/>
+                </a:solidFill>
+                <a:latin typeface="Inter"/>
+              </a:rPr>
+              <a:t>The pipeline</a:t>
+            </a:r>
+          </a:p>
+        </p:txBody>
+      </p:sp>
+      <p:sp>
+        <p:nvSpPr>
+          <p:cNvPr id="4" name="TextBox 3"/>
+          <p:cNvSpPr txBox="1"/>
+          <p:nvPr/>
+        </p:nvSpPr>
+        <p:spPr>
+          <a:xfrm>
+            <a:off x="762000" y="1085850"/>
+            <a:ext cx="8763000" cy="460028"/>
+          </a:xfrm>
+          <a:prstGeom prst="rect">
+            <a:avLst/>
+          </a:prstGeom>
+          <a:noFill/>
+        </p:spPr>
+        <p:txBody>
+          <a:bodyPr wrap="square" lIns="0" rIns="0" tIns="0" bIns="0">
+            <a:spAutoFit/>
+          </a:bodyPr>
+          <a:lstStyle/>
+          <a:p>
+            <a:pPr algn="l"/>
+            <a:r>
+              <a:rPr sz="3450" b="1" i="0" u="none">
+                <a:solidFill>
+                  <a:srgbClr val="F5F5F7"/>
+                </a:solidFill>
+                <a:latin typeface="Inter"/>
+              </a:rPr>
+              <a:t>Render. Cluster. Classify. Emit. Validate.</a:t>
+            </a:r>
+          </a:p>
+        </p:txBody>
+      </p:sp>
+      <p:sp>
+        <p:nvSpPr>
+          <p:cNvPr id="5" name="Rounded Rectangle 4"/>
+          <p:cNvSpPr/>
+          <p:nvPr/>
+        </p:nvSpPr>
+        <p:spPr>
+          <a:xfrm>
+            <a:off x="762000" y="2155478"/>
+            <a:ext cx="1996380" cy="1950541"/>
+          </a:xfrm>
+          <a:prstGeom prst="roundRect">
+            <a:avLst/>
+          </a:prstGeom>
+          <a:solidFill>
+            <a:srgbClr val="FFFFFF"/>
+          </a:solidFill>
+          <a:ln w="9525">
+            <a:solidFill>
+              <a:srgbClr val="FFFFFF"/>
+            </a:solidFill>
+          </a:ln>
+          <a:effectLst>
+            <a:outerShdw blurRad="342900" dist="114300" dir="5400000" algn="ctr" rotWithShape="0">
+              <a:srgbClr val="6366F1">
+                <a:alpha val="6000"/>
+              </a:srgbClr>
+            </a:outerShdw>
+          </a:effectLst>
+        </p:spPr>
+        <p:style>
+          <a:lnRef idx="1">
+            <a:schemeClr val="accent1"/>
+          </a:lnRef>
+          <a:fillRef idx="3">
+            <a:schemeClr val="accent1"/>
+          </a:fillRef>
+          <a:effectRef idx="2">
+            <a:schemeClr val="accent1"/>
+          </a:effectRef>
+          <a:fontRef idx="minor">
+            <a:schemeClr val="lt1"/>
+          </a:fontRef>
+        </p:style>
+        <p:txBody>
+          <a:bodyPr rtlCol="0" anchor="ctr"/>
+          <a:lstStyle/>
+          <a:p>
+            <a:pPr algn="ctr"/>
+          </a:p>
+        </p:txBody>
+      </p:sp>
+      <p:sp>
+        <p:nvSpPr>
+          <p:cNvPr id="6" name="TextBox 5"/>
+          <p:cNvSpPr txBox="1"/>
+          <p:nvPr/>
+        </p:nvSpPr>
+        <p:spPr>
+          <a:xfrm>
+            <a:off x="942975" y="2374553"/>
+            <a:ext cx="342900" cy="342900"/>
+          </a:xfrm>
+          <a:prstGeom prst="rect">
+            <a:avLst/>
+          </a:prstGeom>
+          <a:solidFill>
+            <a:srgbClr val="A78BFA"/>
+          </a:solidFill>
+          <a:effectLst>
+            <a:outerShdw blurRad="0" dist="0" dir="0" algn="ctr" rotWithShape="0">
+              <a:srgbClr val="070710"/>
+            </a:outerShdw>
+          </a:effectLst>
+        </p:spPr>
+        <p:txBody>
+          <a:bodyPr wrap="square" lIns="0" rIns="0" tIns="0" bIns="0">
+            <a:spAutoFit/>
+          </a:bodyPr>
+          <a:lstStyle/>
+          <a:p>
+            <a:pPr algn="l"/>
+            <a:r>
+              <a:rPr sz="1050" b="1" i="0" u="none">
+                <a:solidFill>
+                  <a:srgbClr val="0A0A0F"/>
+                </a:solidFill>
+                <a:latin typeface="Inter"/>
+              </a:rPr>
+              <a:t>01</a:t>
+            </a:r>
+          </a:p>
+        </p:txBody>
+      </p:sp>
+      <p:sp>
+        <p:nvSpPr>
+          <p:cNvPr id="7" name="TextBox 6"/>
+          <p:cNvSpPr txBox="1"/>
+          <p:nvPr/>
+        </p:nvSpPr>
+        <p:spPr>
+          <a:xfrm>
+            <a:off x="942975" y="2850803"/>
+            <a:ext cx="1634430" cy="200025"/>
+          </a:xfrm>
+          <a:prstGeom prst="rect">
+            <a:avLst/>
+          </a:prstGeom>
+          <a:noFill/>
+        </p:spPr>
+        <p:txBody>
+          <a:bodyPr wrap="square" lIns="0" rIns="0" tIns="0" bIns="0">
+            <a:spAutoFit/>
+          </a:bodyPr>
+          <a:lstStyle/>
+          <a:p>
+            <a:pPr algn="l"/>
+            <a:r>
+              <a:rPr sz="1350" b="1" i="0" u="none">
+                <a:solidFill>
+                  <a:srgbClr val="F5F5F7"/>
+                </a:solidFill>
+                <a:latin typeface="Inter"/>
+              </a:rPr>
+              <a:t>Render</a:t>
+            </a:r>
+          </a:p>
+        </p:txBody>
+      </p:sp>
+      <p:sp>
+        <p:nvSpPr>
+          <p:cNvPr id="8" name="TextBox 7"/>
+          <p:cNvSpPr txBox="1"/>
+          <p:nvPr/>
+        </p:nvSpPr>
+        <p:spPr>
+          <a:xfrm>
+            <a:off x="942975" y="3107978"/>
+            <a:ext cx="1634430" cy="531316"/>
+          </a:xfrm>
+          <a:prstGeom prst="rect">
+            <a:avLst/>
+          </a:prstGeom>
+          <a:noFill/>
+        </p:spPr>
+        <p:txBody>
+          <a:bodyPr wrap="square" lIns="0" rIns="0" tIns="0" bIns="0">
+            <a:spAutoFit/>
+          </a:bodyPr>
+          <a:lstStyle/>
+          <a:p>
+            <a:pPr algn="l"/>
+            <a:r>
+              <a:rPr sz="900" b="0" i="0" u="none">
+                <a:solidFill>
+                  <a:srgbClr val="A1A1AA"/>
+                </a:solidFill>
+                <a:latin typeface="Inter"/>
+              </a:rPr>
+              <a:t>Headless Chromium, animation freeze, two-rAF wait, font preload.</a:t>
+            </a:r>
+          </a:p>
+        </p:txBody>
+      </p:sp>
+      <p:sp>
+        <p:nvSpPr>
+          <p:cNvPr id="9" name="TextBox 8"/>
+          <p:cNvSpPr txBox="1"/>
+          <p:nvPr/>
+        </p:nvSpPr>
+        <p:spPr>
+          <a:xfrm>
+            <a:off x="942975" y="3772644"/>
+            <a:ext cx="1634430" cy="114300"/>
+          </a:xfrm>
+          <a:prstGeom prst="rect">
+            <a:avLst/>
+          </a:prstGeom>
+          <a:noFill/>
+        </p:spPr>
+        <p:txBody>
+          <a:bodyPr wrap="square" lIns="0" rIns="0" tIns="0" bIns="0">
+            <a:spAutoFit/>
+          </a:bodyPr>
+          <a:lstStyle/>
+          <a:p>
+            <a:pPr algn="l"/>
+            <a:r>
+              <a:rPr sz="800" b="1" i="0" u="none">
+                <a:solidFill>
+                  <a:srgbClr val="52525B"/>
+                </a:solidFill>
+                <a:latin typeface="Inter"/>
+              </a:rPr>
+              <a:t>PLAYWRIGHT</a:t>
+            </a:r>
+          </a:p>
+        </p:txBody>
+      </p:sp>
+      <p:sp>
+        <p:nvSpPr>
+          <p:cNvPr id="10" name="Rounded Rectangle 9"/>
+          <p:cNvSpPr/>
+          <p:nvPr/>
+        </p:nvSpPr>
+        <p:spPr>
+          <a:xfrm>
+            <a:off x="2929830" y="2155478"/>
+            <a:ext cx="1996380" cy="1950541"/>
+          </a:xfrm>
+          <a:prstGeom prst="roundRect">
+            <a:avLst/>
+          </a:prstGeom>
+          <a:solidFill>
+            <a:srgbClr val="FFFFFF"/>
+          </a:solidFill>
+          <a:ln w="9525">
+            <a:solidFill>
+              <a:srgbClr val="FFFFFF"/>
+            </a:solidFill>
+          </a:ln>
+          <a:effectLst>
+            <a:outerShdw blurRad="342900" dist="114300" dir="5400000" algn="ctr" rotWithShape="0">
+              <a:srgbClr val="6366F1">
+                <a:alpha val="6000"/>
+              </a:srgbClr>
+            </a:outerShdw>
+          </a:effectLst>
+        </p:spPr>
+        <p:style>
+          <a:lnRef idx="1">
+            <a:schemeClr val="accent1"/>
+          </a:lnRef>
+          <a:fillRef idx="3">
+            <a:schemeClr val="accent1"/>
+          </a:fillRef>
+          <a:effectRef idx="2">
+            <a:schemeClr val="accent1"/>
+          </a:effectRef>
+          <a:fontRef idx="minor">
+            <a:schemeClr val="lt1"/>
+          </a:fontRef>
+        </p:style>
+        <p:txBody>
+          <a:bodyPr rtlCol="0" anchor="ctr"/>
+          <a:lstStyle/>
+          <a:p>
+            <a:pPr algn="ctr"/>
+          </a:p>
+        </p:txBody>
+      </p:sp>
+      <p:sp>
+        <p:nvSpPr>
+          <p:cNvPr id="11" name="TextBox 10"/>
+          <p:cNvSpPr txBox="1"/>
+          <p:nvPr/>
+        </p:nvSpPr>
+        <p:spPr>
+          <a:xfrm>
+            <a:off x="3110805" y="2374553"/>
+            <a:ext cx="342900" cy="342900"/>
+          </a:xfrm>
+          <a:prstGeom prst="rect">
+            <a:avLst/>
+          </a:prstGeom>
+          <a:solidFill>
+            <a:srgbClr val="C084FC"/>
+          </a:solidFill>
+          <a:effectLst>
+            <a:outerShdw blurRad="0" dist="0" dir="0" algn="ctr" rotWithShape="0">
+              <a:srgbClr val="070710"/>
+            </a:outerShdw>
+          </a:effectLst>
+        </p:spPr>
+        <p:txBody>
+          <a:bodyPr wrap="square" lIns="0" rIns="0" tIns="0" bIns="0">
+            <a:spAutoFit/>
+          </a:bodyPr>
+          <a:lstStyle/>
+          <a:p>
+            <a:pPr algn="l"/>
+            <a:r>
+              <a:rPr sz="1050" b="1" i="0" u="none">
+                <a:solidFill>
+                  <a:srgbClr val="0A0A0F"/>
+                </a:solidFill>
+                <a:latin typeface="Inter"/>
+              </a:rPr>
+              <a:t>02</a:t>
+            </a:r>
+          </a:p>
+        </p:txBody>
+      </p:sp>
+      <p:sp>
+        <p:nvSpPr>
+          <p:cNvPr id="12" name="TextBox 11"/>
+          <p:cNvSpPr txBox="1"/>
+          <p:nvPr/>
+        </p:nvSpPr>
+        <p:spPr>
+          <a:xfrm>
+            <a:off x="3110805" y="2850803"/>
+            <a:ext cx="1634430" cy="200025"/>
+          </a:xfrm>
+          <a:prstGeom prst="rect">
+            <a:avLst/>
+          </a:prstGeom>
+          <a:noFill/>
+        </p:spPr>
+        <p:txBody>
+          <a:bodyPr wrap="square" lIns="0" rIns="0" tIns="0" bIns="0">
+            <a:spAutoFit/>
+          </a:bodyPr>
+          <a:lstStyle/>
+          <a:p>
+            <a:pPr algn="l"/>
+            <a:r>
+              <a:rPr sz="1350" b="1" i="0" u="none">
+                <a:solidFill>
+                  <a:srgbClr val="F5F5F7"/>
+                </a:solidFill>
+                <a:latin typeface="Inter"/>
+              </a:rPr>
+              <a:t>Cluster</a:t>
+            </a:r>
+          </a:p>
+        </p:txBody>
+      </p:sp>
+      <p:sp>
+        <p:nvSpPr>
+          <p:cNvPr id="13" name="TextBox 12"/>
+          <p:cNvSpPr txBox="1"/>
+          <p:nvPr/>
+        </p:nvSpPr>
+        <p:spPr>
+          <a:xfrm>
+            <a:off x="3110805" y="3107978"/>
+            <a:ext cx="1634430" cy="531316"/>
+          </a:xfrm>
+          <a:prstGeom prst="rect">
+            <a:avLst/>
+          </a:prstGeom>
+          <a:noFill/>
+        </p:spPr>
+        <p:txBody>
+          <a:bodyPr wrap="square" lIns="0" rIns="0" tIns="0" bIns="0">
+            <a:spAutoFit/>
+          </a:bodyPr>
+          <a:lstStyle/>
+          <a:p>
+            <a:pPr algn="l"/>
+            <a:r>
+              <a:rPr sz="900" b="0" i="0" u="none">
+                <a:solidFill>
+                  <a:srgbClr val="A1A1AA"/>
+                </a:solidFill>
+                <a:latin typeface="Inter"/>
+              </a:rPr>
+              <a:t>DOM elements grouped into atomic visual units by anchor + spatial overlap.</a:t>
+            </a:r>
+          </a:p>
+        </p:txBody>
+      </p:sp>
+      <p:sp>
+        <p:nvSpPr>
+          <p:cNvPr id="14" name="TextBox 13"/>
+          <p:cNvSpPr txBox="1"/>
+          <p:nvPr/>
+        </p:nvSpPr>
+        <p:spPr>
+          <a:xfrm>
+            <a:off x="3110805" y="3772644"/>
+            <a:ext cx="1634430" cy="114300"/>
+          </a:xfrm>
+          <a:prstGeom prst="rect">
+            <a:avLst/>
+          </a:prstGeom>
+          <a:noFill/>
+        </p:spPr>
+        <p:txBody>
+          <a:bodyPr wrap="square" lIns="0" rIns="0" tIns="0" bIns="0">
+            <a:spAutoFit/>
+          </a:bodyPr>
+          <a:lstStyle/>
+          <a:p>
+            <a:pPr algn="l"/>
+            <a:r>
+              <a:rPr sz="800" b="1" i="0" u="none">
+                <a:solidFill>
+                  <a:srgbClr val="52525B"/>
+                </a:solidFill>
+                <a:latin typeface="Inter"/>
+              </a:rPr>
+              <a:t>~10–50 / SLIDE</a:t>
+            </a:r>
+          </a:p>
+        </p:txBody>
+      </p:sp>
+      <p:sp>
+        <p:nvSpPr>
+          <p:cNvPr id="15" name="Rounded Rectangle 14"/>
+          <p:cNvSpPr/>
+          <p:nvPr/>
+        </p:nvSpPr>
+        <p:spPr>
+          <a:xfrm>
+            <a:off x="5097661" y="2155478"/>
+            <a:ext cx="1996529" cy="1950541"/>
+          </a:xfrm>
+          <a:prstGeom prst="roundRect">
+            <a:avLst/>
+          </a:prstGeom>
+          <a:solidFill>
+            <a:srgbClr val="FFFFFF"/>
+          </a:solidFill>
+          <a:ln w="9525">
+            <a:solidFill>
+              <a:srgbClr val="FFFFFF"/>
+            </a:solidFill>
+          </a:ln>
+          <a:effectLst>
+            <a:outerShdw blurRad="342900" dist="114300" dir="5400000" algn="ctr" rotWithShape="0">
+              <a:srgbClr val="6366F1">
+                <a:alpha val="6000"/>
+              </a:srgbClr>
+            </a:outerShdw>
+          </a:effectLst>
+        </p:spPr>
+        <p:style>
+          <a:lnRef idx="1">
+            <a:schemeClr val="accent1"/>
+          </a:lnRef>
+          <a:fillRef idx="3">
+            <a:schemeClr val="accent1"/>
+          </a:fillRef>
+          <a:effectRef idx="2">
+            <a:schemeClr val="accent1"/>
+          </a:effectRef>
+          <a:fontRef idx="minor">
+            <a:schemeClr val="lt1"/>
+          </a:fontRef>
+        </p:style>
+        <p:txBody>
+          <a:bodyPr rtlCol="0" anchor="ctr"/>
+          <a:lstStyle/>
+          <a:p>
+            <a:pPr algn="ctr"/>
+          </a:p>
+        </p:txBody>
+      </p:sp>
+      <p:sp>
+        <p:nvSpPr>
+          <p:cNvPr id="16" name="TextBox 15"/>
+          <p:cNvSpPr txBox="1"/>
+          <p:nvPr/>
+        </p:nvSpPr>
+        <p:spPr>
+          <a:xfrm>
+            <a:off x="5278636" y="2374553"/>
+            <a:ext cx="342900" cy="342900"/>
+          </a:xfrm>
+          <a:prstGeom prst="rect">
+            <a:avLst/>
+          </a:prstGeom>
+          <a:solidFill>
+            <a:srgbClr val="F472B6"/>
+          </a:solidFill>
+          <a:effectLst>
+            <a:outerShdw blurRad="0" dist="0" dir="0" algn="ctr" rotWithShape="0">
+              <a:srgbClr val="070710"/>
+            </a:outerShdw>
+          </a:effectLst>
+        </p:spPr>
+        <p:txBody>
+          <a:bodyPr wrap="square" lIns="0" rIns="0" tIns="0" bIns="0">
+            <a:spAutoFit/>
+          </a:bodyPr>
+          <a:lstStyle/>
+          <a:p>
+            <a:pPr algn="l"/>
+            <a:r>
+              <a:rPr sz="1050" b="1" i="0" u="none">
+                <a:solidFill>
+                  <a:srgbClr val="0A0A0F"/>
+                </a:solidFill>
+                <a:latin typeface="Inter"/>
+              </a:rPr>
+              <a:t>03</a:t>
+            </a:r>
+          </a:p>
+        </p:txBody>
+      </p:sp>
+      <p:sp>
+        <p:nvSpPr>
+          <p:cNvPr id="17" name="TextBox 16"/>
+          <p:cNvSpPr txBox="1"/>
+          <p:nvPr/>
+        </p:nvSpPr>
+        <p:spPr>
+          <a:xfrm>
+            <a:off x="5278636" y="2850803"/>
+            <a:ext cx="1634579" cy="200025"/>
+          </a:xfrm>
+          <a:prstGeom prst="rect">
+            <a:avLst/>
+          </a:prstGeom>
+          <a:noFill/>
+        </p:spPr>
+        <p:txBody>
+          <a:bodyPr wrap="square" lIns="0" rIns="0" tIns="0" bIns="0">
+            <a:spAutoFit/>
+          </a:bodyPr>
+          <a:lstStyle/>
+          <a:p>
+            <a:pPr algn="l"/>
+            <a:r>
+              <a:rPr sz="1350" b="1" i="0" u="none">
+                <a:solidFill>
+                  <a:srgbClr val="F5F5F7"/>
+                </a:solidFill>
+                <a:latin typeface="Inter"/>
+              </a:rPr>
+              <a:t>Classify</a:t>
+            </a:r>
+          </a:p>
+        </p:txBody>
+      </p:sp>
+      <p:sp>
+        <p:nvSpPr>
+          <p:cNvPr id="18" name="TextBox 17"/>
+          <p:cNvSpPr txBox="1"/>
+          <p:nvPr/>
+        </p:nvSpPr>
+        <p:spPr>
+          <a:xfrm>
+            <a:off x="5278636" y="3107978"/>
+            <a:ext cx="1634579" cy="531316"/>
+          </a:xfrm>
+          <a:prstGeom prst="rect">
+            <a:avLst/>
+          </a:prstGeom>
+          <a:noFill/>
+        </p:spPr>
+        <p:txBody>
+          <a:bodyPr wrap="square" lIns="0" rIns="0" tIns="0" bIns="0">
+            <a:spAutoFit/>
+          </a:bodyPr>
+          <a:lstStyle/>
+          <a:p>
+            <a:pPr algn="l"/>
+            <a:r>
+              <a:rPr sz="900" b="0" i="0" u="none">
+                <a:solidFill>
+                  <a:srgbClr val="A1A1AA"/>
+                </a:solidFill>
+                <a:latin typeface="Inter"/>
+              </a:rPr>
+              <a:t>Tier 0 patterns → Tier 1 rules → Tier 2 heuristics → Tier 3 vision LLM.</a:t>
+            </a:r>
+          </a:p>
+        </p:txBody>
+      </p:sp>
+      <p:sp>
+        <p:nvSpPr>
+          <p:cNvPr id="19" name="TextBox 18"/>
+          <p:cNvSpPr txBox="1"/>
+          <p:nvPr/>
+        </p:nvSpPr>
+        <p:spPr>
+          <a:xfrm>
+            <a:off x="5278636" y="3772644"/>
+            <a:ext cx="1634579" cy="114300"/>
+          </a:xfrm>
+          <a:prstGeom prst="rect">
+            <a:avLst/>
+          </a:prstGeom>
+          <a:noFill/>
+        </p:spPr>
+        <p:txBody>
+          <a:bodyPr wrap="square" lIns="0" rIns="0" tIns="0" bIns="0">
+            <a:spAutoFit/>
+          </a:bodyPr>
+          <a:lstStyle/>
+          <a:p>
+            <a:pPr algn="l"/>
+            <a:r>
+              <a:rPr sz="800" b="1" i="0" u="none">
+                <a:solidFill>
+                  <a:srgbClr val="52525B"/>
+                </a:solidFill>
+                <a:latin typeface="Inter"/>
+              </a:rPr>
+              <a:t>FOUR TIERS</a:t>
+            </a:r>
+          </a:p>
+        </p:txBody>
+      </p:sp>
+      <p:sp>
+        <p:nvSpPr>
+          <p:cNvPr id="20" name="Rounded Rectangle 19"/>
+          <p:cNvSpPr/>
+          <p:nvPr/>
+        </p:nvSpPr>
+        <p:spPr>
+          <a:xfrm>
+            <a:off x="7265640" y="2155478"/>
+            <a:ext cx="1996380" cy="1950541"/>
+          </a:xfrm>
+          <a:prstGeom prst="roundRect">
+            <a:avLst/>
+          </a:prstGeom>
+          <a:solidFill>
+            <a:srgbClr val="FFFFFF"/>
+          </a:solidFill>
+          <a:ln w="9525">
+            <a:solidFill>
+              <a:srgbClr val="FFFFFF"/>
+            </a:solidFill>
+          </a:ln>
+          <a:effectLst>
+            <a:outerShdw blurRad="342900" dist="114300" dir="5400000" algn="ctr" rotWithShape="0">
+              <a:srgbClr val="6366F1">
+                <a:alpha val="6000"/>
+              </a:srgbClr>
+            </a:outerShdw>
+          </a:effectLst>
+        </p:spPr>
+        <p:style>
+          <a:lnRef idx="1">
+            <a:schemeClr val="accent1"/>
+          </a:lnRef>
+          <a:fillRef idx="3">
+            <a:schemeClr val="accent1"/>
+          </a:fillRef>
+          <a:effectRef idx="2">
+            <a:schemeClr val="accent1"/>
+          </a:effectRef>
+          <a:fontRef idx="minor">
+            <a:schemeClr val="lt1"/>
+          </a:fontRef>
+        </p:style>
+        <p:txBody>
+          <a:bodyPr rtlCol="0" anchor="ctr"/>
+          <a:lstStyle/>
+          <a:p>
+            <a:pPr algn="ctr"/>
+          </a:p>
+        </p:txBody>
+      </p:sp>
+      <p:sp>
+        <p:nvSpPr>
+          <p:cNvPr id="21" name="TextBox 20"/>
+          <p:cNvSpPr txBox="1"/>
+          <p:nvPr/>
+        </p:nvSpPr>
+        <p:spPr>
+          <a:xfrm>
+            <a:off x="7446615" y="2374553"/>
+            <a:ext cx="342900" cy="342900"/>
+          </a:xfrm>
+          <a:prstGeom prst="rect">
+            <a:avLst/>
+          </a:prstGeom>
+          <a:solidFill>
+            <a:srgbClr val="FB923C"/>
+          </a:solidFill>
+          <a:effectLst>
+            <a:outerShdw blurRad="0" dist="0" dir="0" algn="ctr" rotWithShape="0">
+              <a:srgbClr val="070710"/>
+            </a:outerShdw>
+          </a:effectLst>
+        </p:spPr>
+        <p:txBody>
+          <a:bodyPr wrap="square" lIns="0" rIns="0" tIns="0" bIns="0">
+            <a:spAutoFit/>
+          </a:bodyPr>
+          <a:lstStyle/>
+          <a:p>
+            <a:pPr algn="l"/>
+            <a:r>
+              <a:rPr sz="1050" b="1" i="0" u="none">
+                <a:solidFill>
+                  <a:srgbClr val="0A0A0F"/>
+                </a:solidFill>
+                <a:latin typeface="Inter"/>
+              </a:rPr>
+              <a:t>04</a:t>
+            </a:r>
+          </a:p>
+        </p:txBody>
+      </p:sp>
+      <p:sp>
+        <p:nvSpPr>
+          <p:cNvPr id="22" name="TextBox 21"/>
+          <p:cNvSpPr txBox="1"/>
+          <p:nvPr/>
+        </p:nvSpPr>
+        <p:spPr>
+          <a:xfrm>
+            <a:off x="7446615" y="2850803"/>
+            <a:ext cx="1634430" cy="200025"/>
+          </a:xfrm>
+          <a:prstGeom prst="rect">
+            <a:avLst/>
+          </a:prstGeom>
+          <a:noFill/>
+        </p:spPr>
+        <p:txBody>
+          <a:bodyPr wrap="square" lIns="0" rIns="0" tIns="0" bIns="0">
+            <a:spAutoFit/>
+          </a:bodyPr>
+          <a:lstStyle/>
+          <a:p>
+            <a:pPr algn="l"/>
+            <a:r>
+              <a:rPr sz="1350" b="1" i="0" u="none">
+                <a:solidFill>
+                  <a:srgbClr val="F5F5F7"/>
+                </a:solidFill>
+                <a:latin typeface="Inter"/>
+              </a:rPr>
+              <a:t>Emit</a:t>
+            </a:r>
+          </a:p>
+        </p:txBody>
+      </p:sp>
+      <p:sp>
+        <p:nvSpPr>
+          <p:cNvPr id="23" name="TextBox 22"/>
+          <p:cNvSpPr txBox="1"/>
+          <p:nvPr/>
+        </p:nvSpPr>
+        <p:spPr>
+          <a:xfrm>
+            <a:off x="7446615" y="3107978"/>
+            <a:ext cx="1634430" cy="531316"/>
+          </a:xfrm>
+          <a:prstGeom prst="rect">
+            <a:avLst/>
+          </a:prstGeom>
+          <a:noFill/>
+        </p:spPr>
+        <p:txBody>
+          <a:bodyPr wrap="square" lIns="0" rIns="0" tIns="0" bIns="0">
+            <a:spAutoFit/>
+          </a:bodyPr>
+          <a:lstStyle/>
+          <a:p>
+            <a:pPr algn="l"/>
+            <a:r>
+              <a:rPr sz="900" b="0" i="0" u="none">
+                <a:solidFill>
+                  <a:srgbClr val="A1A1AA"/>
+                </a:solidFill>
+                <a:latin typeface="Inter"/>
+              </a:rPr>
+              <a:t>python-pptx writes native text, shapes, gradients, shadows with EMU precision.</a:t>
+            </a:r>
+          </a:p>
+        </p:txBody>
+      </p:sp>
+      <p:sp>
+        <p:nvSpPr>
+          <p:cNvPr id="24" name="TextBox 23"/>
+          <p:cNvSpPr txBox="1"/>
+          <p:nvPr/>
+        </p:nvSpPr>
+        <p:spPr>
+          <a:xfrm>
+            <a:off x="7446615" y="3772644"/>
+            <a:ext cx="1634430" cy="114300"/>
+          </a:xfrm>
+          <a:prstGeom prst="rect">
+            <a:avLst/>
+          </a:prstGeom>
+          <a:noFill/>
+        </p:spPr>
+        <p:txBody>
+          <a:bodyPr wrap="square" lIns="0" rIns="0" tIns="0" bIns="0">
+            <a:spAutoFit/>
+          </a:bodyPr>
+          <a:lstStyle/>
+          <a:p>
+            <a:pPr algn="l"/>
+            <a:r>
+              <a:rPr sz="800" b="1" i="0" u="none">
+                <a:solidFill>
+                  <a:srgbClr val="52525B"/>
+                </a:solidFill>
+                <a:latin typeface="Inter"/>
+              </a:rPr>
+              <a:t>OOXML</a:t>
+            </a:r>
+          </a:p>
+        </p:txBody>
+      </p:sp>
+      <p:sp>
+        <p:nvSpPr>
+          <p:cNvPr id="25" name="Rounded Rectangle 24"/>
+          <p:cNvSpPr/>
+          <p:nvPr/>
+        </p:nvSpPr>
+        <p:spPr>
+          <a:xfrm>
+            <a:off x="9433471" y="2155478"/>
+            <a:ext cx="1996529" cy="1950541"/>
+          </a:xfrm>
+          <a:prstGeom prst="roundRect">
+            <a:avLst/>
+          </a:prstGeom>
+          <a:solidFill>
+            <a:srgbClr val="FFFFFF"/>
+          </a:solidFill>
+          <a:ln w="9525">
+            <a:solidFill>
+              <a:srgbClr val="FFFFFF"/>
+            </a:solidFill>
+          </a:ln>
+          <a:effectLst>
+            <a:outerShdw blurRad="342900" dist="114300" dir="5400000" algn="ctr" rotWithShape="0">
+              <a:srgbClr val="6366F1">
+                <a:alpha val="6000"/>
+              </a:srgbClr>
+            </a:outerShdw>
+          </a:effectLst>
+        </p:spPr>
+        <p:style>
+          <a:lnRef idx="1">
+            <a:schemeClr val="accent1"/>
+          </a:lnRef>
+          <a:fillRef idx="3">
+            <a:schemeClr val="accent1"/>
+          </a:fillRef>
+          <a:effectRef idx="2">
+            <a:schemeClr val="accent1"/>
+          </a:effectRef>
+          <a:fontRef idx="minor">
+            <a:schemeClr val="lt1"/>
+          </a:fontRef>
+        </p:style>
+        <p:txBody>
+          <a:bodyPr rtlCol="0" anchor="ctr"/>
+          <a:lstStyle/>
+          <a:p>
+            <a:pPr algn="ctr"/>
+          </a:p>
+        </p:txBody>
+      </p:sp>
+      <p:sp>
+        <p:nvSpPr>
+          <p:cNvPr id="26" name="TextBox 25"/>
+          <p:cNvSpPr txBox="1"/>
+          <p:nvPr/>
+        </p:nvSpPr>
+        <p:spPr>
+          <a:xfrm>
+            <a:off x="9614446" y="2374553"/>
+            <a:ext cx="342900" cy="342900"/>
+          </a:xfrm>
+          <a:prstGeom prst="rect">
+            <a:avLst/>
+          </a:prstGeom>
+          <a:solidFill>
+            <a:srgbClr val="FACC15"/>
+          </a:solidFill>
+          <a:effectLst>
+            <a:outerShdw blurRad="0" dist="0" dir="0" algn="ctr" rotWithShape="0">
+              <a:srgbClr val="070710"/>
+            </a:outerShdw>
+          </a:effectLst>
+        </p:spPr>
+        <p:txBody>
+          <a:bodyPr wrap="square" lIns="0" rIns="0" tIns="0" bIns="0">
+            <a:spAutoFit/>
+          </a:bodyPr>
+          <a:lstStyle/>
+          <a:p>
+            <a:pPr algn="l"/>
+            <a:r>
+              <a:rPr sz="1050" b="1" i="0" u="none">
+                <a:solidFill>
+                  <a:srgbClr val="0A0A0F"/>
+                </a:solidFill>
+                <a:latin typeface="Inter"/>
+              </a:rPr>
+              <a:t>05</a:t>
+            </a:r>
+          </a:p>
+        </p:txBody>
+      </p:sp>
+      <p:sp>
+        <p:nvSpPr>
+          <p:cNvPr id="27" name="TextBox 26"/>
+          <p:cNvSpPr txBox="1"/>
+          <p:nvPr/>
+        </p:nvSpPr>
+        <p:spPr>
+          <a:xfrm>
+            <a:off x="9614446" y="2850803"/>
+            <a:ext cx="1634579" cy="200025"/>
+          </a:xfrm>
+          <a:prstGeom prst="rect">
+            <a:avLst/>
+          </a:prstGeom>
+          <a:noFill/>
+        </p:spPr>
+        <p:txBody>
+          <a:bodyPr wrap="square" lIns="0" rIns="0" tIns="0" bIns="0">
+            <a:spAutoFit/>
+          </a:bodyPr>
+          <a:lstStyle/>
+          <a:p>
+            <a:pPr algn="l"/>
+            <a:r>
+              <a:rPr sz="1350" b="1" i="0" u="none">
+                <a:solidFill>
+                  <a:srgbClr val="F5F5F7"/>
+                </a:solidFill>
+                <a:latin typeface="Inter"/>
+              </a:rPr>
+              <a:t>Validate</a:t>
+            </a:r>
+          </a:p>
+        </p:txBody>
+      </p:sp>
+      <p:sp>
+        <p:nvSpPr>
+          <p:cNvPr id="28" name="TextBox 27"/>
+          <p:cNvSpPr txBox="1"/>
+          <p:nvPr/>
+        </p:nvSpPr>
+        <p:spPr>
+          <a:xfrm>
+            <a:off x="9614446" y="3107978"/>
+            <a:ext cx="1634579" cy="531316"/>
+          </a:xfrm>
+          <a:prstGeom prst="rect">
+            <a:avLst/>
+          </a:prstGeom>
+          <a:noFill/>
+        </p:spPr>
+        <p:txBody>
+          <a:bodyPr wrap="square" lIns="0" rIns="0" tIns="0" bIns="0">
+            <a:spAutoFit/>
+          </a:bodyPr>
+          <a:lstStyle/>
+          <a:p>
+            <a:pPr algn="l"/>
+            <a:r>
+              <a:rPr sz="900" b="0" i="0" u="none">
+                <a:solidFill>
+                  <a:srgbClr val="A1A1AA"/>
+                </a:solidFill>
+                <a:latin typeface="Inter"/>
+              </a:rPr>
+              <a:t>LibreOffice re-renders. SSIM + OCR oracle. Auto-correct failing regions.</a:t>
+            </a:r>
+          </a:p>
+        </p:txBody>
+      </p:sp>
+      <p:sp>
+        <p:nvSpPr>
+          <p:cNvPr id="29" name="TextBox 28"/>
+          <p:cNvSpPr txBox="1"/>
+          <p:nvPr/>
+        </p:nvSpPr>
+        <p:spPr>
+          <a:xfrm>
+            <a:off x="9614446" y="3772644"/>
+            <a:ext cx="1634579" cy="114300"/>
+          </a:xfrm>
+          <a:prstGeom prst="rect">
+            <a:avLst/>
+          </a:prstGeom>
+          <a:noFill/>
+        </p:spPr>
+        <p:txBody>
+          <a:bodyPr wrap="square" lIns="0" rIns="0" tIns="0" bIns="0">
+            <a:spAutoFit/>
+          </a:bodyPr>
+          <a:lstStyle/>
+          <a:p>
+            <a:pPr algn="l"/>
+            <a:r>
+              <a:rPr sz="800" b="1" i="0" u="none">
+                <a:solidFill>
+                  <a:srgbClr val="52525B"/>
+                </a:solidFill>
+                <a:latin typeface="Inter"/>
+              </a:rPr>
+              <a:t>SSIM ≥ 0.95</a:t>
+            </a:r>
+          </a:p>
+        </p:txBody>
+      </p:sp>
+      <p:sp>
+        <p:nvSpPr>
+          <p:cNvPr id="30" name="Rounded Rectangle 29"/>
+          <p:cNvSpPr/>
+          <p:nvPr/>
+        </p:nvSpPr>
+        <p:spPr>
+          <a:gradFill flip="none" rotWithShape="1">
+            <a:gsLst>
+              <a:gs pos="0">
+                <a:srgbClr val="6366F1">
+                  <a:alpha val="14000"/>
+                </a:srgbClr>
+              </a:gs>
+              <a:gs pos="100000">
+                <a:srgbClr val="EC4899">
+                  <a:alpha val="10000"/>
+                </a:srgbClr>
+              </a:gs>
+            </a:gsLst>
+            <a:lin ang="2700000" scaled="0"/>
+          </a:gradFill>
+          <a:xfrm>
+            <a:off x="762000" y="4448919"/>
+            <a:ext cx="10668000" cy="965597"/>
+          </a:xfrm>
+          <a:prstGeom prst="roundRect">
+            <a:avLst/>
+          </a:prstGeom>
+          <a:ln w="9525">
+            <a:solidFill>
+              <a:srgbClr val="A78BFA"/>
+            </a:solidFill>
+          </a:ln>
+          <a:effectLst>
+            <a:outerShdw blurRad="571500" dist="228600" dir="5400000" algn="ctr" rotWithShape="0">
+              <a:srgbClr val="8B5CF6">
+                <a:alpha val="10000"/>
+              </a:srgbClr>
+            </a:outerShdw>
+          </a:effectLst>
+        </p:spPr>
+        <p:style>
+          <a:lnRef idx="1">
+            <a:schemeClr val="accent1"/>
+          </a:lnRef>
+          <a:fillRef idx="3">
+            <a:schemeClr val="accent1"/>
+          </a:fillRef>
+          <a:effectRef idx="2">
+            <a:schemeClr val="accent1"/>
+          </a:effectRef>
+          <a:fontRef idx="minor">
+            <a:schemeClr val="lt1"/>
+          </a:fontRef>
+        </p:style>
+        <p:txBody>
+          <a:bodyPr rtlCol="0" anchor="ctr"/>
+          <a:lstStyle/>
+          <a:p>
+            <a:pPr algn="ctr"/>
+          </a:p>
+        </p:txBody>
+      </p:sp>
+      <p:sp>
+        <p:nvSpPr>
+          <p:cNvPr id="31" name="TextBox 30"/>
+          <p:cNvSpPr txBox="1"/>
+          <p:nvPr/>
+        </p:nvSpPr>
+        <p:spPr>
+          <a:xfrm>
+            <a:off x="1114425" y="4831705"/>
+            <a:ext cx="3068836" cy="200025"/>
+          </a:xfrm>
+          <a:prstGeom prst="rect">
+            <a:avLst/>
+          </a:prstGeom>
+          <a:noFill/>
+        </p:spPr>
+        <p:txBody>
+          <a:bodyPr wrap="square" lIns="0" rIns="0" tIns="0" bIns="0">
+            <a:spAutoFit/>
+          </a:bodyPr>
+          <a:lstStyle/>
+          <a:p>
+            <a:pPr algn="l"/>
+            <a:r>
+              <a:rPr sz="1350" b="1" i="0" u="none">
+                <a:solidFill>
+                  <a:srgbClr val="F5F5F7"/>
+                </a:solidFill>
+                <a:latin typeface="Inter"/>
+              </a:rPr>
+              <a:t>Total budget · </a:t>
+            </a:r>
+            <a:r>
+              <a:rPr sz="1350" b="1" i="0" u="none">
+                <a:solidFill>
+                  <a:srgbClr val="A78BFA"/>
+                </a:solidFill>
+                <a:latin typeface="Inter"/>
+              </a:rPr>
+              <a:t>23 s</a:t>
+            </a:r>
+            <a:r>
+              <a:rPr sz="1350" b="1" i="0" u="none">
+                <a:solidFill>
+                  <a:srgbClr val="F5F5F7"/>
+                </a:solidFill>
+                <a:latin typeface="Inter"/>
+              </a:rPr>
+              <a:t> for a 10-slide deck</a:t>
+            </a:r>
+          </a:p>
+        </p:txBody>
+      </p:sp>
+      <p:sp>
+        <p:nvSpPr>
+          <p:cNvPr id="32" name="TextBox 31"/>
+          <p:cNvSpPr txBox="1"/>
+          <p:nvPr/>
+        </p:nvSpPr>
+        <p:spPr>
+          <a:xfrm>
+            <a:off x="5362575" y="4725144"/>
+            <a:ext cx="5715000" cy="413147"/>
+          </a:xfrm>
+          <a:prstGeom prst="rect">
+            <a:avLst/>
+          </a:prstGeom>
+          <a:noFill/>
+        </p:spPr>
+        <p:txBody>
+          <a:bodyPr wrap="square" lIns="0" rIns="0" tIns="0" bIns="0">
+            <a:spAutoFit/>
+          </a:bodyPr>
+          <a:lstStyle/>
+          <a:p>
+            <a:pPr algn="l"/>
+            <a:r>
+              <a:rPr sz="1050" b="0" i="0" u="none">
+                <a:solidFill>
+                  <a:srgbClr val="A1A1AA"/>
+                </a:solidFill>
+                <a:latin typeface="Inter"/>
+              </a:rPr>
+              <a:t>Bottleneck is render parallelism (Chart.js init). Tier-3 LLM is batched once per slide; cost ≤ $0.10 / deck on default settings.</a:t>
+            </a:r>
+          </a:p>
+        </p:txBody>
+      </p:sp>
+      <p:sp>
+        <p:nvSpPr>
+          <p:cNvPr id="33" name="TextBox 32"/>
+          <p:cNvSpPr txBox="1"/>
+          <p:nvPr/>
+        </p:nvSpPr>
+        <p:spPr>
+          <a:xfrm>
+            <a:off x="762000" y="6477000"/>
+            <a:ext cx="1411635" cy="152400"/>
+          </a:xfrm>
+          <a:prstGeom prst="rect">
+            <a:avLst/>
+          </a:prstGeom>
+          <a:noFill/>
+        </p:spPr>
+        <p:txBody>
+          <a:bodyPr wrap="square" lIns="0" rIns="0" tIns="0" bIns="0">
+            <a:spAutoFit/>
+          </a:bodyPr>
+          <a:lstStyle/>
+          <a:p>
+            <a:pPr algn="l"/>
+            <a:r>
+              <a:rPr sz="975" b="1" i="0" u="none">
+                <a:solidFill>
+                  <a:srgbClr val="52525B"/>
+                </a:solidFill>
+                <a:latin typeface="Inter"/>
+              </a:rPr>
+              <a:t>PIXELPITCH LABS</a:t>
+            </a:r>
+          </a:p>
+        </p:txBody>
+      </p:sp>
+      <p:sp>
+        <p:nvSpPr>
+          <p:cNvPr id="34" name="TextBox 33"/>
+          <p:cNvSpPr txBox="1"/>
+          <p:nvPr/>
+        </p:nvSpPr>
+        <p:spPr>
+          <a:xfrm>
+            <a:off x="10884545" y="6477000"/>
+            <a:ext cx="545455" cy="152400"/>
+          </a:xfrm>
+          <a:prstGeom prst="rect">
+            <a:avLst/>
+          </a:prstGeom>
+          <a:noFill/>
+        </p:spPr>
+        <p:txBody>
+          <a:bodyPr wrap="square" lIns="0" rIns="0" tIns="0" bIns="0">
+            <a:spAutoFit/>
+          </a:bodyPr>
+          <a:lstStyle/>
+          <a:p>
+            <a:pPr algn="l"/>
+            <a:r>
+              <a:rPr sz="975" b="1" i="0" u="none">
+                <a:solidFill>
+                  <a:srgbClr val="52525B"/>
+                </a:solidFill>
+                <a:latin typeface="Inter"/>
+              </a:rPr>
+              <a:t>07 / 12</a:t>
+            </a:r>
+          </a:p>
+        </p:txBody>
+      </p:sp>
+    </p:spTree>
+  </p:cSld>
+  <p:clrMapOvr>
+    <a:masterClrMapping/>
+  </p:clrMapOvr>
+</p:sld>
+</file>
+
+<file path=ppt/slides/slide8.xml><?xml version="1.0" encoding="utf-8"?>
+<p:sld xmlns:a="http://schemas.openxmlformats.org/drawingml/2006/main" xmlns:p="http://schemas.openxmlformats.org/presentationml/2006/main" xmlns:r="http://schemas.openxmlformats.org/officeDocument/2006/relationships">
+  <p:cSld>
+    <p:spTree>
+      <p:nvGrpSpPr>
+        <p:cNvPr id="1" name=""/>
+        <p:cNvGrpSpPr/>
+        <p:nvPr/>
+      </p:nvGrpSpPr>
+      <p:grpSpPr/>
+      <p:sp>
+        <p:nvSpPr>
+          <p:cNvPr id="2" name="Rectangle 1"/>
+          <p:cNvSpPr/>
+          <p:nvPr/>
+        </p:nvSpPr>
+        <p:spPr>
+          <a:xfrm>
+            <a:off x="0" y="0"/>
+            <a:ext cx="12192000" cy="6858000"/>
+          </a:xfrm>
+          <a:prstGeom prst="rect">
+            <a:avLst/>
+          </a:prstGeom>
+          <a:noFill/>
+          <a:ln>
+            <a:noFill/>
+          </a:ln>
+        </p:spPr>
+        <p:style>
+          <a:lnRef idx="1">
+            <a:schemeClr val="accent1"/>
+          </a:lnRef>
+          <a:fillRef idx="3">
+            <a:schemeClr val="accent1"/>
+          </a:fillRef>
+          <a:effectRef idx="2">
+            <a:schemeClr val="accent1"/>
+          </a:effectRef>
+          <a:fontRef idx="minor">
+            <a:schemeClr val="lt1"/>
+          </a:fontRef>
+        </p:style>
+        <p:txBody>
+          <a:bodyPr rtlCol="0" anchor="ctr"/>
+          <a:lstStyle/>
+          <a:p>
+            <a:pPr algn="ctr"/>
+          </a:p>
+        </p:txBody>
+      </p:sp>
+      <p:sp>
+        <p:nvSpPr>
+          <p:cNvPr id="3" name="Rectangle 2"/>
+          <p:cNvSpPr/>
+          <p:nvPr/>
+        </p:nvSpPr>
+        <p:spPr>
+          <a:gradFill flip="none" rotWithShape="1">
+            <a:gsLst>
+              <a:gs pos="0">
+                <a:srgbClr val="4338CA"/>
+              </a:gs>
+              <a:gs pos="35000">
+                <a:srgbClr val="7C3AED"/>
+              </a:gs>
+              <a:gs pos="80000">
+                <a:srgbClr val="DB2777"/>
+              </a:gs>
+            </a:gsLst>
+            <a:lin ang="2700000" scaled="0"/>
+          </a:gradFill>
+          <a:xfrm>
+            <a:off x="0" y="0"/>
+            <a:ext cx="12192000" cy="6858000"/>
+          </a:xfrm>
+          <a:prstGeom prst="rect">
+            <a:avLst/>
+          </a:prstGeom>
+          <a:ln>
+            <a:noFill/>
+          </a:ln>
+        </p:spPr>
+        <p:style>
+          <a:lnRef idx="1">
+            <a:schemeClr val="accent1"/>
+          </a:lnRef>
+          <a:fillRef idx="3">
+            <a:schemeClr val="accent1"/>
+          </a:fillRef>
+          <a:effectRef idx="2">
+            <a:schemeClr val="accent1"/>
+          </a:effectRef>
+          <a:fontRef idx="minor">
+            <a:schemeClr val="lt1"/>
+          </a:fontRef>
+        </p:style>
+        <p:txBody>
+          <a:bodyPr rtlCol="0" anchor="ctr"/>
+          <a:lstStyle/>
+          <a:p>
+            <a:pPr algn="ctr"/>
+          </a:p>
+        </p:txBody>
+      </p:sp>
+      <p:sp>
+        <p:nvSpPr>
+          <p:cNvPr id="4" name="Rectangle 3"/>
+          <p:cNvSpPr/>
+          <p:nvPr/>
+        </p:nvSpPr>
+        <p:spPr>
+          <a:xfrm>
+            <a:off x="0" y="0"/>
+            <a:ext cx="12192000" cy="6858000"/>
+          </a:xfrm>
+          <a:prstGeom prst="rect">
+            <a:avLst/>
+          </a:prstGeom>
+          <a:noFill/>
+          <a:ln>
+            <a:noFill/>
+          </a:ln>
+        </p:spPr>
+        <p:style>
+          <a:lnRef idx="1">
+            <a:schemeClr val="accent1"/>
+          </a:lnRef>
+          <a:fillRef idx="3">
+            <a:schemeClr val="accent1"/>
+          </a:fillRef>
+          <a:effectRef idx="2">
+            <a:schemeClr val="accent1"/>
+          </a:effectRef>
+          <a:fontRef idx="minor">
+            <a:schemeClr val="lt1"/>
+          </a:fontRef>
+        </p:style>
+        <p:txBody>
+          <a:bodyPr rtlCol="0" anchor="ctr"/>
+          <a:lstStyle/>
+          <a:p>
+            <a:pPr algn="ctr"/>
+          </a:p>
+        </p:txBody>
+      </p:sp>
+      <p:sp>
+        <p:nvSpPr>
+          <p:cNvPr id="5" name="TextBox 4"/>
+          <p:cNvSpPr txBox="1"/>
+          <p:nvPr/>
+        </p:nvSpPr>
+        <p:spPr>
+          <a:xfrm>
+            <a:off x="1047750" y="1318617"/>
+            <a:ext cx="8191500" cy="762000"/>
+          </a:xfrm>
+          <a:prstGeom prst="rect">
+            <a:avLst/>
+          </a:prstGeom>
+          <a:noFill/>
+        </p:spPr>
+        <p:txBody>
+          <a:bodyPr wrap="square" lIns="0" rIns="0" tIns="0" bIns="0">
+            <a:spAutoFit/>
+          </a:bodyPr>
+          <a:lstStyle/>
+          <a:p>
+            <a:pPr algn="l"/>
+            <a:r>
+              <a:rPr sz="12000" b="1" i="0" u="none">
+                <a:solidFill>
+                  <a:srgbClr val="FFFFFF"/>
+                </a:solidFill>
+                <a:latin typeface="Inter"/>
+              </a:rPr>
+              <a:t>"</a:t>
+            </a:r>
+          </a:p>
+        </p:txBody>
+      </p:sp>
+      <p:sp>
+        <p:nvSpPr>
+          <p:cNvPr id="6" name="TextBox 5"/>
+          <p:cNvSpPr txBox="1"/>
+          <p:nvPr/>
+        </p:nvSpPr>
+        <p:spPr>
+          <a:xfrm>
+            <a:off x="1047750" y="1813917"/>
+            <a:ext cx="8191500" cy="2696766"/>
+          </a:xfrm>
+          <a:prstGeom prst="rect">
+            <a:avLst/>
+          </a:prstGeom>
+          <a:noFill/>
+        </p:spPr>
+        <p:txBody>
+          <a:bodyPr wrap="square" lIns="0" rIns="0" tIns="0" bIns="0">
+            <a:spAutoFit/>
+          </a:bodyPr>
+          <a:lstStyle/>
+          <a:p>
+            <a:pPr algn="l"/>
+            <a:r>
+              <a:rPr sz="3600" b="1" i="0" u="none">
+                <a:solidFill>
+                  <a:srgbClr val="FFFFFF"/>
+                </a:solidFill>
+                <a:latin typeface="Inter"/>
+              </a:rPr>
+              <a:t>Rasterization is the failure mode, </a:t>
+            </a:r>
+            <a:r>
+              <a:rPr sz="3600" b="1" i="0" u="none">
+                <a:latin typeface="Inter"/>
+              </a:rPr>
+              <a:t>not the goal</a:t>
+            </a:r>
+            <a:r>
+              <a:rPr sz="3600" b="1" i="0" u="none">
+                <a:solidFill>
+                  <a:srgbClr val="FFFFFF"/>
+                </a:solidFill>
+                <a:latin typeface="Inter"/>
+              </a:rPr>
+              <a:t>. Every pixel that stays editable compounds across every translation, every theme swap, every revision.</a:t>
+            </a:r>
+          </a:p>
+        </p:txBody>
+      </p:sp>
+      <p:sp>
+        <p:nvSpPr>
+          <p:cNvPr id="7" name="TextBox 6"/>
+          <p:cNvSpPr txBox="1"/>
+          <p:nvPr/>
+        </p:nvSpPr>
+        <p:spPr>
+          <a:gradFill flip="none" rotWithShape="1">
+            <a:gsLst>
+              <a:gs pos="0">
+                <a:srgbClr val="FDE68A"/>
+              </a:gs>
+              <a:gs pos="70000">
+                <a:srgbClr val="F472B6"/>
+              </a:gs>
+            </a:gsLst>
+            <a:lin ang="2700000" scaled="0"/>
+          </a:gradFill>
+          <a:xfrm>
+            <a:off x="1047750" y="4967883"/>
+            <a:ext cx="571500" cy="571500"/>
+          </a:xfrm>
+          <a:prstGeom prst="rect">
+            <a:avLst/>
+          </a:prstGeom>
+        </p:spPr>
+        <p:txBody>
+          <a:bodyPr wrap="square" lIns="0" rIns="0" tIns="0" bIns="0">
+            <a:spAutoFit/>
+          </a:bodyPr>
+          <a:lstStyle/>
+          <a:p>
+            <a:pPr algn="l"/>
+            <a:r>
+              <a:rPr sz="1650" b="1" i="0" u="none">
+                <a:solidFill>
+                  <a:srgbClr val="831843"/>
+                </a:solidFill>
+                <a:latin typeface="Inter"/>
+              </a:rPr>
+              <a:t>VR</a:t>
+            </a:r>
+          </a:p>
+        </p:txBody>
+      </p:sp>
+      <p:sp>
+        <p:nvSpPr>
+          <p:cNvPr id="8" name="TextBox 7"/>
+          <p:cNvSpPr txBox="1"/>
+          <p:nvPr/>
+        </p:nvSpPr>
+        <p:spPr>
+          <a:xfrm>
+            <a:off x="1790700" y="5063133"/>
+            <a:ext cx="1732062" cy="200025"/>
+          </a:xfrm>
+          <a:prstGeom prst="rect">
+            <a:avLst/>
+          </a:prstGeom>
+          <a:noFill/>
+        </p:spPr>
+        <p:txBody>
+          <a:bodyPr wrap="square" lIns="0" rIns="0" tIns="0" bIns="0">
+            <a:spAutoFit/>
+          </a:bodyPr>
+          <a:lstStyle/>
+          <a:p>
+            <a:pPr algn="l"/>
+            <a:r>
+              <a:rPr sz="1350" b="1" i="0" u="none">
+                <a:solidFill>
+                  <a:srgbClr val="FFFFFF"/>
+                </a:solidFill>
+                <a:latin typeface="Inter"/>
+              </a:rPr>
+              <a:t>Vamsi Ramakrishnan</a:t>
+            </a:r>
+          </a:p>
+        </p:txBody>
+      </p:sp>
+      <p:sp>
+        <p:nvSpPr>
+          <p:cNvPr id="9" name="TextBox 8"/>
+          <p:cNvSpPr txBox="1"/>
+          <p:nvPr/>
+        </p:nvSpPr>
+        <p:spPr>
+          <a:xfrm>
+            <a:off x="1790700" y="5282208"/>
+            <a:ext cx="1732062" cy="161925"/>
+          </a:xfrm>
+          <a:prstGeom prst="rect">
+            <a:avLst/>
+          </a:prstGeom>
+          <a:noFill/>
+        </p:spPr>
+        <p:txBody>
+          <a:bodyPr wrap="square" lIns="0" rIns="0" tIns="0" bIns="0">
+            <a:spAutoFit/>
+          </a:bodyPr>
+          <a:lstStyle/>
+          <a:p>
+            <a:pPr algn="l"/>
+            <a:r>
+              <a:rPr sz="1050" b="0" i="0" u="none">
+                <a:solidFill>
+                  <a:srgbClr val="FFFFFF"/>
+                </a:solidFill>
+                <a:latin typeface="Inter"/>
+              </a:rPr>
+              <a:t>Founder · Pixelpitch Labs</a:t>
+            </a:r>
+          </a:p>
+        </p:txBody>
+      </p:sp>
+      <p:sp>
+        <p:nvSpPr>
+          <p:cNvPr id="10" name="TextBox 9"/>
+          <p:cNvSpPr txBox="1"/>
+          <p:nvPr/>
+        </p:nvSpPr>
+        <p:spPr>
+          <a:xfrm>
+            <a:off x="1047750" y="6400800"/>
+            <a:ext cx="1411635" cy="152400"/>
+          </a:xfrm>
+          <a:prstGeom prst="rect">
+            <a:avLst/>
+          </a:prstGeom>
+          <a:noFill/>
+        </p:spPr>
+        <p:txBody>
+          <a:bodyPr wrap="square" lIns="0" rIns="0" tIns="0" bIns="0">
+            <a:spAutoFit/>
+          </a:bodyPr>
+          <a:lstStyle/>
+          <a:p>
+            <a:pPr algn="l"/>
+            <a:r>
+              <a:rPr sz="975" b="1" i="0" u="none">
+                <a:solidFill>
+                  <a:srgbClr val="FFFFFF"/>
+                </a:solidFill>
+                <a:latin typeface="Inter"/>
+              </a:rPr>
+              <a:t>PIXELPITCH LABS</a:t>
+            </a:r>
+          </a:p>
+        </p:txBody>
+      </p:sp>
+      <p:sp>
+        <p:nvSpPr>
+          <p:cNvPr id="11" name="TextBox 10"/>
+          <p:cNvSpPr txBox="1"/>
+          <p:nvPr/>
+        </p:nvSpPr>
+        <p:spPr>
+          <a:xfrm>
+            <a:off x="10588377" y="6400800"/>
+            <a:ext cx="555873" cy="152400"/>
+          </a:xfrm>
+          <a:prstGeom prst="rect">
+            <a:avLst/>
+          </a:prstGeom>
+          <a:noFill/>
+        </p:spPr>
+        <p:txBody>
+          <a:bodyPr wrap="square" lIns="0" rIns="0" tIns="0" bIns="0">
+            <a:spAutoFit/>
+          </a:bodyPr>
+          <a:lstStyle/>
+          <a:p>
+            <a:pPr algn="l"/>
+            <a:r>
+              <a:rPr sz="975" b="1" i="0" u="none">
+                <a:solidFill>
+                  <a:srgbClr val="FFFFFF"/>
+                </a:solidFill>
+                <a:latin typeface="Inter"/>
+              </a:rPr>
+              <a:t>08 / 12</a:t>
+            </a:r>
+          </a:p>
+        </p:txBody>
+      </p:sp>
+    </p:spTree>
+  </p:cSld>
+  <p:clrMapOvr>
+    <a:masterClrMapping/>
+  </p:clrMapOvr>
+</p:sld>
+</file>
+
+<file path=ppt/slides/slide9.xml><?xml version="1.0" encoding="utf-8"?>
+<p:sld xmlns:a="http://schemas.openxmlformats.org/drawingml/2006/main" xmlns:p="http://schemas.openxmlformats.org/presentationml/2006/main" xmlns:r="http://schemas.openxmlformats.org/officeDocument/2006/relationships">
+  <p:cSld>
+    <p:spTree>
+      <p:nvGrpSpPr>
+        <p:cNvPr id="1" name=""/>
+        <p:cNvGrpSpPr/>
+        <p:nvPr/>
+      </p:nvGrpSpPr>
+      <p:grpSpPr/>
+      <p:sp>
+        <p:nvSpPr>
+          <p:cNvPr id="2" name="Rectangle 1"/>
+          <p:cNvSpPr/>
+          <p:nvPr/>
+        </p:nvSpPr>
+        <p:spPr>
+          <a:xfrm>
+            <a:off x="0" y="0"/>
+            <a:ext cx="12192000" cy="6858000"/>
+          </a:xfrm>
+          <a:prstGeom prst="rect">
+            <a:avLst/>
+          </a:prstGeom>
+          <a:solidFill>
+            <a:srgbClr val="070710"/>
+          </a:solidFill>
+          <a:ln>
+            <a:noFill/>
+          </a:ln>
+        </p:spPr>
+        <p:style>
+          <a:lnRef idx="1">
+            <a:schemeClr val="accent1"/>
+          </a:lnRef>
+          <a:fillRef idx="3">
+            <a:schemeClr val="accent1"/>
+          </a:fillRef>
+          <a:effectRef idx="2">
+            <a:schemeClr val="accent1"/>
+          </a:effectRef>
+          <a:fontRef idx="minor">
+            <a:schemeClr val="lt1"/>
+          </a:fontRef>
+        </p:style>
+        <p:txBody>
+          <a:bodyPr rtlCol="0" anchor="ctr"/>
+          <a:lstStyle/>
+          <a:p>
+            <a:pPr algn="ctr"/>
+          </a:p>
+        </p:txBody>
+      </p:sp>
+      <p:sp>
+        <p:nvSpPr>
+          <p:cNvPr id="3" name="TextBox 2"/>
+          <p:cNvSpPr txBox="1"/>
+          <p:nvPr/>
+        </p:nvSpPr>
+        <p:spPr>
+          <a:xfrm>
+            <a:off x="762000" y="609600"/>
+            <a:ext cx="10668000" cy="152400"/>
+          </a:xfrm>
+          <a:prstGeom prst="rect">
+            <a:avLst/>
+          </a:prstGeom>
+          <a:noFill/>
+        </p:spPr>
+        <p:txBody>
+          <a:bodyPr wrap="square" lIns="0" rIns="0" tIns="0" bIns="0">
+            <a:spAutoFit/>
+          </a:bodyPr>
+          <a:lstStyle/>
+          <a:p>
+            <a:pPr algn="l"/>
+            <a:r>
+              <a:rPr sz="975" b="1" i="0" u="none">
+                <a:solidFill>
+                  <a:srgbClr val="A78BFA"/>
+                </a:solidFill>
+                <a:latin typeface="Inter"/>
+              </a:rPr>
+              <a:t>Pricing</a:t>
+            </a:r>
+          </a:p>
+        </p:txBody>
+      </p:sp>
+      <p:sp>
+        <p:nvSpPr>
+          <p:cNvPr id="4" name="TextBox 3"/>
+          <p:cNvSpPr txBox="1"/>
+          <p:nvPr/>
+        </p:nvSpPr>
+        <p:spPr>
+          <a:xfrm>
+            <a:off x="762000" y="895350"/>
+            <a:ext cx="8382000" cy="759916"/>
+          </a:xfrm>
+          <a:prstGeom prst="rect">
+            <a:avLst/>
+          </a:prstGeom>
+          <a:noFill/>
+        </p:spPr>
+        <p:txBody>
+          <a:bodyPr wrap="square" lIns="0" rIns="0" tIns="0" bIns="0">
+            <a:spAutoFit/>
+          </a:bodyPr>
+          <a:lstStyle/>
+          <a:p>
+            <a:pPr algn="l"/>
+            <a:r>
+              <a:rPr sz="2850" b="1" i="0" u="none">
+                <a:solidFill>
+                  <a:srgbClr val="F5F5F7"/>
+                </a:solidFill>
+                <a:latin typeface="Inter"/>
+              </a:rPr>
+              <a:t>Pay for the slides you ship, not the seats you don't fill.</a:t>
+            </a:r>
+          </a:p>
+        </p:txBody>
+      </p:sp>
+      <p:sp>
+        <p:nvSpPr>
+          <p:cNvPr id="5" name="Rounded Rectangle 4"/>
+          <p:cNvSpPr/>
+          <p:nvPr/>
+        </p:nvSpPr>
+        <p:spPr>
+          <a:xfrm>
+            <a:off x="762000" y="1960066"/>
+            <a:ext cx="3441650" cy="4336554"/>
+          </a:xfrm>
+          <a:prstGeom prst="roundRect">
+            <a:avLst/>
+          </a:prstGeom>
+          <a:solidFill>
+            <a:srgbClr val="FFFFFF"/>
+          </a:solidFill>
+          <a:ln w="9525">
+            <a:solidFill>
+              <a:srgbClr val="FFFFFF"/>
+            </a:solidFill>
+          </a:ln>
+          <a:effectLst>
+            <a:outerShdw blurRad="457200" dist="152400" dir="5400000" algn="ctr" rotWithShape="0">
+              <a:srgbClr val="6366F1">
+                <a:alpha val="6000"/>
+              </a:srgbClr>
+            </a:outerShdw>
+          </a:effectLst>
+        </p:spPr>
+        <p:style>
+          <a:lnRef idx="1">
+            <a:schemeClr val="accent1"/>
+          </a:lnRef>
+          <a:fillRef idx="3">
+            <a:schemeClr val="accent1"/>
+          </a:fillRef>
+          <a:effectRef idx="2">
+            <a:schemeClr val="accent1"/>
+          </a:effectRef>
+          <a:fontRef idx="minor">
+            <a:schemeClr val="lt1"/>
+          </a:fontRef>
+        </p:style>
+        <p:txBody>
+          <a:bodyPr rtlCol="0" anchor="ctr"/>
+          <a:lstStyle/>
+          <a:p>
+            <a:pPr algn="ctr"/>
+          </a:p>
+        </p:txBody>
+      </p:sp>
+      <p:sp>
+        <p:nvSpPr>
+          <p:cNvPr id="6" name="TextBox 5"/>
+          <p:cNvSpPr txBox="1"/>
+          <p:nvPr/>
+        </p:nvSpPr>
+        <p:spPr>
+          <a:xfrm>
+            <a:off x="1038225" y="2274391"/>
+            <a:ext cx="2889200" cy="152400"/>
+          </a:xfrm>
+          <a:prstGeom prst="rect">
+            <a:avLst/>
+          </a:prstGeom>
+          <a:noFill/>
+        </p:spPr>
+        <p:txBody>
+          <a:bodyPr wrap="square" lIns="0" rIns="0" tIns="0" bIns="0">
+            <a:spAutoFit/>
+          </a:bodyPr>
+          <a:lstStyle/>
+          <a:p>
+            <a:pPr algn="l"/>
+            <a:r>
+              <a:rPr sz="975" b="1" i="0" u="none">
+                <a:solidFill>
+                  <a:srgbClr val="A78BFA"/>
+                </a:solidFill>
+                <a:latin typeface="Inter"/>
+              </a:rPr>
+              <a:t>Starter</a:t>
+            </a:r>
+          </a:p>
+        </p:txBody>
+      </p:sp>
+      <p:sp>
+        <p:nvSpPr>
+          <p:cNvPr id="7" name="TextBox 6"/>
+          <p:cNvSpPr txBox="1"/>
+          <p:nvPr/>
+        </p:nvSpPr>
+        <p:spPr>
+          <a:xfrm>
+            <a:off x="1038225" y="2522041"/>
+            <a:ext cx="2889200" cy="457200"/>
+          </a:xfrm>
+          <a:prstGeom prst="rect">
+            <a:avLst/>
+          </a:prstGeom>
+          <a:noFill/>
+        </p:spPr>
+        <p:txBody>
+          <a:bodyPr wrap="square" lIns="0" rIns="0" tIns="0" bIns="0">
+            <a:spAutoFit/>
+          </a:bodyPr>
+          <a:lstStyle/>
+          <a:p>
+            <a:pPr algn="l"/>
+            <a:r>
+              <a:rPr sz="3600" b="1" i="0" u="none">
+                <a:solidFill>
+                  <a:srgbClr val="F5F5F7"/>
+                </a:solidFill>
+                <a:latin typeface="Inter"/>
+              </a:rPr>
+              <a:t>$0</a:t>
+            </a:r>
+            <a:r>
+              <a:rPr sz="1050" b="0" i="0" u="none">
+                <a:solidFill>
+                  <a:srgbClr val="A1A1AA"/>
+                </a:solidFill>
+                <a:latin typeface="Inter"/>
+              </a:rPr>
+              <a:t>/mo</a:t>
+            </a:r>
+          </a:p>
+        </p:txBody>
+      </p:sp>
+      <p:sp>
+        <p:nvSpPr>
+          <p:cNvPr id="8" name="TextBox 7"/>
+          <p:cNvSpPr txBox="1"/>
+          <p:nvPr/>
+        </p:nvSpPr>
+        <p:spPr>
+          <a:xfrm>
+            <a:off x="1038225" y="3093541"/>
+            <a:ext cx="2889200" cy="383679"/>
+          </a:xfrm>
+          <a:prstGeom prst="rect">
+            <a:avLst/>
+          </a:prstGeom>
+          <a:noFill/>
+        </p:spPr>
+        <p:txBody>
+          <a:bodyPr wrap="square" lIns="0" rIns="0" tIns="0" bIns="0">
+            <a:spAutoFit/>
+          </a:bodyPr>
+          <a:lstStyle/>
+          <a:p>
+            <a:pPr algn="l"/>
+            <a:r>
+              <a:rPr sz="975" b="0" i="0" u="none">
+                <a:solidFill>
+                  <a:srgbClr val="A1A1AA"/>
+                </a:solidFill>
+                <a:latin typeface="Inter"/>
+              </a:rPr>
+              <a:t>For solo founders shipping their first deck. No credit card.</a:t>
+            </a:r>
+          </a:p>
+        </p:txBody>
+      </p:sp>
+      <p:sp>
+        <p:nvSpPr>
+          <p:cNvPr id="9" name="TextBox 8"/>
+          <p:cNvSpPr txBox="1"/>
+          <p:nvPr/>
+        </p:nvSpPr>
+        <p:spPr>
+          <a:xfrm>
+            <a:off x="1038225" y="3686770"/>
+            <a:ext cx="117723" cy="200025"/>
+          </a:xfrm>
+          <a:prstGeom prst="rect">
+            <a:avLst/>
+          </a:prstGeom>
+          <a:noFill/>
+        </p:spPr>
+        <p:txBody>
+          <a:bodyPr wrap="square" lIns="0" rIns="0" tIns="0" bIns="0">
+            <a:spAutoFit/>
+          </a:bodyPr>
+          <a:lstStyle/>
+          <a:p>
+            <a:pPr algn="l"/>
+            <a:r>
+              <a:rPr sz="1050" b="1" i="0" u="none">
+                <a:solidFill>
+                  <a:srgbClr val="86EFAC"/>
+                </a:solidFill>
+                <a:latin typeface="Inter"/>
+              </a:rPr>
+              <a:t>✓</a:t>
+            </a:r>
+          </a:p>
+        </p:txBody>
+      </p:sp>
+      <p:sp>
+        <p:nvSpPr>
+          <p:cNvPr id="10" name="TextBox 9"/>
+          <p:cNvSpPr txBox="1"/>
+          <p:nvPr/>
+        </p:nvSpPr>
+        <p:spPr>
+          <a:xfrm>
+            <a:off x="1251198" y="3686770"/>
+            <a:ext cx="1010841" cy="185738"/>
+          </a:xfrm>
+          <a:prstGeom prst="rect">
+            <a:avLst/>
+          </a:prstGeom>
+          <a:noFill/>
+        </p:spPr>
+        <p:txBody>
+          <a:bodyPr wrap="square" lIns="0" rIns="0" tIns="0" bIns="0">
+            <a:spAutoFit/>
+          </a:bodyPr>
+          <a:lstStyle/>
+          <a:p>
+            <a:pPr algn="l"/>
+            <a:r>
+              <a:rPr sz="975" b="0" i="0" u="none">
+                <a:solidFill>
+                  <a:srgbClr val="F5F5F7"/>
+                </a:solidFill>
+                <a:latin typeface="Inter"/>
+              </a:rPr>
+              <a:t>50 slides / month</a:t>
+            </a:r>
+          </a:p>
+        </p:txBody>
+      </p:sp>
+      <p:sp>
+        <p:nvSpPr>
+          <p:cNvPr id="11" name="TextBox 10"/>
+          <p:cNvSpPr txBox="1"/>
+          <p:nvPr/>
+        </p:nvSpPr>
+        <p:spPr>
+          <a:xfrm>
+            <a:off x="1038225" y="4048720"/>
+            <a:ext cx="117723" cy="200025"/>
+          </a:xfrm>
+          <a:prstGeom prst="rect">
+            <a:avLst/>
+          </a:prstGeom>
+          <a:noFill/>
+        </p:spPr>
+        <p:txBody>
+          <a:bodyPr wrap="square" lIns="0" rIns="0" tIns="0" bIns="0">
+            <a:spAutoFit/>
+          </a:bodyPr>
+          <a:lstStyle/>
+          <a:p>
+            <a:pPr algn="l"/>
+            <a:r>
+              <a:rPr sz="1050" b="1" i="0" u="none">
+                <a:solidFill>
+                  <a:srgbClr val="86EFAC"/>
+                </a:solidFill>
+                <a:latin typeface="Inter"/>
+              </a:rPr>
+              <a:t>✓</a:t>
+            </a:r>
+          </a:p>
+        </p:txBody>
+      </p:sp>
+      <p:sp>
+        <p:nvSpPr>
+          <p:cNvPr id="12" name="TextBox 11"/>
+          <p:cNvSpPr txBox="1"/>
+          <p:nvPr/>
+        </p:nvSpPr>
+        <p:spPr>
+          <a:xfrm>
+            <a:off x="1251198" y="4048720"/>
+            <a:ext cx="1039564" cy="185738"/>
+          </a:xfrm>
+          <a:prstGeom prst="rect">
+            <a:avLst/>
+          </a:prstGeom>
+          <a:noFill/>
+        </p:spPr>
+        <p:txBody>
+          <a:bodyPr wrap="square" lIns="0" rIns="0" tIns="0" bIns="0">
+            <a:spAutoFit/>
+          </a:bodyPr>
+          <a:lstStyle/>
+          <a:p>
+            <a:pPr algn="l"/>
+            <a:r>
+              <a:rPr sz="975" b="0" i="0" u="none">
+                <a:solidFill>
+                  <a:srgbClr val="F5F5F7"/>
+                </a:solidFill>
+                <a:latin typeface="Inter"/>
+              </a:rPr>
+              <a:t>Tier 0–2 classifier</a:t>
+            </a:r>
+          </a:p>
+        </p:txBody>
+      </p:sp>
+      <p:sp>
+        <p:nvSpPr>
+          <p:cNvPr id="13" name="TextBox 12"/>
+          <p:cNvSpPr txBox="1"/>
+          <p:nvPr/>
+        </p:nvSpPr>
+        <p:spPr>
+          <a:xfrm>
+            <a:off x="1038225" y="4410670"/>
+            <a:ext cx="117723" cy="200025"/>
+          </a:xfrm>
+          <a:prstGeom prst="rect">
+            <a:avLst/>
+          </a:prstGeom>
+          <a:noFill/>
+        </p:spPr>
+        <p:txBody>
+          <a:bodyPr wrap="square" lIns="0" rIns="0" tIns="0" bIns="0">
+            <a:spAutoFit/>
+          </a:bodyPr>
+          <a:lstStyle/>
+          <a:p>
+            <a:pPr algn="l"/>
+            <a:r>
+              <a:rPr sz="1050" b="1" i="0" u="none">
+                <a:solidFill>
+                  <a:srgbClr val="86EFAC"/>
+                </a:solidFill>
+                <a:latin typeface="Inter"/>
+              </a:rPr>
+              <a:t>✓</a:t>
+            </a:r>
+          </a:p>
+        </p:txBody>
+      </p:sp>
+      <p:sp>
+        <p:nvSpPr>
+          <p:cNvPr id="14" name="TextBox 13"/>
+          <p:cNvSpPr txBox="1"/>
+          <p:nvPr/>
+        </p:nvSpPr>
+        <p:spPr>
+          <a:xfrm>
+            <a:off x="1251198" y="4410670"/>
+            <a:ext cx="1237952" cy="185738"/>
+          </a:xfrm>
+          <a:prstGeom prst="rect">
+            <a:avLst/>
+          </a:prstGeom>
+          <a:noFill/>
+        </p:spPr>
+        <p:txBody>
+          <a:bodyPr wrap="square" lIns="0" rIns="0" tIns="0" bIns="0">
+            <a:spAutoFit/>
+          </a:bodyPr>
+          <a:lstStyle/>
+          <a:p>
+            <a:pPr algn="l"/>
+            <a:r>
+              <a:rPr sz="975" b="0" i="0" u="none">
+                <a:solidFill>
+                  <a:srgbClr val="F5F5F7"/>
+                </a:solidFill>
+                <a:latin typeface="Inter"/>
+              </a:rPr>
+              <a:t>SSIM oracle included</a:t>
+            </a:r>
+          </a:p>
+        </p:txBody>
+      </p:sp>
+      <p:sp>
+        <p:nvSpPr>
+          <p:cNvPr id="15" name="TextBox 14"/>
+          <p:cNvSpPr txBox="1"/>
+          <p:nvPr/>
+        </p:nvSpPr>
+        <p:spPr>
+          <a:xfrm>
+            <a:off x="1038225" y="4772620"/>
+            <a:ext cx="117723" cy="200025"/>
+          </a:xfrm>
+          <a:prstGeom prst="rect">
+            <a:avLst/>
+          </a:prstGeom>
+          <a:noFill/>
+        </p:spPr>
+        <p:txBody>
+          <a:bodyPr wrap="square" lIns="0" rIns="0" tIns="0" bIns="0">
+            <a:spAutoFit/>
+          </a:bodyPr>
+          <a:lstStyle/>
+          <a:p>
+            <a:pPr algn="l"/>
+            <a:r>
+              <a:rPr sz="1050" b="1" i="0" u="none">
+                <a:solidFill>
+                  <a:srgbClr val="86EFAC"/>
+                </a:solidFill>
+                <a:latin typeface="Inter"/>
+              </a:rPr>
+              <a:t>✓</a:t>
+            </a:r>
+          </a:p>
+        </p:txBody>
+      </p:sp>
+      <p:sp>
+        <p:nvSpPr>
+          <p:cNvPr id="16" name="TextBox 15"/>
+          <p:cNvSpPr txBox="1"/>
+          <p:nvPr/>
+        </p:nvSpPr>
+        <p:spPr>
+          <a:xfrm>
+            <a:off x="1251198" y="4772620"/>
+            <a:ext cx="1158925" cy="185738"/>
+          </a:xfrm>
+          <a:prstGeom prst="rect">
+            <a:avLst/>
+          </a:prstGeom>
+          <a:noFill/>
+        </p:spPr>
+        <p:txBody>
+          <a:bodyPr wrap="square" lIns="0" rIns="0" tIns="0" bIns="0">
+            <a:spAutoFit/>
+          </a:bodyPr>
+          <a:lstStyle/>
+          <a:p>
+            <a:pPr algn="l"/>
+            <a:r>
+              <a:rPr sz="975" b="0" i="0" u="none">
+                <a:solidFill>
+                  <a:srgbClr val="F5F5F7"/>
+                </a:solidFill>
+                <a:latin typeface="Inter"/>
+              </a:rPr>
+              <a:t>Community support</a:t>
+            </a:r>
+          </a:p>
+        </p:txBody>
+      </p:sp>
+      <p:sp>
+        <p:nvSpPr>
+          <p:cNvPr id="17" name="TextBox 16"/>
+          <p:cNvSpPr txBox="1"/>
+          <p:nvPr/>
+        </p:nvSpPr>
+        <p:spPr>
+          <a:xfrm>
+            <a:off x="1038225" y="5601295"/>
+            <a:ext cx="2889200" cy="419100"/>
+          </a:xfrm>
+          <a:prstGeom prst="rect">
+            <a:avLst/>
+          </a:prstGeom>
+          <a:solidFill>
+            <a:srgbClr val="FFFFFF"/>
+          </a:solidFill>
+        </p:spPr>
+        <p:txBody>
+          <a:bodyPr wrap="square" lIns="0" rIns="0" tIns="0" bIns="0">
+            <a:spAutoFit/>
+          </a:bodyPr>
+          <a:lstStyle/>
+          <a:p>
+            <a:pPr algn="ctr"/>
+            <a:r>
+              <a:rPr sz="975" b="1" i="0" u="none">
+                <a:solidFill>
+                  <a:srgbClr val="F5F5F7"/>
+                </a:solidFill>
+                <a:latin typeface="Inter"/>
+              </a:rPr>
+              <a:t>Start free</a:t>
+            </a:r>
+          </a:p>
+        </p:txBody>
+      </p:sp>
+      <p:sp>
+        <p:nvSpPr>
+          <p:cNvPr id="18" name="Rounded Rectangle 17"/>
+          <p:cNvSpPr/>
+          <p:nvPr/>
+        </p:nvSpPr>
+        <p:spPr>
+          <a:gradFill flip="none" rotWithShape="1">
+            <a:gsLst>
+              <a:gs pos="0">
+                <a:srgbClr val="6366F1">
+                  <a:alpha val="20000"/>
+                </a:srgbClr>
+              </a:gs>
+              <a:gs pos="100000">
+                <a:srgbClr val="EC4899">
+                  <a:alpha val="10000"/>
+                </a:srgbClr>
+              </a:gs>
+            </a:gsLst>
+            <a:lin ang="4200000" scaled="0"/>
+          </a:gradFill>
+          <a:xfrm>
+            <a:off x="4375100" y="1960066"/>
+            <a:ext cx="3441650" cy="4336554"/>
+          </a:xfrm>
+          <a:prstGeom prst="roundRect">
+            <a:avLst/>
+          </a:prstGeom>
+          <a:ln w="9525">
+            <a:solidFill>
+              <a:srgbClr val="A78BFA"/>
+            </a:solidFill>
+          </a:ln>
+          <a:effectLst>
+            <a:outerShdw blurRad="762000" dist="0" dir="0" algn="ctr" rotWithShape="0">
+              <a:srgbClr val="8B5CF6">
+                <a:alpha val="25000"/>
+              </a:srgbClr>
+            </a:outerShdw>
+          </a:effectLst>
+        </p:spPr>
+        <p:style>
+          <a:lnRef idx="1">
+            <a:schemeClr val="accent1"/>
+          </a:lnRef>
+          <a:fillRef idx="3">
+            <a:schemeClr val="accent1"/>
+          </a:fillRef>
+          <a:effectRef idx="2">
+            <a:schemeClr val="accent1"/>
+          </a:effectRef>
+          <a:fontRef idx="minor">
+            <a:schemeClr val="lt1"/>
+          </a:fontRef>
+        </p:style>
+        <p:txBody>
+          <a:bodyPr rtlCol="0" anchor="ctr"/>
+          <a:lstStyle/>
+          <a:p>
+            <a:pPr algn="ctr"/>
+          </a:p>
+        </p:txBody>
+      </p:sp>
+      <p:sp>
+        <p:nvSpPr>
+          <p:cNvPr id="19" name="TextBox 18"/>
+          <p:cNvSpPr txBox="1"/>
+          <p:nvPr/>
+        </p:nvSpPr>
+        <p:spPr>
+          <a:gradFill flip="none" rotWithShape="1">
+            <a:gsLst>
+              <a:gs pos="0">
+                <a:srgbClr val="A78BFA"/>
+              </a:gs>
+              <a:gs pos="100000">
+                <a:srgbClr val="EC4899"/>
+              </a:gs>
+            </a:gsLst>
+            <a:lin ang="2700000" scaled="0"/>
+          </a:gradFill>
+          <a:xfrm>
+            <a:off x="5432524" y="1855291"/>
+            <a:ext cx="1326654" cy="247650"/>
+          </a:xfrm>
+          <a:prstGeom prst="rect">
+            <a:avLst/>
+          </a:prstGeom>
+        </p:spPr>
+        <p:txBody>
+          <a:bodyPr wrap="square" lIns="0" rIns="0" tIns="0" bIns="0">
+            <a:spAutoFit/>
+          </a:bodyPr>
+          <a:lstStyle/>
+          <a:p>
+            <a:pPr algn="l"/>
+            <a:r>
+              <a:rPr sz="825" b="1" i="0" u="none">
+                <a:solidFill>
+                  <a:srgbClr val="0A0A0F"/>
+                </a:solidFill>
+                <a:latin typeface="Inter"/>
+              </a:rPr>
+              <a:t>MOST POPULAR</a:t>
+            </a:r>
+          </a:p>
+        </p:txBody>
+      </p:sp>
+      <p:sp>
+        <p:nvSpPr>
+          <p:cNvPr id="20" name="TextBox 19"/>
+          <p:cNvSpPr txBox="1"/>
+          <p:nvPr/>
+        </p:nvSpPr>
+        <p:spPr>
+          <a:xfrm>
+            <a:off x="4651325" y="2274391"/>
+            <a:ext cx="2889200" cy="152400"/>
+          </a:xfrm>
+          <a:prstGeom prst="rect">
+            <a:avLst/>
+          </a:prstGeom>
+          <a:noFill/>
+        </p:spPr>
+        <p:txBody>
+          <a:bodyPr wrap="square" lIns="0" rIns="0" tIns="0" bIns="0">
+            <a:spAutoFit/>
+          </a:bodyPr>
+          <a:lstStyle/>
+          <a:p>
+            <a:pPr algn="l"/>
+            <a:r>
+              <a:rPr sz="975" b="1" i="0" u="none">
+                <a:solidFill>
+                  <a:srgbClr val="A78BFA"/>
+                </a:solidFill>
+                <a:latin typeface="Inter"/>
+              </a:rPr>
+              <a:t>Studio</a:t>
+            </a:r>
+          </a:p>
+        </p:txBody>
+      </p:sp>
+      <p:sp>
+        <p:nvSpPr>
+          <p:cNvPr id="21" name="TextBox 20"/>
+          <p:cNvSpPr txBox="1"/>
+          <p:nvPr/>
+        </p:nvSpPr>
+        <p:spPr>
+          <a:xfrm>
+            <a:off x="4651325" y="2522041"/>
+            <a:ext cx="2889200" cy="457200"/>
+          </a:xfrm>
+          <a:prstGeom prst="rect">
+            <a:avLst/>
+          </a:prstGeom>
+          <a:noFill/>
+        </p:spPr>
+        <p:txBody>
+          <a:bodyPr wrap="square" lIns="0" rIns="0" tIns="0" bIns="0">
+            <a:spAutoFit/>
+          </a:bodyPr>
+          <a:lstStyle/>
+          <a:p>
+            <a:pPr algn="l"/>
+            <a:r>
+              <a:rPr sz="3600" b="1" i="0" u="none">
+                <a:solidFill>
+                  <a:srgbClr val="F5F5F7"/>
+                </a:solidFill>
+                <a:latin typeface="Inter"/>
+              </a:rPr>
+              <a:t>$29</a:t>
+            </a:r>
+            <a:r>
+              <a:rPr sz="1050" b="0" i="0" u="none">
+                <a:solidFill>
+                  <a:srgbClr val="A1A1AA"/>
+                </a:solidFill>
+                <a:latin typeface="Inter"/>
+              </a:rPr>
+              <a:t>/mo</a:t>
+            </a:r>
+          </a:p>
+        </p:txBody>
+      </p:sp>
+      <p:sp>
+        <p:nvSpPr>
+          <p:cNvPr id="22" name="TextBox 21"/>
+          <p:cNvSpPr txBox="1"/>
+          <p:nvPr/>
+        </p:nvSpPr>
+        <p:spPr>
+          <a:xfrm>
+            <a:off x="4651325" y="3093541"/>
+            <a:ext cx="2889200" cy="383679"/>
+          </a:xfrm>
+          <a:prstGeom prst="rect">
+            <a:avLst/>
+          </a:prstGeom>
+          <a:noFill/>
+        </p:spPr>
+        <p:txBody>
+          <a:bodyPr wrap="square" lIns="0" rIns="0" tIns="0" bIns="0">
+            <a:spAutoFit/>
+          </a:bodyPr>
+          <a:lstStyle/>
+          <a:p>
+            <a:pPr algn="l"/>
+            <a:r>
+              <a:rPr sz="975" b="0" i="0" u="none">
+                <a:solidFill>
+                  <a:srgbClr val="A1A1AA"/>
+                </a:solidFill>
+                <a:latin typeface="Inter"/>
+              </a:rPr>
+              <a:t>For design teams converting decks every day. LLM credits included.</a:t>
+            </a:r>
+          </a:p>
+        </p:txBody>
+      </p:sp>
+      <p:sp>
+        <p:nvSpPr>
+          <p:cNvPr id="23" name="TextBox 22"/>
+          <p:cNvSpPr txBox="1"/>
+          <p:nvPr/>
+        </p:nvSpPr>
+        <p:spPr>
+          <a:xfrm>
+            <a:off x="4651325" y="3686770"/>
+            <a:ext cx="117723" cy="200025"/>
+          </a:xfrm>
+          <a:prstGeom prst="rect">
+            <a:avLst/>
+          </a:prstGeom>
+          <a:noFill/>
+        </p:spPr>
+        <p:txBody>
+          <a:bodyPr wrap="square" lIns="0" rIns="0" tIns="0" bIns="0">
+            <a:spAutoFit/>
+          </a:bodyPr>
+          <a:lstStyle/>
+          <a:p>
+            <a:pPr algn="l"/>
+            <a:r>
+              <a:rPr sz="1050" b="1" i="0" u="none">
+                <a:solidFill>
+                  <a:srgbClr val="86EFAC"/>
+                </a:solidFill>
+                <a:latin typeface="Inter"/>
+              </a:rPr>
+              <a:t>✓</a:t>
+            </a:r>
+          </a:p>
+        </p:txBody>
+      </p:sp>
+      <p:sp>
+        <p:nvSpPr>
+          <p:cNvPr id="24" name="TextBox 23"/>
+          <p:cNvSpPr txBox="1"/>
+          <p:nvPr/>
+        </p:nvSpPr>
+        <p:spPr>
+          <a:xfrm>
+            <a:off x="4864298" y="3686770"/>
+            <a:ext cx="1174700" cy="185738"/>
+          </a:xfrm>
+          <a:prstGeom prst="rect">
+            <a:avLst/>
+          </a:prstGeom>
+          <a:noFill/>
+        </p:spPr>
+        <p:txBody>
+          <a:bodyPr wrap="square" lIns="0" rIns="0" tIns="0" bIns="0">
+            <a:spAutoFit/>
+          </a:bodyPr>
+          <a:lstStyle/>
+          <a:p>
+            <a:pPr algn="l"/>
+            <a:r>
+              <a:rPr sz="975" b="0" i="0" u="none">
+                <a:solidFill>
+                  <a:srgbClr val="F5F5F7"/>
+                </a:solidFill>
+                <a:latin typeface="Inter"/>
+              </a:rPr>
+              <a:t>1,000 slides / month</a:t>
+            </a:r>
+          </a:p>
+        </p:txBody>
+      </p:sp>
+      <p:sp>
+        <p:nvSpPr>
+          <p:cNvPr id="25" name="TextBox 24"/>
+          <p:cNvSpPr txBox="1"/>
+          <p:nvPr/>
+        </p:nvSpPr>
+        <p:spPr>
+          <a:xfrm>
+            <a:off x="4651325" y="4048720"/>
+            <a:ext cx="117723" cy="200025"/>
+          </a:xfrm>
+          <a:prstGeom prst="rect">
+            <a:avLst/>
+          </a:prstGeom>
+          <a:noFill/>
+        </p:spPr>
+        <p:txBody>
+          <a:bodyPr wrap="square" lIns="0" rIns="0" tIns="0" bIns="0">
+            <a:spAutoFit/>
+          </a:bodyPr>
+          <a:lstStyle/>
+          <a:p>
+            <a:pPr algn="l"/>
+            <a:r>
+              <a:rPr sz="1050" b="1" i="0" u="none">
+                <a:solidFill>
+                  <a:srgbClr val="86EFAC"/>
+                </a:solidFill>
+                <a:latin typeface="Inter"/>
+              </a:rPr>
+              <a:t>✓</a:t>
+            </a:r>
+          </a:p>
+        </p:txBody>
+      </p:sp>
+      <p:sp>
+        <p:nvSpPr>
+          <p:cNvPr id="26" name="TextBox 25"/>
+          <p:cNvSpPr txBox="1"/>
+          <p:nvPr/>
+        </p:nvSpPr>
+        <p:spPr>
+          <a:xfrm>
+            <a:off x="4864298" y="4048720"/>
+            <a:ext cx="1275011" cy="185738"/>
+          </a:xfrm>
+          <a:prstGeom prst="rect">
+            <a:avLst/>
+          </a:prstGeom>
+          <a:noFill/>
+        </p:spPr>
+        <p:txBody>
+          <a:bodyPr wrap="square" lIns="0" rIns="0" tIns="0" bIns="0">
+            <a:spAutoFit/>
+          </a:bodyPr>
+          <a:lstStyle/>
+          <a:p>
+            <a:pPr algn="l"/>
+            <a:r>
+              <a:rPr sz="975" b="0" i="0" u="none">
+                <a:solidFill>
+                  <a:srgbClr val="F5F5F7"/>
+                </a:solidFill>
+                <a:latin typeface="Inter"/>
+              </a:rPr>
+              <a:t>Full four-tier classifier</a:t>
+            </a:r>
+          </a:p>
+        </p:txBody>
+      </p:sp>
+      <p:sp>
+        <p:nvSpPr>
+          <p:cNvPr id="27" name="TextBox 26"/>
+          <p:cNvSpPr txBox="1"/>
+          <p:nvPr/>
+        </p:nvSpPr>
+        <p:spPr>
+          <a:xfrm>
+            <a:off x="4651325" y="4410670"/>
+            <a:ext cx="117723" cy="200025"/>
+          </a:xfrm>
+          <a:prstGeom prst="rect">
+            <a:avLst/>
+          </a:prstGeom>
+          <a:noFill/>
+        </p:spPr>
+        <p:txBody>
+          <a:bodyPr wrap="square" lIns="0" rIns="0" tIns="0" bIns="0">
+            <a:spAutoFit/>
+          </a:bodyPr>
+          <a:lstStyle/>
+          <a:p>
+            <a:pPr algn="l"/>
+            <a:r>
+              <a:rPr sz="1050" b="1" i="0" u="none">
+                <a:solidFill>
+                  <a:srgbClr val="86EFAC"/>
+                </a:solidFill>
+                <a:latin typeface="Inter"/>
+              </a:rPr>
+              <a:t>✓</a:t>
+            </a:r>
+          </a:p>
+        </p:txBody>
+      </p:sp>
+      <p:sp>
+        <p:nvSpPr>
+          <p:cNvPr id="28" name="TextBox 27"/>
+          <p:cNvSpPr txBox="1"/>
+          <p:nvPr/>
+        </p:nvSpPr>
+        <p:spPr>
+          <a:xfrm>
+            <a:off x="4864298" y="4410670"/>
+            <a:ext cx="2286446" cy="185738"/>
+          </a:xfrm>
+          <a:prstGeom prst="rect">
+            <a:avLst/>
+          </a:prstGeom>
+          <a:noFill/>
+        </p:spPr>
+        <p:txBody>
+          <a:bodyPr wrap="square" lIns="0" rIns="0" tIns="0" bIns="0">
+            <a:spAutoFit/>
+          </a:bodyPr>
+          <a:lstStyle/>
+          <a:p>
+            <a:pPr algn="l"/>
+            <a:r>
+              <a:rPr sz="975" b="0" i="0" u="none">
+                <a:solidFill>
+                  <a:srgbClr val="F5F5F7"/>
+                </a:solidFill>
+                <a:latin typeface="Inter"/>
+              </a:rPr>
+              <a:t>Gemini Flash + Claude Haiku backends</a:t>
+            </a:r>
+          </a:p>
+        </p:txBody>
+      </p:sp>
+      <p:sp>
+        <p:nvSpPr>
+          <p:cNvPr id="29" name="TextBox 28"/>
+          <p:cNvSpPr txBox="1"/>
+          <p:nvPr/>
+        </p:nvSpPr>
+        <p:spPr>
+          <a:xfrm>
+            <a:off x="4651325" y="4772620"/>
+            <a:ext cx="117723" cy="200025"/>
+          </a:xfrm>
+          <a:prstGeom prst="rect">
+            <a:avLst/>
+          </a:prstGeom>
+          <a:noFill/>
+        </p:spPr>
+        <p:txBody>
+          <a:bodyPr wrap="square" lIns="0" rIns="0" tIns="0" bIns="0">
+            <a:spAutoFit/>
+          </a:bodyPr>
+          <a:lstStyle/>
+          <a:p>
+            <a:pPr algn="l"/>
+            <a:r>
+              <a:rPr sz="1050" b="1" i="0" u="none">
+                <a:solidFill>
+                  <a:srgbClr val="86EFAC"/>
+                </a:solidFill>
+                <a:latin typeface="Inter"/>
+              </a:rPr>
+              <a:t>✓</a:t>
+            </a:r>
+          </a:p>
+        </p:txBody>
+      </p:sp>
+      <p:sp>
+        <p:nvSpPr>
+          <p:cNvPr id="30" name="TextBox 29"/>
+          <p:cNvSpPr txBox="1"/>
+          <p:nvPr/>
+        </p:nvSpPr>
+        <p:spPr>
+          <a:xfrm>
+            <a:off x="4864298" y="4772620"/>
+            <a:ext cx="1931640" cy="185738"/>
+          </a:xfrm>
+          <a:prstGeom prst="rect">
+            <a:avLst/>
+          </a:prstGeom>
+          <a:noFill/>
+        </p:spPr>
+        <p:txBody>
+          <a:bodyPr wrap="square" lIns="0" rIns="0" tIns="0" bIns="0">
+            <a:spAutoFit/>
+          </a:bodyPr>
+          <a:lstStyle/>
+          <a:p>
+            <a:pPr algn="l"/>
+            <a:r>
+              <a:rPr sz="975" b="0" i="0" u="none">
+                <a:solidFill>
+                  <a:srgbClr val="F5F5F7"/>
+                </a:solidFill>
+                <a:latin typeface="Inter"/>
+              </a:rPr>
+              <a:t>Diskcache + warm pattern cache</a:t>
+            </a:r>
+          </a:p>
+        </p:txBody>
+      </p:sp>
+      <p:sp>
+        <p:nvSpPr>
+          <p:cNvPr id="31" name="TextBox 30"/>
+          <p:cNvSpPr txBox="1"/>
+          <p:nvPr/>
+        </p:nvSpPr>
+        <p:spPr>
+          <a:xfrm>
+            <a:off x="4651325" y="5134570"/>
+            <a:ext cx="117723" cy="200025"/>
+          </a:xfrm>
+          <a:prstGeom prst="rect">
+            <a:avLst/>
+          </a:prstGeom>
+          <a:noFill/>
+        </p:spPr>
+        <p:txBody>
+          <a:bodyPr wrap="square" lIns="0" rIns="0" tIns="0" bIns="0">
+            <a:spAutoFit/>
+          </a:bodyPr>
+          <a:lstStyle/>
+          <a:p>
+            <a:pPr algn="l"/>
+            <a:r>
+              <a:rPr sz="1050" b="1" i="0" u="none">
+                <a:solidFill>
+                  <a:srgbClr val="86EFAC"/>
+                </a:solidFill>
+                <a:latin typeface="Inter"/>
+              </a:rPr>
+              <a:t>✓</a:t>
+            </a:r>
+          </a:p>
+        </p:txBody>
+      </p:sp>
+      <p:sp>
+        <p:nvSpPr>
+          <p:cNvPr id="32" name="TextBox 31"/>
+          <p:cNvSpPr txBox="1"/>
+          <p:nvPr/>
+        </p:nvSpPr>
+        <p:spPr>
+          <a:xfrm>
+            <a:off x="4864298" y="5134570"/>
+            <a:ext cx="1256407" cy="185738"/>
+          </a:xfrm>
+          <a:prstGeom prst="rect">
+            <a:avLst/>
+          </a:prstGeom>
+          <a:noFill/>
+        </p:spPr>
+        <p:txBody>
+          <a:bodyPr wrap="square" lIns="0" rIns="0" tIns="0" bIns="0">
+            <a:spAutoFit/>
+          </a:bodyPr>
+          <a:lstStyle/>
+          <a:p>
+            <a:pPr algn="l"/>
+            <a:r>
+              <a:rPr sz="975" b="0" i="0" u="none">
+                <a:solidFill>
+                  <a:srgbClr val="F5F5F7"/>
+                </a:solidFill>
+                <a:latin typeface="Inter"/>
+              </a:rPr>
+              <a:t>Priority email support</a:t>
+            </a:r>
+          </a:p>
+        </p:txBody>
+      </p:sp>
+      <p:sp>
+        <p:nvSpPr>
+          <p:cNvPr id="33" name="TextBox 32"/>
+          <p:cNvSpPr txBox="1"/>
+          <p:nvPr/>
+        </p:nvSpPr>
+        <p:spPr>
+          <a:xfrm>
+            <a:off x="4651325" y="5620345"/>
+            <a:ext cx="2889200" cy="400050"/>
+          </a:xfrm>
+          <a:prstGeom prst="rect">
+            <a:avLst/>
+          </a:prstGeom>
+          <a:solidFill>
+            <a:srgbClr val="FFFFFF"/>
+          </a:solidFill>
+        </p:spPr>
+        <p:txBody>
+          <a:bodyPr wrap="square" lIns="0" rIns="0" tIns="0" bIns="0">
+            <a:spAutoFit/>
+          </a:bodyPr>
+          <a:lstStyle/>
+          <a:p>
+            <a:pPr algn="ctr"/>
+            <a:r>
+              <a:rPr sz="975" b="1" i="0" u="none">
+                <a:solidFill>
+                  <a:srgbClr val="0A0A0F"/>
+                </a:solidFill>
+                <a:latin typeface="Inter"/>
+              </a:rPr>
+              <a:t>Try Studio →</a:t>
+            </a:r>
+          </a:p>
+        </p:txBody>
+      </p:sp>
+      <p:sp>
+        <p:nvSpPr>
+          <p:cNvPr id="34" name="Rounded Rectangle 33"/>
+          <p:cNvSpPr/>
+          <p:nvPr/>
+        </p:nvSpPr>
+        <p:spPr>
+          <a:xfrm>
+            <a:off x="7988201" y="1960066"/>
+            <a:ext cx="3441799" cy="4336554"/>
+          </a:xfrm>
+          <a:prstGeom prst="roundRect">
+            <a:avLst/>
+          </a:prstGeom>
+          <a:solidFill>
+            <a:srgbClr val="FFFFFF"/>
+          </a:solidFill>
+          <a:ln w="9525">
+            <a:solidFill>
+              <a:srgbClr val="FFFFFF"/>
+            </a:solidFill>
+          </a:ln>
+          <a:effectLst>
+            <a:outerShdw blurRad="457200" dist="152400" dir="5400000" algn="ctr" rotWithShape="0">
+              <a:srgbClr val="6366F1">
+                <a:alpha val="6000"/>
+              </a:srgbClr>
+            </a:outerShdw>
+          </a:effectLst>
+        </p:spPr>
+        <p:style>
+          <a:lnRef idx="1">
+            <a:schemeClr val="accent1"/>
+          </a:lnRef>
+          <a:fillRef idx="3">
+            <a:schemeClr val="accent1"/>
+          </a:fillRef>
+          <a:effectRef idx="2">
+            <a:schemeClr val="accent1"/>
+          </a:effectRef>
+          <a:fontRef idx="minor">
+            <a:schemeClr val="lt1"/>
+          </a:fontRef>
+        </p:style>
+        <p:txBody>
+          <a:bodyPr rtlCol="0" anchor="ctr"/>
+          <a:lstStyle/>
+          <a:p>
+            <a:pPr algn="ctr"/>
+          </a:p>
+        </p:txBody>
+      </p:sp>
+      <p:sp>
+        <p:nvSpPr>
+          <p:cNvPr id="35" name="TextBox 34"/>
+          <p:cNvSpPr txBox="1"/>
+          <p:nvPr/>
+        </p:nvSpPr>
+        <p:spPr>
+          <a:xfrm>
+            <a:off x="8264426" y="2274391"/>
+            <a:ext cx="2889349" cy="152400"/>
+          </a:xfrm>
+          <a:prstGeom prst="rect">
+            <a:avLst/>
+          </a:prstGeom>
+          <a:noFill/>
+        </p:spPr>
+        <p:txBody>
+          <a:bodyPr wrap="square" lIns="0" rIns="0" tIns="0" bIns="0">
+            <a:spAutoFit/>
+          </a:bodyPr>
+          <a:lstStyle/>
+          <a:p>
+            <a:pPr algn="l"/>
+            <a:r>
+              <a:rPr sz="975" b="1" i="0" u="none">
+                <a:solidFill>
+                  <a:srgbClr val="A78BFA"/>
+                </a:solidFill>
+                <a:latin typeface="Inter"/>
+              </a:rPr>
+              <a:t>Enterprise</a:t>
+            </a:r>
+          </a:p>
+        </p:txBody>
+      </p:sp>
+      <p:sp>
+        <p:nvSpPr>
+          <p:cNvPr id="36" name="TextBox 35"/>
+          <p:cNvSpPr txBox="1"/>
+          <p:nvPr/>
+        </p:nvSpPr>
+        <p:spPr>
+          <a:xfrm>
+            <a:off x="8264426" y="2522041"/>
+            <a:ext cx="2889349" cy="457200"/>
+          </a:xfrm>
+          <a:prstGeom prst="rect">
+            <a:avLst/>
+          </a:prstGeom>
+          <a:noFill/>
+        </p:spPr>
+        <p:txBody>
+          <a:bodyPr wrap="square" lIns="0" rIns="0" tIns="0" bIns="0">
+            <a:spAutoFit/>
+          </a:bodyPr>
+          <a:lstStyle/>
+          <a:p>
+            <a:pPr algn="l"/>
+            <a:r>
+              <a:rPr sz="3600" b="1" i="0" u="none">
+                <a:solidFill>
+                  <a:srgbClr val="F5F5F7"/>
+                </a:solidFill>
+                <a:latin typeface="Inter"/>
+              </a:rPr>
+              <a:t>Custom</a:t>
+            </a:r>
+          </a:p>
+        </p:txBody>
+      </p:sp>
+      <p:sp>
+        <p:nvSpPr>
+          <p:cNvPr id="37" name="TextBox 36"/>
+          <p:cNvSpPr txBox="1"/>
+          <p:nvPr/>
+        </p:nvSpPr>
+        <p:spPr>
+          <a:xfrm>
+            <a:off x="8264426" y="3093541"/>
+            <a:ext cx="2889349" cy="383679"/>
+          </a:xfrm>
+          <a:prstGeom prst="rect">
+            <a:avLst/>
+          </a:prstGeom>
+          <a:noFill/>
+        </p:spPr>
+        <p:txBody>
+          <a:bodyPr wrap="square" lIns="0" rIns="0" tIns="0" bIns="0">
+            <a:spAutoFit/>
+          </a:bodyPr>
+          <a:lstStyle/>
+          <a:p>
+            <a:pPr algn="l"/>
+            <a:r>
+              <a:rPr sz="975" b="0" i="0" u="none">
+                <a:solidFill>
+                  <a:srgbClr val="A1A1AA"/>
+                </a:solidFill>
+                <a:latin typeface="Inter"/>
+              </a:rPr>
+              <a:t>Self-hosted, custom backends, SOC 2, dedicated success engineer.</a:t>
+            </a:r>
+          </a:p>
+        </p:txBody>
+      </p:sp>
+      <p:sp>
+        <p:nvSpPr>
+          <p:cNvPr id="38" name="TextBox 37"/>
+          <p:cNvSpPr txBox="1"/>
+          <p:nvPr/>
+        </p:nvSpPr>
+        <p:spPr>
+          <a:xfrm>
+            <a:off x="8264426" y="3686770"/>
+            <a:ext cx="117723" cy="200025"/>
+          </a:xfrm>
+          <a:prstGeom prst="rect">
+            <a:avLst/>
+          </a:prstGeom>
+          <a:noFill/>
+        </p:spPr>
+        <p:txBody>
+          <a:bodyPr wrap="square" lIns="0" rIns="0" tIns="0" bIns="0">
+            <a:spAutoFit/>
+          </a:bodyPr>
+          <a:lstStyle/>
+          <a:p>
+            <a:pPr algn="l"/>
+            <a:r>
+              <a:rPr sz="1050" b="1" i="0" u="none">
+                <a:solidFill>
+                  <a:srgbClr val="86EFAC"/>
+                </a:solidFill>
+                <a:latin typeface="Inter"/>
+              </a:rPr>
+              <a:t>✓</a:t>
+            </a:r>
+          </a:p>
+        </p:txBody>
+      </p:sp>
+      <p:sp>
+        <p:nvSpPr>
+          <p:cNvPr id="39" name="TextBox 38"/>
+          <p:cNvSpPr txBox="1"/>
+          <p:nvPr/>
+        </p:nvSpPr>
+        <p:spPr>
+          <a:xfrm>
+            <a:off x="8477399" y="3686770"/>
+            <a:ext cx="924669" cy="185738"/>
+          </a:xfrm>
+          <a:prstGeom prst="rect">
+            <a:avLst/>
+          </a:prstGeom>
+          <a:noFill/>
+        </p:spPr>
+        <p:txBody>
+          <a:bodyPr wrap="square" lIns="0" rIns="0" tIns="0" bIns="0">
+            <a:spAutoFit/>
+          </a:bodyPr>
+          <a:lstStyle/>
+          <a:p>
+            <a:pPr algn="l"/>
+            <a:r>
+              <a:rPr sz="975" b="0" i="0" u="none">
+                <a:solidFill>
+                  <a:srgbClr val="F5F5F7"/>
+                </a:solidFill>
+                <a:latin typeface="Inter"/>
+              </a:rPr>
+              <a:t>Unlimited slides</a:t>
+            </a:r>
+          </a:p>
+        </p:txBody>
+      </p:sp>
+      <p:sp>
+        <p:nvSpPr>
+          <p:cNvPr id="40" name="TextBox 39"/>
+          <p:cNvSpPr txBox="1"/>
+          <p:nvPr/>
+        </p:nvSpPr>
+        <p:spPr>
+          <a:xfrm>
+            <a:off x="8264426" y="4048720"/>
+            <a:ext cx="117723" cy="200025"/>
+          </a:xfrm>
+          <a:prstGeom prst="rect">
+            <a:avLst/>
+          </a:prstGeom>
+          <a:noFill/>
+        </p:spPr>
+        <p:txBody>
+          <a:bodyPr wrap="square" lIns="0" rIns="0" tIns="0" bIns="0">
+            <a:spAutoFit/>
+          </a:bodyPr>
+          <a:lstStyle/>
+          <a:p>
+            <a:pPr algn="l"/>
+            <a:r>
+              <a:rPr sz="1050" b="1" i="0" u="none">
+                <a:solidFill>
+                  <a:srgbClr val="86EFAC"/>
+                </a:solidFill>
+                <a:latin typeface="Inter"/>
+              </a:rPr>
+              <a:t>✓</a:t>
+            </a:r>
+          </a:p>
+        </p:txBody>
+      </p:sp>
+      <p:sp>
+        <p:nvSpPr>
+          <p:cNvPr id="41" name="TextBox 40"/>
+          <p:cNvSpPr txBox="1"/>
+          <p:nvPr/>
+        </p:nvSpPr>
+        <p:spPr>
+          <a:xfrm>
+            <a:off x="8477399" y="4048720"/>
+            <a:ext cx="1100882" cy="185738"/>
+          </a:xfrm>
+          <a:prstGeom prst="rect">
+            <a:avLst/>
+          </a:prstGeom>
+          <a:noFill/>
+        </p:spPr>
+        <p:txBody>
+          <a:bodyPr wrap="square" lIns="0" rIns="0" tIns="0" bIns="0">
+            <a:spAutoFit/>
+          </a:bodyPr>
+          <a:lstStyle/>
+          <a:p>
+            <a:pPr algn="l"/>
+            <a:r>
+              <a:rPr sz="975" b="0" i="0" u="none">
+                <a:solidFill>
+                  <a:srgbClr val="F5F5F7"/>
+                </a:solidFill>
+                <a:latin typeface="Inter"/>
+              </a:rPr>
+              <a:t>Self-hosted runner</a:t>
+            </a:r>
+          </a:p>
+        </p:txBody>
+      </p:sp>
+      <p:sp>
+        <p:nvSpPr>
+          <p:cNvPr id="42" name="TextBox 41"/>
+          <p:cNvSpPr txBox="1"/>
+          <p:nvPr/>
+        </p:nvSpPr>
+        <p:spPr>
+          <a:xfrm>
+            <a:off x="8264426" y="4410670"/>
+            <a:ext cx="117723" cy="200025"/>
+          </a:xfrm>
+          <a:prstGeom prst="rect">
+            <a:avLst/>
+          </a:prstGeom>
+          <a:noFill/>
+        </p:spPr>
+        <p:txBody>
+          <a:bodyPr wrap="square" lIns="0" rIns="0" tIns="0" bIns="0">
+            <a:spAutoFit/>
+          </a:bodyPr>
+          <a:lstStyle/>
+          <a:p>
+            <a:pPr algn="l"/>
+            <a:r>
+              <a:rPr sz="1050" b="1" i="0" u="none">
+                <a:solidFill>
+                  <a:srgbClr val="86EFAC"/>
+                </a:solidFill>
+                <a:latin typeface="Inter"/>
+              </a:rPr>
+              <a:t>✓</a:t>
+            </a:r>
+          </a:p>
+        </p:txBody>
+      </p:sp>
+      <p:sp>
+        <p:nvSpPr>
+          <p:cNvPr id="43" name="TextBox 42"/>
+          <p:cNvSpPr txBox="1"/>
+          <p:nvPr/>
+        </p:nvSpPr>
+        <p:spPr>
+          <a:xfrm>
+            <a:off x="8477399" y="4410670"/>
+            <a:ext cx="1063526" cy="185738"/>
+          </a:xfrm>
+          <a:prstGeom prst="rect">
+            <a:avLst/>
+          </a:prstGeom>
+          <a:noFill/>
+        </p:spPr>
+        <p:txBody>
+          <a:bodyPr wrap="square" lIns="0" rIns="0" tIns="0" bIns="0">
+            <a:spAutoFit/>
+          </a:bodyPr>
+          <a:lstStyle/>
+          <a:p>
+            <a:pPr algn="l"/>
+            <a:r>
+              <a:rPr sz="975" b="0" i="0" u="none">
+                <a:solidFill>
+                  <a:srgbClr val="F5F5F7"/>
+                </a:solidFill>
+                <a:latin typeface="Inter"/>
+              </a:rPr>
+              <a:t>BYO LLM provider</a:t>
+            </a:r>
+          </a:p>
+        </p:txBody>
+      </p:sp>
+      <p:sp>
+        <p:nvSpPr>
+          <p:cNvPr id="44" name="TextBox 43"/>
+          <p:cNvSpPr txBox="1"/>
+          <p:nvPr/>
+        </p:nvSpPr>
+        <p:spPr>
+          <a:xfrm>
+            <a:off x="8264426" y="4772620"/>
+            <a:ext cx="117723" cy="200025"/>
+          </a:xfrm>
+          <a:prstGeom prst="rect">
+            <a:avLst/>
+          </a:prstGeom>
+          <a:noFill/>
+        </p:spPr>
+        <p:txBody>
+          <a:bodyPr wrap="square" lIns="0" rIns="0" tIns="0" bIns="0">
+            <a:spAutoFit/>
+          </a:bodyPr>
+          <a:lstStyle/>
+          <a:p>
+            <a:pPr algn="l"/>
+            <a:r>
+              <a:rPr sz="1050" b="1" i="0" u="none">
+                <a:solidFill>
+                  <a:srgbClr val="86EFAC"/>
+                </a:solidFill>
+                <a:latin typeface="Inter"/>
+              </a:rPr>
+              <a:t>✓</a:t>
+            </a:r>
+          </a:p>
+        </p:txBody>
+      </p:sp>
+      <p:sp>
+        <p:nvSpPr>
+          <p:cNvPr id="45" name="TextBox 44"/>
+          <p:cNvSpPr txBox="1"/>
+          <p:nvPr/>
+        </p:nvSpPr>
+        <p:spPr>
+          <a:xfrm>
+            <a:off x="8477399" y="4772620"/>
+            <a:ext cx="1457474" cy="185738"/>
+          </a:xfrm>
+          <a:prstGeom prst="rect">
+            <a:avLst/>
+          </a:prstGeom>
+          <a:noFill/>
+        </p:spPr>
+        <p:txBody>
+          <a:bodyPr wrap="square" lIns="0" rIns="0" tIns="0" bIns="0">
+            <a:spAutoFit/>
+          </a:bodyPr>
+          <a:lstStyle/>
+          <a:p>
+            <a:pPr algn="l"/>
+            <a:r>
+              <a:rPr sz="975" b="0" i="0" u="none">
+                <a:solidFill>
+                  <a:srgbClr val="F5F5F7"/>
+                </a:solidFill>
+                <a:latin typeface="Inter"/>
+              </a:rPr>
+              <a:t>SLA + dedicated support</a:t>
+            </a:r>
+          </a:p>
+        </p:txBody>
+      </p:sp>
+      <p:sp>
+        <p:nvSpPr>
+          <p:cNvPr id="46" name="TextBox 45"/>
+          <p:cNvSpPr txBox="1"/>
+          <p:nvPr/>
+        </p:nvSpPr>
+        <p:spPr>
+          <a:xfrm>
+            <a:off x="8264426" y="5601295"/>
+            <a:ext cx="2889349" cy="419100"/>
+          </a:xfrm>
+          <a:prstGeom prst="rect">
+            <a:avLst/>
+          </a:prstGeom>
+          <a:solidFill>
+            <a:srgbClr val="FFFFFF"/>
+          </a:solidFill>
+        </p:spPr>
+        <p:txBody>
+          <a:bodyPr wrap="square" lIns="0" rIns="0" tIns="0" bIns="0">
+            <a:spAutoFit/>
+          </a:bodyPr>
+          <a:lstStyle/>
+          <a:p>
+            <a:pPr algn="ctr"/>
+            <a:r>
+              <a:rPr sz="975" b="1" i="0" u="none">
+                <a:solidFill>
+                  <a:srgbClr val="F5F5F7"/>
+                </a:solidFill>
+                <a:latin typeface="Inter"/>
+              </a:rPr>
+              <a:t>Talk to sales</a:t>
+            </a:r>
+          </a:p>
+        </p:txBody>
+      </p:sp>
+      <p:sp>
+        <p:nvSpPr>
+          <p:cNvPr id="47" name="TextBox 46"/>
+          <p:cNvSpPr txBox="1"/>
+          <p:nvPr/>
+        </p:nvSpPr>
+        <p:spPr>
+          <a:xfrm>
+            <a:off x="762000" y="6477000"/>
+            <a:ext cx="1411635" cy="152400"/>
+          </a:xfrm>
+          <a:prstGeom prst="rect">
+            <a:avLst/>
+          </a:prstGeom>
+          <a:noFill/>
+        </p:spPr>
+        <p:txBody>
+          <a:bodyPr wrap="square" lIns="0" rIns="0" tIns="0" bIns="0">
+            <a:spAutoFit/>
+          </a:bodyPr>
+          <a:lstStyle/>
+          <a:p>
+            <a:pPr algn="l"/>
+            <a:r>
+              <a:rPr sz="975" b="1" i="0" u="none">
+                <a:solidFill>
+                  <a:srgbClr val="52525B"/>
+                </a:solidFill>
+                <a:latin typeface="Inter"/>
+              </a:rPr>
+              <a:t>PIXELPITCH LABS</a:t>
+            </a:r>
+          </a:p>
+        </p:txBody>
+      </p:sp>
+      <p:sp>
+        <p:nvSpPr>
+          <p:cNvPr id="48" name="TextBox 47"/>
+          <p:cNvSpPr txBox="1"/>
+          <p:nvPr/>
+        </p:nvSpPr>
+        <p:spPr>
+          <a:xfrm>
+            <a:off x="10874127" y="6477000"/>
+            <a:ext cx="555873" cy="152400"/>
+          </a:xfrm>
+          <a:prstGeom prst="rect">
+            <a:avLst/>
+          </a:prstGeom>
+          <a:noFill/>
+        </p:spPr>
+        <p:txBody>
+          <a:bodyPr wrap="square" lIns="0" rIns="0" tIns="0" bIns="0">
+            <a:spAutoFit/>
+          </a:bodyPr>
+          <a:lstStyle/>
+          <a:p>
+            <a:pPr algn="l"/>
+            <a:r>
+              <a:rPr sz="975" b="1" i="0" u="none">
+                <a:solidFill>
+                  <a:srgbClr val="52525B"/>
+                </a:solidFill>
+                <a:latin typeface="Inter"/>
+              </a:rPr>
+              <a:t>09 / 12</a:t>
             </a:r>
           </a:p>
         </p:txBody>

--- a/examples/sophisticated/deck.pptx
+++ b/examples/sophisticated/deck.pptx
@@ -14,6 +14,9 @@
     <p:sldId id="262" r:id="rId13"/>
     <p:sldId id="263" r:id="rId14"/>
     <p:sldId id="264" r:id="rId15"/>
+    <p:sldId id="265" r:id="rId16"/>
+    <p:sldId id="266" r:id="rId17"/>
+    <p:sldId id="267" r:id="rId18"/>
   </p:sldIdLst>
   <p:sldSz cx="12192000" cy="6858000" type="screen4x3"/>
   <p:notesSz cx="6858000" cy="9144000"/>
@@ -3630,6 +3633,4147 @@
                 <a:latin typeface="Inter"/>
               </a:rPr>
               <a:t>PIXELPITCH LABS · 01 / 12</a:t>
+            </a:r>
+          </a:p>
+        </p:txBody>
+      </p:sp>
+    </p:spTree>
+  </p:cSld>
+  <p:clrMapOvr>
+    <a:masterClrMapping/>
+  </p:clrMapOvr>
+</p:sld>
+</file>
+
+<file path=ppt/slides/slide10.xml><?xml version="1.0" encoding="utf-8"?>
+<p:sld xmlns:a="http://schemas.openxmlformats.org/drawingml/2006/main" xmlns:p="http://schemas.openxmlformats.org/presentationml/2006/main" xmlns:r="http://schemas.openxmlformats.org/officeDocument/2006/relationships">
+  <p:cSld>
+    <p:spTree>
+      <p:nvGrpSpPr>
+        <p:cNvPr id="1" name=""/>
+        <p:cNvGrpSpPr/>
+        <p:nvPr/>
+      </p:nvGrpSpPr>
+      <p:grpSpPr/>
+      <p:sp>
+        <p:nvSpPr>
+          <p:cNvPr id="2" name="Rectangle 1"/>
+          <p:cNvSpPr/>
+          <p:nvPr/>
+        </p:nvSpPr>
+        <p:spPr>
+          <a:xfrm>
+            <a:off x="0" y="0"/>
+            <a:ext cx="12192000" cy="6858000"/>
+          </a:xfrm>
+          <a:prstGeom prst="rect">
+            <a:avLst/>
+          </a:prstGeom>
+          <a:solidFill>
+            <a:srgbClr val="070710"/>
+          </a:solidFill>
+          <a:ln>
+            <a:noFill/>
+          </a:ln>
+        </p:spPr>
+        <p:style>
+          <a:lnRef idx="1">
+            <a:schemeClr val="accent1"/>
+          </a:lnRef>
+          <a:fillRef idx="3">
+            <a:schemeClr val="accent1"/>
+          </a:fillRef>
+          <a:effectRef idx="2">
+            <a:schemeClr val="accent1"/>
+          </a:effectRef>
+          <a:fontRef idx="minor">
+            <a:schemeClr val="lt1"/>
+          </a:fontRef>
+        </p:style>
+        <p:txBody>
+          <a:bodyPr rtlCol="0" anchor="ctr"/>
+          <a:lstStyle/>
+          <a:p>
+            <a:pPr algn="ctr"/>
+          </a:p>
+        </p:txBody>
+      </p:sp>
+      <p:sp>
+        <p:nvSpPr>
+          <p:cNvPr id="3" name="TextBox 2"/>
+          <p:cNvSpPr txBox="1"/>
+          <p:nvPr/>
+        </p:nvSpPr>
+        <p:spPr>
+          <a:xfrm>
+            <a:off x="762000" y="762000"/>
+            <a:ext cx="10668000" cy="152400"/>
+          </a:xfrm>
+          <a:prstGeom prst="rect">
+            <a:avLst/>
+          </a:prstGeom>
+          <a:noFill/>
+        </p:spPr>
+        <p:txBody>
+          <a:bodyPr wrap="square" lIns="0" rIns="0" tIns="0" bIns="0">
+            <a:spAutoFit/>
+          </a:bodyPr>
+          <a:lstStyle/>
+          <a:p>
+            <a:pPr algn="l"/>
+            <a:r>
+              <a:rPr sz="975" b="1" i="0" u="none">
+                <a:solidFill>
+                  <a:srgbClr val="A78BFA"/>
+                </a:solidFill>
+                <a:latin typeface="Inter"/>
+              </a:rPr>
+              <a:t>Developer experience</a:t>
+            </a:r>
+          </a:p>
+        </p:txBody>
+      </p:sp>
+      <p:sp>
+        <p:nvSpPr>
+          <p:cNvPr id="4" name="TextBox 3"/>
+          <p:cNvSpPr txBox="1"/>
+          <p:nvPr/>
+        </p:nvSpPr>
+        <p:spPr>
+          <a:xfrm>
+            <a:off x="762000" y="1085850"/>
+            <a:ext cx="8382000" cy="920055"/>
+          </a:xfrm>
+          <a:prstGeom prst="rect">
+            <a:avLst/>
+          </a:prstGeom>
+          <a:noFill/>
+        </p:spPr>
+        <p:txBody>
+          <a:bodyPr wrap="square" lIns="0" rIns="0" tIns="0" bIns="0">
+            <a:spAutoFit/>
+          </a:bodyPr>
+          <a:lstStyle/>
+          <a:p>
+            <a:pPr algn="l"/>
+            <a:r>
+              <a:rPr sz="3450" b="1" i="0" u="none">
+                <a:solidFill>
+                  <a:srgbClr val="F5F5F7"/>
+                </a:solidFill>
+                <a:latin typeface="Inter"/>
+              </a:rPr>
+              <a:t>Convert in one command. Edit in PowerPoint forever.</a:t>
+            </a:r>
+          </a:p>
+        </p:txBody>
+      </p:sp>
+      <p:sp>
+        <p:nvSpPr>
+          <p:cNvPr id="5" name="TextBox 4"/>
+          <p:cNvSpPr txBox="1"/>
+          <p:nvPr/>
+        </p:nvSpPr>
+        <p:spPr>
+          <a:xfrm>
+            <a:off x="762000" y="2310705"/>
+            <a:ext cx="7429500" cy="501848"/>
+          </a:xfrm>
+          <a:prstGeom prst="rect">
+            <a:avLst/>
+          </a:prstGeom>
+          <a:noFill/>
+        </p:spPr>
+        <p:txBody>
+          <a:bodyPr wrap="square" lIns="0" rIns="0" tIns="0" bIns="0">
+            <a:spAutoFit/>
+          </a:bodyPr>
+          <a:lstStyle/>
+          <a:p>
+            <a:pPr algn="l"/>
+            <a:r>
+              <a:rPr sz="1275" b="0" i="0" u="none">
+                <a:solidFill>
+                  <a:srgbClr val="A1A1AA"/>
+                </a:solidFill>
+                <a:latin typeface="Inter"/>
+              </a:rPr>
+              <a:t>Slidify is a pip-installable CLI and Python library. Pattern recognition is data; provider fallback is automatic.</a:t>
+            </a:r>
+          </a:p>
+        </p:txBody>
+      </p:sp>
+      <p:sp>
+        <p:nvSpPr>
+          <p:cNvPr id="6" name="Rounded Rectangle 5"/>
+          <p:cNvSpPr/>
+          <p:nvPr/>
+        </p:nvSpPr>
+        <p:spPr>
+          <a:xfrm>
+            <a:off x="762000" y="3079254"/>
+            <a:ext cx="6089600" cy="3699718"/>
+          </a:xfrm>
+          <a:prstGeom prst="roundRect">
+            <a:avLst/>
+          </a:prstGeom>
+          <a:solidFill>
+            <a:srgbClr val="09090B"/>
+          </a:solidFill>
+          <a:ln w="9525">
+            <a:solidFill>
+              <a:srgbClr val="FFFFFF"/>
+            </a:solidFill>
+          </a:ln>
+          <a:effectLst>
+            <a:outerShdw blurRad="762000" dist="266700" dir="5400000" algn="ctr" rotWithShape="0">
+              <a:srgbClr val="000000">
+                <a:alpha val="55000"/>
+              </a:srgbClr>
+            </a:outerShdw>
+          </a:effectLst>
+        </p:spPr>
+        <p:style>
+          <a:lnRef idx="1">
+            <a:schemeClr val="accent1"/>
+          </a:lnRef>
+          <a:fillRef idx="3">
+            <a:schemeClr val="accent1"/>
+          </a:fillRef>
+          <a:effectRef idx="2">
+            <a:schemeClr val="accent1"/>
+          </a:effectRef>
+          <a:fontRef idx="minor">
+            <a:schemeClr val="lt1"/>
+          </a:fontRef>
+        </p:style>
+        <p:txBody>
+          <a:bodyPr rtlCol="0" anchor="ctr"/>
+          <a:lstStyle/>
+          <a:p>
+            <a:pPr algn="ctr"/>
+          </a:p>
+        </p:txBody>
+      </p:sp>
+      <p:sp>
+        <p:nvSpPr>
+          <p:cNvPr id="7" name="Rectangle 6"/>
+          <p:cNvSpPr/>
+          <p:nvPr/>
+        </p:nvSpPr>
+        <p:spPr>
+          <a:xfrm>
+            <a:off x="771525" y="3088779"/>
+            <a:ext cx="6070550" cy="381000"/>
+          </a:xfrm>
+          <a:prstGeom prst="rect">
+            <a:avLst/>
+          </a:prstGeom>
+          <a:solidFill>
+            <a:srgbClr val="0F0F14"/>
+          </a:solidFill>
+          <a:ln>
+            <a:noFill/>
+          </a:ln>
+        </p:spPr>
+        <p:style>
+          <a:lnRef idx="1">
+            <a:schemeClr val="accent1"/>
+          </a:lnRef>
+          <a:fillRef idx="3">
+            <a:schemeClr val="accent1"/>
+          </a:fillRef>
+          <a:effectRef idx="2">
+            <a:schemeClr val="accent1"/>
+          </a:effectRef>
+          <a:fontRef idx="minor">
+            <a:schemeClr val="lt1"/>
+          </a:fontRef>
+        </p:style>
+        <p:txBody>
+          <a:bodyPr rtlCol="0" anchor="ctr"/>
+          <a:lstStyle/>
+          <a:p>
+            <a:pPr algn="ctr"/>
+          </a:p>
+        </p:txBody>
+      </p:sp>
+      <p:sp>
+        <p:nvSpPr>
+          <p:cNvPr id="8" name="Rounded Rectangle 7"/>
+          <p:cNvSpPr/>
+          <p:nvPr/>
+        </p:nvSpPr>
+        <p:spPr>
+          <a:xfrm>
+            <a:off x="923925" y="3226891"/>
+            <a:ext cx="95250" cy="95250"/>
+          </a:xfrm>
+          <a:prstGeom prst="roundRect">
+            <a:avLst/>
+          </a:prstGeom>
+          <a:solidFill>
+            <a:srgbClr val="F87171"/>
+          </a:solidFill>
+          <a:ln>
+            <a:noFill/>
+          </a:ln>
+        </p:spPr>
+        <p:style>
+          <a:lnRef idx="1">
+            <a:schemeClr val="accent1"/>
+          </a:lnRef>
+          <a:fillRef idx="3">
+            <a:schemeClr val="accent1"/>
+          </a:fillRef>
+          <a:effectRef idx="2">
+            <a:schemeClr val="accent1"/>
+          </a:effectRef>
+          <a:fontRef idx="minor">
+            <a:schemeClr val="lt1"/>
+          </a:fontRef>
+        </p:style>
+        <p:txBody>
+          <a:bodyPr rtlCol="0" anchor="ctr"/>
+          <a:lstStyle/>
+          <a:p>
+            <a:pPr algn="ctr"/>
+          </a:p>
+        </p:txBody>
+      </p:sp>
+      <p:sp>
+        <p:nvSpPr>
+          <p:cNvPr id="9" name="Rounded Rectangle 8"/>
+          <p:cNvSpPr/>
+          <p:nvPr/>
+        </p:nvSpPr>
+        <p:spPr>
+          <a:xfrm>
+            <a:off x="1095375" y="3226891"/>
+            <a:ext cx="95250" cy="95250"/>
+          </a:xfrm>
+          <a:prstGeom prst="roundRect">
+            <a:avLst/>
+          </a:prstGeom>
+          <a:solidFill>
+            <a:srgbClr val="FBBF24"/>
+          </a:solidFill>
+          <a:ln>
+            <a:noFill/>
+          </a:ln>
+        </p:spPr>
+        <p:style>
+          <a:lnRef idx="1">
+            <a:schemeClr val="accent1"/>
+          </a:lnRef>
+          <a:fillRef idx="3">
+            <a:schemeClr val="accent1"/>
+          </a:fillRef>
+          <a:effectRef idx="2">
+            <a:schemeClr val="accent1"/>
+          </a:effectRef>
+          <a:fontRef idx="minor">
+            <a:schemeClr val="lt1"/>
+          </a:fontRef>
+        </p:style>
+        <p:txBody>
+          <a:bodyPr rtlCol="0" anchor="ctr"/>
+          <a:lstStyle/>
+          <a:p>
+            <a:pPr algn="ctr"/>
+          </a:p>
+        </p:txBody>
+      </p:sp>
+      <p:sp>
+        <p:nvSpPr>
+          <p:cNvPr id="10" name="Rounded Rectangle 9"/>
+          <p:cNvSpPr/>
+          <p:nvPr/>
+        </p:nvSpPr>
+        <p:spPr>
+          <a:xfrm>
+            <a:off x="1266825" y="3226891"/>
+            <a:ext cx="95250" cy="95250"/>
+          </a:xfrm>
+          <a:prstGeom prst="roundRect">
+            <a:avLst/>
+          </a:prstGeom>
+          <a:solidFill>
+            <a:srgbClr val="4ADE80"/>
+          </a:solidFill>
+          <a:ln>
+            <a:noFill/>
+          </a:ln>
+        </p:spPr>
+        <p:style>
+          <a:lnRef idx="1">
+            <a:schemeClr val="accent1"/>
+          </a:lnRef>
+          <a:fillRef idx="3">
+            <a:schemeClr val="accent1"/>
+          </a:fillRef>
+          <a:effectRef idx="2">
+            <a:schemeClr val="accent1"/>
+          </a:effectRef>
+          <a:fontRef idx="minor">
+            <a:schemeClr val="lt1"/>
+          </a:fontRef>
+        </p:style>
+        <p:txBody>
+          <a:bodyPr rtlCol="0" anchor="ctr"/>
+          <a:lstStyle/>
+          <a:p>
+            <a:pPr algn="ctr"/>
+          </a:p>
+        </p:txBody>
+      </p:sp>
+      <p:sp>
+        <p:nvSpPr>
+          <p:cNvPr id="11" name="TextBox 10"/>
+          <p:cNvSpPr txBox="1"/>
+          <p:nvPr/>
+        </p:nvSpPr>
+        <p:spPr>
+          <a:xfrm>
+            <a:off x="1514475" y="3203079"/>
+            <a:ext cx="789533" cy="142875"/>
+          </a:xfrm>
+          <a:prstGeom prst="rect">
+            <a:avLst/>
+          </a:prstGeom>
+          <a:noFill/>
+        </p:spPr>
+        <p:txBody>
+          <a:bodyPr wrap="square" lIns="0" rIns="0" tIns="0" bIns="0">
+            <a:spAutoFit/>
+          </a:bodyPr>
+          <a:lstStyle/>
+          <a:p>
+            <a:pPr algn="l"/>
+            <a:r>
+              <a:rPr sz="900" b="0" i="0" u="none">
+                <a:solidFill>
+                  <a:srgbClr val="71717A"/>
+                </a:solidFill>
+                <a:latin typeface="Inter"/>
+              </a:rPr>
+              <a:t>~/decks · zsh</a:t>
+            </a:r>
+          </a:p>
+        </p:txBody>
+      </p:sp>
+      <p:sp>
+        <p:nvSpPr>
+          <p:cNvPr id="12" name="TextBox 11"/>
+          <p:cNvSpPr txBox="1"/>
+          <p:nvPr/>
+        </p:nvSpPr>
+        <p:spPr>
+          <a:xfrm>
+            <a:off x="1198959" y="3726954"/>
+            <a:ext cx="4014192" cy="152400"/>
+          </a:xfrm>
+          <a:prstGeom prst="rect">
+            <a:avLst/>
+          </a:prstGeom>
+          <a:noFill/>
+        </p:spPr>
+        <p:txBody>
+          <a:bodyPr wrap="square" lIns="0" rIns="0" tIns="0" bIns="0">
+            <a:spAutoFit/>
+          </a:bodyPr>
+          <a:lstStyle/>
+          <a:p>
+            <a:pPr algn="l"/>
+            <a:r>
+              <a:rPr sz="1050" b="0" i="0" u="none">
+                <a:solidFill>
+                  <a:srgbClr val="F5F5F7"/>
+                </a:solidFill>
+                <a:latin typeface="Jetbrains Mono"/>
+              </a:rPr>
+              <a:t>pip install slidify &amp;&amp; playwright install chromium</a:t>
+            </a:r>
+          </a:p>
+        </p:txBody>
+      </p:sp>
+      <p:sp>
+        <p:nvSpPr>
+          <p:cNvPr id="13" name="TextBox 12"/>
+          <p:cNvSpPr txBox="1"/>
+          <p:nvPr/>
+        </p:nvSpPr>
+        <p:spPr>
+          <a:xfrm>
+            <a:off x="1038225" y="3925044"/>
+            <a:ext cx="5537150" cy="226665"/>
+          </a:xfrm>
+          <a:prstGeom prst="rect">
+            <a:avLst/>
+          </a:prstGeom>
+          <a:noFill/>
+        </p:spPr>
+        <p:txBody>
+          <a:bodyPr wrap="square" lIns="0" rIns="0" tIns="0" bIns="0">
+            <a:spAutoFit/>
+          </a:bodyPr>
+          <a:lstStyle/>
+          <a:p>
+            <a:pPr algn="l"/>
+            <a:r>
+              <a:rPr sz="1050" b="0" i="0" u="none">
+                <a:solidFill>
+                  <a:srgbClr val="A1A1AA"/>
+                </a:solidFill>
+                <a:latin typeface="Jetbrains Mono"/>
+              </a:rPr>
+              <a:t>Installed slidify 1.0.0 in 1.7s</a:t>
+            </a:r>
+          </a:p>
+        </p:txBody>
+      </p:sp>
+      <p:sp>
+        <p:nvSpPr>
+          <p:cNvPr id="14" name="TextBox 13"/>
+          <p:cNvSpPr txBox="1"/>
+          <p:nvPr/>
+        </p:nvSpPr>
+        <p:spPr>
+          <a:xfrm>
+            <a:off x="1198959" y="4406950"/>
+            <a:ext cx="2167682" cy="152400"/>
+          </a:xfrm>
+          <a:prstGeom prst="rect">
+            <a:avLst/>
+          </a:prstGeom>
+          <a:noFill/>
+        </p:spPr>
+        <p:txBody>
+          <a:bodyPr wrap="square" lIns="0" rIns="0" tIns="0" bIns="0">
+            <a:spAutoFit/>
+          </a:bodyPr>
+          <a:lstStyle/>
+          <a:p>
+            <a:pPr algn="l"/>
+            <a:r>
+              <a:rPr sz="1050" b="0" i="0" u="none">
+                <a:solidFill>
+                  <a:srgbClr val="F5F5F7"/>
+                </a:solidFill>
+                <a:latin typeface="Jetbrains Mono"/>
+              </a:rPr>
+              <a:t>slidify deck.html deck.pptx</a:t>
+            </a:r>
+          </a:p>
+        </p:txBody>
+      </p:sp>
+      <p:sp>
+        <p:nvSpPr>
+          <p:cNvPr id="15" name="TextBox 14"/>
+          <p:cNvSpPr txBox="1"/>
+          <p:nvPr/>
+        </p:nvSpPr>
+        <p:spPr>
+          <a:xfrm>
+            <a:off x="1038225" y="4605040"/>
+            <a:ext cx="5537150" cy="226665"/>
+          </a:xfrm>
+          <a:prstGeom prst="rect">
+            <a:avLst/>
+          </a:prstGeom>
+          <a:noFill/>
+        </p:spPr>
+        <p:txBody>
+          <a:bodyPr wrap="square" lIns="0" rIns="0" tIns="0" bIns="0">
+            <a:spAutoFit/>
+          </a:bodyPr>
+          <a:lstStyle/>
+          <a:p>
+            <a:pPr algn="l"/>
+            <a:r>
+              <a:rPr sz="1050" b="0" i="0" u="none">
+                <a:solidFill>
+                  <a:srgbClr val="A1A1AA"/>
+                </a:solidFill>
+                <a:latin typeface="Jetbrains Mono"/>
+              </a:rPr>
+              <a:t>  ✓ Splitting     ▏ </a:t>
+            </a:r>
+            <a:r>
+              <a:rPr sz="1050" b="1" i="0" u="none">
+                <a:solidFill>
+                  <a:srgbClr val="FBBF24"/>
+                </a:solidFill>
+                <a:latin typeface="Jetbrains Mono"/>
+              </a:rPr>
+              <a:t>12</a:t>
+            </a:r>
+            <a:r>
+              <a:rPr sz="1050" b="0" i="0" u="none">
+                <a:solidFill>
+                  <a:srgbClr val="A1A1AA"/>
+                </a:solidFill>
+                <a:latin typeface="Jetbrains Mono"/>
+              </a:rPr>
+              <a:t> slides</a:t>
+            </a:r>
+          </a:p>
+        </p:txBody>
+      </p:sp>
+      <p:sp>
+        <p:nvSpPr>
+          <p:cNvPr id="16" name="TextBox 15"/>
+          <p:cNvSpPr txBox="1"/>
+          <p:nvPr/>
+        </p:nvSpPr>
+        <p:spPr>
+          <a:xfrm>
+            <a:off x="1038225" y="4831705"/>
+            <a:ext cx="5537150" cy="226665"/>
+          </a:xfrm>
+          <a:prstGeom prst="rect">
+            <a:avLst/>
+          </a:prstGeom>
+          <a:noFill/>
+        </p:spPr>
+        <p:txBody>
+          <a:bodyPr wrap="square" lIns="0" rIns="0" tIns="0" bIns="0">
+            <a:spAutoFit/>
+          </a:bodyPr>
+          <a:lstStyle/>
+          <a:p>
+            <a:pPr algn="l"/>
+            <a:r>
+              <a:rPr sz="1050" b="0" i="0" u="none">
+                <a:solidFill>
+                  <a:srgbClr val="A1A1AA"/>
+                </a:solidFill>
+                <a:latin typeface="Jetbrains Mono"/>
+              </a:rPr>
+              <a:t>  ✓ Rendering     ▏ </a:t>
+            </a:r>
+            <a:r>
+              <a:rPr sz="1050" b="1" i="0" u="none">
+                <a:solidFill>
+                  <a:srgbClr val="FBBF24"/>
+                </a:solidFill>
+                <a:latin typeface="Jetbrains Mono"/>
+              </a:rPr>
+              <a:t>2.4s</a:t>
+            </a:r>
+            <a:r>
+              <a:rPr sz="1050" b="0" i="0" u="none">
+                <a:solidFill>
+                  <a:srgbClr val="A1A1AA"/>
+                </a:solidFill>
+                <a:latin typeface="Jetbrains Mono"/>
+              </a:rPr>
+              <a:t> · 4 parallel</a:t>
+            </a:r>
+          </a:p>
+        </p:txBody>
+      </p:sp>
+      <p:sp>
+        <p:nvSpPr>
+          <p:cNvPr id="17" name="TextBox 16"/>
+          <p:cNvSpPr txBox="1"/>
+          <p:nvPr/>
+        </p:nvSpPr>
+        <p:spPr>
+          <a:xfrm>
+            <a:off x="1038225" y="5058370"/>
+            <a:ext cx="5537150" cy="226665"/>
+          </a:xfrm>
+          <a:prstGeom prst="rect">
+            <a:avLst/>
+          </a:prstGeom>
+          <a:noFill/>
+        </p:spPr>
+        <p:txBody>
+          <a:bodyPr wrap="square" lIns="0" rIns="0" tIns="0" bIns="0">
+            <a:spAutoFit/>
+          </a:bodyPr>
+          <a:lstStyle/>
+          <a:p>
+            <a:pPr algn="l"/>
+            <a:r>
+              <a:rPr sz="1050" b="0" i="0" u="none">
+                <a:solidFill>
+                  <a:srgbClr val="A1A1AA"/>
+                </a:solidFill>
+                <a:latin typeface="Jetbrains Mono"/>
+              </a:rPr>
+              <a:t>  ✓ Classifying   ▏ tier0=</a:t>
+            </a:r>
+            <a:r>
+              <a:rPr sz="1050" b="1" i="0" u="none">
+                <a:solidFill>
+                  <a:srgbClr val="FBBF24"/>
+                </a:solidFill>
+                <a:latin typeface="Jetbrains Mono"/>
+              </a:rPr>
+              <a:t>65</a:t>
+            </a:r>
+            <a:r>
+              <a:rPr sz="1050" b="0" i="0" u="none">
+                <a:solidFill>
+                  <a:srgbClr val="A1A1AA"/>
+                </a:solidFill>
+                <a:latin typeface="Jetbrains Mono"/>
+              </a:rPr>
+              <a:t> tier1=</a:t>
+            </a:r>
+            <a:r>
+              <a:rPr sz="1050" b="1" i="0" u="none">
+                <a:solidFill>
+                  <a:srgbClr val="FBBF24"/>
+                </a:solidFill>
+                <a:latin typeface="Jetbrains Mono"/>
+              </a:rPr>
+              <a:t>4</a:t>
+            </a:r>
+            <a:r>
+              <a:rPr sz="1050" b="0" i="0" u="none">
+                <a:solidFill>
+                  <a:srgbClr val="A1A1AA"/>
+                </a:solidFill>
+                <a:latin typeface="Jetbrains Mono"/>
+              </a:rPr>
+              <a:t> tier2=</a:t>
+            </a:r>
+            <a:r>
+              <a:rPr sz="1050" b="1" i="0" u="none">
+                <a:solidFill>
+                  <a:srgbClr val="FBBF24"/>
+                </a:solidFill>
+                <a:latin typeface="Jetbrains Mono"/>
+              </a:rPr>
+              <a:t>5</a:t>
+            </a:r>
+          </a:p>
+        </p:txBody>
+      </p:sp>
+      <p:sp>
+        <p:nvSpPr>
+          <p:cNvPr id="18" name="TextBox 17"/>
+          <p:cNvSpPr txBox="1"/>
+          <p:nvPr/>
+        </p:nvSpPr>
+        <p:spPr>
+          <a:xfrm>
+            <a:off x="1038225" y="5285036"/>
+            <a:ext cx="5537150" cy="226665"/>
+          </a:xfrm>
+          <a:prstGeom prst="rect">
+            <a:avLst/>
+          </a:prstGeom>
+          <a:noFill/>
+        </p:spPr>
+        <p:txBody>
+          <a:bodyPr wrap="square" lIns="0" rIns="0" tIns="0" bIns="0">
+            <a:spAutoFit/>
+          </a:bodyPr>
+          <a:lstStyle/>
+          <a:p>
+            <a:pPr algn="l"/>
+            <a:r>
+              <a:rPr sz="1050" b="0" i="0" u="none">
+                <a:solidFill>
+                  <a:srgbClr val="A1A1AA"/>
+                </a:solidFill>
+                <a:latin typeface="Jetbrains Mono"/>
+              </a:rPr>
+              <a:t>  ✓ Emitting      ▏ </a:t>
+            </a:r>
+            <a:r>
+              <a:rPr sz="1050" b="1" i="0" u="none">
+                <a:solidFill>
+                  <a:srgbClr val="FBBF24"/>
+                </a:solidFill>
+                <a:latin typeface="Jetbrains Mono"/>
+              </a:rPr>
+              <a:t>3.7 MB</a:t>
+            </a:r>
+            <a:r>
+              <a:rPr sz="1050" b="0" i="0" u="none">
+                <a:solidFill>
+                  <a:srgbClr val="A1A1AA"/>
+                </a:solidFill>
+                <a:latin typeface="Jetbrains Mono"/>
+              </a:rPr>
+              <a:t> output</a:t>
+            </a:r>
+          </a:p>
+        </p:txBody>
+      </p:sp>
+      <p:sp>
+        <p:nvSpPr>
+          <p:cNvPr id="19" name="TextBox 18"/>
+          <p:cNvSpPr txBox="1"/>
+          <p:nvPr/>
+        </p:nvSpPr>
+        <p:spPr>
+          <a:xfrm>
+            <a:off x="1038225" y="5511701"/>
+            <a:ext cx="5537150" cy="226665"/>
+          </a:xfrm>
+          <a:prstGeom prst="rect">
+            <a:avLst/>
+          </a:prstGeom>
+          <a:noFill/>
+        </p:spPr>
+        <p:txBody>
+          <a:bodyPr wrap="square" lIns="0" rIns="0" tIns="0" bIns="0">
+            <a:spAutoFit/>
+          </a:bodyPr>
+          <a:lstStyle/>
+          <a:p>
+            <a:pPr algn="l"/>
+            <a:r>
+              <a:rPr sz="1050" b="0" i="0" u="none">
+                <a:solidFill>
+                  <a:srgbClr val="A1A1AA"/>
+                </a:solidFill>
+                <a:latin typeface="Jetbrains Mono"/>
+              </a:rPr>
+              <a:t>  ✓ Validating    ▏ </a:t>
+            </a:r>
+            <a:r>
+              <a:rPr sz="1050" b="1" i="0" u="none">
+                <a:solidFill>
+                  <a:srgbClr val="FBBF24"/>
+                </a:solidFill>
+                <a:latin typeface="Jetbrains Mono"/>
+              </a:rPr>
+              <a:t>12/12</a:t>
+            </a:r>
+            <a:r>
+              <a:rPr sz="1050" b="0" i="0" u="none">
+                <a:solidFill>
+                  <a:srgbClr val="A1A1AA"/>
+                </a:solidFill>
+                <a:latin typeface="Jetbrains Mono"/>
+              </a:rPr>
+              <a:t> passed</a:t>
+            </a:r>
+          </a:p>
+        </p:txBody>
+      </p:sp>
+      <p:sp>
+        <p:nvSpPr>
+          <p:cNvPr id="20" name="TextBox 19"/>
+          <p:cNvSpPr txBox="1"/>
+          <p:nvPr/>
+        </p:nvSpPr>
+        <p:spPr>
+          <a:xfrm>
+            <a:off x="1038225" y="5965031"/>
+            <a:ext cx="5537150" cy="226665"/>
+          </a:xfrm>
+          <a:prstGeom prst="rect">
+            <a:avLst/>
+          </a:prstGeom>
+          <a:noFill/>
+        </p:spPr>
+        <p:txBody>
+          <a:bodyPr wrap="square" lIns="0" rIns="0" tIns="0" bIns="0">
+            <a:spAutoFit/>
+          </a:bodyPr>
+          <a:lstStyle/>
+          <a:p>
+            <a:pPr algn="l"/>
+            <a:r>
+              <a:rPr sz="1050" b="1" i="0" u="none">
+                <a:solidFill>
+                  <a:srgbClr val="86EFAC"/>
+                </a:solidFill>
+                <a:latin typeface="Jetbrains Mono"/>
+              </a:rPr>
+              <a:t>native_area_ratio: </a:t>
+            </a:r>
+            <a:r>
+              <a:rPr sz="1050" b="1" i="0" u="none">
+                <a:solidFill>
+                  <a:srgbClr val="F472B6"/>
+                </a:solidFill>
+                <a:latin typeface="Jetbrains Mono"/>
+              </a:rPr>
+              <a:t>0.886</a:t>
+            </a:r>
+            <a:r>
+              <a:rPr sz="1050" b="1" i="0" u="none">
+                <a:solidFill>
+                  <a:srgbClr val="86EFAC"/>
+                </a:solidFill>
+                <a:latin typeface="Jetbrains Mono"/>
+              </a:rPr>
+              <a:t> · cost: </a:t>
+            </a:r>
+            <a:r>
+              <a:rPr sz="1050" b="1" i="0" u="none">
+                <a:solidFill>
+                  <a:srgbClr val="F472B6"/>
+                </a:solidFill>
+                <a:latin typeface="Jetbrains Mono"/>
+              </a:rPr>
+              <a:t>$0.04</a:t>
+            </a:r>
+          </a:p>
+        </p:txBody>
+      </p:sp>
+      <p:sp>
+        <p:nvSpPr>
+          <p:cNvPr id="21" name="Rounded Rectangle 20"/>
+          <p:cNvSpPr/>
+          <p:nvPr/>
+        </p:nvSpPr>
+        <p:spPr>
+          <a:xfrm>
+            <a:off x="7080200" y="3079254"/>
+            <a:ext cx="2108150" cy="895350"/>
+          </a:xfrm>
+          <a:prstGeom prst="roundRect">
+            <a:avLst/>
+          </a:prstGeom>
+          <a:solidFill>
+            <a:srgbClr val="FFFFFF"/>
+          </a:solidFill>
+          <a:ln w="9525">
+            <a:solidFill>
+              <a:srgbClr val="FFFFFF"/>
+            </a:solidFill>
+          </a:ln>
+        </p:spPr>
+        <p:style>
+          <a:lnRef idx="1">
+            <a:schemeClr val="accent1"/>
+          </a:lnRef>
+          <a:fillRef idx="3">
+            <a:schemeClr val="accent1"/>
+          </a:fillRef>
+          <a:effectRef idx="2">
+            <a:schemeClr val="accent1"/>
+          </a:effectRef>
+          <a:fontRef idx="minor">
+            <a:schemeClr val="lt1"/>
+          </a:fontRef>
+        </p:style>
+        <p:txBody>
+          <a:bodyPr rtlCol="0" anchor="ctr"/>
+          <a:lstStyle/>
+          <a:p>
+            <a:pPr algn="ctr"/>
+          </a:p>
+        </p:txBody>
+      </p:sp>
+      <p:sp>
+        <p:nvSpPr>
+          <p:cNvPr id="22" name="TextBox 21"/>
+          <p:cNvSpPr txBox="1"/>
+          <p:nvPr/>
+        </p:nvSpPr>
+        <p:spPr>
+          <a:xfrm>
+            <a:off x="7280225" y="3260229"/>
+            <a:ext cx="1708100" cy="133350"/>
+          </a:xfrm>
+          <a:prstGeom prst="rect">
+            <a:avLst/>
+          </a:prstGeom>
+          <a:noFill/>
+        </p:spPr>
+        <p:txBody>
+          <a:bodyPr wrap="square" lIns="0" rIns="0" tIns="0" bIns="0">
+            <a:spAutoFit/>
+          </a:bodyPr>
+          <a:lstStyle/>
+          <a:p>
+            <a:pPr algn="l"/>
+            <a:r>
+              <a:rPr sz="825" b="1" i="0" u="none">
+                <a:solidFill>
+                  <a:srgbClr val="A1A1AA"/>
+                </a:solidFill>
+                <a:latin typeface="Inter"/>
+              </a:rPr>
+              <a:t>Time-to-first-deck</a:t>
+            </a:r>
+          </a:p>
+        </p:txBody>
+      </p:sp>
+      <p:sp>
+        <p:nvSpPr>
+          <p:cNvPr id="23" name="TextBox 22"/>
+          <p:cNvSpPr txBox="1"/>
+          <p:nvPr/>
+        </p:nvSpPr>
+        <p:spPr>
+          <a:xfrm>
+            <a:off x="7280225" y="3450729"/>
+            <a:ext cx="1708100" cy="342900"/>
+          </a:xfrm>
+          <a:prstGeom prst="rect">
+            <a:avLst/>
+          </a:prstGeom>
+          <a:noFill/>
+        </p:spPr>
+        <p:txBody>
+          <a:bodyPr wrap="square" lIns="0" rIns="0" tIns="0" bIns="0">
+            <a:spAutoFit/>
+          </a:bodyPr>
+          <a:lstStyle/>
+          <a:p>
+            <a:pPr algn="l"/>
+            <a:r>
+              <a:rPr sz="2250" b="1" i="0" u="none">
+                <a:solidFill>
+                  <a:srgbClr val="F5F5F7"/>
+                </a:solidFill>
+                <a:latin typeface="Inter"/>
+              </a:rPr>
+              <a:t>38</a:t>
+            </a:r>
+            <a:r>
+              <a:rPr sz="1050" b="1" i="0" u="none">
+                <a:solidFill>
+                  <a:srgbClr val="A78BFA"/>
+                </a:solidFill>
+                <a:latin typeface="Inter"/>
+              </a:rPr>
+              <a:t>s</a:t>
+            </a:r>
+          </a:p>
+        </p:txBody>
+      </p:sp>
+      <p:sp>
+        <p:nvSpPr>
+          <p:cNvPr id="24" name="Rounded Rectangle 23"/>
+          <p:cNvSpPr/>
+          <p:nvPr/>
+        </p:nvSpPr>
+        <p:spPr>
+          <a:xfrm>
+            <a:off x="9321701" y="3079254"/>
+            <a:ext cx="2108150" cy="895350"/>
+          </a:xfrm>
+          <a:prstGeom prst="roundRect">
+            <a:avLst/>
+          </a:prstGeom>
+          <a:solidFill>
+            <a:srgbClr val="FFFFFF"/>
+          </a:solidFill>
+          <a:ln w="9525">
+            <a:solidFill>
+              <a:srgbClr val="FFFFFF"/>
+            </a:solidFill>
+          </a:ln>
+        </p:spPr>
+        <p:style>
+          <a:lnRef idx="1">
+            <a:schemeClr val="accent1"/>
+          </a:lnRef>
+          <a:fillRef idx="3">
+            <a:schemeClr val="accent1"/>
+          </a:fillRef>
+          <a:effectRef idx="2">
+            <a:schemeClr val="accent1"/>
+          </a:effectRef>
+          <a:fontRef idx="minor">
+            <a:schemeClr val="lt1"/>
+          </a:fontRef>
+        </p:style>
+        <p:txBody>
+          <a:bodyPr rtlCol="0" anchor="ctr"/>
+          <a:lstStyle/>
+          <a:p>
+            <a:pPr algn="ctr"/>
+          </a:p>
+        </p:txBody>
+      </p:sp>
+      <p:sp>
+        <p:nvSpPr>
+          <p:cNvPr id="25" name="TextBox 24"/>
+          <p:cNvSpPr txBox="1"/>
+          <p:nvPr/>
+        </p:nvSpPr>
+        <p:spPr>
+          <a:xfrm>
+            <a:off x="9521726" y="3260229"/>
+            <a:ext cx="1708100" cy="133350"/>
+          </a:xfrm>
+          <a:prstGeom prst="rect">
+            <a:avLst/>
+          </a:prstGeom>
+          <a:noFill/>
+        </p:spPr>
+        <p:txBody>
+          <a:bodyPr wrap="square" lIns="0" rIns="0" tIns="0" bIns="0">
+            <a:spAutoFit/>
+          </a:bodyPr>
+          <a:lstStyle/>
+          <a:p>
+            <a:pPr algn="l"/>
+            <a:r>
+              <a:rPr sz="825" b="1" i="0" u="none">
+                <a:solidFill>
+                  <a:srgbClr val="A1A1AA"/>
+                </a:solidFill>
+                <a:latin typeface="Inter"/>
+              </a:rPr>
+              <a:t>Lines of code</a:t>
+            </a:r>
+          </a:p>
+        </p:txBody>
+      </p:sp>
+      <p:sp>
+        <p:nvSpPr>
+          <p:cNvPr id="26" name="TextBox 25"/>
+          <p:cNvSpPr txBox="1"/>
+          <p:nvPr/>
+        </p:nvSpPr>
+        <p:spPr>
+          <a:xfrm>
+            <a:off x="9521726" y="3450729"/>
+            <a:ext cx="1708100" cy="342900"/>
+          </a:xfrm>
+          <a:prstGeom prst="rect">
+            <a:avLst/>
+          </a:prstGeom>
+          <a:noFill/>
+        </p:spPr>
+        <p:txBody>
+          <a:bodyPr wrap="square" lIns="0" rIns="0" tIns="0" bIns="0">
+            <a:spAutoFit/>
+          </a:bodyPr>
+          <a:lstStyle/>
+          <a:p>
+            <a:pPr algn="l"/>
+            <a:r>
+              <a:rPr sz="2250" b="1" i="0" u="none">
+                <a:solidFill>
+                  <a:srgbClr val="F5F5F7"/>
+                </a:solidFill>
+                <a:latin typeface="Inter"/>
+              </a:rPr>
+              <a:t>3</a:t>
+            </a:r>
+          </a:p>
+        </p:txBody>
+      </p:sp>
+      <p:sp>
+        <p:nvSpPr>
+          <p:cNvPr id="27" name="Rounded Rectangle 26"/>
+          <p:cNvSpPr/>
+          <p:nvPr/>
+        </p:nvSpPr>
+        <p:spPr>
+          <a:gradFill flip="none" rotWithShape="1">
+            <a:gsLst>
+              <a:gs pos="0">
+                <a:srgbClr val="6366F1">
+                  <a:alpha val="16000"/>
+                </a:srgbClr>
+              </a:gs>
+              <a:gs pos="100000">
+                <a:srgbClr val="EC4899">
+                  <a:alpha val="10000"/>
+                </a:srgbClr>
+              </a:gs>
+            </a:gsLst>
+            <a:lin ang="2700000" scaled="0"/>
+          </a:gradFill>
+          <a:xfrm>
+            <a:off x="7080200" y="4146054"/>
+            <a:ext cx="4349651" cy="1185118"/>
+          </a:xfrm>
+          <a:prstGeom prst="roundRect">
+            <a:avLst/>
+          </a:prstGeom>
+          <a:ln w="9525">
+            <a:solidFill>
+              <a:srgbClr val="A78BFA"/>
+            </a:solidFill>
+          </a:ln>
+        </p:spPr>
+        <p:style>
+          <a:lnRef idx="1">
+            <a:schemeClr val="accent1"/>
+          </a:lnRef>
+          <a:fillRef idx="3">
+            <a:schemeClr val="accent1"/>
+          </a:fillRef>
+          <a:effectRef idx="2">
+            <a:schemeClr val="accent1"/>
+          </a:effectRef>
+          <a:fontRef idx="minor">
+            <a:schemeClr val="lt1"/>
+          </a:fontRef>
+        </p:style>
+        <p:txBody>
+          <a:bodyPr rtlCol="0" anchor="ctr"/>
+          <a:lstStyle/>
+          <a:p>
+            <a:pPr algn="ctr"/>
+          </a:p>
+        </p:txBody>
+      </p:sp>
+      <p:sp>
+        <p:nvSpPr>
+          <p:cNvPr id="28" name="TextBox 27"/>
+          <p:cNvSpPr txBox="1"/>
+          <p:nvPr/>
+        </p:nvSpPr>
+        <p:spPr>
+          <a:xfrm>
+            <a:off x="7299275" y="4346079"/>
+            <a:ext cx="3911501" cy="133350"/>
+          </a:xfrm>
+          <a:prstGeom prst="rect">
+            <a:avLst/>
+          </a:prstGeom>
+          <a:noFill/>
+        </p:spPr>
+        <p:txBody>
+          <a:bodyPr wrap="square" lIns="0" rIns="0" tIns="0" bIns="0">
+            <a:spAutoFit/>
+          </a:bodyPr>
+          <a:lstStyle/>
+          <a:p>
+            <a:r>
+              <a:rPr sz="825" b="1">
+                <a:solidFill>
+                  <a:srgbClr val="C084FC"/>
+                </a:solidFill>
+                <a:latin typeface="Inter"/>
+              </a:rPr>
+              <a:t>• No API key? No problem.</a:t>
+            </a:r>
+          </a:p>
+        </p:txBody>
+      </p:sp>
+      <p:sp>
+        <p:nvSpPr>
+          <p:cNvPr id="29" name="TextBox 28"/>
+          <p:cNvSpPr txBox="1"/>
+          <p:nvPr/>
+        </p:nvSpPr>
+        <p:spPr>
+          <a:xfrm>
+            <a:off x="7299275" y="4555629"/>
+            <a:ext cx="3911501" cy="575518"/>
+          </a:xfrm>
+          <a:prstGeom prst="rect">
+            <a:avLst/>
+          </a:prstGeom>
+          <a:noFill/>
+        </p:spPr>
+        <p:txBody>
+          <a:bodyPr wrap="square" lIns="0" rIns="0" tIns="0" bIns="0">
+            <a:spAutoFit/>
+          </a:bodyPr>
+          <a:lstStyle/>
+          <a:p>
+            <a:pPr algn="l"/>
+            <a:r>
+              <a:rPr sz="975" b="0" i="0" u="none">
+                <a:solidFill>
+                  <a:srgbClr val="E4E4E7"/>
+                </a:solidFill>
+                <a:latin typeface="Inter"/>
+              </a:rPr>
+              <a:t>Tier-3 LLM is opt-in. Without credentials slidify falls back to safe Raster decisions for the ambiguous tail and ships a fully-correct PPTX.</a:t>
+            </a:r>
+          </a:p>
+        </p:txBody>
+      </p:sp>
+      <p:sp>
+        <p:nvSpPr>
+          <p:cNvPr id="30" name="Rounded Rectangle 29"/>
+          <p:cNvSpPr/>
+          <p:nvPr/>
+        </p:nvSpPr>
+        <p:spPr>
+          <a:xfrm>
+            <a:off x="7080200" y="5502622"/>
+            <a:ext cx="4349651" cy="1276350"/>
+          </a:xfrm>
+          <a:prstGeom prst="roundRect">
+            <a:avLst/>
+          </a:prstGeom>
+          <a:solidFill>
+            <a:srgbClr val="FFFFFF"/>
+          </a:solidFill>
+          <a:ln w="9525">
+            <a:solidFill>
+              <a:srgbClr val="FFFFFF"/>
+            </a:solidFill>
+          </a:ln>
+        </p:spPr>
+        <p:style>
+          <a:lnRef idx="1">
+            <a:schemeClr val="accent1"/>
+          </a:lnRef>
+          <a:fillRef idx="3">
+            <a:schemeClr val="accent1"/>
+          </a:fillRef>
+          <a:effectRef idx="2">
+            <a:schemeClr val="accent1"/>
+          </a:effectRef>
+          <a:fontRef idx="minor">
+            <a:schemeClr val="lt1"/>
+          </a:fontRef>
+        </p:style>
+        <p:txBody>
+          <a:bodyPr rtlCol="0" anchor="ctr"/>
+          <a:lstStyle/>
+          <a:p>
+            <a:pPr algn="ctr"/>
+          </a:p>
+        </p:txBody>
+      </p:sp>
+      <p:sp>
+        <p:nvSpPr>
+          <p:cNvPr id="31" name="TextBox 30"/>
+          <p:cNvSpPr txBox="1"/>
+          <p:nvPr/>
+        </p:nvSpPr>
+        <p:spPr>
+          <a:xfrm>
+            <a:off x="7280225" y="5683597"/>
+            <a:ext cx="3949601" cy="133350"/>
+          </a:xfrm>
+          <a:prstGeom prst="rect">
+            <a:avLst/>
+          </a:prstGeom>
+          <a:noFill/>
+        </p:spPr>
+        <p:txBody>
+          <a:bodyPr wrap="square" lIns="0" rIns="0" tIns="0" bIns="0">
+            <a:spAutoFit/>
+          </a:bodyPr>
+          <a:lstStyle/>
+          <a:p>
+            <a:r>
+              <a:rPr sz="825" b="1">
+                <a:solidFill>
+                  <a:srgbClr val="A1A1AA"/>
+                </a:solidFill>
+                <a:latin typeface="Inter"/>
+              </a:rPr>
+              <a:t>• Backends</a:t>
+            </a:r>
+          </a:p>
+        </p:txBody>
+      </p:sp>
+      <p:sp>
+        <p:nvSpPr>
+          <p:cNvPr id="32" name="TextBox 31"/>
+          <p:cNvSpPr txBox="1"/>
+          <p:nvPr/>
+        </p:nvSpPr>
+        <p:spPr>
+          <a:xfrm>
+            <a:off x="7280225" y="5874097"/>
+            <a:ext cx="3949601" cy="342900"/>
+          </a:xfrm>
+          <a:prstGeom prst="rect">
+            <a:avLst/>
+          </a:prstGeom>
+          <a:noFill/>
+        </p:spPr>
+        <p:txBody>
+          <a:bodyPr wrap="square" lIns="0" rIns="0" tIns="0" bIns="0">
+            <a:spAutoFit/>
+          </a:bodyPr>
+          <a:lstStyle/>
+          <a:p>
+            <a:pPr algn="l"/>
+            <a:r>
+              <a:rPr sz="2250" b="1" i="0" u="none">
+                <a:solidFill>
+                  <a:srgbClr val="F5F5F7"/>
+                </a:solidFill>
+                <a:latin typeface="Inter"/>
+              </a:rPr>
+              <a:t>4</a:t>
+            </a:r>
+          </a:p>
+        </p:txBody>
+      </p:sp>
+      <p:sp>
+        <p:nvSpPr>
+          <p:cNvPr id="33" name="TextBox 32"/>
+          <p:cNvSpPr txBox="1"/>
+          <p:nvPr/>
+        </p:nvSpPr>
+        <p:spPr>
+          <a:xfrm>
+            <a:off x="7280225" y="6293197"/>
+            <a:ext cx="3949601" cy="304800"/>
+          </a:xfrm>
+          <a:prstGeom prst="rect">
+            <a:avLst/>
+          </a:prstGeom>
+          <a:noFill/>
+        </p:spPr>
+        <p:txBody>
+          <a:bodyPr wrap="square" lIns="0" rIns="0" tIns="0" bIns="0">
+            <a:spAutoFit/>
+          </a:bodyPr>
+          <a:lstStyle/>
+          <a:p>
+            <a:pPr algn="l"/>
+            <a:r>
+              <a:rPr sz="975" b="0" i="0" u="none">
+                <a:solidFill>
+                  <a:srgbClr val="A1A1AA"/>
+                </a:solidFill>
+                <a:latin typeface="Inter"/>
+              </a:rPr>
+              <a:t>Gemini AI Studio, Gemini Vertex, Anthropic, Claude Vertex. Auto-detected.</a:t>
+            </a:r>
+          </a:p>
+        </p:txBody>
+      </p:sp>
+      <p:sp>
+        <p:nvSpPr>
+          <p:cNvPr id="34" name="TextBox 33"/>
+          <p:cNvSpPr txBox="1"/>
+          <p:nvPr/>
+        </p:nvSpPr>
+        <p:spPr>
+          <a:xfrm>
+            <a:off x="762000" y="6477000"/>
+            <a:ext cx="1411635" cy="152400"/>
+          </a:xfrm>
+          <a:prstGeom prst="rect">
+            <a:avLst/>
+          </a:prstGeom>
+          <a:noFill/>
+        </p:spPr>
+        <p:txBody>
+          <a:bodyPr wrap="square" lIns="0" rIns="0" tIns="0" bIns="0">
+            <a:spAutoFit/>
+          </a:bodyPr>
+          <a:lstStyle/>
+          <a:p>
+            <a:pPr algn="l"/>
+            <a:r>
+              <a:rPr sz="975" b="1" i="0" u="none">
+                <a:solidFill>
+                  <a:srgbClr val="52525B"/>
+                </a:solidFill>
+                <a:latin typeface="Inter"/>
+              </a:rPr>
+              <a:t>PIXELPITCH LABS</a:t>
+            </a:r>
+          </a:p>
+        </p:txBody>
+      </p:sp>
+      <p:sp>
+        <p:nvSpPr>
+          <p:cNvPr id="35" name="TextBox 34"/>
+          <p:cNvSpPr txBox="1"/>
+          <p:nvPr/>
+        </p:nvSpPr>
+        <p:spPr>
+          <a:xfrm>
+            <a:off x="10901065" y="6477000"/>
+            <a:ext cx="528935" cy="152400"/>
+          </a:xfrm>
+          <a:prstGeom prst="rect">
+            <a:avLst/>
+          </a:prstGeom>
+          <a:noFill/>
+        </p:spPr>
+        <p:txBody>
+          <a:bodyPr wrap="square" lIns="0" rIns="0" tIns="0" bIns="0">
+            <a:spAutoFit/>
+          </a:bodyPr>
+          <a:lstStyle/>
+          <a:p>
+            <a:pPr algn="l"/>
+            <a:r>
+              <a:rPr sz="975" b="1" i="0" u="none">
+                <a:solidFill>
+                  <a:srgbClr val="52525B"/>
+                </a:solidFill>
+                <a:latin typeface="Inter"/>
+              </a:rPr>
+              <a:t>10 / 12</a:t>
+            </a:r>
+          </a:p>
+        </p:txBody>
+      </p:sp>
+    </p:spTree>
+  </p:cSld>
+  <p:clrMapOvr>
+    <a:masterClrMapping/>
+  </p:clrMapOvr>
+</p:sld>
+</file>
+
+<file path=ppt/slides/slide11.xml><?xml version="1.0" encoding="utf-8"?>
+<p:sld xmlns:a="http://schemas.openxmlformats.org/drawingml/2006/main" xmlns:p="http://schemas.openxmlformats.org/presentationml/2006/main" xmlns:r="http://schemas.openxmlformats.org/officeDocument/2006/relationships">
+  <p:cSld>
+    <p:spTree>
+      <p:nvGrpSpPr>
+        <p:cNvPr id="1" name=""/>
+        <p:cNvGrpSpPr/>
+        <p:nvPr/>
+      </p:nvGrpSpPr>
+      <p:grpSpPr/>
+      <p:sp>
+        <p:nvSpPr>
+          <p:cNvPr id="2" name="Rectangle 1"/>
+          <p:cNvSpPr/>
+          <p:nvPr/>
+        </p:nvSpPr>
+        <p:spPr>
+          <a:xfrm>
+            <a:off x="0" y="0"/>
+            <a:ext cx="12192000" cy="6858000"/>
+          </a:xfrm>
+          <a:prstGeom prst="rect">
+            <a:avLst/>
+          </a:prstGeom>
+          <a:solidFill>
+            <a:srgbClr val="070710"/>
+          </a:solidFill>
+          <a:ln>
+            <a:noFill/>
+          </a:ln>
+        </p:spPr>
+        <p:style>
+          <a:lnRef idx="1">
+            <a:schemeClr val="accent1"/>
+          </a:lnRef>
+          <a:fillRef idx="3">
+            <a:schemeClr val="accent1"/>
+          </a:fillRef>
+          <a:effectRef idx="2">
+            <a:schemeClr val="accent1"/>
+          </a:effectRef>
+          <a:fontRef idx="minor">
+            <a:schemeClr val="lt1"/>
+          </a:fontRef>
+        </p:style>
+        <p:txBody>
+          <a:bodyPr rtlCol="0" anchor="ctr"/>
+          <a:lstStyle/>
+          <a:p>
+            <a:pPr algn="ctr"/>
+          </a:p>
+        </p:txBody>
+      </p:sp>
+      <p:sp>
+        <p:nvSpPr>
+          <p:cNvPr id="3" name="TextBox 2"/>
+          <p:cNvSpPr txBox="1"/>
+          <p:nvPr/>
+        </p:nvSpPr>
+        <p:spPr>
+          <a:xfrm>
+            <a:off x="762000" y="762000"/>
+            <a:ext cx="10668000" cy="152400"/>
+          </a:xfrm>
+          <a:prstGeom prst="rect">
+            <a:avLst/>
+          </a:prstGeom>
+          <a:noFill/>
+        </p:spPr>
+        <p:txBody>
+          <a:bodyPr wrap="square" lIns="0" rIns="0" tIns="0" bIns="0">
+            <a:spAutoFit/>
+          </a:bodyPr>
+          <a:lstStyle/>
+          <a:p>
+            <a:pPr algn="l"/>
+            <a:r>
+              <a:rPr sz="975" b="1" i="0" u="none">
+                <a:solidFill>
+                  <a:srgbClr val="A78BFA"/>
+                </a:solidFill>
+                <a:latin typeface="Inter"/>
+              </a:rPr>
+              <a:t>Roadmap</a:t>
+            </a:r>
+          </a:p>
+        </p:txBody>
+      </p:sp>
+      <p:sp>
+        <p:nvSpPr>
+          <p:cNvPr id="4" name="TextBox 3"/>
+          <p:cNvSpPr txBox="1"/>
+          <p:nvPr/>
+        </p:nvSpPr>
+        <p:spPr>
+          <a:xfrm>
+            <a:off x="762000" y="1085850"/>
+            <a:ext cx="8382000" cy="460028"/>
+          </a:xfrm>
+          <a:prstGeom prst="rect">
+            <a:avLst/>
+          </a:prstGeom>
+          <a:noFill/>
+        </p:spPr>
+        <p:txBody>
+          <a:bodyPr wrap="square" lIns="0" rIns="0" tIns="0" bIns="0">
+            <a:spAutoFit/>
+          </a:bodyPr>
+          <a:lstStyle/>
+          <a:p>
+            <a:pPr algn="l"/>
+            <a:r>
+              <a:rPr sz="3450" b="1" i="0" u="none">
+                <a:solidFill>
+                  <a:srgbClr val="F5F5F7"/>
+                </a:solidFill>
+                <a:latin typeface="Inter"/>
+              </a:rPr>
+              <a:t>Where we are. Where we're going.</a:t>
+            </a:r>
+          </a:p>
+        </p:txBody>
+      </p:sp>
+      <p:sp>
+        <p:nvSpPr>
+          <p:cNvPr id="5" name="Rounded Rectangle 4"/>
+          <p:cNvSpPr/>
+          <p:nvPr/>
+        </p:nvSpPr>
+        <p:spPr>
+          <a:xfrm>
+            <a:off x="762000" y="2079278"/>
+            <a:ext cx="2538412" cy="3275112"/>
+          </a:xfrm>
+          <a:prstGeom prst="roundRect">
+            <a:avLst/>
+          </a:prstGeom>
+          <a:solidFill>
+            <a:srgbClr val="FFFFFF"/>
+          </a:solidFill>
+          <a:ln w="9525">
+            <a:solidFill>
+              <a:srgbClr val="FFFFFF"/>
+            </a:solidFill>
+          </a:ln>
+          <a:effectLst>
+            <a:outerShdw blurRad="457200" dist="152400" dir="5400000" algn="ctr" rotWithShape="0">
+              <a:srgbClr val="6366F1">
+                <a:alpha val="6000"/>
+              </a:srgbClr>
+            </a:outerShdw>
+          </a:effectLst>
+        </p:spPr>
+        <p:style>
+          <a:lnRef idx="1">
+            <a:schemeClr val="accent1"/>
+          </a:lnRef>
+          <a:fillRef idx="3">
+            <a:schemeClr val="accent1"/>
+          </a:fillRef>
+          <a:effectRef idx="2">
+            <a:schemeClr val="accent1"/>
+          </a:effectRef>
+          <a:fontRef idx="minor">
+            <a:schemeClr val="lt1"/>
+          </a:fontRef>
+        </p:style>
+        <p:txBody>
+          <a:bodyPr rtlCol="0" anchor="ctr"/>
+          <a:lstStyle/>
+          <a:p>
+            <a:pPr algn="ctr"/>
+          </a:p>
+        </p:txBody>
+      </p:sp>
+      <p:sp>
+        <p:nvSpPr>
+          <p:cNvPr id="6" name="TextBox 5"/>
+          <p:cNvSpPr txBox="1"/>
+          <p:nvPr/>
+        </p:nvSpPr>
+        <p:spPr>
+          <a:xfrm>
+            <a:off x="981075" y="2317403"/>
+            <a:ext cx="333821" cy="200025"/>
+          </a:xfrm>
+          <a:prstGeom prst="rect">
+            <a:avLst/>
+          </a:prstGeom>
+          <a:noFill/>
+        </p:spPr>
+        <p:txBody>
+          <a:bodyPr wrap="square" lIns="0" rIns="0" tIns="0" bIns="0">
+            <a:spAutoFit/>
+          </a:bodyPr>
+          <a:lstStyle/>
+          <a:p>
+            <a:pPr algn="l"/>
+            <a:r>
+              <a:rPr sz="1350" b="1" i="0" u="none">
+                <a:solidFill>
+                  <a:srgbClr val="F5F5F7"/>
+                </a:solidFill>
+                <a:latin typeface="Inter"/>
+              </a:rPr>
+              <a:t>Q1</a:t>
+            </a:r>
+          </a:p>
+        </p:txBody>
+      </p:sp>
+      <p:sp>
+        <p:nvSpPr>
+          <p:cNvPr id="7" name="TextBox 6"/>
+          <p:cNvSpPr txBox="1"/>
+          <p:nvPr/>
+        </p:nvSpPr>
+        <p:spPr>
+          <a:xfrm>
+            <a:off x="981075" y="2517428"/>
+            <a:ext cx="333821" cy="133350"/>
+          </a:xfrm>
+          <a:prstGeom prst="rect">
+            <a:avLst/>
+          </a:prstGeom>
+          <a:noFill/>
+        </p:spPr>
+        <p:txBody>
+          <a:bodyPr wrap="square" lIns="0" rIns="0" tIns="0" bIns="0">
+            <a:spAutoFit/>
+          </a:bodyPr>
+          <a:lstStyle/>
+          <a:p>
+            <a:pPr algn="l"/>
+            <a:r>
+              <a:rPr sz="825" b="1" i="0" u="none">
+                <a:solidFill>
+                  <a:srgbClr val="71717A"/>
+                </a:solidFill>
+                <a:latin typeface="Inter"/>
+              </a:rPr>
+              <a:t>2026</a:t>
+            </a:r>
+          </a:p>
+        </p:txBody>
+      </p:sp>
+      <p:sp>
+        <p:nvSpPr>
+          <p:cNvPr id="8" name="TextBox 7"/>
+          <p:cNvSpPr txBox="1"/>
+          <p:nvPr/>
+        </p:nvSpPr>
+        <p:spPr>
+          <a:xfrm>
+            <a:off x="2545705" y="2317403"/>
+            <a:ext cx="535632" cy="209550"/>
+          </a:xfrm>
+          <a:prstGeom prst="rect">
+            <a:avLst/>
+          </a:prstGeom>
+          <a:solidFill>
+            <a:srgbClr val="22C55E"/>
+          </a:solidFill>
+        </p:spPr>
+        <p:txBody>
+          <a:bodyPr wrap="square" lIns="0" rIns="0" tIns="0" bIns="0">
+            <a:spAutoFit/>
+          </a:bodyPr>
+          <a:lstStyle/>
+          <a:p>
+            <a:pPr algn="l"/>
+            <a:r>
+              <a:rPr sz="800" b="1" i="0" u="none">
+                <a:solidFill>
+                  <a:srgbClr val="86EFAC"/>
+                </a:solidFill>
+                <a:latin typeface="Inter"/>
+              </a:rPr>
+              <a:t>DONE</a:t>
+            </a:r>
+          </a:p>
+        </p:txBody>
+      </p:sp>
+      <p:sp>
+        <p:nvSpPr>
+          <p:cNvPr id="9" name="TextBox 8"/>
+          <p:cNvSpPr txBox="1"/>
+          <p:nvPr/>
+        </p:nvSpPr>
+        <p:spPr>
+          <a:xfrm>
+            <a:off x="981075" y="3060353"/>
+            <a:ext cx="117723" cy="206573"/>
+          </a:xfrm>
+          <a:prstGeom prst="rect">
+            <a:avLst/>
+          </a:prstGeom>
+          <a:noFill/>
+        </p:spPr>
+        <p:txBody>
+          <a:bodyPr wrap="square" lIns="0" rIns="0" tIns="0" bIns="0">
+            <a:spAutoFit/>
+          </a:bodyPr>
+          <a:lstStyle/>
+          <a:p>
+            <a:pPr algn="l"/>
+            <a:r>
+              <a:rPr sz="1050" b="1" i="0" u="none">
+                <a:solidFill>
+                  <a:srgbClr val="86EFAC"/>
+                </a:solidFill>
+                <a:latin typeface="Inter"/>
+              </a:rPr>
+              <a:t>✓</a:t>
+            </a:r>
+          </a:p>
+        </p:txBody>
+      </p:sp>
+      <p:sp>
+        <p:nvSpPr>
+          <p:cNvPr id="10" name="TextBox 9"/>
+          <p:cNvSpPr txBox="1"/>
+          <p:nvPr/>
+        </p:nvSpPr>
+        <p:spPr>
+          <a:xfrm>
+            <a:off x="1194048" y="3060353"/>
+            <a:ext cx="1395412" cy="191839"/>
+          </a:xfrm>
+          <a:prstGeom prst="rect">
+            <a:avLst/>
+          </a:prstGeom>
+          <a:noFill/>
+        </p:spPr>
+        <p:txBody>
+          <a:bodyPr wrap="square" lIns="0" rIns="0" tIns="0" bIns="0">
+            <a:spAutoFit/>
+          </a:bodyPr>
+          <a:lstStyle/>
+          <a:p>
+            <a:pPr algn="l"/>
+            <a:r>
+              <a:rPr sz="975" b="0" i="0" u="none">
+                <a:solidFill>
+                  <a:srgbClr val="E4E4E7"/>
+                </a:solidFill>
+                <a:latin typeface="Inter"/>
+              </a:rPr>
+              <a:t>Tier-1 + Tier-2 classifier</a:t>
+            </a:r>
+          </a:p>
+        </p:txBody>
+      </p:sp>
+      <p:sp>
+        <p:nvSpPr>
+          <p:cNvPr id="11" name="TextBox 10"/>
+          <p:cNvSpPr txBox="1"/>
+          <p:nvPr/>
+        </p:nvSpPr>
+        <p:spPr>
+          <a:xfrm>
+            <a:off x="981075" y="3447901"/>
+            <a:ext cx="117723" cy="206573"/>
+          </a:xfrm>
+          <a:prstGeom prst="rect">
+            <a:avLst/>
+          </a:prstGeom>
+          <a:noFill/>
+        </p:spPr>
+        <p:txBody>
+          <a:bodyPr wrap="square" lIns="0" rIns="0" tIns="0" bIns="0">
+            <a:spAutoFit/>
+          </a:bodyPr>
+          <a:lstStyle/>
+          <a:p>
+            <a:pPr algn="l"/>
+            <a:r>
+              <a:rPr sz="1050" b="1" i="0" u="none">
+                <a:solidFill>
+                  <a:srgbClr val="86EFAC"/>
+                </a:solidFill>
+                <a:latin typeface="Inter"/>
+              </a:rPr>
+              <a:t>✓</a:t>
+            </a:r>
+          </a:p>
+        </p:txBody>
+      </p:sp>
+      <p:sp>
+        <p:nvSpPr>
+          <p:cNvPr id="12" name="TextBox 11"/>
+          <p:cNvSpPr txBox="1"/>
+          <p:nvPr/>
+        </p:nvSpPr>
+        <p:spPr>
+          <a:xfrm>
+            <a:off x="1194048" y="3447901"/>
+            <a:ext cx="1088975" cy="191839"/>
+          </a:xfrm>
+          <a:prstGeom prst="rect">
+            <a:avLst/>
+          </a:prstGeom>
+          <a:noFill/>
+        </p:spPr>
+        <p:txBody>
+          <a:bodyPr wrap="square" lIns="0" rIns="0" tIns="0" bIns="0">
+            <a:spAutoFit/>
+          </a:bodyPr>
+          <a:lstStyle/>
+          <a:p>
+            <a:pPr algn="l"/>
+            <a:r>
+              <a:rPr sz="975" b="0" i="0" u="none">
+                <a:solidFill>
+                  <a:srgbClr val="E4E4E7"/>
+                </a:solidFill>
+                <a:latin typeface="Inter"/>
+              </a:rPr>
+              <a:t>Streaming pipeline</a:t>
+            </a:r>
+          </a:p>
+        </p:txBody>
+      </p:sp>
+      <p:sp>
+        <p:nvSpPr>
+          <p:cNvPr id="13" name="TextBox 12"/>
+          <p:cNvSpPr txBox="1"/>
+          <p:nvPr/>
+        </p:nvSpPr>
+        <p:spPr>
+          <a:xfrm>
+            <a:off x="981075" y="3835450"/>
+            <a:ext cx="117723" cy="206573"/>
+          </a:xfrm>
+          <a:prstGeom prst="rect">
+            <a:avLst/>
+          </a:prstGeom>
+          <a:noFill/>
+        </p:spPr>
+        <p:txBody>
+          <a:bodyPr wrap="square" lIns="0" rIns="0" tIns="0" bIns="0">
+            <a:spAutoFit/>
+          </a:bodyPr>
+          <a:lstStyle/>
+          <a:p>
+            <a:pPr algn="l"/>
+            <a:r>
+              <a:rPr sz="1050" b="1" i="0" u="none">
+                <a:solidFill>
+                  <a:srgbClr val="86EFAC"/>
+                </a:solidFill>
+                <a:latin typeface="Inter"/>
+              </a:rPr>
+              <a:t>✓</a:t>
+            </a:r>
+          </a:p>
+        </p:txBody>
+      </p:sp>
+      <p:sp>
+        <p:nvSpPr>
+          <p:cNvPr id="14" name="TextBox 13"/>
+          <p:cNvSpPr txBox="1"/>
+          <p:nvPr/>
+        </p:nvSpPr>
+        <p:spPr>
+          <a:xfrm>
+            <a:off x="1194048" y="3835450"/>
+            <a:ext cx="1118592" cy="191839"/>
+          </a:xfrm>
+          <a:prstGeom prst="rect">
+            <a:avLst/>
+          </a:prstGeom>
+          <a:noFill/>
+        </p:spPr>
+        <p:txBody>
+          <a:bodyPr wrap="square" lIns="0" rIns="0" tIns="0" bIns="0">
+            <a:spAutoFit/>
+          </a:bodyPr>
+          <a:lstStyle/>
+          <a:p>
+            <a:pPr algn="l"/>
+            <a:r>
+              <a:rPr sz="975" b="0" i="0" u="none">
+                <a:solidFill>
+                  <a:srgbClr val="E4E4E7"/>
+                </a:solidFill>
+                <a:latin typeface="Inter"/>
+              </a:rPr>
+              <a:t>SSIM + OCR oracle</a:t>
+            </a:r>
+          </a:p>
+        </p:txBody>
+      </p:sp>
+      <p:sp>
+        <p:nvSpPr>
+          <p:cNvPr id="15" name="TextBox 14"/>
+          <p:cNvSpPr txBox="1"/>
+          <p:nvPr/>
+        </p:nvSpPr>
+        <p:spPr>
+          <a:xfrm>
+            <a:off x="981075" y="4222998"/>
+            <a:ext cx="117723" cy="206573"/>
+          </a:xfrm>
+          <a:prstGeom prst="rect">
+            <a:avLst/>
+          </a:prstGeom>
+          <a:noFill/>
+        </p:spPr>
+        <p:txBody>
+          <a:bodyPr wrap="square" lIns="0" rIns="0" tIns="0" bIns="0">
+            <a:spAutoFit/>
+          </a:bodyPr>
+          <a:lstStyle/>
+          <a:p>
+            <a:pPr algn="l"/>
+            <a:r>
+              <a:rPr sz="1050" b="1" i="0" u="none">
+                <a:solidFill>
+                  <a:srgbClr val="86EFAC"/>
+                </a:solidFill>
+                <a:latin typeface="Inter"/>
+              </a:rPr>
+              <a:t>✓</a:t>
+            </a:r>
+          </a:p>
+        </p:txBody>
+      </p:sp>
+      <p:sp>
+        <p:nvSpPr>
+          <p:cNvPr id="16" name="TextBox 15"/>
+          <p:cNvSpPr txBox="1"/>
+          <p:nvPr/>
+        </p:nvSpPr>
+        <p:spPr>
+          <a:xfrm>
+            <a:off x="1194048" y="4222998"/>
+            <a:ext cx="1117550" cy="191839"/>
+          </a:xfrm>
+          <a:prstGeom prst="rect">
+            <a:avLst/>
+          </a:prstGeom>
+          <a:noFill/>
+        </p:spPr>
+        <p:txBody>
+          <a:bodyPr wrap="square" lIns="0" rIns="0" tIns="0" bIns="0">
+            <a:spAutoFit/>
+          </a:bodyPr>
+          <a:lstStyle/>
+          <a:p>
+            <a:pPr algn="l"/>
+            <a:r>
+              <a:rPr sz="975" b="0" i="0" u="none">
+                <a:solidFill>
+                  <a:srgbClr val="E4E4E7"/>
+                </a:solidFill>
+                <a:latin typeface="Inter"/>
+              </a:rPr>
+              <a:t>Multi-provider LLM</a:t>
+            </a:r>
+          </a:p>
+        </p:txBody>
+      </p:sp>
+      <p:sp>
+        <p:nvSpPr>
+          <p:cNvPr id="17" name="TextBox 16"/>
+          <p:cNvSpPr txBox="1"/>
+          <p:nvPr/>
+        </p:nvSpPr>
+        <p:spPr>
+          <a:xfrm>
+            <a:off x="981075" y="4667696"/>
+            <a:ext cx="2100262" cy="286196"/>
+          </a:xfrm>
+          <a:prstGeom prst="rect">
+            <a:avLst/>
+          </a:prstGeom>
+          <a:noFill/>
+        </p:spPr>
+        <p:txBody>
+          <a:bodyPr wrap="square" lIns="0" rIns="0" tIns="0" bIns="0">
+            <a:spAutoFit/>
+          </a:bodyPr>
+          <a:lstStyle/>
+          <a:p>
+            <a:pPr algn="l"/>
+            <a:r>
+              <a:rPr sz="825" b="0" i="0" u="none">
+                <a:solidFill>
+                  <a:srgbClr val="71717A"/>
+                </a:solidFill>
+                <a:latin typeface="Inter"/>
+              </a:rPr>
+              <a:t>Foundation shipped Mar 18.</a:t>
+            </a:r>
+          </a:p>
+        </p:txBody>
+      </p:sp>
+      <p:sp>
+        <p:nvSpPr>
+          <p:cNvPr id="18" name="Rounded Rectangle 17"/>
+          <p:cNvSpPr/>
+          <p:nvPr/>
+        </p:nvSpPr>
+        <p:spPr>
+          <a:gradFill flip="none" rotWithShape="1">
+            <a:gsLst>
+              <a:gs pos="0">
+                <a:srgbClr val="6366F1">
+                  <a:alpha val="18000"/>
+                </a:srgbClr>
+              </a:gs>
+              <a:gs pos="100000">
+                <a:srgbClr val="EC4899">
+                  <a:alpha val="10000"/>
+                </a:srgbClr>
+              </a:gs>
+            </a:gsLst>
+            <a:lin ang="4200000" scaled="0"/>
+          </a:gradFill>
+          <a:xfrm>
+            <a:off x="3471862" y="2079278"/>
+            <a:ext cx="2538412" cy="3275112"/>
+          </a:xfrm>
+          <a:prstGeom prst="roundRect">
+            <a:avLst/>
+          </a:prstGeom>
+          <a:ln w="9525">
+            <a:solidFill>
+              <a:srgbClr val="A78BFA"/>
+            </a:solidFill>
+          </a:ln>
+          <a:effectLst>
+            <a:outerShdw blurRad="762000" dist="0" dir="0" algn="ctr" rotWithShape="0">
+              <a:srgbClr val="8B5CF6">
+                <a:alpha val="18000"/>
+              </a:srgbClr>
+            </a:outerShdw>
+          </a:effectLst>
+        </p:spPr>
+        <p:style>
+          <a:lnRef idx="1">
+            <a:schemeClr val="accent1"/>
+          </a:lnRef>
+          <a:fillRef idx="3">
+            <a:schemeClr val="accent1"/>
+          </a:fillRef>
+          <a:effectRef idx="2">
+            <a:schemeClr val="accent1"/>
+          </a:effectRef>
+          <a:fontRef idx="minor">
+            <a:schemeClr val="lt1"/>
+          </a:fontRef>
+        </p:style>
+        <p:txBody>
+          <a:bodyPr rtlCol="0" anchor="ctr"/>
+          <a:lstStyle/>
+          <a:p>
+            <a:pPr algn="ctr"/>
+          </a:p>
+        </p:txBody>
+      </p:sp>
+      <p:sp>
+        <p:nvSpPr>
+          <p:cNvPr id="19" name="TextBox 18"/>
+          <p:cNvSpPr txBox="1"/>
+          <p:nvPr/>
+        </p:nvSpPr>
+        <p:spPr>
+          <a:xfrm>
+            <a:off x="3690938" y="2317403"/>
+            <a:ext cx="333821" cy="200025"/>
+          </a:xfrm>
+          <a:prstGeom prst="rect">
+            <a:avLst/>
+          </a:prstGeom>
+          <a:noFill/>
+        </p:spPr>
+        <p:txBody>
+          <a:bodyPr wrap="square" lIns="0" rIns="0" tIns="0" bIns="0">
+            <a:spAutoFit/>
+          </a:bodyPr>
+          <a:lstStyle/>
+          <a:p>
+            <a:pPr algn="l"/>
+            <a:r>
+              <a:rPr sz="1350" b="1" i="0" u="none">
+                <a:solidFill>
+                  <a:srgbClr val="F5F5F7"/>
+                </a:solidFill>
+                <a:latin typeface="Inter"/>
+              </a:rPr>
+              <a:t>Q2</a:t>
+            </a:r>
+          </a:p>
+        </p:txBody>
+      </p:sp>
+      <p:sp>
+        <p:nvSpPr>
+          <p:cNvPr id="20" name="TextBox 19"/>
+          <p:cNvSpPr txBox="1"/>
+          <p:nvPr/>
+        </p:nvSpPr>
+        <p:spPr>
+          <a:xfrm>
+            <a:off x="3690938" y="2517428"/>
+            <a:ext cx="333821" cy="133350"/>
+          </a:xfrm>
+          <a:prstGeom prst="rect">
+            <a:avLst/>
+          </a:prstGeom>
+          <a:noFill/>
+        </p:spPr>
+        <p:txBody>
+          <a:bodyPr wrap="square" lIns="0" rIns="0" tIns="0" bIns="0">
+            <a:spAutoFit/>
+          </a:bodyPr>
+          <a:lstStyle/>
+          <a:p>
+            <a:pPr algn="l"/>
+            <a:r>
+              <a:rPr sz="825" b="1" i="0" u="none">
+                <a:solidFill>
+                  <a:srgbClr val="71717A"/>
+                </a:solidFill>
+                <a:latin typeface="Inter"/>
+              </a:rPr>
+              <a:t>2026</a:t>
+            </a:r>
+          </a:p>
+        </p:txBody>
+      </p:sp>
+      <p:sp>
+        <p:nvSpPr>
+          <p:cNvPr id="21" name="TextBox 20"/>
+          <p:cNvSpPr txBox="1"/>
+          <p:nvPr/>
+        </p:nvSpPr>
+        <p:spPr>
+          <a:gradFill flip="none" rotWithShape="1">
+            <a:gsLst>
+              <a:gs pos="0">
+                <a:srgbClr val="A78BFA"/>
+              </a:gs>
+              <a:gs pos="100000">
+                <a:srgbClr val="EC4899"/>
+              </a:gs>
+            </a:gsLst>
+            <a:lin ang="2700000" scaled="0"/>
+          </a:gradFill>
+          <a:xfrm>
+            <a:off x="5318075" y="2317403"/>
+            <a:ext cx="473125" cy="190500"/>
+          </a:xfrm>
+          <a:prstGeom prst="rect">
+            <a:avLst/>
+          </a:prstGeom>
+        </p:spPr>
+        <p:txBody>
+          <a:bodyPr wrap="square" lIns="0" rIns="0" tIns="0" bIns="0">
+            <a:spAutoFit/>
+          </a:bodyPr>
+          <a:lstStyle/>
+          <a:p>
+            <a:pPr algn="l"/>
+            <a:r>
+              <a:rPr sz="800" b="1" i="0" u="none">
+                <a:solidFill>
+                  <a:srgbClr val="0A0A0F"/>
+                </a:solidFill>
+                <a:latin typeface="Inter"/>
+              </a:rPr>
+              <a:t>NOW</a:t>
+            </a:r>
+          </a:p>
+        </p:txBody>
+      </p:sp>
+      <p:sp>
+        <p:nvSpPr>
+          <p:cNvPr id="22" name="TextBox 21"/>
+          <p:cNvSpPr txBox="1"/>
+          <p:nvPr/>
+        </p:nvSpPr>
+        <p:spPr>
+          <a:xfrm>
+            <a:off x="3690938" y="3060353"/>
+            <a:ext cx="121890" cy="206573"/>
+          </a:xfrm>
+          <a:prstGeom prst="rect">
+            <a:avLst/>
+          </a:prstGeom>
+          <a:noFill/>
+        </p:spPr>
+        <p:txBody>
+          <a:bodyPr wrap="square" lIns="0" rIns="0" tIns="0" bIns="0">
+            <a:spAutoFit/>
+          </a:bodyPr>
+          <a:lstStyle/>
+          <a:p>
+            <a:pPr algn="l"/>
+            <a:r>
+              <a:rPr sz="1050" b="1" i="0" u="none">
+                <a:solidFill>
+                  <a:srgbClr val="A78BFA"/>
+                </a:solidFill>
+                <a:latin typeface="Inter"/>
+              </a:rPr>
+              <a:t>●</a:t>
+            </a:r>
+          </a:p>
+        </p:txBody>
+      </p:sp>
+      <p:sp>
+        <p:nvSpPr>
+          <p:cNvPr id="23" name="TextBox 22"/>
+          <p:cNvSpPr txBox="1"/>
+          <p:nvPr/>
+        </p:nvSpPr>
+        <p:spPr>
+          <a:xfrm>
+            <a:off x="3908078" y="3060353"/>
+            <a:ext cx="1386036" cy="191839"/>
+          </a:xfrm>
+          <a:prstGeom prst="rect">
+            <a:avLst/>
+          </a:prstGeom>
+          <a:noFill/>
+        </p:spPr>
+        <p:txBody>
+          <a:bodyPr wrap="square" lIns="0" rIns="0" tIns="0" bIns="0">
+            <a:spAutoFit/>
+          </a:bodyPr>
+          <a:lstStyle/>
+          <a:p>
+            <a:pPr algn="l"/>
+            <a:r>
+              <a:rPr sz="975" b="0" i="0" u="none">
+                <a:solidFill>
+                  <a:srgbClr val="E4E4E7"/>
+                </a:solidFill>
+                <a:latin typeface="Inter"/>
+              </a:rPr>
+              <a:t>Tier-0 pattern database</a:t>
+            </a:r>
+          </a:p>
+        </p:txBody>
+      </p:sp>
+      <p:sp>
+        <p:nvSpPr>
+          <p:cNvPr id="24" name="TextBox 23"/>
+          <p:cNvSpPr txBox="1"/>
+          <p:nvPr/>
+        </p:nvSpPr>
+        <p:spPr>
+          <a:xfrm>
+            <a:off x="3690938" y="3447901"/>
+            <a:ext cx="121890" cy="206573"/>
+          </a:xfrm>
+          <a:prstGeom prst="rect">
+            <a:avLst/>
+          </a:prstGeom>
+          <a:noFill/>
+        </p:spPr>
+        <p:txBody>
+          <a:bodyPr wrap="square" lIns="0" rIns="0" tIns="0" bIns="0">
+            <a:spAutoFit/>
+          </a:bodyPr>
+          <a:lstStyle/>
+          <a:p>
+            <a:pPr algn="l"/>
+            <a:r>
+              <a:rPr sz="1050" b="1" i="0" u="none">
+                <a:solidFill>
+                  <a:srgbClr val="A78BFA"/>
+                </a:solidFill>
+                <a:latin typeface="Inter"/>
+              </a:rPr>
+              <a:t>●</a:t>
+            </a:r>
+          </a:p>
+        </p:txBody>
+      </p:sp>
+      <p:sp>
+        <p:nvSpPr>
+          <p:cNvPr id="25" name="TextBox 24"/>
+          <p:cNvSpPr txBox="1"/>
+          <p:nvPr/>
+        </p:nvSpPr>
+        <p:spPr>
+          <a:xfrm>
+            <a:off x="3908078" y="3447901"/>
+            <a:ext cx="1629668" cy="191839"/>
+          </a:xfrm>
+          <a:prstGeom prst="rect">
+            <a:avLst/>
+          </a:prstGeom>
+          <a:noFill/>
+        </p:spPr>
+        <p:txBody>
+          <a:bodyPr wrap="square" lIns="0" rIns="0" tIns="0" bIns="0">
+            <a:spAutoFit/>
+          </a:bodyPr>
+          <a:lstStyle/>
+          <a:p>
+            <a:pPr algn="l"/>
+            <a:r>
+              <a:rPr sz="975" b="0" i="0" u="none">
+                <a:solidFill>
+                  <a:srgbClr val="E4E4E7"/>
+                </a:solidFill>
+                <a:latin typeface="Inter"/>
+              </a:rPr>
+              <a:t>Native gradients + shadows</a:t>
+            </a:r>
+          </a:p>
+        </p:txBody>
+      </p:sp>
+      <p:sp>
+        <p:nvSpPr>
+          <p:cNvPr id="26" name="TextBox 25"/>
+          <p:cNvSpPr txBox="1"/>
+          <p:nvPr/>
+        </p:nvSpPr>
+        <p:spPr>
+          <a:xfrm>
+            <a:off x="3690938" y="3835450"/>
+            <a:ext cx="121890" cy="206573"/>
+          </a:xfrm>
+          <a:prstGeom prst="rect">
+            <a:avLst/>
+          </a:prstGeom>
+          <a:noFill/>
+        </p:spPr>
+        <p:txBody>
+          <a:bodyPr wrap="square" lIns="0" rIns="0" tIns="0" bIns="0">
+            <a:spAutoFit/>
+          </a:bodyPr>
+          <a:lstStyle/>
+          <a:p>
+            <a:pPr algn="l"/>
+            <a:r>
+              <a:rPr sz="1050" b="1" i="0" u="none">
+                <a:solidFill>
+                  <a:srgbClr val="A78BFA"/>
+                </a:solidFill>
+                <a:latin typeface="Inter"/>
+              </a:rPr>
+              <a:t>●</a:t>
+            </a:r>
+          </a:p>
+        </p:txBody>
+      </p:sp>
+      <p:sp>
+        <p:nvSpPr>
+          <p:cNvPr id="27" name="TextBox 26"/>
+          <p:cNvSpPr txBox="1"/>
+          <p:nvPr/>
+        </p:nvSpPr>
+        <p:spPr>
+          <a:xfrm>
+            <a:off x="3908078" y="3835450"/>
+            <a:ext cx="1434852" cy="191839"/>
+          </a:xfrm>
+          <a:prstGeom prst="rect">
+            <a:avLst/>
+          </a:prstGeom>
+          <a:noFill/>
+        </p:spPr>
+        <p:txBody>
+          <a:bodyPr wrap="square" lIns="0" rIns="0" tIns="0" bIns="0">
+            <a:spAutoFit/>
+          </a:bodyPr>
+          <a:lstStyle/>
+          <a:p>
+            <a:pPr algn="l"/>
+            <a:r>
+              <a:rPr sz="975" b="0" i="0" u="none">
+                <a:solidFill>
+                  <a:srgbClr val="E4E4E7"/>
+                </a:solidFill>
+                <a:latin typeface="Inter"/>
+              </a:rPr>
+              <a:t>Surgical hybrid emission</a:t>
+            </a:r>
+          </a:p>
+        </p:txBody>
+      </p:sp>
+      <p:sp>
+        <p:nvSpPr>
+          <p:cNvPr id="28" name="TextBox 27"/>
+          <p:cNvSpPr txBox="1"/>
+          <p:nvPr/>
+        </p:nvSpPr>
+        <p:spPr>
+          <a:xfrm>
+            <a:off x="3690938" y="4222998"/>
+            <a:ext cx="121890" cy="206573"/>
+          </a:xfrm>
+          <a:prstGeom prst="rect">
+            <a:avLst/>
+          </a:prstGeom>
+          <a:noFill/>
+        </p:spPr>
+        <p:txBody>
+          <a:bodyPr wrap="square" lIns="0" rIns="0" tIns="0" bIns="0">
+            <a:spAutoFit/>
+          </a:bodyPr>
+          <a:lstStyle/>
+          <a:p>
+            <a:pPr algn="l"/>
+            <a:r>
+              <a:rPr sz="1050" b="1" i="0" u="none">
+                <a:solidFill>
+                  <a:srgbClr val="A78BFA"/>
+                </a:solidFill>
+                <a:latin typeface="Inter"/>
+              </a:rPr>
+              <a:t>●</a:t>
+            </a:r>
+          </a:p>
+        </p:txBody>
+      </p:sp>
+      <p:sp>
+        <p:nvSpPr>
+          <p:cNvPr id="29" name="TextBox 28"/>
+          <p:cNvSpPr txBox="1"/>
+          <p:nvPr/>
+        </p:nvSpPr>
+        <p:spPr>
+          <a:xfrm>
+            <a:off x="3908078" y="4222998"/>
+            <a:ext cx="1245245" cy="191839"/>
+          </a:xfrm>
+          <a:prstGeom prst="rect">
+            <a:avLst/>
+          </a:prstGeom>
+          <a:noFill/>
+        </p:spPr>
+        <p:txBody>
+          <a:bodyPr wrap="square" lIns="0" rIns="0" tIns="0" bIns="0">
+            <a:spAutoFit/>
+          </a:bodyPr>
+          <a:lstStyle/>
+          <a:p>
+            <a:pPr algn="l"/>
+            <a:r>
+              <a:rPr sz="975" b="0" i="0" u="none">
+                <a:solidFill>
+                  <a:srgbClr val="E4E4E7"/>
+                </a:solidFill>
+                <a:latin typeface="Inter"/>
+              </a:rPr>
+              <a:t>Corpus harvester CLI</a:t>
+            </a:r>
+          </a:p>
+        </p:txBody>
+      </p:sp>
+      <p:sp>
+        <p:nvSpPr>
+          <p:cNvPr id="30" name="TextBox 29"/>
+          <p:cNvSpPr txBox="1"/>
+          <p:nvPr/>
+        </p:nvSpPr>
+        <p:spPr>
+          <a:xfrm>
+            <a:off x="3690938" y="4667696"/>
+            <a:ext cx="2100262" cy="448568"/>
+          </a:xfrm>
+          <a:prstGeom prst="rect">
+            <a:avLst/>
+          </a:prstGeom>
+          <a:noFill/>
+        </p:spPr>
+        <p:txBody>
+          <a:bodyPr wrap="square" lIns="0" rIns="0" tIns="0" bIns="0">
+            <a:spAutoFit/>
+          </a:bodyPr>
+          <a:lstStyle/>
+          <a:p>
+            <a:pPr algn="l"/>
+            <a:r>
+              <a:rPr sz="825" b="0" i="0" u="none">
+                <a:solidFill>
+                  <a:srgbClr val="71717A"/>
+                </a:solidFill>
+                <a:latin typeface="Inter"/>
+              </a:rPr>
+              <a:t>Native ratio jumped 0.62 → 1.00 on showcase.</a:t>
+            </a:r>
+          </a:p>
+        </p:txBody>
+      </p:sp>
+      <p:sp>
+        <p:nvSpPr>
+          <p:cNvPr id="31" name="Rounded Rectangle 30"/>
+          <p:cNvSpPr/>
+          <p:nvPr/>
+        </p:nvSpPr>
+        <p:spPr>
+          <a:xfrm>
+            <a:off x="6181725" y="2079278"/>
+            <a:ext cx="2538412" cy="3275112"/>
+          </a:xfrm>
+          <a:prstGeom prst="roundRect">
+            <a:avLst/>
+          </a:prstGeom>
+          <a:solidFill>
+            <a:srgbClr val="FFFFFF"/>
+          </a:solidFill>
+          <a:ln w="9525">
+            <a:solidFill>
+              <a:srgbClr val="FFFFFF"/>
+            </a:solidFill>
+          </a:ln>
+          <a:effectLst>
+            <a:outerShdw blurRad="457200" dist="152400" dir="5400000" algn="ctr" rotWithShape="0">
+              <a:srgbClr val="6366F1">
+                <a:alpha val="6000"/>
+              </a:srgbClr>
+            </a:outerShdw>
+          </a:effectLst>
+        </p:spPr>
+        <p:style>
+          <a:lnRef idx="1">
+            <a:schemeClr val="accent1"/>
+          </a:lnRef>
+          <a:fillRef idx="3">
+            <a:schemeClr val="accent1"/>
+          </a:fillRef>
+          <a:effectRef idx="2">
+            <a:schemeClr val="accent1"/>
+          </a:effectRef>
+          <a:fontRef idx="minor">
+            <a:schemeClr val="lt1"/>
+          </a:fontRef>
+        </p:style>
+        <p:txBody>
+          <a:bodyPr rtlCol="0" anchor="ctr"/>
+          <a:lstStyle/>
+          <a:p>
+            <a:pPr algn="ctr"/>
+          </a:p>
+        </p:txBody>
+      </p:sp>
+      <p:sp>
+        <p:nvSpPr>
+          <p:cNvPr id="32" name="TextBox 31"/>
+          <p:cNvSpPr txBox="1"/>
+          <p:nvPr/>
+        </p:nvSpPr>
+        <p:spPr>
+          <a:xfrm>
+            <a:off x="6400800" y="2317403"/>
+            <a:ext cx="333821" cy="200025"/>
+          </a:xfrm>
+          <a:prstGeom prst="rect">
+            <a:avLst/>
+          </a:prstGeom>
+          <a:noFill/>
+        </p:spPr>
+        <p:txBody>
+          <a:bodyPr wrap="square" lIns="0" rIns="0" tIns="0" bIns="0">
+            <a:spAutoFit/>
+          </a:bodyPr>
+          <a:lstStyle/>
+          <a:p>
+            <a:pPr algn="l"/>
+            <a:r>
+              <a:rPr sz="1350" b="1" i="0" u="none">
+                <a:solidFill>
+                  <a:srgbClr val="F5F5F7"/>
+                </a:solidFill>
+                <a:latin typeface="Inter"/>
+              </a:rPr>
+              <a:t>Q3</a:t>
+            </a:r>
+          </a:p>
+        </p:txBody>
+      </p:sp>
+      <p:sp>
+        <p:nvSpPr>
+          <p:cNvPr id="33" name="TextBox 32"/>
+          <p:cNvSpPr txBox="1"/>
+          <p:nvPr/>
+        </p:nvSpPr>
+        <p:spPr>
+          <a:xfrm>
+            <a:off x="6400800" y="2517428"/>
+            <a:ext cx="333821" cy="133350"/>
+          </a:xfrm>
+          <a:prstGeom prst="rect">
+            <a:avLst/>
+          </a:prstGeom>
+          <a:noFill/>
+        </p:spPr>
+        <p:txBody>
+          <a:bodyPr wrap="square" lIns="0" rIns="0" tIns="0" bIns="0">
+            <a:spAutoFit/>
+          </a:bodyPr>
+          <a:lstStyle/>
+          <a:p>
+            <a:pPr algn="l"/>
+            <a:r>
+              <a:rPr sz="825" b="1" i="0" u="none">
+                <a:solidFill>
+                  <a:srgbClr val="71717A"/>
+                </a:solidFill>
+                <a:latin typeface="Inter"/>
+              </a:rPr>
+              <a:t>2026</a:t>
+            </a:r>
+          </a:p>
+        </p:txBody>
+      </p:sp>
+      <p:sp>
+        <p:nvSpPr>
+          <p:cNvPr id="34" name="TextBox 33"/>
+          <p:cNvSpPr txBox="1"/>
+          <p:nvPr/>
+        </p:nvSpPr>
+        <p:spPr>
+          <a:xfrm>
+            <a:off x="7977485" y="2317403"/>
+            <a:ext cx="523577" cy="209550"/>
+          </a:xfrm>
+          <a:prstGeom prst="rect">
+            <a:avLst/>
+          </a:prstGeom>
+          <a:solidFill>
+            <a:srgbClr val="FFFFFF"/>
+          </a:solidFill>
+        </p:spPr>
+        <p:txBody>
+          <a:bodyPr wrap="square" lIns="0" rIns="0" tIns="0" bIns="0">
+            <a:spAutoFit/>
+          </a:bodyPr>
+          <a:lstStyle/>
+          <a:p>
+            <a:pPr algn="l"/>
+            <a:r>
+              <a:rPr sz="800" b="1" i="0" u="none">
+                <a:solidFill>
+                  <a:srgbClr val="A1A1AA"/>
+                </a:solidFill>
+                <a:latin typeface="Inter"/>
+              </a:rPr>
+              <a:t>NEXT</a:t>
+            </a:r>
+          </a:p>
+        </p:txBody>
+      </p:sp>
+      <p:sp>
+        <p:nvSpPr>
+          <p:cNvPr id="35" name="TextBox 34"/>
+          <p:cNvSpPr txBox="1"/>
+          <p:nvPr/>
+        </p:nvSpPr>
+        <p:spPr>
+          <a:xfrm>
+            <a:off x="6400800" y="3060353"/>
+            <a:ext cx="121890" cy="206573"/>
+          </a:xfrm>
+          <a:prstGeom prst="rect">
+            <a:avLst/>
+          </a:prstGeom>
+          <a:noFill/>
+        </p:spPr>
+        <p:txBody>
+          <a:bodyPr wrap="square" lIns="0" rIns="0" tIns="0" bIns="0">
+            <a:spAutoFit/>
+          </a:bodyPr>
+          <a:lstStyle/>
+          <a:p>
+            <a:pPr algn="l"/>
+            <a:r>
+              <a:rPr sz="1050" b="1" i="0" u="none">
+                <a:solidFill>
+                  <a:srgbClr val="52525B"/>
+                </a:solidFill>
+                <a:latin typeface="Inter"/>
+              </a:rPr>
+              <a:t>○</a:t>
+            </a:r>
+          </a:p>
+        </p:txBody>
+      </p:sp>
+      <p:sp>
+        <p:nvSpPr>
+          <p:cNvPr id="36" name="TextBox 35"/>
+          <p:cNvSpPr txBox="1"/>
+          <p:nvPr/>
+        </p:nvSpPr>
+        <p:spPr>
+          <a:xfrm>
+            <a:off x="6617940" y="3060353"/>
+            <a:ext cx="1635472" cy="191839"/>
+          </a:xfrm>
+          <a:prstGeom prst="rect">
+            <a:avLst/>
+          </a:prstGeom>
+          <a:noFill/>
+        </p:spPr>
+        <p:txBody>
+          <a:bodyPr wrap="square" lIns="0" rIns="0" tIns="0" bIns="0">
+            <a:spAutoFit/>
+          </a:bodyPr>
+          <a:lstStyle/>
+          <a:p>
+            <a:pPr algn="l"/>
+            <a:r>
+              <a:rPr sz="975" b="0" i="0" u="none">
+                <a:solidFill>
+                  <a:srgbClr val="E4E4E7"/>
+                </a:solidFill>
+                <a:latin typeface="Inter"/>
+              </a:rPr>
+              <a:t>@slidify/components library</a:t>
+            </a:r>
+          </a:p>
+        </p:txBody>
+      </p:sp>
+      <p:sp>
+        <p:nvSpPr>
+          <p:cNvPr id="37" name="TextBox 36"/>
+          <p:cNvSpPr txBox="1"/>
+          <p:nvPr/>
+        </p:nvSpPr>
+        <p:spPr>
+          <a:xfrm>
+            <a:off x="6400800" y="3447901"/>
+            <a:ext cx="121890" cy="206573"/>
+          </a:xfrm>
+          <a:prstGeom prst="rect">
+            <a:avLst/>
+          </a:prstGeom>
+          <a:noFill/>
+        </p:spPr>
+        <p:txBody>
+          <a:bodyPr wrap="square" lIns="0" rIns="0" tIns="0" bIns="0">
+            <a:spAutoFit/>
+          </a:bodyPr>
+          <a:lstStyle/>
+          <a:p>
+            <a:pPr algn="l"/>
+            <a:r>
+              <a:rPr sz="1050" b="1" i="0" u="none">
+                <a:solidFill>
+                  <a:srgbClr val="52525B"/>
+                </a:solidFill>
+                <a:latin typeface="Inter"/>
+              </a:rPr>
+              <a:t>○</a:t>
+            </a:r>
+          </a:p>
+        </p:txBody>
+      </p:sp>
+      <p:sp>
+        <p:nvSpPr>
+          <p:cNvPr id="38" name="TextBox 37"/>
+          <p:cNvSpPr txBox="1"/>
+          <p:nvPr/>
+        </p:nvSpPr>
+        <p:spPr>
+          <a:xfrm>
+            <a:off x="6617940" y="3447901"/>
+            <a:ext cx="1339602" cy="191839"/>
+          </a:xfrm>
+          <a:prstGeom prst="rect">
+            <a:avLst/>
+          </a:prstGeom>
+          <a:noFill/>
+        </p:spPr>
+        <p:txBody>
+          <a:bodyPr wrap="square" lIns="0" rIns="0" tIns="0" bIns="0">
+            <a:spAutoFit/>
+          </a:bodyPr>
+          <a:lstStyle/>
+          <a:p>
+            <a:pPr algn="l"/>
+            <a:r>
+              <a:rPr sz="975" b="0" i="0" u="none">
+                <a:solidFill>
+                  <a:srgbClr val="E4E4E7"/>
+                </a:solidFill>
+                <a:latin typeface="Inter"/>
+              </a:rPr>
+              <a:t>JSX → IR → PPTX path</a:t>
+            </a:r>
+          </a:p>
+        </p:txBody>
+      </p:sp>
+      <p:sp>
+        <p:nvSpPr>
+          <p:cNvPr id="39" name="TextBox 38"/>
+          <p:cNvSpPr txBox="1"/>
+          <p:nvPr/>
+        </p:nvSpPr>
+        <p:spPr>
+          <a:xfrm>
+            <a:off x="6400800" y="3835450"/>
+            <a:ext cx="121890" cy="206573"/>
+          </a:xfrm>
+          <a:prstGeom prst="rect">
+            <a:avLst/>
+          </a:prstGeom>
+          <a:noFill/>
+        </p:spPr>
+        <p:txBody>
+          <a:bodyPr wrap="square" lIns="0" rIns="0" tIns="0" bIns="0">
+            <a:spAutoFit/>
+          </a:bodyPr>
+          <a:lstStyle/>
+          <a:p>
+            <a:pPr algn="l"/>
+            <a:r>
+              <a:rPr sz="1050" b="1" i="0" u="none">
+                <a:solidFill>
+                  <a:srgbClr val="52525B"/>
+                </a:solidFill>
+                <a:latin typeface="Inter"/>
+              </a:rPr>
+              <a:t>○</a:t>
+            </a:r>
+          </a:p>
+        </p:txBody>
+      </p:sp>
+      <p:sp>
+        <p:nvSpPr>
+          <p:cNvPr id="40" name="TextBox 39"/>
+          <p:cNvSpPr txBox="1"/>
+          <p:nvPr/>
+        </p:nvSpPr>
+        <p:spPr>
+          <a:xfrm>
+            <a:off x="6617940" y="3835450"/>
+            <a:ext cx="1349425" cy="191839"/>
+          </a:xfrm>
+          <a:prstGeom prst="rect">
+            <a:avLst/>
+          </a:prstGeom>
+          <a:noFill/>
+        </p:spPr>
+        <p:txBody>
+          <a:bodyPr wrap="square" lIns="0" rIns="0" tIns="0" bIns="0">
+            <a:spAutoFit/>
+          </a:bodyPr>
+          <a:lstStyle/>
+          <a:p>
+            <a:pPr algn="l"/>
+            <a:r>
+              <a:rPr sz="975" b="0" i="0" u="none">
+                <a:solidFill>
+                  <a:srgbClr val="E4E4E7"/>
+                </a:solidFill>
+                <a:latin typeface="Inter"/>
+              </a:rPr>
+              <a:t>Bidirectional round-trip</a:t>
+            </a:r>
+          </a:p>
+        </p:txBody>
+      </p:sp>
+      <p:sp>
+        <p:nvSpPr>
+          <p:cNvPr id="41" name="TextBox 40"/>
+          <p:cNvSpPr txBox="1"/>
+          <p:nvPr/>
+        </p:nvSpPr>
+        <p:spPr>
+          <a:xfrm>
+            <a:off x="6400800" y="4222998"/>
+            <a:ext cx="121890" cy="206573"/>
+          </a:xfrm>
+          <a:prstGeom prst="rect">
+            <a:avLst/>
+          </a:prstGeom>
+          <a:noFill/>
+        </p:spPr>
+        <p:txBody>
+          <a:bodyPr wrap="square" lIns="0" rIns="0" tIns="0" bIns="0">
+            <a:spAutoFit/>
+          </a:bodyPr>
+          <a:lstStyle/>
+          <a:p>
+            <a:pPr algn="l"/>
+            <a:r>
+              <a:rPr sz="1050" b="1" i="0" u="none">
+                <a:solidFill>
+                  <a:srgbClr val="52525B"/>
+                </a:solidFill>
+                <a:latin typeface="Inter"/>
+              </a:rPr>
+              <a:t>○</a:t>
+            </a:r>
+          </a:p>
+        </p:txBody>
+      </p:sp>
+      <p:sp>
+        <p:nvSpPr>
+          <p:cNvPr id="42" name="TextBox 41"/>
+          <p:cNvSpPr txBox="1"/>
+          <p:nvPr/>
+        </p:nvSpPr>
+        <p:spPr>
+          <a:xfrm>
+            <a:off x="6617940" y="4222998"/>
+            <a:ext cx="1509712" cy="191839"/>
+          </a:xfrm>
+          <a:prstGeom prst="rect">
+            <a:avLst/>
+          </a:prstGeom>
+          <a:noFill/>
+        </p:spPr>
+        <p:txBody>
+          <a:bodyPr wrap="square" lIns="0" rIns="0" tIns="0" bIns="0">
+            <a:spAutoFit/>
+          </a:bodyPr>
+          <a:lstStyle/>
+          <a:p>
+            <a:pPr algn="l"/>
+            <a:r>
+              <a:rPr sz="975" b="0" i="0" u="none">
+                <a:solidFill>
+                  <a:srgbClr val="E4E4E7"/>
+                </a:solidFill>
+                <a:latin typeface="Inter"/>
+              </a:rPr>
+              <a:t>Theme-token brand swap</a:t>
+            </a:r>
+          </a:p>
+        </p:txBody>
+      </p:sp>
+      <p:sp>
+        <p:nvSpPr>
+          <p:cNvPr id="43" name="TextBox 42"/>
+          <p:cNvSpPr txBox="1"/>
+          <p:nvPr/>
+        </p:nvSpPr>
+        <p:spPr>
+          <a:xfrm>
+            <a:off x="6400800" y="4667696"/>
+            <a:ext cx="2100262" cy="286196"/>
+          </a:xfrm>
+          <a:prstGeom prst="rect">
+            <a:avLst/>
+          </a:prstGeom>
+          <a:noFill/>
+        </p:spPr>
+        <p:txBody>
+          <a:bodyPr wrap="square" lIns="0" rIns="0" tIns="0" bIns="0">
+            <a:spAutoFit/>
+          </a:bodyPr>
+          <a:lstStyle/>
+          <a:p>
+            <a:pPr algn="l"/>
+            <a:r>
+              <a:rPr sz="825" b="0" i="0" u="none">
+                <a:solidFill>
+                  <a:srgbClr val="71717A"/>
+                </a:solidFill>
+                <a:latin typeface="Inter"/>
+              </a:rPr>
+              <a:t>Generator-first: lossless by construction.</a:t>
+            </a:r>
+          </a:p>
+        </p:txBody>
+      </p:sp>
+      <p:sp>
+        <p:nvSpPr>
+          <p:cNvPr id="44" name="Rounded Rectangle 43"/>
+          <p:cNvSpPr/>
+          <p:nvPr/>
+        </p:nvSpPr>
+        <p:spPr>
+          <a:xfrm>
+            <a:off x="8891588" y="2079278"/>
+            <a:ext cx="2538412" cy="3275112"/>
+          </a:xfrm>
+          <a:prstGeom prst="roundRect">
+            <a:avLst/>
+          </a:prstGeom>
+          <a:solidFill>
+            <a:srgbClr val="FFFFFF"/>
+          </a:solidFill>
+          <a:ln w="9525">
+            <a:solidFill>
+              <a:srgbClr val="FFFFFF"/>
+            </a:solidFill>
+          </a:ln>
+          <a:effectLst>
+            <a:outerShdw blurRad="457200" dist="152400" dir="5400000" algn="ctr" rotWithShape="0">
+              <a:srgbClr val="6366F1">
+                <a:alpha val="6000"/>
+              </a:srgbClr>
+            </a:outerShdw>
+          </a:effectLst>
+        </p:spPr>
+        <p:style>
+          <a:lnRef idx="1">
+            <a:schemeClr val="accent1"/>
+          </a:lnRef>
+          <a:fillRef idx="3">
+            <a:schemeClr val="accent1"/>
+          </a:fillRef>
+          <a:effectRef idx="2">
+            <a:schemeClr val="accent1"/>
+          </a:effectRef>
+          <a:fontRef idx="minor">
+            <a:schemeClr val="lt1"/>
+          </a:fontRef>
+        </p:style>
+        <p:txBody>
+          <a:bodyPr rtlCol="0" anchor="ctr"/>
+          <a:lstStyle/>
+          <a:p>
+            <a:pPr algn="ctr"/>
+          </a:p>
+        </p:txBody>
+      </p:sp>
+      <p:sp>
+        <p:nvSpPr>
+          <p:cNvPr id="45" name="TextBox 44"/>
+          <p:cNvSpPr txBox="1"/>
+          <p:nvPr/>
+        </p:nvSpPr>
+        <p:spPr>
+          <a:xfrm>
+            <a:off x="9110662" y="2317403"/>
+            <a:ext cx="333821" cy="200025"/>
+          </a:xfrm>
+          <a:prstGeom prst="rect">
+            <a:avLst/>
+          </a:prstGeom>
+          <a:noFill/>
+        </p:spPr>
+        <p:txBody>
+          <a:bodyPr wrap="square" lIns="0" rIns="0" tIns="0" bIns="0">
+            <a:spAutoFit/>
+          </a:bodyPr>
+          <a:lstStyle/>
+          <a:p>
+            <a:pPr algn="l"/>
+            <a:r>
+              <a:rPr sz="1350" b="1" i="0" u="none">
+                <a:solidFill>
+                  <a:srgbClr val="F5F5F7"/>
+                </a:solidFill>
+                <a:latin typeface="Inter"/>
+              </a:rPr>
+              <a:t>Q4</a:t>
+            </a:r>
+          </a:p>
+        </p:txBody>
+      </p:sp>
+      <p:sp>
+        <p:nvSpPr>
+          <p:cNvPr id="46" name="TextBox 45"/>
+          <p:cNvSpPr txBox="1"/>
+          <p:nvPr/>
+        </p:nvSpPr>
+        <p:spPr>
+          <a:xfrm>
+            <a:off x="9110662" y="2517428"/>
+            <a:ext cx="333821" cy="133350"/>
+          </a:xfrm>
+          <a:prstGeom prst="rect">
+            <a:avLst/>
+          </a:prstGeom>
+          <a:noFill/>
+        </p:spPr>
+        <p:txBody>
+          <a:bodyPr wrap="square" lIns="0" rIns="0" tIns="0" bIns="0">
+            <a:spAutoFit/>
+          </a:bodyPr>
+          <a:lstStyle/>
+          <a:p>
+            <a:pPr algn="l"/>
+            <a:r>
+              <a:rPr sz="825" b="1" i="0" u="none">
+                <a:solidFill>
+                  <a:srgbClr val="71717A"/>
+                </a:solidFill>
+                <a:latin typeface="Inter"/>
+              </a:rPr>
+              <a:t>2026</a:t>
+            </a:r>
+          </a:p>
+        </p:txBody>
+      </p:sp>
+      <p:sp>
+        <p:nvSpPr>
+          <p:cNvPr id="47" name="TextBox 46"/>
+          <p:cNvSpPr txBox="1"/>
+          <p:nvPr/>
+        </p:nvSpPr>
+        <p:spPr>
+          <a:xfrm>
+            <a:off x="10634067" y="2317403"/>
+            <a:ext cx="576858" cy="209550"/>
+          </a:xfrm>
+          <a:prstGeom prst="rect">
+            <a:avLst/>
+          </a:prstGeom>
+          <a:solidFill>
+            <a:srgbClr val="FFFFFF"/>
+          </a:solidFill>
+        </p:spPr>
+        <p:txBody>
+          <a:bodyPr wrap="square" lIns="0" rIns="0" tIns="0" bIns="0">
+            <a:spAutoFit/>
+          </a:bodyPr>
+          <a:lstStyle/>
+          <a:p>
+            <a:pPr algn="l"/>
+            <a:r>
+              <a:rPr sz="800" b="1" i="0" u="none">
+                <a:solidFill>
+                  <a:srgbClr val="A1A1AA"/>
+                </a:solidFill>
+                <a:latin typeface="Inter"/>
+              </a:rPr>
+              <a:t>LATER</a:t>
+            </a:r>
+          </a:p>
+        </p:txBody>
+      </p:sp>
+      <p:sp>
+        <p:nvSpPr>
+          <p:cNvPr id="48" name="TextBox 47"/>
+          <p:cNvSpPr txBox="1"/>
+          <p:nvPr/>
+        </p:nvSpPr>
+        <p:spPr>
+          <a:xfrm>
+            <a:off x="9110662" y="3060353"/>
+            <a:ext cx="121890" cy="206573"/>
+          </a:xfrm>
+          <a:prstGeom prst="rect">
+            <a:avLst/>
+          </a:prstGeom>
+          <a:noFill/>
+        </p:spPr>
+        <p:txBody>
+          <a:bodyPr wrap="square" lIns="0" rIns="0" tIns="0" bIns="0">
+            <a:spAutoFit/>
+          </a:bodyPr>
+          <a:lstStyle/>
+          <a:p>
+            <a:pPr algn="l"/>
+            <a:r>
+              <a:rPr sz="1050" b="1" i="0" u="none">
+                <a:solidFill>
+                  <a:srgbClr val="52525B"/>
+                </a:solidFill>
+                <a:latin typeface="Inter"/>
+              </a:rPr>
+              <a:t>○</a:t>
+            </a:r>
+          </a:p>
+        </p:txBody>
+      </p:sp>
+      <p:sp>
+        <p:nvSpPr>
+          <p:cNvPr id="49" name="TextBox 48"/>
+          <p:cNvSpPr txBox="1"/>
+          <p:nvPr/>
+        </p:nvSpPr>
+        <p:spPr>
+          <a:xfrm>
+            <a:off x="9327803" y="3060353"/>
+            <a:ext cx="1450479" cy="191839"/>
+          </a:xfrm>
+          <a:prstGeom prst="rect">
+            <a:avLst/>
+          </a:prstGeom>
+          <a:noFill/>
+        </p:spPr>
+        <p:txBody>
+          <a:bodyPr wrap="square" lIns="0" rIns="0" tIns="0" bIns="0">
+            <a:spAutoFit/>
+          </a:bodyPr>
+          <a:lstStyle/>
+          <a:p>
+            <a:pPr algn="l"/>
+            <a:r>
+              <a:rPr sz="975" b="0" i="0" u="none">
+                <a:solidFill>
+                  <a:srgbClr val="E4E4E7"/>
+                </a:solidFill>
+                <a:latin typeface="Inter"/>
+              </a:rPr>
+              <a:t>Native Chart.js synthesis</a:t>
+            </a:r>
+          </a:p>
+        </p:txBody>
+      </p:sp>
+      <p:sp>
+        <p:nvSpPr>
+          <p:cNvPr id="50" name="TextBox 49"/>
+          <p:cNvSpPr txBox="1"/>
+          <p:nvPr/>
+        </p:nvSpPr>
+        <p:spPr>
+          <a:xfrm>
+            <a:off x="9110662" y="3447901"/>
+            <a:ext cx="121890" cy="206573"/>
+          </a:xfrm>
+          <a:prstGeom prst="rect">
+            <a:avLst/>
+          </a:prstGeom>
+          <a:noFill/>
+        </p:spPr>
+        <p:txBody>
+          <a:bodyPr wrap="square" lIns="0" rIns="0" tIns="0" bIns="0">
+            <a:spAutoFit/>
+          </a:bodyPr>
+          <a:lstStyle/>
+          <a:p>
+            <a:pPr algn="l"/>
+            <a:r>
+              <a:rPr sz="1050" b="1" i="0" u="none">
+                <a:solidFill>
+                  <a:srgbClr val="52525B"/>
+                </a:solidFill>
+                <a:latin typeface="Inter"/>
+              </a:rPr>
+              <a:t>○</a:t>
+            </a:r>
+          </a:p>
+        </p:txBody>
+      </p:sp>
+      <p:sp>
+        <p:nvSpPr>
+          <p:cNvPr id="51" name="TextBox 50"/>
+          <p:cNvSpPr txBox="1"/>
+          <p:nvPr/>
+        </p:nvSpPr>
+        <p:spPr>
+          <a:xfrm>
+            <a:off x="9327803" y="3447901"/>
+            <a:ext cx="1161306" cy="191839"/>
+          </a:xfrm>
+          <a:prstGeom prst="rect">
+            <a:avLst/>
+          </a:prstGeom>
+          <a:noFill/>
+        </p:spPr>
+        <p:txBody>
+          <a:bodyPr wrap="square" lIns="0" rIns="0" tIns="0" bIns="0">
+            <a:spAutoFit/>
+          </a:bodyPr>
+          <a:lstStyle/>
+          <a:p>
+            <a:pPr algn="l"/>
+            <a:r>
+              <a:rPr sz="975" b="0" i="0" u="none">
+                <a:solidFill>
+                  <a:srgbClr val="E4E4E7"/>
+                </a:solidFill>
+                <a:latin typeface="Inter"/>
+              </a:rPr>
+              <a:t>Pix2struct fine-tune</a:t>
+            </a:r>
+          </a:p>
+        </p:txBody>
+      </p:sp>
+      <p:sp>
+        <p:nvSpPr>
+          <p:cNvPr id="52" name="TextBox 51"/>
+          <p:cNvSpPr txBox="1"/>
+          <p:nvPr/>
+        </p:nvSpPr>
+        <p:spPr>
+          <a:xfrm>
+            <a:off x="9110662" y="3835450"/>
+            <a:ext cx="121890" cy="206573"/>
+          </a:xfrm>
+          <a:prstGeom prst="rect">
+            <a:avLst/>
+          </a:prstGeom>
+          <a:noFill/>
+        </p:spPr>
+        <p:txBody>
+          <a:bodyPr wrap="square" lIns="0" rIns="0" tIns="0" bIns="0">
+            <a:spAutoFit/>
+          </a:bodyPr>
+          <a:lstStyle/>
+          <a:p>
+            <a:pPr algn="l"/>
+            <a:r>
+              <a:rPr sz="1050" b="1" i="0" u="none">
+                <a:solidFill>
+                  <a:srgbClr val="52525B"/>
+                </a:solidFill>
+                <a:latin typeface="Inter"/>
+              </a:rPr>
+              <a:t>○</a:t>
+            </a:r>
+          </a:p>
+        </p:txBody>
+      </p:sp>
+      <p:sp>
+        <p:nvSpPr>
+          <p:cNvPr id="53" name="TextBox 52"/>
+          <p:cNvSpPr txBox="1"/>
+          <p:nvPr/>
+        </p:nvSpPr>
+        <p:spPr>
+          <a:xfrm>
+            <a:off x="9327803" y="3835450"/>
+            <a:ext cx="1472803" cy="191839"/>
+          </a:xfrm>
+          <a:prstGeom prst="rect">
+            <a:avLst/>
+          </a:prstGeom>
+          <a:noFill/>
+        </p:spPr>
+        <p:txBody>
+          <a:bodyPr wrap="square" lIns="0" rIns="0" tIns="0" bIns="0">
+            <a:spAutoFit/>
+          </a:bodyPr>
+          <a:lstStyle/>
+          <a:p>
+            <a:pPr algn="l"/>
+            <a:r>
+              <a:rPr sz="975" b="0" i="0" u="none">
+                <a:solidFill>
+                  <a:srgbClr val="E4E4E7"/>
+                </a:solidFill>
+                <a:latin typeface="Inter"/>
+              </a:rPr>
+              <a:t>PowerPoint Online oracle</a:t>
+            </a:r>
+          </a:p>
+        </p:txBody>
+      </p:sp>
+      <p:sp>
+        <p:nvSpPr>
+          <p:cNvPr id="54" name="TextBox 53"/>
+          <p:cNvSpPr txBox="1"/>
+          <p:nvPr/>
+        </p:nvSpPr>
+        <p:spPr>
+          <a:xfrm>
+            <a:off x="9110662" y="4222998"/>
+            <a:ext cx="121890" cy="206573"/>
+          </a:xfrm>
+          <a:prstGeom prst="rect">
+            <a:avLst/>
+          </a:prstGeom>
+          <a:noFill/>
+        </p:spPr>
+        <p:txBody>
+          <a:bodyPr wrap="square" lIns="0" rIns="0" tIns="0" bIns="0">
+            <a:spAutoFit/>
+          </a:bodyPr>
+          <a:lstStyle/>
+          <a:p>
+            <a:pPr algn="l"/>
+            <a:r>
+              <a:rPr sz="1050" b="1" i="0" u="none">
+                <a:solidFill>
+                  <a:srgbClr val="52525B"/>
+                </a:solidFill>
+                <a:latin typeface="Inter"/>
+              </a:rPr>
+              <a:t>○</a:t>
+            </a:r>
+          </a:p>
+        </p:txBody>
+      </p:sp>
+      <p:sp>
+        <p:nvSpPr>
+          <p:cNvPr id="55" name="TextBox 54"/>
+          <p:cNvSpPr txBox="1"/>
+          <p:nvPr/>
+        </p:nvSpPr>
+        <p:spPr>
+          <a:xfrm>
+            <a:off x="9327803" y="4222998"/>
+            <a:ext cx="1329928" cy="191839"/>
+          </a:xfrm>
+          <a:prstGeom prst="rect">
+            <a:avLst/>
+          </a:prstGeom>
+          <a:noFill/>
+        </p:spPr>
+        <p:txBody>
+          <a:bodyPr wrap="square" lIns="0" rIns="0" tIns="0" bIns="0">
+            <a:spAutoFit/>
+          </a:bodyPr>
+          <a:lstStyle/>
+          <a:p>
+            <a:pPr algn="l"/>
+            <a:r>
+              <a:rPr sz="975" b="0" i="0" u="none">
+                <a:solidFill>
+                  <a:srgbClr val="E4E4E7"/>
+                </a:solidFill>
+                <a:latin typeface="Inter"/>
+              </a:rPr>
+              <a:t>Skia paint-op intercept</a:t>
+            </a:r>
+          </a:p>
+        </p:txBody>
+      </p:sp>
+      <p:sp>
+        <p:nvSpPr>
+          <p:cNvPr id="56" name="TextBox 55"/>
+          <p:cNvSpPr txBox="1"/>
+          <p:nvPr/>
+        </p:nvSpPr>
+        <p:spPr>
+          <a:xfrm>
+            <a:off x="9110662" y="4667696"/>
+            <a:ext cx="2100262" cy="286196"/>
+          </a:xfrm>
+          <a:prstGeom prst="rect">
+            <a:avLst/>
+          </a:prstGeom>
+          <a:noFill/>
+        </p:spPr>
+        <p:txBody>
+          <a:bodyPr wrap="square" lIns="0" rIns="0" tIns="0" bIns="0">
+            <a:spAutoFit/>
+          </a:bodyPr>
+          <a:lstStyle/>
+          <a:p>
+            <a:pPr algn="l"/>
+            <a:r>
+              <a:rPr sz="825" b="0" i="0" u="none">
+                <a:solidFill>
+                  <a:srgbClr val="71717A"/>
+                </a:solidFill>
+                <a:latin typeface="Inter"/>
+              </a:rPr>
+              <a:t>Research-tier moves; high ceiling.</a:t>
+            </a:r>
+          </a:p>
+        </p:txBody>
+      </p:sp>
+      <p:sp>
+        <p:nvSpPr>
+          <p:cNvPr id="57" name="TextBox 56"/>
+          <p:cNvSpPr txBox="1"/>
+          <p:nvPr/>
+        </p:nvSpPr>
+        <p:spPr>
+          <a:xfrm>
+            <a:off x="762000" y="6477000"/>
+            <a:ext cx="1411635" cy="152400"/>
+          </a:xfrm>
+          <a:prstGeom prst="rect">
+            <a:avLst/>
+          </a:prstGeom>
+          <a:noFill/>
+        </p:spPr>
+        <p:txBody>
+          <a:bodyPr wrap="square" lIns="0" rIns="0" tIns="0" bIns="0">
+            <a:spAutoFit/>
+          </a:bodyPr>
+          <a:lstStyle/>
+          <a:p>
+            <a:pPr algn="l"/>
+            <a:r>
+              <a:rPr sz="975" b="1" i="0" u="none">
+                <a:solidFill>
+                  <a:srgbClr val="52525B"/>
+                </a:solidFill>
+                <a:latin typeface="Inter"/>
+              </a:rPr>
+              <a:t>PIXELPITCH LABS</a:t>
+            </a:r>
+          </a:p>
+        </p:txBody>
+      </p:sp>
+      <p:sp>
+        <p:nvSpPr>
+          <p:cNvPr id="58" name="TextBox 57"/>
+          <p:cNvSpPr txBox="1"/>
+          <p:nvPr/>
+        </p:nvSpPr>
+        <p:spPr>
+          <a:xfrm>
+            <a:off x="10930384" y="6477000"/>
+            <a:ext cx="499616" cy="152400"/>
+          </a:xfrm>
+          <a:prstGeom prst="rect">
+            <a:avLst/>
+          </a:prstGeom>
+          <a:noFill/>
+        </p:spPr>
+        <p:txBody>
+          <a:bodyPr wrap="square" lIns="0" rIns="0" tIns="0" bIns="0">
+            <a:spAutoFit/>
+          </a:bodyPr>
+          <a:lstStyle/>
+          <a:p>
+            <a:pPr algn="l"/>
+            <a:r>
+              <a:rPr sz="975" b="1" i="0" u="none">
+                <a:solidFill>
+                  <a:srgbClr val="52525B"/>
+                </a:solidFill>
+                <a:latin typeface="Inter"/>
+              </a:rPr>
+              <a:t>11 / 12</a:t>
+            </a:r>
+          </a:p>
+        </p:txBody>
+      </p:sp>
+    </p:spTree>
+  </p:cSld>
+  <p:clrMapOvr>
+    <a:masterClrMapping/>
+  </p:clrMapOvr>
+</p:sld>
+</file>
+
+<file path=ppt/slides/slide12.xml><?xml version="1.0" encoding="utf-8"?>
+<p:sld xmlns:a="http://schemas.openxmlformats.org/drawingml/2006/main" xmlns:p="http://schemas.openxmlformats.org/presentationml/2006/main" xmlns:r="http://schemas.openxmlformats.org/officeDocument/2006/relationships">
+  <p:cSld>
+    <p:spTree>
+      <p:nvGrpSpPr>
+        <p:cNvPr id="1" name=""/>
+        <p:cNvGrpSpPr/>
+        <p:nvPr/>
+      </p:nvGrpSpPr>
+      <p:grpSpPr/>
+      <p:sp>
+        <p:nvSpPr>
+          <p:cNvPr id="2" name="Rectangle 1"/>
+          <p:cNvSpPr/>
+          <p:nvPr/>
+        </p:nvSpPr>
+        <p:spPr>
+          <a:xfrm>
+            <a:off x="0" y="0"/>
+            <a:ext cx="12192000" cy="6858000"/>
+          </a:xfrm>
+          <a:prstGeom prst="rect">
+            <a:avLst/>
+          </a:prstGeom>
+          <a:noFill/>
+          <a:ln>
+            <a:noFill/>
+          </a:ln>
+        </p:spPr>
+        <p:style>
+          <a:lnRef idx="1">
+            <a:schemeClr val="accent1"/>
+          </a:lnRef>
+          <a:fillRef idx="3">
+            <a:schemeClr val="accent1"/>
+          </a:fillRef>
+          <a:effectRef idx="2">
+            <a:schemeClr val="accent1"/>
+          </a:effectRef>
+          <a:fontRef idx="minor">
+            <a:schemeClr val="lt1"/>
+          </a:fontRef>
+        </p:style>
+        <p:txBody>
+          <a:bodyPr rtlCol="0" anchor="ctr"/>
+          <a:lstStyle/>
+          <a:p>
+            <a:pPr algn="ctr"/>
+          </a:p>
+        </p:txBody>
+      </p:sp>
+      <p:sp>
+        <p:nvSpPr>
+          <p:cNvPr id="3" name="Rectangle 2"/>
+          <p:cNvSpPr/>
+          <p:nvPr/>
+        </p:nvSpPr>
+        <p:spPr>
+          <a:gradFill flip="none" rotWithShape="1">
+            <a:gsLst>
+              <a:gs pos="0">
+                <a:srgbClr val="4338CA"/>
+              </a:gs>
+              <a:gs pos="35000">
+                <a:srgbClr val="1E1B4B"/>
+              </a:gs>
+              <a:gs pos="70000">
+                <a:srgbClr val="050510"/>
+              </a:gs>
+            </a:gsLst>
+            <a:path path="circle">
+              <a:fillToRect l="50000" t="100000" r="50000" b="0"/>
+            </a:path>
+          </a:gradFill>
+          <a:xfrm>
+            <a:off x="0" y="0"/>
+            <a:ext cx="12192000" cy="6858000"/>
+          </a:xfrm>
+          <a:prstGeom prst="rect">
+            <a:avLst/>
+          </a:prstGeom>
+          <a:ln>
+            <a:noFill/>
+          </a:ln>
+        </p:spPr>
+        <p:style>
+          <a:lnRef idx="1">
+            <a:schemeClr val="accent1"/>
+          </a:lnRef>
+          <a:fillRef idx="3">
+            <a:schemeClr val="accent1"/>
+          </a:fillRef>
+          <a:effectRef idx="2">
+            <a:schemeClr val="accent1"/>
+          </a:effectRef>
+          <a:fontRef idx="minor">
+            <a:schemeClr val="lt1"/>
+          </a:fontRef>
+        </p:style>
+        <p:txBody>
+          <a:bodyPr rtlCol="0" anchor="ctr"/>
+          <a:lstStyle/>
+          <a:p>
+            <a:pPr algn="ctr"/>
+          </a:p>
+        </p:txBody>
+      </p:sp>
+      <p:sp>
+        <p:nvSpPr>
+          <p:cNvPr id="4" name="Rectangle 3"/>
+          <p:cNvSpPr/>
+          <p:nvPr/>
+        </p:nvSpPr>
+        <p:spPr>
+          <a:xfrm>
+            <a:off x="0" y="0"/>
+            <a:ext cx="12192000" cy="6858000"/>
+          </a:xfrm>
+          <a:prstGeom prst="rect">
+            <a:avLst/>
+          </a:prstGeom>
+          <a:noFill/>
+          <a:ln>
+            <a:noFill/>
+          </a:ln>
+        </p:spPr>
+        <p:style>
+          <a:lnRef idx="1">
+            <a:schemeClr val="accent1"/>
+          </a:lnRef>
+          <a:fillRef idx="3">
+            <a:schemeClr val="accent1"/>
+          </a:fillRef>
+          <a:effectRef idx="2">
+            <a:schemeClr val="accent1"/>
+          </a:effectRef>
+          <a:fontRef idx="minor">
+            <a:schemeClr val="lt1"/>
+          </a:fontRef>
+        </p:style>
+        <p:txBody>
+          <a:bodyPr rtlCol="0" anchor="ctr"/>
+          <a:lstStyle/>
+          <a:p>
+            <a:pPr algn="ctr"/>
+          </a:p>
+        </p:txBody>
+      </p:sp>
+      <p:sp>
+        <p:nvSpPr>
+          <p:cNvPr id="5" name="Rectangle 4"/>
+          <p:cNvSpPr/>
+          <p:nvPr/>
+        </p:nvSpPr>
+        <p:spPr>
+          <a:gradFill flip="none" rotWithShape="1">
+            <a:gsLst>
+              <a:gs pos="0">
+                <a:srgbClr val="A78BFA">
+                  <a:alpha val="40000"/>
+                </a:srgbClr>
+              </a:gs>
+              <a:gs pos="40000">
+                <a:srgbClr val="EC4899">
+                  <a:alpha val="15000"/>
+                </a:srgbClr>
+              </a:gs>
+            </a:gsLst>
+            <a:path path="circle">
+              <a:fillToRect l="50000" t="50000" r="50000" b="50000"/>
+            </a:path>
+          </a:gradFill>
+          <a:xfrm>
+            <a:off x="381000" y="3367980"/>
+            <a:ext cx="11430000" cy="3490020"/>
+          </a:xfrm>
+          <a:prstGeom prst="rect">
+            <a:avLst/>
+          </a:prstGeom>
+          <a:ln>
+            <a:noFill/>
+          </a:ln>
+        </p:spPr>
+        <p:style>
+          <a:lnRef idx="1">
+            <a:schemeClr val="accent1"/>
+          </a:lnRef>
+          <a:fillRef idx="3">
+            <a:schemeClr val="accent1"/>
+          </a:fillRef>
+          <a:effectRef idx="2">
+            <a:schemeClr val="accent1"/>
+          </a:effectRef>
+          <a:fontRef idx="minor">
+            <a:schemeClr val="lt1"/>
+          </a:fontRef>
+        </p:style>
+        <p:txBody>
+          <a:bodyPr rtlCol="0" anchor="ctr"/>
+          <a:lstStyle/>
+          <a:p>
+            <a:pPr algn="ctr"/>
+          </a:p>
+        </p:txBody>
+      </p:sp>
+      <p:sp>
+        <p:nvSpPr>
+          <p:cNvPr id="6" name="TextBox 5"/>
+          <p:cNvSpPr txBox="1"/>
+          <p:nvPr/>
+        </p:nvSpPr>
+        <p:spPr>
+          <a:xfrm>
+            <a:off x="4400699" y="1112193"/>
+            <a:ext cx="3390454" cy="152400"/>
+          </a:xfrm>
+          <a:prstGeom prst="rect">
+            <a:avLst/>
+          </a:prstGeom>
+          <a:noFill/>
+        </p:spPr>
+        <p:txBody>
+          <a:bodyPr wrap="square" lIns="0" rIns="0" tIns="0" bIns="0">
+            <a:spAutoFit/>
+          </a:bodyPr>
+          <a:lstStyle/>
+          <a:p>
+            <a:pPr algn="ctr"/>
+            <a:r>
+              <a:rPr sz="975" b="1" i="0" u="none">
+                <a:solidFill>
+                  <a:srgbClr val="A78BFA"/>
+                </a:solidFill>
+                <a:latin typeface="Inter"/>
+              </a:rPr>
+              <a:t>Get started in 30 seconds</a:t>
+            </a:r>
+          </a:p>
+        </p:txBody>
+      </p:sp>
+      <p:sp>
+        <p:nvSpPr>
+          <p:cNvPr id="7" name="TextBox 6"/>
+          <p:cNvSpPr txBox="1"/>
+          <p:nvPr/>
+        </p:nvSpPr>
+        <p:spPr>
+          <a:xfrm>
+            <a:off x="914400" y="1569393"/>
+            <a:ext cx="10363200" cy="1642765"/>
+          </a:xfrm>
+          <a:prstGeom prst="rect">
+            <a:avLst/>
+          </a:prstGeom>
+          <a:noFill/>
+        </p:spPr>
+        <p:txBody>
+          <a:bodyPr wrap="square" lIns="0" rIns="0" tIns="0" bIns="0">
+            <a:spAutoFit/>
+          </a:bodyPr>
+          <a:lstStyle/>
+          <a:p>
+            <a:pPr algn="ctr"/>
+            <a:r>
+              <a:rPr sz="6600" b="1" i="0" u="none">
+                <a:solidFill>
+                  <a:srgbClr val="F5F5F7"/>
+                </a:solidFill>
+                <a:latin typeface="Inter"/>
+              </a:rPr>
+              <a:t>Ship decks that </a:t>
+            </a:r>
+            <a:r>
+              <a:rPr sz="6600" b="1" i="0" u="none">
+                <a:latin typeface="Inter"/>
+              </a:rPr>
+              <a:t>stay alive</a:t>
+            </a:r>
+            <a:r>
+              <a:rPr sz="6600" b="1" i="0" u="none">
+                <a:solidFill>
+                  <a:srgbClr val="F5F5F7"/>
+                </a:solidFill>
+                <a:latin typeface="Inter"/>
+              </a:rPr>
+              <a:t> after the meeting.</a:t>
+            </a:r>
+          </a:p>
+        </p:txBody>
+      </p:sp>
+      <p:sp>
+        <p:nvSpPr>
+          <p:cNvPr id="8" name="TextBox 7"/>
+          <p:cNvSpPr txBox="1"/>
+          <p:nvPr/>
+        </p:nvSpPr>
+        <p:spPr>
+          <a:xfrm>
+            <a:off x="2476500" y="3516957"/>
+            <a:ext cx="7239000" cy="628650"/>
+          </a:xfrm>
+          <a:prstGeom prst="rect">
+            <a:avLst/>
+          </a:prstGeom>
+          <a:noFill/>
+        </p:spPr>
+        <p:txBody>
+          <a:bodyPr wrap="square" lIns="0" rIns="0" tIns="0" bIns="0">
+            <a:spAutoFit/>
+          </a:bodyPr>
+          <a:lstStyle/>
+          <a:p>
+            <a:pPr algn="ctr"/>
+            <a:r>
+              <a:rPr sz="1650" b="0" i="0" u="none">
+                <a:solidFill>
+                  <a:srgbClr val="D4D4D8"/>
+                </a:solidFill>
+                <a:latin typeface="Inter"/>
+              </a:rPr>
+              <a:t>Convert your first HTML deck for free. No signup, no credit card. Bring your own LLM provider or use the auto-detected fallback.</a:t>
+            </a:r>
+          </a:p>
+        </p:txBody>
+      </p:sp>
+      <p:sp>
+        <p:nvSpPr>
+          <p:cNvPr id="9" name="TextBox 8"/>
+          <p:cNvSpPr txBox="1"/>
+          <p:nvPr/>
+        </p:nvSpPr>
+        <p:spPr>
+          <a:xfrm>
+            <a:off x="3207990" y="4688532"/>
+            <a:ext cx="1842046" cy="533400"/>
+          </a:xfrm>
+          <a:prstGeom prst="rect">
+            <a:avLst/>
+          </a:prstGeom>
+          <a:solidFill>
+            <a:srgbClr val="FFFFFF"/>
+          </a:solidFill>
+          <a:effectLst>
+            <a:outerShdw blurRad="381000" dist="114300" dir="5400000" algn="ctr" rotWithShape="0">
+              <a:srgbClr val="FFFFFF">
+                <a:alpha val="20000"/>
+              </a:srgbClr>
+            </a:outerShdw>
+          </a:effectLst>
+        </p:spPr>
+        <p:txBody>
+          <a:bodyPr wrap="square" lIns="0" rIns="0" tIns="0" bIns="0">
+            <a:spAutoFit/>
+          </a:bodyPr>
+          <a:lstStyle/>
+          <a:p>
+            <a:pPr algn="ctr"/>
+            <a:r>
+              <a:rPr sz="1200" b="1" i="0" u="none">
+                <a:solidFill>
+                  <a:srgbClr val="0A0A0F"/>
+                </a:solidFill>
+                <a:latin typeface="Inter"/>
+              </a:rPr>
+              <a:t>pip install slidify</a:t>
+            </a:r>
+          </a:p>
+        </p:txBody>
+      </p:sp>
+      <p:sp>
+        <p:nvSpPr>
+          <p:cNvPr id="10" name="TextBox 9"/>
+          <p:cNvSpPr txBox="1"/>
+          <p:nvPr/>
+        </p:nvSpPr>
+        <p:spPr>
+          <a:xfrm>
+            <a:off x="5183386" y="4679007"/>
+            <a:ext cx="1868835" cy="552450"/>
+          </a:xfrm>
+          <a:prstGeom prst="rect">
+            <a:avLst/>
+          </a:prstGeom>
+          <a:solidFill>
+            <a:srgbClr val="FFFFFF"/>
+          </a:solidFill>
+        </p:spPr>
+        <p:txBody>
+          <a:bodyPr wrap="square" lIns="0" rIns="0" tIns="0" bIns="0">
+            <a:spAutoFit/>
+          </a:bodyPr>
+          <a:lstStyle/>
+          <a:p>
+            <a:pPr algn="ctr"/>
+            <a:r>
+              <a:rPr sz="1200" b="1" i="0" u="none">
+                <a:solidFill>
+                  <a:srgbClr val="F5F5F7"/>
+                </a:solidFill>
+                <a:latin typeface="Inter"/>
+              </a:rPr>
+              <a:t>Read the spec →</a:t>
+            </a:r>
+          </a:p>
+        </p:txBody>
+      </p:sp>
+      <p:sp>
+        <p:nvSpPr>
+          <p:cNvPr id="11" name="TextBox 10"/>
+          <p:cNvSpPr txBox="1"/>
+          <p:nvPr/>
+        </p:nvSpPr>
+        <p:spPr>
+          <a:xfrm>
+            <a:off x="7185571" y="4779020"/>
+            <a:ext cx="1798439" cy="352425"/>
+          </a:xfrm>
+          <a:prstGeom prst="rect">
+            <a:avLst/>
+          </a:prstGeom>
+          <a:noFill/>
+        </p:spPr>
+        <p:txBody>
+          <a:bodyPr wrap="square" lIns="0" rIns="0" tIns="0" bIns="0">
+            <a:spAutoFit/>
+          </a:bodyPr>
+          <a:lstStyle/>
+          <a:p>
+            <a:pPr algn="ctr"/>
+            <a:r>
+              <a:rPr sz="1050" b="1" i="0" u="none">
+                <a:solidFill>
+                  <a:srgbClr val="A1A1AA"/>
+                </a:solidFill>
+                <a:latin typeface="Inter"/>
+              </a:rPr>
+              <a:t>github.com/pixelpitch</a:t>
+            </a:r>
+          </a:p>
+        </p:txBody>
+      </p:sp>
+      <p:sp>
+        <p:nvSpPr>
+          <p:cNvPr id="12" name="TextBox 11"/>
+          <p:cNvSpPr txBox="1"/>
+          <p:nvPr/>
+        </p:nvSpPr>
+        <p:spPr>
+          <a:xfrm>
+            <a:off x="5249912" y="5688657"/>
+            <a:ext cx="1692027" cy="323850"/>
+          </a:xfrm>
+          <a:prstGeom prst="rect">
+            <a:avLst/>
+          </a:prstGeom>
+          <a:solidFill>
+            <a:srgbClr val="FFFFFF"/>
+          </a:solidFill>
+        </p:spPr>
+        <p:txBody>
+          <a:bodyPr wrap="square" lIns="0" rIns="0" tIns="0" bIns="0">
+            <a:spAutoFit/>
+          </a:bodyPr>
+          <a:lstStyle/>
+          <a:p>
+            <a:pPr algn="ctr"/>
+            <a:r>
+              <a:rPr sz="975" b="0" i="0" u="none">
+                <a:solidFill>
+                  <a:srgbClr val="D4D4D8"/>
+                </a:solidFill>
+                <a:latin typeface="Inter"/>
+              </a:rPr>
+              <a:t> v1.0 · shipping today</a:t>
+            </a:r>
+          </a:p>
+        </p:txBody>
+      </p:sp>
+      <p:sp>
+        <p:nvSpPr>
+          <p:cNvPr id="13" name="TextBox 12"/>
+          <p:cNvSpPr txBox="1"/>
+          <p:nvPr/>
+        </p:nvSpPr>
+        <p:spPr>
+          <a:xfrm>
+            <a:off x="914400" y="6400800"/>
+            <a:ext cx="1418630" cy="152400"/>
+          </a:xfrm>
+          <a:prstGeom prst="rect">
+            <a:avLst/>
+          </a:prstGeom>
+          <a:noFill/>
+        </p:spPr>
+        <p:txBody>
+          <a:bodyPr wrap="square" lIns="0" rIns="0" tIns="0" bIns="0">
+            <a:spAutoFit/>
+          </a:bodyPr>
+          <a:lstStyle/>
+          <a:p>
+            <a:pPr algn="l"/>
+            <a:r>
+              <a:rPr sz="975" b="1" i="0" u="none">
+                <a:solidFill>
+                  <a:srgbClr val="52525B"/>
+                </a:solidFill>
+                <a:latin typeface="Inter"/>
+              </a:rPr>
+              <a:t>PIXELPITCH LABS</a:t>
+            </a:r>
+          </a:p>
+        </p:txBody>
+      </p:sp>
+      <p:sp>
+        <p:nvSpPr>
+          <p:cNvPr id="14" name="TextBox 13"/>
+          <p:cNvSpPr txBox="1"/>
+          <p:nvPr/>
+        </p:nvSpPr>
+        <p:spPr>
+          <a:xfrm>
+            <a:off x="10259318" y="6400800"/>
+            <a:ext cx="1018282" cy="152400"/>
+          </a:xfrm>
+          <a:prstGeom prst="rect">
+            <a:avLst/>
+          </a:prstGeom>
+          <a:noFill/>
+        </p:spPr>
+        <p:txBody>
+          <a:bodyPr wrap="square" lIns="0" rIns="0" tIns="0" bIns="0">
+            <a:spAutoFit/>
+          </a:bodyPr>
+          <a:lstStyle/>
+          <a:p>
+            <a:pPr algn="l"/>
+            <a:r>
+              <a:rPr sz="975" b="1" i="0" u="none">
+                <a:solidFill>
+                  <a:srgbClr val="52525B"/>
+                </a:solidFill>
+                <a:latin typeface="Inter"/>
+              </a:rPr>
+              <a:t>12 / 12 · END</a:t>
             </a:r>
           </a:p>
         </p:txBody>

--- a/examples/sophisticated/deck.pptx
+++ b/examples/sophisticated/deck.pptx
@@ -3106,49 +3106,6 @@
           <p:nvPr/>
         </p:nvSpPr>
         <p:spPr>
-          <a:xfrm>
-            <a:off x="0" y="0"/>
-            <a:ext cx="12192000" cy="6858000"/>
-          </a:xfrm>
-          <a:prstGeom prst="rect">
-            <a:avLst/>
-          </a:prstGeom>
-          <a:solidFill>
-            <a:srgbClr val="070710"/>
-          </a:solidFill>
-          <a:ln>
-            <a:noFill/>
-          </a:ln>
-        </p:spPr>
-        <p:style>
-          <a:lnRef idx="1">
-            <a:schemeClr val="accent1"/>
-          </a:lnRef>
-          <a:fillRef idx="3">
-            <a:schemeClr val="accent1"/>
-          </a:fillRef>
-          <a:effectRef idx="2">
-            <a:schemeClr val="accent1"/>
-          </a:effectRef>
-          <a:fontRef idx="minor">
-            <a:schemeClr val="lt1"/>
-          </a:fontRef>
-        </p:style>
-        <p:txBody>
-          <a:bodyPr rtlCol="0" anchor="ctr"/>
-          <a:lstStyle/>
-          <a:p>
-            <a:pPr algn="ctr"/>
-          </a:p>
-        </p:txBody>
-      </p:sp>
-      <p:sp>
-        <p:nvSpPr>
-          <p:cNvPr id="3" name="Rectangle 2"/>
-          <p:cNvSpPr/>
-          <p:nvPr/>
-        </p:nvSpPr>
-        <p:spPr>
           <a:gradFill flip="none" rotWithShape="1">
             <a:gsLst>
               <a:gs pos="0">
@@ -3200,7 +3157,7 @@
       </p:sp>
       <p:sp>
         <p:nvSpPr>
-          <p:cNvPr id="4" name="Rectangle 3"/>
+          <p:cNvPr id="3" name="Rectangle 2"/>
           <p:cNvSpPr/>
           <p:nvPr/>
         </p:nvSpPr>
@@ -3217,14 +3174,24 @@
                   <a:alpha val="18000"/>
                 </a:srgbClr>
               </a:gs>
+              <a:gs pos="70000">
+                <a:srgbClr val="6366F1">
+                  <a:alpha val="0"/>
+                </a:srgbClr>
+              </a:gs>
+              <a:gs pos="100000">
+                <a:srgbClr val="6366F1">
+                  <a:alpha val="0"/>
+                </a:srgbClr>
+              </a:gs>
             </a:gsLst>
             <a:path path="circle">
               <a:fillToRect l="50000" t="50000" r="50000" b="50000"/>
             </a:path>
           </a:gradFill>
           <a:xfrm>
-            <a:off x="0" y="0"/>
-            <a:ext cx="7429500" cy="6858000"/>
+            <a:off x="-1143000" y="-2095500"/>
+            <a:ext cx="7429500" cy="7429500"/>
           </a:xfrm>
           <a:prstGeom prst="rect">
             <a:avLst/>
@@ -3257,7 +3224,7 @@
       </p:sp>
       <p:sp>
         <p:nvSpPr>
-          <p:cNvPr id="5" name="Rectangle 4"/>
+          <p:cNvPr id="4" name="Rectangle 3"/>
           <p:cNvSpPr/>
           <p:nvPr/>
         </p:nvSpPr>
@@ -3274,6 +3241,16 @@
                   <a:alpha val="10000"/>
                 </a:srgbClr>
               </a:gs>
+              <a:gs pos="72000">
+                <a:srgbClr val="F472B6">
+                  <a:alpha val="0"/>
+                </a:srgbClr>
+              </a:gs>
+              <a:gs pos="100000">
+                <a:srgbClr val="F472B6">
+                  <a:alpha val="0"/>
+                </a:srgbClr>
+              </a:gs>
             </a:gsLst>
             <a:path path="circle">
               <a:fillToRect l="50000" t="50000" r="50000" b="50000"/>
@@ -3281,7 +3258,7 @@
           </a:gradFill>
           <a:xfrm>
             <a:off x="5143500" y="571500"/>
-            <a:ext cx="7048500" cy="6286500"/>
+            <a:ext cx="8763000" cy="8763000"/>
           </a:xfrm>
           <a:prstGeom prst="rect">
             <a:avLst/>
@@ -3314,7 +3291,7 @@
       </p:sp>
       <p:sp>
         <p:nvSpPr>
-          <p:cNvPr id="6" name="Rounded Rectangle 5"/>
+          <p:cNvPr id="5" name="Rounded Rectangle 4"/>
           <p:cNvSpPr/>
           <p:nvPr/>
         </p:nvSpPr>
@@ -3368,7 +3345,7 @@
       </p:sp>
       <p:sp>
         <p:nvSpPr>
-          <p:cNvPr id="7" name="TextBox 6"/>
+          <p:cNvPr id="6" name="TextBox 5"/>
           <p:cNvSpPr txBox="1"/>
           <p:nvPr/>
         </p:nvSpPr>
@@ -3384,7 +3361,7 @@
         </p:spPr>
         <p:txBody>
           <a:bodyPr wrap="square" lIns="0" rIns="0" tIns="0" bIns="0">
-            <a:spAutoFit/>
+            <a:normAutofit/>
           </a:bodyPr>
           <a:lstStyle/>
           <a:p>
@@ -3412,7 +3389,7 @@
       </p:sp>
       <p:sp>
         <p:nvSpPr>
-          <p:cNvPr id="8" name="TextBox 7"/>
+          <p:cNvPr id="7" name="TextBox 6"/>
           <p:cNvSpPr txBox="1"/>
           <p:nvPr/>
         </p:nvSpPr>
@@ -3425,12 +3402,14 @@
             <a:avLst/>
           </a:prstGeom>
           <a:solidFill>
-            <a:srgbClr val="FFFFFF"/>
+            <a:srgbClr val="FFFFFF">
+              <a:alpha val="6000"/>
+            </a:srgbClr>
           </a:solidFill>
         </p:spPr>
         <p:txBody>
           <a:bodyPr wrap="square" lIns="0" rIns="0" tIns="0" bIns="0">
-            <a:spAutoFit/>
+            <a:normAutofit/>
           </a:bodyPr>
           <a:lstStyle/>
           <a:p>
@@ -3449,7 +3428,7 @@
       </p:sp>
       <p:sp>
         <p:nvSpPr>
-          <p:cNvPr id="9" name="TextBox 8"/>
+          <p:cNvPr id="8" name="TextBox 7"/>
           <p:cNvSpPr txBox="1"/>
           <p:nvPr/>
         </p:nvSpPr>
@@ -3465,7 +3444,7 @@
         </p:spPr>
         <p:txBody>
           <a:bodyPr wrap="square" lIns="0" rIns="0" tIns="0" bIns="0">
-            <a:spAutoFit/>
+            <a:normAutofit/>
           </a:bodyPr>
           <a:lstStyle/>
           <a:p>
@@ -3484,7 +3463,7 @@
       </p:sp>
       <p:sp>
         <p:nvSpPr>
-          <p:cNvPr id="10" name="TextBox 9"/>
+          <p:cNvPr id="9" name="TextBox 8"/>
           <p:cNvSpPr txBox="1"/>
           <p:nvPr/>
         </p:nvSpPr>
@@ -3500,7 +3479,7 @@
         </p:spPr>
         <p:txBody>
           <a:bodyPr wrap="square" lIns="0" rIns="0" tIns="0" bIns="0">
-            <a:spAutoFit/>
+            <a:normAutofit/>
           </a:bodyPr>
           <a:lstStyle/>
           <a:p>
@@ -3516,6 +3495,9 @@
             </a:r>
             <a:r>
               <a:rPr sz="7800" b="1" i="0" u="none">
+                <a:solidFill>
+                  <a:srgbClr val="818CF8"/>
+                </a:solidFill>
                 <a:latin typeface="Inter"/>
               </a:rPr>
               <a:t>presentations</a:t>
@@ -3534,7 +3516,7 @@
       </p:sp>
       <p:sp>
         <p:nvSpPr>
-          <p:cNvPr id="11" name="TextBox 10"/>
+          <p:cNvPr id="10" name="TextBox 9"/>
           <p:cNvSpPr txBox="1"/>
           <p:nvPr/>
         </p:nvSpPr>
@@ -3550,7 +3532,7 @@
         </p:spPr>
         <p:txBody>
           <a:bodyPr wrap="square" lIns="0" rIns="0" tIns="0" bIns="0">
-            <a:spAutoFit/>
+            <a:normAutofit/>
           </a:bodyPr>
           <a:lstStyle/>
           <a:p>
@@ -3569,7 +3551,7 @@
       </p:sp>
       <p:sp>
         <p:nvSpPr>
-          <p:cNvPr id="12" name="TextBox 11"/>
+          <p:cNvPr id="11" name="TextBox 10"/>
           <p:cNvSpPr txBox="1"/>
           <p:nvPr/>
         </p:nvSpPr>
@@ -3585,7 +3567,7 @@
         </p:spPr>
         <p:txBody>
           <a:bodyPr wrap="square" lIns="0" rIns="0" tIns="0" bIns="0">
-            <a:spAutoFit/>
+            <a:normAutofit/>
           </a:bodyPr>
           <a:lstStyle/>
           <a:p>
@@ -3604,7 +3586,7 @@
       </p:sp>
       <p:sp>
         <p:nvSpPr>
-          <p:cNvPr id="13" name="TextBox 12"/>
+          <p:cNvPr id="12" name="TextBox 11"/>
           <p:cNvSpPr txBox="1"/>
           <p:nvPr/>
         </p:nvSpPr>
@@ -3620,7 +3602,7 @@
         </p:spPr>
         <p:txBody>
           <a:bodyPr wrap="square" lIns="0" rIns="0" tIns="0" bIns="0">
-            <a:spAutoFit/>
+            <a:normAutofit/>
           </a:bodyPr>
           <a:lstStyle/>
           <a:p>
@@ -3716,7 +3698,7 @@
         </p:spPr>
         <p:txBody>
           <a:bodyPr wrap="square" lIns="0" rIns="0" tIns="0" bIns="0">
-            <a:spAutoFit/>
+            <a:normAutofit/>
           </a:bodyPr>
           <a:lstStyle/>
           <a:p>
@@ -3751,7 +3733,7 @@
         </p:spPr>
         <p:txBody>
           <a:bodyPr wrap="square" lIns="0" rIns="0" tIns="0" bIns="0">
-            <a:spAutoFit/>
+            <a:normAutofit/>
           </a:bodyPr>
           <a:lstStyle/>
           <a:p>
@@ -3786,7 +3768,7 @@
         </p:spPr>
         <p:txBody>
           <a:bodyPr wrap="square" lIns="0" rIns="0" tIns="0" bIns="0">
-            <a:spAutoFit/>
+            <a:normAutofit/>
           </a:bodyPr>
           <a:lstStyle/>
           <a:p>
@@ -3900,7 +3882,7 @@
       </p:sp>
       <p:sp>
         <p:nvSpPr>
-          <p:cNvPr id="8" name="Rounded Rectangle 7"/>
+          <p:cNvPr id="8" name="Oval 7"/>
           <p:cNvSpPr/>
           <p:nvPr/>
         </p:nvSpPr>
@@ -3909,7 +3891,7 @@
             <a:off x="923925" y="3226891"/>
             <a:ext cx="95250" cy="95250"/>
           </a:xfrm>
-          <a:prstGeom prst="roundRect">
+          <a:prstGeom prst="ellipse">
             <a:avLst/>
           </a:prstGeom>
           <a:solidFill>
@@ -3943,7 +3925,7 @@
       </p:sp>
       <p:sp>
         <p:nvSpPr>
-          <p:cNvPr id="9" name="Rounded Rectangle 8"/>
+          <p:cNvPr id="9" name="Oval 8"/>
           <p:cNvSpPr/>
           <p:nvPr/>
         </p:nvSpPr>
@@ -3952,7 +3934,7 @@
             <a:off x="1095375" y="3226891"/>
             <a:ext cx="95250" cy="95250"/>
           </a:xfrm>
-          <a:prstGeom prst="roundRect">
+          <a:prstGeom prst="ellipse">
             <a:avLst/>
           </a:prstGeom>
           <a:solidFill>
@@ -3986,7 +3968,7 @@
       </p:sp>
       <p:sp>
         <p:nvSpPr>
-          <p:cNvPr id="10" name="Rounded Rectangle 9"/>
+          <p:cNvPr id="10" name="Oval 9"/>
           <p:cNvSpPr/>
           <p:nvPr/>
         </p:nvSpPr>
@@ -3995,7 +3977,7 @@
             <a:off x="1266825" y="3226891"/>
             <a:ext cx="95250" cy="95250"/>
           </a:xfrm>
-          <a:prstGeom prst="roundRect">
+          <a:prstGeom prst="ellipse">
             <a:avLst/>
           </a:prstGeom>
           <a:solidFill>
@@ -4045,7 +4027,7 @@
         </p:spPr>
         <p:txBody>
           <a:bodyPr wrap="square" lIns="0" rIns="0" tIns="0" bIns="0">
-            <a:spAutoFit/>
+            <a:normAutofit/>
           </a:bodyPr>
           <a:lstStyle/>
           <a:p>
@@ -4080,7 +4062,7 @@
         </p:spPr>
         <p:txBody>
           <a:bodyPr wrap="square" lIns="0" rIns="0" tIns="0" bIns="0">
-            <a:spAutoFit/>
+            <a:normAutofit/>
           </a:bodyPr>
           <a:lstStyle/>
           <a:p>
@@ -4115,7 +4097,7 @@
         </p:spPr>
         <p:txBody>
           <a:bodyPr wrap="square" lIns="0" rIns="0" tIns="0" bIns="0">
-            <a:spAutoFit/>
+            <a:normAutofit/>
           </a:bodyPr>
           <a:lstStyle/>
           <a:p>
@@ -4150,7 +4132,7 @@
         </p:spPr>
         <p:txBody>
           <a:bodyPr wrap="square" lIns="0" rIns="0" tIns="0" bIns="0">
-            <a:spAutoFit/>
+            <a:normAutofit/>
           </a:bodyPr>
           <a:lstStyle/>
           <a:p>
@@ -4185,7 +4167,7 @@
         </p:spPr>
         <p:txBody>
           <a:bodyPr wrap="square" lIns="0" rIns="0" tIns="0" bIns="0">
-            <a:spAutoFit/>
+            <a:normAutofit/>
           </a:bodyPr>
           <a:lstStyle/>
           <a:p>
@@ -4238,7 +4220,7 @@
         </p:spPr>
         <p:txBody>
           <a:bodyPr wrap="square" lIns="0" rIns="0" tIns="0" bIns="0">
-            <a:spAutoFit/>
+            <a:normAutofit/>
           </a:bodyPr>
           <a:lstStyle/>
           <a:p>
@@ -4291,7 +4273,7 @@
         </p:spPr>
         <p:txBody>
           <a:bodyPr wrap="square" lIns="0" rIns="0" tIns="0" bIns="0">
-            <a:spAutoFit/>
+            <a:normAutofit/>
           </a:bodyPr>
           <a:lstStyle/>
           <a:p>
@@ -4371,7 +4353,7 @@
         </p:spPr>
         <p:txBody>
           <a:bodyPr wrap="square" lIns="0" rIns="0" tIns="0" bIns="0">
-            <a:spAutoFit/>
+            <a:normAutofit/>
           </a:bodyPr>
           <a:lstStyle/>
           <a:p>
@@ -4424,7 +4406,7 @@
         </p:spPr>
         <p:txBody>
           <a:bodyPr wrap="square" lIns="0" rIns="0" tIns="0" bIns="0">
-            <a:spAutoFit/>
+            <a:normAutofit/>
           </a:bodyPr>
           <a:lstStyle/>
           <a:p>
@@ -4477,7 +4459,7 @@
         </p:spPr>
         <p:txBody>
           <a:bodyPr wrap="square" lIns="0" rIns="0" tIns="0" bIns="0">
-            <a:spAutoFit/>
+            <a:normAutofit/>
           </a:bodyPr>
           <a:lstStyle/>
           <a:p>
@@ -4536,7 +4518,9 @@
             <a:avLst/>
           </a:prstGeom>
           <a:solidFill>
-            <a:srgbClr val="FFFFFF"/>
+            <a:srgbClr val="FFFFFF">
+              <a:alpha val="4000"/>
+            </a:srgbClr>
           </a:solidFill>
           <a:ln w="9525">
             <a:solidFill>
@@ -4584,7 +4568,7 @@
         </p:spPr>
         <p:txBody>
           <a:bodyPr wrap="square" lIns="0" rIns="0" tIns="0" bIns="0">
-            <a:spAutoFit/>
+            <a:normAutofit/>
           </a:bodyPr>
           <a:lstStyle/>
           <a:p>
@@ -4619,7 +4603,7 @@
         </p:spPr>
         <p:txBody>
           <a:bodyPr wrap="square" lIns="0" rIns="0" tIns="0" bIns="0">
-            <a:spAutoFit/>
+            <a:normAutofit/>
           </a:bodyPr>
           <a:lstStyle/>
           <a:p>
@@ -4660,7 +4644,9 @@
             <a:avLst/>
           </a:prstGeom>
           <a:solidFill>
-            <a:srgbClr val="FFFFFF"/>
+            <a:srgbClr val="FFFFFF">
+              <a:alpha val="4000"/>
+            </a:srgbClr>
           </a:solidFill>
           <a:ln w="9525">
             <a:solidFill>
@@ -4708,7 +4694,7 @@
         </p:spPr>
         <p:txBody>
           <a:bodyPr wrap="square" lIns="0" rIns="0" tIns="0" bIns="0">
-            <a:spAutoFit/>
+            <a:normAutofit/>
           </a:bodyPr>
           <a:lstStyle/>
           <a:p>
@@ -4743,7 +4729,7 @@
         </p:spPr>
         <p:txBody>
           <a:bodyPr wrap="square" lIns="0" rIns="0" tIns="0" bIns="0">
-            <a:spAutoFit/>
+            <a:normAutofit/>
           </a:bodyPr>
           <a:lstStyle/>
           <a:p>
@@ -4835,7 +4821,7 @@
         </p:spPr>
         <p:txBody>
           <a:bodyPr wrap="square" lIns="0" rIns="0" tIns="0" bIns="0">
-            <a:spAutoFit/>
+            <a:normAutofit/>
           </a:bodyPr>
           <a:lstStyle/>
           <a:p>
@@ -4869,7 +4855,7 @@
         </p:spPr>
         <p:txBody>
           <a:bodyPr wrap="square" lIns="0" rIns="0" tIns="0" bIns="0">
-            <a:spAutoFit/>
+            <a:normAutofit/>
           </a:bodyPr>
           <a:lstStyle/>
           <a:p>
@@ -4901,7 +4887,9 @@
             <a:avLst/>
           </a:prstGeom>
           <a:solidFill>
-            <a:srgbClr val="FFFFFF"/>
+            <a:srgbClr val="FFFFFF">
+              <a:alpha val="4000"/>
+            </a:srgbClr>
           </a:solidFill>
           <a:ln w="9525">
             <a:solidFill>
@@ -4949,7 +4937,7 @@
         </p:spPr>
         <p:txBody>
           <a:bodyPr wrap="square" lIns="0" rIns="0" tIns="0" bIns="0">
-            <a:spAutoFit/>
+            <a:normAutofit/>
           </a:bodyPr>
           <a:lstStyle/>
           <a:p>
@@ -4983,7 +4971,7 @@
         </p:spPr>
         <p:txBody>
           <a:bodyPr wrap="square" lIns="0" rIns="0" tIns="0" bIns="0">
-            <a:spAutoFit/>
+            <a:normAutofit/>
           </a:bodyPr>
           <a:lstStyle/>
           <a:p>
@@ -5018,7 +5006,7 @@
         </p:spPr>
         <p:txBody>
           <a:bodyPr wrap="square" lIns="0" rIns="0" tIns="0" bIns="0">
-            <a:spAutoFit/>
+            <a:normAutofit/>
           </a:bodyPr>
           <a:lstStyle/>
           <a:p>
@@ -5053,7 +5041,7 @@
         </p:spPr>
         <p:txBody>
           <a:bodyPr wrap="square" lIns="0" rIns="0" tIns="0" bIns="0">
-            <a:spAutoFit/>
+            <a:normAutofit/>
           </a:bodyPr>
           <a:lstStyle/>
           <a:p>
@@ -5088,7 +5076,7 @@
         </p:spPr>
         <p:txBody>
           <a:bodyPr wrap="square" lIns="0" rIns="0" tIns="0" bIns="0">
-            <a:spAutoFit/>
+            <a:normAutofit/>
           </a:bodyPr>
           <a:lstStyle/>
           <a:p>
@@ -5184,7 +5172,7 @@
         </p:spPr>
         <p:txBody>
           <a:bodyPr wrap="square" lIns="0" rIns="0" tIns="0" bIns="0">
-            <a:spAutoFit/>
+            <a:normAutofit/>
           </a:bodyPr>
           <a:lstStyle/>
           <a:p>
@@ -5219,7 +5207,7 @@
         </p:spPr>
         <p:txBody>
           <a:bodyPr wrap="square" lIns="0" rIns="0" tIns="0" bIns="0">
-            <a:spAutoFit/>
+            <a:normAutofit/>
           </a:bodyPr>
           <a:lstStyle/>
           <a:p>
@@ -5251,7 +5239,9 @@
             <a:avLst/>
           </a:prstGeom>
           <a:solidFill>
-            <a:srgbClr val="FFFFFF"/>
+            <a:srgbClr val="FFFFFF">
+              <a:alpha val="4000"/>
+            </a:srgbClr>
           </a:solidFill>
           <a:ln w="9525">
             <a:solidFill>
@@ -5306,7 +5296,7 @@
         </p:spPr>
         <p:txBody>
           <a:bodyPr wrap="square" lIns="0" rIns="0" tIns="0" bIns="0">
-            <a:spAutoFit/>
+            <a:normAutofit/>
           </a:bodyPr>
           <a:lstStyle/>
           <a:p>
@@ -5341,7 +5331,7 @@
         </p:spPr>
         <p:txBody>
           <a:bodyPr wrap="square" lIns="0" rIns="0" tIns="0" bIns="0">
-            <a:spAutoFit/>
+            <a:normAutofit/>
           </a:bodyPr>
           <a:lstStyle/>
           <a:p>
@@ -5373,12 +5363,14 @@
             <a:avLst/>
           </a:prstGeom>
           <a:solidFill>
-            <a:srgbClr val="22C55E"/>
+            <a:srgbClr val="22C55E">
+              <a:alpha val="14000"/>
+            </a:srgbClr>
           </a:solidFill>
         </p:spPr>
         <p:txBody>
           <a:bodyPr wrap="square" lIns="0" rIns="0" tIns="0" bIns="0">
-            <a:spAutoFit/>
+            <a:normAutofit/>
           </a:bodyPr>
           <a:lstStyle/>
           <a:p>
@@ -5413,7 +5405,7 @@
         </p:spPr>
         <p:txBody>
           <a:bodyPr wrap="square" lIns="0" rIns="0" tIns="0" bIns="0">
-            <a:spAutoFit/>
+            <a:normAutofit/>
           </a:bodyPr>
           <a:lstStyle/>
           <a:p>
@@ -5448,7 +5440,7 @@
         </p:spPr>
         <p:txBody>
           <a:bodyPr wrap="square" lIns="0" rIns="0" tIns="0" bIns="0">
-            <a:spAutoFit/>
+            <a:normAutofit/>
           </a:bodyPr>
           <a:lstStyle/>
           <a:p>
@@ -5483,7 +5475,7 @@
         </p:spPr>
         <p:txBody>
           <a:bodyPr wrap="square" lIns="0" rIns="0" tIns="0" bIns="0">
-            <a:spAutoFit/>
+            <a:normAutofit/>
           </a:bodyPr>
           <a:lstStyle/>
           <a:p>
@@ -5518,7 +5510,7 @@
         </p:spPr>
         <p:txBody>
           <a:bodyPr wrap="square" lIns="0" rIns="0" tIns="0" bIns="0">
-            <a:spAutoFit/>
+            <a:normAutofit/>
           </a:bodyPr>
           <a:lstStyle/>
           <a:p>
@@ -5553,7 +5545,7 @@
         </p:spPr>
         <p:txBody>
           <a:bodyPr wrap="square" lIns="0" rIns="0" tIns="0" bIns="0">
-            <a:spAutoFit/>
+            <a:normAutofit/>
           </a:bodyPr>
           <a:lstStyle/>
           <a:p>
@@ -5588,7 +5580,7 @@
         </p:spPr>
         <p:txBody>
           <a:bodyPr wrap="square" lIns="0" rIns="0" tIns="0" bIns="0">
-            <a:spAutoFit/>
+            <a:normAutofit/>
           </a:bodyPr>
           <a:lstStyle/>
           <a:p>
@@ -5623,7 +5615,7 @@
         </p:spPr>
         <p:txBody>
           <a:bodyPr wrap="square" lIns="0" rIns="0" tIns="0" bIns="0">
-            <a:spAutoFit/>
+            <a:normAutofit/>
           </a:bodyPr>
           <a:lstStyle/>
           <a:p>
@@ -5658,7 +5650,7 @@
         </p:spPr>
         <p:txBody>
           <a:bodyPr wrap="square" lIns="0" rIns="0" tIns="0" bIns="0">
-            <a:spAutoFit/>
+            <a:normAutofit/>
           </a:bodyPr>
           <a:lstStyle/>
           <a:p>
@@ -5693,7 +5685,7 @@
         </p:spPr>
         <p:txBody>
           <a:bodyPr wrap="square" lIns="0" rIns="0" tIns="0" bIns="0">
-            <a:spAutoFit/>
+            <a:normAutofit/>
           </a:bodyPr>
           <a:lstStyle/>
           <a:p>
@@ -5792,7 +5784,7 @@
         </p:spPr>
         <p:txBody>
           <a:bodyPr wrap="square" lIns="0" rIns="0" tIns="0" bIns="0">
-            <a:spAutoFit/>
+            <a:normAutofit/>
           </a:bodyPr>
           <a:lstStyle/>
           <a:p>
@@ -5827,7 +5819,7 @@
         </p:spPr>
         <p:txBody>
           <a:bodyPr wrap="square" lIns="0" rIns="0" tIns="0" bIns="0">
-            <a:spAutoFit/>
+            <a:normAutofit/>
           </a:bodyPr>
           <a:lstStyle/>
           <a:p>
@@ -5872,7 +5864,7 @@
         </p:spPr>
         <p:txBody>
           <a:bodyPr wrap="square" lIns="0" rIns="0" tIns="0" bIns="0">
-            <a:spAutoFit/>
+            <a:normAutofit/>
           </a:bodyPr>
           <a:lstStyle/>
           <a:p>
@@ -5907,7 +5899,7 @@
         </p:spPr>
         <p:txBody>
           <a:bodyPr wrap="square" lIns="0" rIns="0" tIns="0" bIns="0">
-            <a:spAutoFit/>
+            <a:normAutofit/>
           </a:bodyPr>
           <a:lstStyle/>
           <a:p>
@@ -5942,7 +5934,7 @@
         </p:spPr>
         <p:txBody>
           <a:bodyPr wrap="square" lIns="0" rIns="0" tIns="0" bIns="0">
-            <a:spAutoFit/>
+            <a:normAutofit/>
           </a:bodyPr>
           <a:lstStyle/>
           <a:p>
@@ -5977,7 +5969,7 @@
         </p:spPr>
         <p:txBody>
           <a:bodyPr wrap="square" lIns="0" rIns="0" tIns="0" bIns="0">
-            <a:spAutoFit/>
+            <a:normAutofit/>
           </a:bodyPr>
           <a:lstStyle/>
           <a:p>
@@ -6012,7 +6004,7 @@
         </p:spPr>
         <p:txBody>
           <a:bodyPr wrap="square" lIns="0" rIns="0" tIns="0" bIns="0">
-            <a:spAutoFit/>
+            <a:normAutofit/>
           </a:bodyPr>
           <a:lstStyle/>
           <a:p>
@@ -6047,7 +6039,7 @@
         </p:spPr>
         <p:txBody>
           <a:bodyPr wrap="square" lIns="0" rIns="0" tIns="0" bIns="0">
-            <a:spAutoFit/>
+            <a:normAutofit/>
           </a:bodyPr>
           <a:lstStyle/>
           <a:p>
@@ -6082,7 +6074,7 @@
         </p:spPr>
         <p:txBody>
           <a:bodyPr wrap="square" lIns="0" rIns="0" tIns="0" bIns="0">
-            <a:spAutoFit/>
+            <a:normAutofit/>
           </a:bodyPr>
           <a:lstStyle/>
           <a:p>
@@ -6117,7 +6109,7 @@
         </p:spPr>
         <p:txBody>
           <a:bodyPr wrap="square" lIns="0" rIns="0" tIns="0" bIns="0">
-            <a:spAutoFit/>
+            <a:normAutofit/>
           </a:bodyPr>
           <a:lstStyle/>
           <a:p>
@@ -6152,7 +6144,7 @@
         </p:spPr>
         <p:txBody>
           <a:bodyPr wrap="square" lIns="0" rIns="0" tIns="0" bIns="0">
-            <a:spAutoFit/>
+            <a:normAutofit/>
           </a:bodyPr>
           <a:lstStyle/>
           <a:p>
@@ -6187,7 +6179,7 @@
         </p:spPr>
         <p:txBody>
           <a:bodyPr wrap="square" lIns="0" rIns="0" tIns="0" bIns="0">
-            <a:spAutoFit/>
+            <a:normAutofit/>
           </a:bodyPr>
           <a:lstStyle/>
           <a:p>
@@ -6219,7 +6211,9 @@
             <a:avLst/>
           </a:prstGeom>
           <a:solidFill>
-            <a:srgbClr val="FFFFFF"/>
+            <a:srgbClr val="FFFFFF">
+              <a:alpha val="4000"/>
+            </a:srgbClr>
           </a:solidFill>
           <a:ln w="9525">
             <a:solidFill>
@@ -6274,7 +6268,7 @@
         </p:spPr>
         <p:txBody>
           <a:bodyPr wrap="square" lIns="0" rIns="0" tIns="0" bIns="0">
-            <a:spAutoFit/>
+            <a:normAutofit/>
           </a:bodyPr>
           <a:lstStyle/>
           <a:p>
@@ -6309,7 +6303,7 @@
         </p:spPr>
         <p:txBody>
           <a:bodyPr wrap="square" lIns="0" rIns="0" tIns="0" bIns="0">
-            <a:spAutoFit/>
+            <a:normAutofit/>
           </a:bodyPr>
           <a:lstStyle/>
           <a:p>
@@ -6341,12 +6335,14 @@
             <a:avLst/>
           </a:prstGeom>
           <a:solidFill>
-            <a:srgbClr val="FFFFFF"/>
+            <a:srgbClr val="FFFFFF">
+              <a:alpha val="6000"/>
+            </a:srgbClr>
           </a:solidFill>
         </p:spPr>
         <p:txBody>
           <a:bodyPr wrap="square" lIns="0" rIns="0" tIns="0" bIns="0">
-            <a:spAutoFit/>
+            <a:normAutofit/>
           </a:bodyPr>
           <a:lstStyle/>
           <a:p>
@@ -6381,7 +6377,7 @@
         </p:spPr>
         <p:txBody>
           <a:bodyPr wrap="square" lIns="0" rIns="0" tIns="0" bIns="0">
-            <a:spAutoFit/>
+            <a:normAutofit/>
           </a:bodyPr>
           <a:lstStyle/>
           <a:p>
@@ -6416,7 +6412,7 @@
         </p:spPr>
         <p:txBody>
           <a:bodyPr wrap="square" lIns="0" rIns="0" tIns="0" bIns="0">
-            <a:spAutoFit/>
+            <a:normAutofit/>
           </a:bodyPr>
           <a:lstStyle/>
           <a:p>
@@ -6451,7 +6447,7 @@
         </p:spPr>
         <p:txBody>
           <a:bodyPr wrap="square" lIns="0" rIns="0" tIns="0" bIns="0">
-            <a:spAutoFit/>
+            <a:normAutofit/>
           </a:bodyPr>
           <a:lstStyle/>
           <a:p>
@@ -6486,7 +6482,7 @@
         </p:spPr>
         <p:txBody>
           <a:bodyPr wrap="square" lIns="0" rIns="0" tIns="0" bIns="0">
-            <a:spAutoFit/>
+            <a:normAutofit/>
           </a:bodyPr>
           <a:lstStyle/>
           <a:p>
@@ -6521,7 +6517,7 @@
         </p:spPr>
         <p:txBody>
           <a:bodyPr wrap="square" lIns="0" rIns="0" tIns="0" bIns="0">
-            <a:spAutoFit/>
+            <a:normAutofit/>
           </a:bodyPr>
           <a:lstStyle/>
           <a:p>
@@ -6556,7 +6552,7 @@
         </p:spPr>
         <p:txBody>
           <a:bodyPr wrap="square" lIns="0" rIns="0" tIns="0" bIns="0">
-            <a:spAutoFit/>
+            <a:normAutofit/>
           </a:bodyPr>
           <a:lstStyle/>
           <a:p>
@@ -6591,7 +6587,7 @@
         </p:spPr>
         <p:txBody>
           <a:bodyPr wrap="square" lIns="0" rIns="0" tIns="0" bIns="0">
-            <a:spAutoFit/>
+            <a:normAutofit/>
           </a:bodyPr>
           <a:lstStyle/>
           <a:p>
@@ -6626,7 +6622,7 @@
         </p:spPr>
         <p:txBody>
           <a:bodyPr wrap="square" lIns="0" rIns="0" tIns="0" bIns="0">
-            <a:spAutoFit/>
+            <a:normAutofit/>
           </a:bodyPr>
           <a:lstStyle/>
           <a:p>
@@ -6661,7 +6657,7 @@
         </p:spPr>
         <p:txBody>
           <a:bodyPr wrap="square" lIns="0" rIns="0" tIns="0" bIns="0">
-            <a:spAutoFit/>
+            <a:normAutofit/>
           </a:bodyPr>
           <a:lstStyle/>
           <a:p>
@@ -6693,7 +6689,9 @@
             <a:avLst/>
           </a:prstGeom>
           <a:solidFill>
-            <a:srgbClr val="FFFFFF"/>
+            <a:srgbClr val="FFFFFF">
+              <a:alpha val="4000"/>
+            </a:srgbClr>
           </a:solidFill>
           <a:ln w="9525">
             <a:solidFill>
@@ -6748,7 +6746,7 @@
         </p:spPr>
         <p:txBody>
           <a:bodyPr wrap="square" lIns="0" rIns="0" tIns="0" bIns="0">
-            <a:spAutoFit/>
+            <a:normAutofit/>
           </a:bodyPr>
           <a:lstStyle/>
           <a:p>
@@ -6783,7 +6781,7 @@
         </p:spPr>
         <p:txBody>
           <a:bodyPr wrap="square" lIns="0" rIns="0" tIns="0" bIns="0">
-            <a:spAutoFit/>
+            <a:normAutofit/>
           </a:bodyPr>
           <a:lstStyle/>
           <a:p>
@@ -6815,12 +6813,14 @@
             <a:avLst/>
           </a:prstGeom>
           <a:solidFill>
-            <a:srgbClr val="FFFFFF"/>
+            <a:srgbClr val="FFFFFF">
+              <a:alpha val="6000"/>
+            </a:srgbClr>
           </a:solidFill>
         </p:spPr>
         <p:txBody>
           <a:bodyPr wrap="square" lIns="0" rIns="0" tIns="0" bIns="0">
-            <a:spAutoFit/>
+            <a:normAutofit/>
           </a:bodyPr>
           <a:lstStyle/>
           <a:p>
@@ -6855,7 +6855,7 @@
         </p:spPr>
         <p:txBody>
           <a:bodyPr wrap="square" lIns="0" rIns="0" tIns="0" bIns="0">
-            <a:spAutoFit/>
+            <a:normAutofit/>
           </a:bodyPr>
           <a:lstStyle/>
           <a:p>
@@ -6890,7 +6890,7 @@
         </p:spPr>
         <p:txBody>
           <a:bodyPr wrap="square" lIns="0" rIns="0" tIns="0" bIns="0">
-            <a:spAutoFit/>
+            <a:normAutofit/>
           </a:bodyPr>
           <a:lstStyle/>
           <a:p>
@@ -6925,7 +6925,7 @@
         </p:spPr>
         <p:txBody>
           <a:bodyPr wrap="square" lIns="0" rIns="0" tIns="0" bIns="0">
-            <a:spAutoFit/>
+            <a:normAutofit/>
           </a:bodyPr>
           <a:lstStyle/>
           <a:p>
@@ -6960,7 +6960,7 @@
         </p:spPr>
         <p:txBody>
           <a:bodyPr wrap="square" lIns="0" rIns="0" tIns="0" bIns="0">
-            <a:spAutoFit/>
+            <a:normAutofit/>
           </a:bodyPr>
           <a:lstStyle/>
           <a:p>
@@ -6995,7 +6995,7 @@
         </p:spPr>
         <p:txBody>
           <a:bodyPr wrap="square" lIns="0" rIns="0" tIns="0" bIns="0">
-            <a:spAutoFit/>
+            <a:normAutofit/>
           </a:bodyPr>
           <a:lstStyle/>
           <a:p>
@@ -7030,7 +7030,7 @@
         </p:spPr>
         <p:txBody>
           <a:bodyPr wrap="square" lIns="0" rIns="0" tIns="0" bIns="0">
-            <a:spAutoFit/>
+            <a:normAutofit/>
           </a:bodyPr>
           <a:lstStyle/>
           <a:p>
@@ -7065,7 +7065,7 @@
         </p:spPr>
         <p:txBody>
           <a:bodyPr wrap="square" lIns="0" rIns="0" tIns="0" bIns="0">
-            <a:spAutoFit/>
+            <a:normAutofit/>
           </a:bodyPr>
           <a:lstStyle/>
           <a:p>
@@ -7100,7 +7100,7 @@
         </p:spPr>
         <p:txBody>
           <a:bodyPr wrap="square" lIns="0" rIns="0" tIns="0" bIns="0">
-            <a:spAutoFit/>
+            <a:normAutofit/>
           </a:bodyPr>
           <a:lstStyle/>
           <a:p>
@@ -7135,7 +7135,7 @@
         </p:spPr>
         <p:txBody>
           <a:bodyPr wrap="square" lIns="0" rIns="0" tIns="0" bIns="0">
-            <a:spAutoFit/>
+            <a:normAutofit/>
           </a:bodyPr>
           <a:lstStyle/>
           <a:p>
@@ -7170,7 +7170,7 @@
         </p:spPr>
         <p:txBody>
           <a:bodyPr wrap="square" lIns="0" rIns="0" tIns="0" bIns="0">
-            <a:spAutoFit/>
+            <a:normAutofit/>
           </a:bodyPr>
           <a:lstStyle/>
           <a:p>
@@ -7205,7 +7205,7 @@
         </p:spPr>
         <p:txBody>
           <a:bodyPr wrap="square" lIns="0" rIns="0" tIns="0" bIns="0">
-            <a:spAutoFit/>
+            <a:normAutofit/>
           </a:bodyPr>
           <a:lstStyle/>
           <a:p>
@@ -7247,6 +7247,25 @@
           <p:nvPr/>
         </p:nvSpPr>
         <p:spPr>
+          <a:gradFill flip="none" rotWithShape="1">
+            <a:gsLst>
+              <a:gs pos="0">
+                <a:srgbClr val="4338CA"/>
+              </a:gs>
+              <a:gs pos="35000">
+                <a:srgbClr val="1E1B4B"/>
+              </a:gs>
+              <a:gs pos="70000">
+                <a:srgbClr val="050510"/>
+              </a:gs>
+              <a:gs pos="100000">
+                <a:srgbClr val="050510"/>
+              </a:gs>
+            </a:gsLst>
+            <a:path path="circle">
+              <a:fillToRect l="50000" t="100000" r="50000" b="0"/>
+            </a:path>
+          </a:gradFill>
           <a:xfrm>
             <a:off x="0" y="0"/>
             <a:ext cx="12192000" cy="6858000"/>
@@ -7254,7 +7273,6 @@
           <a:prstGeom prst="rect">
             <a:avLst/>
           </a:prstGeom>
-          <a:noFill/>
           <a:ln>
             <a:noFill/>
           </a:ln>
@@ -7291,18 +7309,17 @@
           <a:gradFill flip="none" rotWithShape="1">
             <a:gsLst>
               <a:gs pos="0">
-                <a:srgbClr val="4338CA"/>
+                <a:srgbClr val="FFFFFF">
+                  <a:alpha val="3000"/>
+                </a:srgbClr>
               </a:gs>
-              <a:gs pos="35000">
-                <a:srgbClr val="1E1B4B"/>
-              </a:gs>
-              <a:gs pos="70000">
-                <a:srgbClr val="050510"/>
+              <a:gs pos="100000">
+                <a:srgbClr val="FFFFFF">
+                  <a:alpha val="3000"/>
+                </a:srgbClr>
               </a:gs>
             </a:gsLst>
-            <a:path path="circle">
-              <a:fillToRect l="50000" t="100000" r="50000" b="0"/>
-            </a:path>
+            <a:lin ang="5400000" scaled="0"/>
           </a:gradFill>
           <a:xfrm>
             <a:off x="0" y="0"/>
@@ -7344,14 +7361,40 @@
           <p:nvPr/>
         </p:nvSpPr>
         <p:spPr>
-          <a:xfrm>
-            <a:off x="0" y="0"/>
-            <a:ext cx="12192000" cy="6858000"/>
-          </a:xfrm>
-          <a:prstGeom prst="rect">
-            <a:avLst/>
-          </a:prstGeom>
-          <a:noFill/>
+          <a:gradFill flip="none" rotWithShape="1">
+            <a:gsLst>
+              <a:gs pos="0">
+                <a:srgbClr val="A78BFA">
+                  <a:alpha val="40000"/>
+                </a:srgbClr>
+              </a:gs>
+              <a:gs pos="40000">
+                <a:srgbClr val="EC4899">
+                  <a:alpha val="15000"/>
+                </a:srgbClr>
+              </a:gs>
+              <a:gs pos="70000">
+                <a:srgbClr val="EC4899">
+                  <a:alpha val="0"/>
+                </a:srgbClr>
+              </a:gs>
+              <a:gs pos="100000">
+                <a:srgbClr val="EC4899">
+                  <a:alpha val="0"/>
+                </a:srgbClr>
+              </a:gs>
+            </a:gsLst>
+            <a:path path="circle">
+              <a:fillToRect l="50000" t="50000" r="50000" b="50000"/>
+            </a:path>
+          </a:gradFill>
+          <a:xfrm>
+            <a:off x="381000" y="3367980"/>
+            <a:ext cx="11430000" cy="5334000"/>
+          </a:xfrm>
+          <a:prstGeom prst="rect">
+            <a:avLst/>
+          </a:prstGeom>
           <a:ln>
             <a:noFill/>
           </a:ln>
@@ -7380,64 +7423,7 @@
       </p:sp>
       <p:sp>
         <p:nvSpPr>
-          <p:cNvPr id="5" name="Rectangle 4"/>
-          <p:cNvSpPr/>
-          <p:nvPr/>
-        </p:nvSpPr>
-        <p:spPr>
-          <a:gradFill flip="none" rotWithShape="1">
-            <a:gsLst>
-              <a:gs pos="0">
-                <a:srgbClr val="A78BFA">
-                  <a:alpha val="40000"/>
-                </a:srgbClr>
-              </a:gs>
-              <a:gs pos="40000">
-                <a:srgbClr val="EC4899">
-                  <a:alpha val="15000"/>
-                </a:srgbClr>
-              </a:gs>
-            </a:gsLst>
-            <a:path path="circle">
-              <a:fillToRect l="50000" t="50000" r="50000" b="50000"/>
-            </a:path>
-          </a:gradFill>
-          <a:xfrm>
-            <a:off x="381000" y="3367980"/>
-            <a:ext cx="11430000" cy="3490020"/>
-          </a:xfrm>
-          <a:prstGeom prst="rect">
-            <a:avLst/>
-          </a:prstGeom>
-          <a:ln>
-            <a:noFill/>
-          </a:ln>
-        </p:spPr>
-        <p:style>
-          <a:lnRef idx="1">
-            <a:schemeClr val="accent1"/>
-          </a:lnRef>
-          <a:fillRef idx="3">
-            <a:schemeClr val="accent1"/>
-          </a:fillRef>
-          <a:effectRef idx="2">
-            <a:schemeClr val="accent1"/>
-          </a:effectRef>
-          <a:fontRef idx="minor">
-            <a:schemeClr val="lt1"/>
-          </a:fontRef>
-        </p:style>
-        <p:txBody>
-          <a:bodyPr rtlCol="0" anchor="ctr"/>
-          <a:lstStyle/>
-          <a:p>
-            <a:pPr algn="ctr"/>
-          </a:p>
-        </p:txBody>
-      </p:sp>
-      <p:sp>
-        <p:nvSpPr>
-          <p:cNvPr id="6" name="TextBox 5"/>
+          <p:cNvPr id="5" name="TextBox 4"/>
           <p:cNvSpPr txBox="1"/>
           <p:nvPr/>
         </p:nvSpPr>
@@ -7453,7 +7439,7 @@
         </p:spPr>
         <p:txBody>
           <a:bodyPr wrap="square" lIns="0" rIns="0" tIns="0" bIns="0">
-            <a:spAutoFit/>
+            <a:normAutofit/>
           </a:bodyPr>
           <a:lstStyle/>
           <a:p>
@@ -7472,7 +7458,7 @@
       </p:sp>
       <p:sp>
         <p:nvSpPr>
-          <p:cNvPr id="7" name="TextBox 6"/>
+          <p:cNvPr id="6" name="TextBox 5"/>
           <p:cNvSpPr txBox="1"/>
           <p:nvPr/>
         </p:nvSpPr>
@@ -7488,7 +7474,7 @@
         </p:spPr>
         <p:txBody>
           <a:bodyPr wrap="square" lIns="0" rIns="0" tIns="0" bIns="0">
-            <a:spAutoFit/>
+            <a:normAutofit/>
           </a:bodyPr>
           <a:lstStyle/>
           <a:p>
@@ -7504,6 +7490,9 @@
             </a:r>
             <a:r>
               <a:rPr sz="6600" b="1" i="0" u="none">
+                <a:solidFill>
+                  <a:srgbClr val="818CF8"/>
+                </a:solidFill>
                 <a:latin typeface="Inter"/>
               </a:rPr>
               <a:t>stay alive</a:t>
@@ -7522,7 +7511,7 @@
       </p:sp>
       <p:sp>
         <p:nvSpPr>
-          <p:cNvPr id="8" name="TextBox 7"/>
+          <p:cNvPr id="7" name="TextBox 6"/>
           <p:cNvSpPr txBox="1"/>
           <p:nvPr/>
         </p:nvSpPr>
@@ -7538,7 +7527,7 @@
         </p:spPr>
         <p:txBody>
           <a:bodyPr wrap="square" lIns="0" rIns="0" tIns="0" bIns="0">
-            <a:spAutoFit/>
+            <a:normAutofit/>
           </a:bodyPr>
           <a:lstStyle/>
           <a:p>
@@ -7557,7 +7546,7 @@
       </p:sp>
       <p:sp>
         <p:nvSpPr>
-          <p:cNvPr id="9" name="TextBox 8"/>
+          <p:cNvPr id="8" name="TextBox 7"/>
           <p:cNvSpPr txBox="1"/>
           <p:nvPr/>
         </p:nvSpPr>
@@ -7582,7 +7571,7 @@
         </p:spPr>
         <p:txBody>
           <a:bodyPr wrap="square" lIns="0" rIns="0" tIns="0" bIns="0">
-            <a:spAutoFit/>
+            <a:normAutofit/>
           </a:bodyPr>
           <a:lstStyle/>
           <a:p>
@@ -7601,7 +7590,7 @@
       </p:sp>
       <p:sp>
         <p:nvSpPr>
-          <p:cNvPr id="10" name="TextBox 9"/>
+          <p:cNvPr id="9" name="TextBox 8"/>
           <p:cNvSpPr txBox="1"/>
           <p:nvPr/>
         </p:nvSpPr>
@@ -7614,12 +7603,14 @@
             <a:avLst/>
           </a:prstGeom>
           <a:solidFill>
-            <a:srgbClr val="FFFFFF"/>
+            <a:srgbClr val="FFFFFF">
+              <a:alpha val="8000"/>
+            </a:srgbClr>
           </a:solidFill>
         </p:spPr>
         <p:txBody>
           <a:bodyPr wrap="square" lIns="0" rIns="0" tIns="0" bIns="0">
-            <a:spAutoFit/>
+            <a:normAutofit/>
           </a:bodyPr>
           <a:lstStyle/>
           <a:p>
@@ -7638,7 +7629,7 @@
       </p:sp>
       <p:sp>
         <p:nvSpPr>
-          <p:cNvPr id="11" name="TextBox 10"/>
+          <p:cNvPr id="10" name="TextBox 9"/>
           <p:cNvSpPr txBox="1"/>
           <p:nvPr/>
         </p:nvSpPr>
@@ -7654,7 +7645,7 @@
         </p:spPr>
         <p:txBody>
           <a:bodyPr wrap="square" lIns="0" rIns="0" tIns="0" bIns="0">
-            <a:spAutoFit/>
+            <a:normAutofit/>
           </a:bodyPr>
           <a:lstStyle/>
           <a:p>
@@ -7673,7 +7664,7 @@
       </p:sp>
       <p:sp>
         <p:nvSpPr>
-          <p:cNvPr id="12" name="TextBox 11"/>
+          <p:cNvPr id="11" name="TextBox 10"/>
           <p:cNvSpPr txBox="1"/>
           <p:nvPr/>
         </p:nvSpPr>
@@ -7686,12 +7677,14 @@
             <a:avLst/>
           </a:prstGeom>
           <a:solidFill>
-            <a:srgbClr val="FFFFFF"/>
+            <a:srgbClr val="FFFFFF">
+              <a:alpha val="6000"/>
+            </a:srgbClr>
           </a:solidFill>
         </p:spPr>
         <p:txBody>
           <a:bodyPr wrap="square" lIns="0" rIns="0" tIns="0" bIns="0">
-            <a:spAutoFit/>
+            <a:normAutofit/>
           </a:bodyPr>
           <a:lstStyle/>
           <a:p>
@@ -7710,7 +7703,7 @@
       </p:sp>
       <p:sp>
         <p:nvSpPr>
-          <p:cNvPr id="13" name="TextBox 12"/>
+          <p:cNvPr id="12" name="TextBox 11"/>
           <p:cNvSpPr txBox="1"/>
           <p:nvPr/>
         </p:nvSpPr>
@@ -7726,7 +7719,7 @@
         </p:spPr>
         <p:txBody>
           <a:bodyPr wrap="square" lIns="0" rIns="0" tIns="0" bIns="0">
-            <a:spAutoFit/>
+            <a:normAutofit/>
           </a:bodyPr>
           <a:lstStyle/>
           <a:p>
@@ -7745,7 +7738,7 @@
       </p:sp>
       <p:sp>
         <p:nvSpPr>
-          <p:cNvPr id="14" name="TextBox 13"/>
+          <p:cNvPr id="13" name="TextBox 12"/>
           <p:cNvSpPr txBox="1"/>
           <p:nvPr/>
         </p:nvSpPr>
@@ -7761,7 +7754,7 @@
         </p:spPr>
         <p:txBody>
           <a:bodyPr wrap="square" lIns="0" rIns="0" tIns="0" bIns="0">
-            <a:spAutoFit/>
+            <a:normAutofit/>
           </a:bodyPr>
           <a:lstStyle/>
           <a:p>
@@ -7857,7 +7850,7 @@
         </p:spPr>
         <p:txBody>
           <a:bodyPr wrap="square" lIns="0" rIns="0" tIns="0" bIns="0">
-            <a:spAutoFit/>
+            <a:normAutofit/>
           </a:bodyPr>
           <a:lstStyle/>
           <a:p>
@@ -7892,7 +7885,7 @@
         </p:spPr>
         <p:txBody>
           <a:bodyPr wrap="square" lIns="0" rIns="0" tIns="0" bIns="0">
-            <a:spAutoFit/>
+            <a:normAutofit/>
           </a:bodyPr>
           <a:lstStyle/>
           <a:p>
@@ -7927,7 +7920,7 @@
         </p:spPr>
         <p:txBody>
           <a:bodyPr wrap="square" lIns="0" rIns="0" tIns="0" bIns="0">
-            <a:spAutoFit/>
+            <a:normAutofit/>
           </a:bodyPr>
           <a:lstStyle/>
           <a:p>
@@ -7962,7 +7955,7 @@
         </p:spPr>
         <p:txBody>
           <a:bodyPr wrap="square" lIns="0" rIns="0" tIns="0" bIns="0">
-            <a:spAutoFit/>
+            <a:normAutofit/>
           </a:bodyPr>
           <a:lstStyle/>
           <a:p>
@@ -7996,7 +7989,7 @@
         </p:spPr>
         <p:txBody>
           <a:bodyPr wrap="square" lIns="0" rIns="0" tIns="0" bIns="0">
-            <a:spAutoFit/>
+            <a:normAutofit/>
           </a:bodyPr>
           <a:lstStyle/>
           <a:p>
@@ -8031,7 +8024,7 @@
         </p:spPr>
         <p:txBody>
           <a:bodyPr wrap="square" lIns="0" rIns="0" tIns="0" bIns="0">
-            <a:spAutoFit/>
+            <a:normAutofit/>
           </a:bodyPr>
           <a:lstStyle/>
           <a:p>
@@ -8066,7 +8059,7 @@
         </p:spPr>
         <p:txBody>
           <a:bodyPr wrap="square" lIns="0" rIns="0" tIns="0" bIns="0">
-            <a:spAutoFit/>
+            <a:normAutofit/>
           </a:bodyPr>
           <a:lstStyle/>
           <a:p>
@@ -8100,7 +8093,7 @@
         </p:spPr>
         <p:txBody>
           <a:bodyPr wrap="square" lIns="0" rIns="0" tIns="0" bIns="0">
-            <a:spAutoFit/>
+            <a:normAutofit/>
           </a:bodyPr>
           <a:lstStyle/>
           <a:p>
@@ -8135,7 +8128,7 @@
         </p:spPr>
         <p:txBody>
           <a:bodyPr wrap="square" lIns="0" rIns="0" tIns="0" bIns="0">
-            <a:spAutoFit/>
+            <a:normAutofit/>
           </a:bodyPr>
           <a:lstStyle/>
           <a:p>
@@ -8170,7 +8163,7 @@
         </p:spPr>
         <p:txBody>
           <a:bodyPr wrap="square" lIns="0" rIns="0" tIns="0" bIns="0">
-            <a:spAutoFit/>
+            <a:normAutofit/>
           </a:bodyPr>
           <a:lstStyle/>
           <a:p>
@@ -8204,7 +8197,7 @@
         </p:spPr>
         <p:txBody>
           <a:bodyPr wrap="square" lIns="0" rIns="0" tIns="0" bIns="0">
-            <a:spAutoFit/>
+            <a:normAutofit/>
           </a:bodyPr>
           <a:lstStyle/>
           <a:p>
@@ -8239,7 +8232,7 @@
         </p:spPr>
         <p:txBody>
           <a:bodyPr wrap="square" lIns="0" rIns="0" tIns="0" bIns="0">
-            <a:spAutoFit/>
+            <a:normAutofit/>
           </a:bodyPr>
           <a:lstStyle/>
           <a:p>
@@ -8274,7 +8267,7 @@
         </p:spPr>
         <p:txBody>
           <a:bodyPr wrap="square" lIns="0" rIns="0" tIns="0" bIns="0">
-            <a:spAutoFit/>
+            <a:normAutofit/>
           </a:bodyPr>
           <a:lstStyle/>
           <a:p>
@@ -8308,7 +8301,7 @@
         </p:spPr>
         <p:txBody>
           <a:bodyPr wrap="square" lIns="0" rIns="0" tIns="0" bIns="0">
-            <a:spAutoFit/>
+            <a:normAutofit/>
           </a:bodyPr>
           <a:lstStyle/>
           <a:p>
@@ -8343,7 +8336,7 @@
         </p:spPr>
         <p:txBody>
           <a:bodyPr wrap="square" lIns="0" rIns="0" tIns="0" bIns="0">
-            <a:spAutoFit/>
+            <a:normAutofit/>
           </a:bodyPr>
           <a:lstStyle/>
           <a:p>
@@ -8378,7 +8371,7 @@
         </p:spPr>
         <p:txBody>
           <a:bodyPr wrap="square" lIns="0" rIns="0" tIns="0" bIns="0">
-            <a:spAutoFit/>
+            <a:normAutofit/>
           </a:bodyPr>
           <a:lstStyle/>
           <a:p>
@@ -8412,7 +8405,7 @@
         </p:spPr>
         <p:txBody>
           <a:bodyPr wrap="square" lIns="0" rIns="0" tIns="0" bIns="0">
-            <a:spAutoFit/>
+            <a:normAutofit/>
           </a:bodyPr>
           <a:lstStyle/>
           <a:p>
@@ -8447,7 +8440,7 @@
         </p:spPr>
         <p:txBody>
           <a:bodyPr wrap="square" lIns="0" rIns="0" tIns="0" bIns="0">
-            <a:spAutoFit/>
+            <a:normAutofit/>
           </a:bodyPr>
           <a:lstStyle/>
           <a:p>
@@ -8482,7 +8475,7 @@
         </p:spPr>
         <p:txBody>
           <a:bodyPr wrap="square" lIns="0" rIns="0" tIns="0" bIns="0">
-            <a:spAutoFit/>
+            <a:normAutofit/>
           </a:bodyPr>
           <a:lstStyle/>
           <a:p>
@@ -8516,7 +8509,7 @@
         </p:spPr>
         <p:txBody>
           <a:bodyPr wrap="square" lIns="0" rIns="0" tIns="0" bIns="0">
-            <a:spAutoFit/>
+            <a:normAutofit/>
           </a:bodyPr>
           <a:lstStyle/>
           <a:p>
@@ -8551,7 +8544,7 @@
         </p:spPr>
         <p:txBody>
           <a:bodyPr wrap="square" lIns="0" rIns="0" tIns="0" bIns="0">
-            <a:spAutoFit/>
+            <a:normAutofit/>
           </a:bodyPr>
           <a:lstStyle/>
           <a:p>
@@ -8586,7 +8579,7 @@
         </p:spPr>
         <p:txBody>
           <a:bodyPr wrap="square" lIns="0" rIns="0" tIns="0" bIns="0">
-            <a:spAutoFit/>
+            <a:normAutofit/>
           </a:bodyPr>
           <a:lstStyle/>
           <a:p>
@@ -8682,7 +8675,7 @@
         </p:spPr>
         <p:txBody>
           <a:bodyPr wrap="square" lIns="0" rIns="0" tIns="0" bIns="0">
-            <a:spAutoFit/>
+            <a:normAutofit/>
           </a:bodyPr>
           <a:lstStyle/>
           <a:p>
@@ -8714,7 +8707,9 @@
             <a:avLst/>
           </a:prstGeom>
           <a:solidFill>
-            <a:srgbClr val="FFFFFF"/>
+            <a:srgbClr val="FFFFFF">
+              <a:alpha val="10000"/>
+            </a:srgbClr>
           </a:solidFill>
           <a:ln>
             <a:noFill/>
@@ -8776,13 +8771,16 @@
         </p:spPr>
         <p:txBody>
           <a:bodyPr wrap="square" lIns="0" rIns="0" tIns="0" bIns="0">
-            <a:spAutoFit/>
+            <a:normAutofit/>
           </a:bodyPr>
           <a:lstStyle/>
           <a:p>
             <a:pPr algn="l"/>
             <a:r>
               <a:rPr sz="18000" b="1" i="0" u="none">
+                <a:solidFill>
+                  <a:srgbClr val="F5F5F7"/>
+                </a:solidFill>
                 <a:latin typeface="Inter"/>
               </a:rPr>
               <a:t>87</a:t>
@@ -8817,7 +8815,7 @@
         </p:spPr>
         <p:txBody>
           <a:bodyPr wrap="square" lIns="0" rIns="0" tIns="0" bIns="0">
-            <a:spAutoFit/>
+            <a:normAutofit/>
           </a:bodyPr>
           <a:lstStyle/>
           <a:p>
@@ -8852,7 +8850,7 @@
         </p:spPr>
         <p:txBody>
           <a:bodyPr wrap="square" lIns="0" rIns="0" tIns="0" bIns="0">
-            <a:spAutoFit/>
+            <a:normAutofit/>
           </a:bodyPr>
           <a:lstStyle/>
           <a:p>
@@ -8884,7 +8882,9 @@
             <a:avLst/>
           </a:prstGeom>
           <a:solidFill>
-            <a:srgbClr val="FFFFFF"/>
+            <a:srgbClr val="FFFFFF">
+              <a:alpha val="4000"/>
+            </a:srgbClr>
           </a:solidFill>
           <a:ln w="9525">
             <a:solidFill>
@@ -8936,12 +8936,14 @@
             <a:avLst/>
           </a:prstGeom>
           <a:solidFill>
-            <a:srgbClr val="22C55E"/>
+            <a:srgbClr val="22C55E">
+              <a:alpha val="12000"/>
+            </a:srgbClr>
           </a:solidFill>
         </p:spPr>
         <p:txBody>
           <a:bodyPr wrap="square" lIns="0" rIns="0" tIns="0" bIns="0">
-            <a:spAutoFit/>
+            <a:normAutofit/>
           </a:bodyPr>
           <a:lstStyle/>
           <a:p>
@@ -8976,7 +8978,7 @@
         </p:spPr>
         <p:txBody>
           <a:bodyPr wrap="square" lIns="0" rIns="0" tIns="0" bIns="0">
-            <a:spAutoFit/>
+            <a:normAutofit/>
           </a:bodyPr>
           <a:lstStyle/>
           <a:p>
@@ -9011,7 +9013,7 @@
         </p:spPr>
         <p:txBody>
           <a:bodyPr wrap="square" lIns="0" rIns="0" tIns="0" bIns="0">
-            <a:spAutoFit/>
+            <a:normAutofit/>
           </a:bodyPr>
           <a:lstStyle/>
           <a:p>
@@ -9046,7 +9048,7 @@
         </p:spPr>
         <p:txBody>
           <a:bodyPr wrap="square" lIns="0" rIns="0" tIns="0" bIns="0">
-            <a:spAutoFit/>
+            <a:normAutofit/>
           </a:bodyPr>
           <a:lstStyle/>
           <a:p>
@@ -9081,7 +9083,7 @@
         </p:spPr>
         <p:txBody>
           <a:bodyPr wrap="square" lIns="0" rIns="0" tIns="0" bIns="0">
-            <a:spAutoFit/>
+            <a:normAutofit/>
           </a:bodyPr>
           <a:lstStyle/>
           <a:p>
@@ -9116,7 +9118,7 @@
         </p:spPr>
         <p:txBody>
           <a:bodyPr wrap="square" lIns="0" rIns="0" tIns="0" bIns="0">
-            <a:spAutoFit/>
+            <a:normAutofit/>
           </a:bodyPr>
           <a:lstStyle/>
           <a:p>
@@ -9212,7 +9214,7 @@
         </p:spPr>
         <p:txBody>
           <a:bodyPr wrap="square" lIns="0" rIns="0" tIns="0" bIns="0">
-            <a:spAutoFit/>
+            <a:normAutofit/>
           </a:bodyPr>
           <a:lstStyle/>
           <a:p>
@@ -9247,7 +9249,7 @@
         </p:spPr>
         <p:txBody>
           <a:bodyPr wrap="square" lIns="0" rIns="0" tIns="0" bIns="0">
-            <a:spAutoFit/>
+            <a:normAutofit/>
           </a:bodyPr>
           <a:lstStyle/>
           <a:p>
@@ -9346,7 +9348,7 @@
         </p:spPr>
         <p:txBody>
           <a:bodyPr wrap="square" lIns="0" rIns="0" tIns="0" bIns="0">
-            <a:spAutoFit/>
+            <a:normAutofit/>
           </a:bodyPr>
           <a:lstStyle/>
           <a:p>
@@ -9381,7 +9383,7 @@
         </p:spPr>
         <p:txBody>
           <a:bodyPr wrap="square" lIns="0" rIns="0" tIns="0" bIns="0">
-            <a:spAutoFit/>
+            <a:normAutofit/>
           </a:bodyPr>
           <a:lstStyle/>
           <a:p>
@@ -9422,12 +9424,14 @@
             <a:avLst/>
           </a:prstGeom>
           <a:solidFill>
-            <a:srgbClr val="22C55E"/>
+            <a:srgbClr val="22C55E">
+              <a:alpha val="12000"/>
+            </a:srgbClr>
           </a:solidFill>
         </p:spPr>
         <p:txBody>
           <a:bodyPr wrap="square" lIns="0" rIns="0" tIns="0" bIns="0">
-            <a:spAutoFit/>
+            <a:normAutofit/>
           </a:bodyPr>
           <a:lstStyle/>
           <a:p>
@@ -9462,7 +9466,7 @@
         </p:spPr>
         <p:txBody>
           <a:bodyPr wrap="square" lIns="0" rIns="0" tIns="0" bIns="0">
-            <a:spAutoFit/>
+            <a:normAutofit/>
           </a:bodyPr>
           <a:lstStyle/>
           <a:p>
@@ -9497,7 +9501,7 @@
         </p:spPr>
         <p:txBody>
           <a:bodyPr wrap="square" lIns="0" rIns="0" tIns="0" bIns="0">
-            <a:spAutoFit/>
+            <a:normAutofit/>
           </a:bodyPr>
           <a:lstStyle/>
           <a:p>
@@ -9596,7 +9600,7 @@
         </p:spPr>
         <p:txBody>
           <a:bodyPr wrap="square" lIns="0" rIns="0" tIns="0" bIns="0">
-            <a:spAutoFit/>
+            <a:normAutofit/>
           </a:bodyPr>
           <a:lstStyle/>
           <a:p>
@@ -9631,7 +9635,7 @@
         </p:spPr>
         <p:txBody>
           <a:bodyPr wrap="square" lIns="0" rIns="0" tIns="0" bIns="0">
-            <a:spAutoFit/>
+            <a:normAutofit/>
           </a:bodyPr>
           <a:lstStyle/>
           <a:p>
@@ -9672,12 +9676,14 @@
             <a:avLst/>
           </a:prstGeom>
           <a:solidFill>
-            <a:srgbClr val="F43F5E"/>
+            <a:srgbClr val="F43F5E">
+              <a:alpha val="12000"/>
+            </a:srgbClr>
           </a:solidFill>
         </p:spPr>
         <p:txBody>
           <a:bodyPr wrap="square" lIns="0" rIns="0" tIns="0" bIns="0">
-            <a:spAutoFit/>
+            <a:normAutofit/>
           </a:bodyPr>
           <a:lstStyle/>
           <a:p>
@@ -9712,7 +9718,7 @@
         </p:spPr>
         <p:txBody>
           <a:bodyPr wrap="square" lIns="0" rIns="0" tIns="0" bIns="0">
-            <a:spAutoFit/>
+            <a:normAutofit/>
           </a:bodyPr>
           <a:lstStyle/>
           <a:p>
@@ -9747,7 +9753,7 @@
         </p:spPr>
         <p:txBody>
           <a:bodyPr wrap="square" lIns="0" rIns="0" tIns="0" bIns="0">
-            <a:spAutoFit/>
+            <a:normAutofit/>
           </a:bodyPr>
           <a:lstStyle/>
           <a:p>
@@ -9846,7 +9852,7 @@
         </p:spPr>
         <p:txBody>
           <a:bodyPr wrap="square" lIns="0" rIns="0" tIns="0" bIns="0">
-            <a:spAutoFit/>
+            <a:normAutofit/>
           </a:bodyPr>
           <a:lstStyle/>
           <a:p>
@@ -9881,7 +9887,7 @@
         </p:spPr>
         <p:txBody>
           <a:bodyPr wrap="square" lIns="0" rIns="0" tIns="0" bIns="0">
-            <a:spAutoFit/>
+            <a:normAutofit/>
           </a:bodyPr>
           <a:lstStyle/>
           <a:p>
@@ -9913,12 +9919,14 @@
             <a:avLst/>
           </a:prstGeom>
           <a:solidFill>
-            <a:srgbClr val="F43F5E"/>
+            <a:srgbClr val="F43F5E">
+              <a:alpha val="12000"/>
+            </a:srgbClr>
           </a:solidFill>
         </p:spPr>
         <p:txBody>
           <a:bodyPr wrap="square" lIns="0" rIns="0" tIns="0" bIns="0">
-            <a:spAutoFit/>
+            <a:normAutofit/>
           </a:bodyPr>
           <a:lstStyle/>
           <a:p>
@@ -9953,7 +9961,7 @@
         </p:spPr>
         <p:txBody>
           <a:bodyPr wrap="square" lIns="0" rIns="0" tIns="0" bIns="0">
-            <a:spAutoFit/>
+            <a:normAutofit/>
           </a:bodyPr>
           <a:lstStyle/>
           <a:p>
@@ -9988,7 +9996,7 @@
         </p:spPr>
         <p:txBody>
           <a:bodyPr wrap="square" lIns="0" rIns="0" tIns="0" bIns="0">
-            <a:spAutoFit/>
+            <a:normAutofit/>
           </a:bodyPr>
           <a:lstStyle/>
           <a:p>
@@ -10023,7 +10031,7 @@
         </p:spPr>
         <p:txBody>
           <a:bodyPr wrap="square" lIns="0" rIns="0" tIns="0" bIns="0">
-            <a:spAutoFit/>
+            <a:normAutofit/>
           </a:bodyPr>
           <a:lstStyle/>
           <a:p>
@@ -10058,7 +10066,7 @@
         </p:spPr>
         <p:txBody>
           <a:bodyPr wrap="square" lIns="0" rIns="0" tIns="0" bIns="0">
-            <a:spAutoFit/>
+            <a:normAutofit/>
           </a:bodyPr>
           <a:lstStyle/>
           <a:p>
@@ -10154,7 +10162,7 @@
         </p:spPr>
         <p:txBody>
           <a:bodyPr wrap="square" lIns="0" rIns="0" tIns="0" bIns="0">
-            <a:spAutoFit/>
+            <a:normAutofit/>
           </a:bodyPr>
           <a:lstStyle/>
           <a:p>
@@ -10189,7 +10197,7 @@
         </p:spPr>
         <p:txBody>
           <a:bodyPr wrap="square" lIns="0" rIns="0" tIns="0" bIns="0">
-            <a:spAutoFit/>
+            <a:normAutofit/>
           </a:bodyPr>
           <a:lstStyle/>
           <a:p>
@@ -10221,7 +10229,9 @@
             <a:avLst/>
           </a:prstGeom>
           <a:solidFill>
-            <a:srgbClr val="FFFFFF"/>
+            <a:srgbClr val="FFFFFF">
+              <a:alpha val="4000"/>
+            </a:srgbClr>
           </a:solidFill>
           <a:ln w="9525">
             <a:solidFill>
@@ -10286,7 +10296,7 @@
         </p:spPr>
         <p:txBody>
           <a:bodyPr wrap="square" lIns="0" rIns="0" tIns="0" bIns="0">
-            <a:spAutoFit/>
+            <a:normAutofit/>
           </a:bodyPr>
           <a:lstStyle/>
           <a:p>
@@ -10321,7 +10331,7 @@
         </p:spPr>
         <p:txBody>
           <a:bodyPr wrap="square" lIns="0" rIns="0" tIns="0" bIns="0">
-            <a:spAutoFit/>
+            <a:normAutofit/>
           </a:bodyPr>
           <a:lstStyle/>
           <a:p>
@@ -10356,7 +10366,7 @@
         </p:spPr>
         <p:txBody>
           <a:bodyPr wrap="square" lIns="0" rIns="0" tIns="0" bIns="0">
-            <a:spAutoFit/>
+            <a:normAutofit/>
           </a:bodyPr>
           <a:lstStyle/>
           <a:p>
@@ -10391,7 +10401,7 @@
         </p:spPr>
         <p:txBody>
           <a:bodyPr wrap="square" lIns="0" rIns="0" tIns="0" bIns="0">
-            <a:spAutoFit/>
+            <a:normAutofit/>
           </a:bodyPr>
           <a:lstStyle/>
           <a:p>
@@ -10423,7 +10433,9 @@
             <a:avLst/>
           </a:prstGeom>
           <a:solidFill>
-            <a:srgbClr val="FFFFFF"/>
+            <a:srgbClr val="FFFFFF">
+              <a:alpha val="4000"/>
+            </a:srgbClr>
           </a:solidFill>
           <a:ln w="9525">
             <a:solidFill>
@@ -10488,7 +10500,7 @@
         </p:spPr>
         <p:txBody>
           <a:bodyPr wrap="square" lIns="0" rIns="0" tIns="0" bIns="0">
-            <a:spAutoFit/>
+            <a:normAutofit/>
           </a:bodyPr>
           <a:lstStyle/>
           <a:p>
@@ -10523,7 +10535,7 @@
         </p:spPr>
         <p:txBody>
           <a:bodyPr wrap="square" lIns="0" rIns="0" tIns="0" bIns="0">
-            <a:spAutoFit/>
+            <a:normAutofit/>
           </a:bodyPr>
           <a:lstStyle/>
           <a:p>
@@ -10558,7 +10570,7 @@
         </p:spPr>
         <p:txBody>
           <a:bodyPr wrap="square" lIns="0" rIns="0" tIns="0" bIns="0">
-            <a:spAutoFit/>
+            <a:normAutofit/>
           </a:bodyPr>
           <a:lstStyle/>
           <a:p>
@@ -10593,7 +10605,7 @@
         </p:spPr>
         <p:txBody>
           <a:bodyPr wrap="square" lIns="0" rIns="0" tIns="0" bIns="0">
-            <a:spAutoFit/>
+            <a:normAutofit/>
           </a:bodyPr>
           <a:lstStyle/>
           <a:p>
@@ -10625,7 +10637,9 @@
             <a:avLst/>
           </a:prstGeom>
           <a:solidFill>
-            <a:srgbClr val="FFFFFF"/>
+            <a:srgbClr val="FFFFFF">
+              <a:alpha val="4000"/>
+            </a:srgbClr>
           </a:solidFill>
           <a:ln w="9525">
             <a:solidFill>
@@ -10690,7 +10704,7 @@
         </p:spPr>
         <p:txBody>
           <a:bodyPr wrap="square" lIns="0" rIns="0" tIns="0" bIns="0">
-            <a:spAutoFit/>
+            <a:normAutofit/>
           </a:bodyPr>
           <a:lstStyle/>
           <a:p>
@@ -10725,7 +10739,7 @@
         </p:spPr>
         <p:txBody>
           <a:bodyPr wrap="square" lIns="0" rIns="0" tIns="0" bIns="0">
-            <a:spAutoFit/>
+            <a:normAutofit/>
           </a:bodyPr>
           <a:lstStyle/>
           <a:p>
@@ -10760,7 +10774,7 @@
         </p:spPr>
         <p:txBody>
           <a:bodyPr wrap="square" lIns="0" rIns="0" tIns="0" bIns="0">
-            <a:spAutoFit/>
+            <a:normAutofit/>
           </a:bodyPr>
           <a:lstStyle/>
           <a:p>
@@ -10795,7 +10809,7 @@
         </p:spPr>
         <p:txBody>
           <a:bodyPr wrap="square" lIns="0" rIns="0" tIns="0" bIns="0">
-            <a:spAutoFit/>
+            <a:normAutofit/>
           </a:bodyPr>
           <a:lstStyle/>
           <a:p>
@@ -10827,7 +10841,9 @@
             <a:avLst/>
           </a:prstGeom>
           <a:solidFill>
-            <a:srgbClr val="FFFFFF"/>
+            <a:srgbClr val="FFFFFF">
+              <a:alpha val="4000"/>
+            </a:srgbClr>
           </a:solidFill>
           <a:ln w="9525">
             <a:solidFill>
@@ -10892,7 +10908,7 @@
         </p:spPr>
         <p:txBody>
           <a:bodyPr wrap="square" lIns="0" rIns="0" tIns="0" bIns="0">
-            <a:spAutoFit/>
+            <a:normAutofit/>
           </a:bodyPr>
           <a:lstStyle/>
           <a:p>
@@ -10927,7 +10943,7 @@
         </p:spPr>
         <p:txBody>
           <a:bodyPr wrap="square" lIns="0" rIns="0" tIns="0" bIns="0">
-            <a:spAutoFit/>
+            <a:normAutofit/>
           </a:bodyPr>
           <a:lstStyle/>
           <a:p>
@@ -10962,7 +10978,7 @@
         </p:spPr>
         <p:txBody>
           <a:bodyPr wrap="square" lIns="0" rIns="0" tIns="0" bIns="0">
-            <a:spAutoFit/>
+            <a:normAutofit/>
           </a:bodyPr>
           <a:lstStyle/>
           <a:p>
@@ -10997,7 +11013,7 @@
         </p:spPr>
         <p:txBody>
           <a:bodyPr wrap="square" lIns="0" rIns="0" tIns="0" bIns="0">
-            <a:spAutoFit/>
+            <a:normAutofit/>
           </a:bodyPr>
           <a:lstStyle/>
           <a:p>
@@ -11029,7 +11045,9 @@
             <a:avLst/>
           </a:prstGeom>
           <a:solidFill>
-            <a:srgbClr val="FFFFFF"/>
+            <a:srgbClr val="FFFFFF">
+              <a:alpha val="4000"/>
+            </a:srgbClr>
           </a:solidFill>
           <a:ln w="9525">
             <a:solidFill>
@@ -11094,7 +11112,7 @@
         </p:spPr>
         <p:txBody>
           <a:bodyPr wrap="square" lIns="0" rIns="0" tIns="0" bIns="0">
-            <a:spAutoFit/>
+            <a:normAutofit/>
           </a:bodyPr>
           <a:lstStyle/>
           <a:p>
@@ -11129,7 +11147,7 @@
         </p:spPr>
         <p:txBody>
           <a:bodyPr wrap="square" lIns="0" rIns="0" tIns="0" bIns="0">
-            <a:spAutoFit/>
+            <a:normAutofit/>
           </a:bodyPr>
           <a:lstStyle/>
           <a:p>
@@ -11164,7 +11182,7 @@
         </p:spPr>
         <p:txBody>
           <a:bodyPr wrap="square" lIns="0" rIns="0" tIns="0" bIns="0">
-            <a:spAutoFit/>
+            <a:normAutofit/>
           </a:bodyPr>
           <a:lstStyle/>
           <a:p>
@@ -11199,7 +11217,7 @@
         </p:spPr>
         <p:txBody>
           <a:bodyPr wrap="square" lIns="0" rIns="0" tIns="0" bIns="0">
-            <a:spAutoFit/>
+            <a:normAutofit/>
           </a:bodyPr>
           <a:lstStyle/>
           <a:p>
@@ -11231,7 +11249,9 @@
             <a:avLst/>
           </a:prstGeom>
           <a:solidFill>
-            <a:srgbClr val="FFFFFF"/>
+            <a:srgbClr val="FFFFFF">
+              <a:alpha val="4000"/>
+            </a:srgbClr>
           </a:solidFill>
           <a:ln w="9525">
             <a:solidFill>
@@ -11296,7 +11316,7 @@
         </p:spPr>
         <p:txBody>
           <a:bodyPr wrap="square" lIns="0" rIns="0" tIns="0" bIns="0">
-            <a:spAutoFit/>
+            <a:normAutofit/>
           </a:bodyPr>
           <a:lstStyle/>
           <a:p>
@@ -11331,7 +11351,7 @@
         </p:spPr>
         <p:txBody>
           <a:bodyPr wrap="square" lIns="0" rIns="0" tIns="0" bIns="0">
-            <a:spAutoFit/>
+            <a:normAutofit/>
           </a:bodyPr>
           <a:lstStyle/>
           <a:p>
@@ -11366,7 +11386,7 @@
         </p:spPr>
         <p:txBody>
           <a:bodyPr wrap="square" lIns="0" rIns="0" tIns="0" bIns="0">
-            <a:spAutoFit/>
+            <a:normAutofit/>
           </a:bodyPr>
           <a:lstStyle/>
           <a:p>
@@ -11401,7 +11421,7 @@
         </p:spPr>
         <p:txBody>
           <a:bodyPr wrap="square" lIns="0" rIns="0" tIns="0" bIns="0">
-            <a:spAutoFit/>
+            <a:normAutofit/>
           </a:bodyPr>
           <a:lstStyle/>
           <a:p>
@@ -11436,7 +11456,7 @@
         </p:spPr>
         <p:txBody>
           <a:bodyPr wrap="square" lIns="0" rIns="0" tIns="0" bIns="0">
-            <a:spAutoFit/>
+            <a:normAutofit/>
           </a:bodyPr>
           <a:lstStyle/>
           <a:p>
@@ -11471,7 +11491,7 @@
         </p:spPr>
         <p:txBody>
           <a:bodyPr wrap="square" lIns="0" rIns="0" tIns="0" bIns="0">
-            <a:spAutoFit/>
+            <a:normAutofit/>
           </a:bodyPr>
           <a:lstStyle/>
           <a:p>
@@ -11567,7 +11587,7 @@
         </p:spPr>
         <p:txBody>
           <a:bodyPr wrap="square" lIns="0" rIns="0" tIns="0" bIns="0">
-            <a:spAutoFit/>
+            <a:normAutofit/>
           </a:bodyPr>
           <a:lstStyle/>
           <a:p>
@@ -11602,7 +11622,7 @@
         </p:spPr>
         <p:txBody>
           <a:bodyPr wrap="square" lIns="0" rIns="0" tIns="0" bIns="0">
-            <a:spAutoFit/>
+            <a:normAutofit/>
           </a:bodyPr>
           <a:lstStyle/>
           <a:p>
@@ -11634,7 +11654,9 @@
             <a:avLst/>
           </a:prstGeom>
           <a:solidFill>
-            <a:srgbClr val="3F3F46"/>
+            <a:srgbClr val="3F3F46">
+              <a:alpha val="30000"/>
+            </a:srgbClr>
           </a:solidFill>
           <a:ln w="9525">
             <a:solidFill>
@@ -11682,7 +11704,7 @@
         </p:spPr>
         <p:txBody>
           <a:bodyPr wrap="square" lIns="0" rIns="0" tIns="0" bIns="0">
-            <a:spAutoFit/>
+            <a:normAutofit/>
           </a:bodyPr>
           <a:lstStyle/>
           <a:p>
@@ -11719,7 +11741,7 @@
         </p:spPr>
         <p:txBody>
           <a:bodyPr wrap="square" lIns="0" rIns="0" tIns="0" bIns="0">
-            <a:spAutoFit/>
+            <a:normAutofit/>
           </a:bodyPr>
           <a:lstStyle/>
           <a:p>
@@ -11751,12 +11773,14 @@
             <a:avLst/>
           </a:prstGeom>
           <a:solidFill>
-            <a:srgbClr val="F43F5E"/>
+            <a:srgbClr val="F43F5E">
+              <a:alpha val="20000"/>
+            </a:srgbClr>
           </a:solidFill>
         </p:spPr>
         <p:txBody>
           <a:bodyPr wrap="square" lIns="0" rIns="0" tIns="0" bIns="0">
-            <a:spAutoFit/>
+            <a:normAutofit/>
           </a:bodyPr>
           <a:lstStyle/>
           <a:p>
@@ -11791,7 +11815,7 @@
         </p:spPr>
         <p:txBody>
           <a:bodyPr wrap="square" lIns="0" rIns="0" tIns="0" bIns="0">
-            <a:spAutoFit/>
+            <a:normAutofit/>
           </a:bodyPr>
           <a:lstStyle/>
           <a:p>
@@ -11823,12 +11847,14 @@
             <a:avLst/>
           </a:prstGeom>
           <a:solidFill>
-            <a:srgbClr val="F43F5E"/>
+            <a:srgbClr val="F43F5E">
+              <a:alpha val="20000"/>
+            </a:srgbClr>
           </a:solidFill>
         </p:spPr>
         <p:txBody>
           <a:bodyPr wrap="square" lIns="0" rIns="0" tIns="0" bIns="0">
-            <a:spAutoFit/>
+            <a:normAutofit/>
           </a:bodyPr>
           <a:lstStyle/>
           <a:p>
@@ -11863,7 +11889,7 @@
         </p:spPr>
         <p:txBody>
           <a:bodyPr wrap="square" lIns="0" rIns="0" tIns="0" bIns="0">
-            <a:spAutoFit/>
+            <a:normAutofit/>
           </a:bodyPr>
           <a:lstStyle/>
           <a:p>
@@ -11895,12 +11921,14 @@
             <a:avLst/>
           </a:prstGeom>
           <a:solidFill>
-            <a:srgbClr val="F43F5E"/>
+            <a:srgbClr val="F43F5E">
+              <a:alpha val="20000"/>
+            </a:srgbClr>
           </a:solidFill>
         </p:spPr>
         <p:txBody>
           <a:bodyPr wrap="square" lIns="0" rIns="0" tIns="0" bIns="0">
-            <a:spAutoFit/>
+            <a:normAutofit/>
           </a:bodyPr>
           <a:lstStyle/>
           <a:p>
@@ -11935,7 +11963,7 @@
         </p:spPr>
         <p:txBody>
           <a:bodyPr wrap="square" lIns="0" rIns="0" tIns="0" bIns="0">
-            <a:spAutoFit/>
+            <a:normAutofit/>
           </a:bodyPr>
           <a:lstStyle/>
           <a:p>
@@ -11966,12 +11994,14 @@
             <a:avLst/>
           </a:prstGeom>
           <a:solidFill>
-            <a:srgbClr val="F43F5E"/>
+            <a:srgbClr val="F43F5E">
+              <a:alpha val="20000"/>
+            </a:srgbClr>
           </a:solidFill>
         </p:spPr>
         <p:txBody>
           <a:bodyPr wrap="square" lIns="0" rIns="0" tIns="0" bIns="0">
-            <a:spAutoFit/>
+            <a:normAutofit/>
           </a:bodyPr>
           <a:lstStyle/>
           <a:p>
@@ -12006,7 +12036,7 @@
         </p:spPr>
         <p:txBody>
           <a:bodyPr wrap="square" lIns="0" rIns="0" tIns="0" bIns="0">
-            <a:spAutoFit/>
+            <a:normAutofit/>
           </a:bodyPr>
           <a:lstStyle/>
           <a:p>
@@ -12038,12 +12068,14 @@
             <a:avLst/>
           </a:prstGeom>
           <a:solidFill>
-            <a:srgbClr val="F43F5E"/>
+            <a:srgbClr val="F43F5E">
+              <a:alpha val="20000"/>
+            </a:srgbClr>
           </a:solidFill>
         </p:spPr>
         <p:txBody>
           <a:bodyPr wrap="square" lIns="0" rIns="0" tIns="0" bIns="0">
-            <a:spAutoFit/>
+            <a:normAutofit/>
           </a:bodyPr>
           <a:lstStyle/>
           <a:p>
@@ -12078,7 +12110,7 @@
         </p:spPr>
         <p:txBody>
           <a:bodyPr wrap="square" lIns="0" rIns="0" tIns="0" bIns="0">
-            <a:spAutoFit/>
+            <a:normAutofit/>
           </a:bodyPr>
           <a:lstStyle/>
           <a:p>
@@ -12176,7 +12208,7 @@
         </p:spPr>
         <p:txBody>
           <a:bodyPr wrap="square" lIns="0" rIns="0" tIns="0" bIns="0">
-            <a:spAutoFit/>
+            <a:normAutofit/>
           </a:bodyPr>
           <a:lstStyle/>
           <a:p>
@@ -12221,7 +12253,7 @@
         </p:spPr>
         <p:txBody>
           <a:bodyPr wrap="square" lIns="0" rIns="0" tIns="0" bIns="0">
-            <a:spAutoFit/>
+            <a:normAutofit/>
           </a:bodyPr>
           <a:lstStyle/>
           <a:p>
@@ -12253,12 +12285,14 @@
             <a:avLst/>
           </a:prstGeom>
           <a:solidFill>
-            <a:srgbClr val="22C55E"/>
+            <a:srgbClr val="22C55E">
+              <a:alpha val="22000"/>
+            </a:srgbClr>
           </a:solidFill>
         </p:spPr>
         <p:txBody>
           <a:bodyPr wrap="square" lIns="0" rIns="0" tIns="0" bIns="0">
-            <a:spAutoFit/>
+            <a:normAutofit/>
           </a:bodyPr>
           <a:lstStyle/>
           <a:p>
@@ -12293,7 +12327,7 @@
         </p:spPr>
         <p:txBody>
           <a:bodyPr wrap="square" lIns="0" rIns="0" tIns="0" bIns="0">
-            <a:spAutoFit/>
+            <a:normAutofit/>
           </a:bodyPr>
           <a:lstStyle/>
           <a:p>
@@ -12324,12 +12358,14 @@
             <a:avLst/>
           </a:prstGeom>
           <a:solidFill>
-            <a:srgbClr val="22C55E"/>
+            <a:srgbClr val="22C55E">
+              <a:alpha val="22000"/>
+            </a:srgbClr>
           </a:solidFill>
         </p:spPr>
         <p:txBody>
           <a:bodyPr wrap="square" lIns="0" rIns="0" tIns="0" bIns="0">
-            <a:spAutoFit/>
+            <a:normAutofit/>
           </a:bodyPr>
           <a:lstStyle/>
           <a:p>
@@ -12364,7 +12400,7 @@
         </p:spPr>
         <p:txBody>
           <a:bodyPr wrap="square" lIns="0" rIns="0" tIns="0" bIns="0">
-            <a:spAutoFit/>
+            <a:normAutofit/>
           </a:bodyPr>
           <a:lstStyle/>
           <a:p>
@@ -12395,12 +12431,14 @@
             <a:avLst/>
           </a:prstGeom>
           <a:solidFill>
-            <a:srgbClr val="22C55E"/>
+            <a:srgbClr val="22C55E">
+              <a:alpha val="22000"/>
+            </a:srgbClr>
           </a:solidFill>
         </p:spPr>
         <p:txBody>
           <a:bodyPr wrap="square" lIns="0" rIns="0" tIns="0" bIns="0">
-            <a:spAutoFit/>
+            <a:normAutofit/>
           </a:bodyPr>
           <a:lstStyle/>
           <a:p>
@@ -12435,7 +12473,7 @@
         </p:spPr>
         <p:txBody>
           <a:bodyPr wrap="square" lIns="0" rIns="0" tIns="0" bIns="0">
-            <a:spAutoFit/>
+            <a:normAutofit/>
           </a:bodyPr>
           <a:lstStyle/>
           <a:p>
@@ -12466,12 +12504,14 @@
             <a:avLst/>
           </a:prstGeom>
           <a:solidFill>
-            <a:srgbClr val="22C55E"/>
+            <a:srgbClr val="22C55E">
+              <a:alpha val="22000"/>
+            </a:srgbClr>
           </a:solidFill>
         </p:spPr>
         <p:txBody>
           <a:bodyPr wrap="square" lIns="0" rIns="0" tIns="0" bIns="0">
-            <a:spAutoFit/>
+            <a:normAutofit/>
           </a:bodyPr>
           <a:lstStyle/>
           <a:p>
@@ -12506,7 +12546,7 @@
         </p:spPr>
         <p:txBody>
           <a:bodyPr wrap="square" lIns="0" rIns="0" tIns="0" bIns="0">
-            <a:spAutoFit/>
+            <a:normAutofit/>
           </a:bodyPr>
           <a:lstStyle/>
           <a:p>
@@ -12538,12 +12578,14 @@
             <a:avLst/>
           </a:prstGeom>
           <a:solidFill>
-            <a:srgbClr val="22C55E"/>
+            <a:srgbClr val="22C55E">
+              <a:alpha val="22000"/>
+            </a:srgbClr>
           </a:solidFill>
         </p:spPr>
         <p:txBody>
           <a:bodyPr wrap="square" lIns="0" rIns="0" tIns="0" bIns="0">
-            <a:spAutoFit/>
+            <a:normAutofit/>
           </a:bodyPr>
           <a:lstStyle/>
           <a:p>
@@ -12578,7 +12620,7 @@
         </p:spPr>
         <p:txBody>
           <a:bodyPr wrap="square" lIns="0" rIns="0" tIns="0" bIns="0">
-            <a:spAutoFit/>
+            <a:normAutofit/>
           </a:bodyPr>
           <a:lstStyle/>
           <a:p>
@@ -12613,7 +12655,7 @@
         </p:spPr>
         <p:txBody>
           <a:bodyPr wrap="square" lIns="0" rIns="0" tIns="0" bIns="0">
-            <a:spAutoFit/>
+            <a:normAutofit/>
           </a:bodyPr>
           <a:lstStyle/>
           <a:p>
@@ -12648,7 +12690,7 @@
         </p:spPr>
         <p:txBody>
           <a:bodyPr wrap="square" lIns="0" rIns="0" tIns="0" bIns="0">
-            <a:spAutoFit/>
+            <a:normAutofit/>
           </a:bodyPr>
           <a:lstStyle/>
           <a:p>
@@ -12744,7 +12786,7 @@
         </p:spPr>
         <p:txBody>
           <a:bodyPr wrap="square" lIns="0" rIns="0" tIns="0" bIns="0">
-            <a:spAutoFit/>
+            <a:normAutofit/>
           </a:bodyPr>
           <a:lstStyle/>
           <a:p>
@@ -12779,7 +12821,7 @@
         </p:spPr>
         <p:txBody>
           <a:bodyPr wrap="square" lIns="0" rIns="0" tIns="0" bIns="0">
-            <a:spAutoFit/>
+            <a:normAutofit/>
           </a:bodyPr>
           <a:lstStyle/>
           <a:p>
@@ -12811,7 +12853,9 @@
             <a:avLst/>
           </a:prstGeom>
           <a:solidFill>
-            <a:srgbClr val="FFFFFF"/>
+            <a:srgbClr val="FFFFFF">
+              <a:alpha val="4000"/>
+            </a:srgbClr>
           </a:solidFill>
           <a:ln w="9525">
             <a:solidFill>
@@ -12873,7 +12917,7 @@
         </p:spPr>
         <p:txBody>
           <a:bodyPr wrap="square" lIns="0" rIns="0" tIns="0" bIns="0">
-            <a:spAutoFit/>
+            <a:normAutofit/>
           </a:bodyPr>
           <a:lstStyle/>
           <a:p>
@@ -12908,7 +12952,7 @@
         </p:spPr>
         <p:txBody>
           <a:bodyPr wrap="square" lIns="0" rIns="0" tIns="0" bIns="0">
-            <a:spAutoFit/>
+            <a:normAutofit/>
           </a:bodyPr>
           <a:lstStyle/>
           <a:p>
@@ -12943,7 +12987,7 @@
         </p:spPr>
         <p:txBody>
           <a:bodyPr wrap="square" lIns="0" rIns="0" tIns="0" bIns="0">
-            <a:spAutoFit/>
+            <a:normAutofit/>
           </a:bodyPr>
           <a:lstStyle/>
           <a:p>
@@ -12978,7 +13022,7 @@
         </p:spPr>
         <p:txBody>
           <a:bodyPr wrap="square" lIns="0" rIns="0" tIns="0" bIns="0">
-            <a:spAutoFit/>
+            <a:normAutofit/>
           </a:bodyPr>
           <a:lstStyle/>
           <a:p>
@@ -13010,7 +13054,9 @@
             <a:avLst/>
           </a:prstGeom>
           <a:solidFill>
-            <a:srgbClr val="FFFFFF"/>
+            <a:srgbClr val="FFFFFF">
+              <a:alpha val="4000"/>
+            </a:srgbClr>
           </a:solidFill>
           <a:ln w="9525">
             <a:solidFill>
@@ -13072,7 +13118,7 @@
         </p:spPr>
         <p:txBody>
           <a:bodyPr wrap="square" lIns="0" rIns="0" tIns="0" bIns="0">
-            <a:spAutoFit/>
+            <a:normAutofit/>
           </a:bodyPr>
           <a:lstStyle/>
           <a:p>
@@ -13107,7 +13153,7 @@
         </p:spPr>
         <p:txBody>
           <a:bodyPr wrap="square" lIns="0" rIns="0" tIns="0" bIns="0">
-            <a:spAutoFit/>
+            <a:normAutofit/>
           </a:bodyPr>
           <a:lstStyle/>
           <a:p>
@@ -13142,7 +13188,7 @@
         </p:spPr>
         <p:txBody>
           <a:bodyPr wrap="square" lIns="0" rIns="0" tIns="0" bIns="0">
-            <a:spAutoFit/>
+            <a:normAutofit/>
           </a:bodyPr>
           <a:lstStyle/>
           <a:p>
@@ -13177,7 +13223,7 @@
         </p:spPr>
         <p:txBody>
           <a:bodyPr wrap="square" lIns="0" rIns="0" tIns="0" bIns="0">
-            <a:spAutoFit/>
+            <a:normAutofit/>
           </a:bodyPr>
           <a:lstStyle/>
           <a:p>
@@ -13209,7 +13255,9 @@
             <a:avLst/>
           </a:prstGeom>
           <a:solidFill>
-            <a:srgbClr val="FFFFFF"/>
+            <a:srgbClr val="FFFFFF">
+              <a:alpha val="4000"/>
+            </a:srgbClr>
           </a:solidFill>
           <a:ln w="9525">
             <a:solidFill>
@@ -13271,7 +13319,7 @@
         </p:spPr>
         <p:txBody>
           <a:bodyPr wrap="square" lIns="0" rIns="0" tIns="0" bIns="0">
-            <a:spAutoFit/>
+            <a:normAutofit/>
           </a:bodyPr>
           <a:lstStyle/>
           <a:p>
@@ -13306,7 +13354,7 @@
         </p:spPr>
         <p:txBody>
           <a:bodyPr wrap="square" lIns="0" rIns="0" tIns="0" bIns="0">
-            <a:spAutoFit/>
+            <a:normAutofit/>
           </a:bodyPr>
           <a:lstStyle/>
           <a:p>
@@ -13341,7 +13389,7 @@
         </p:spPr>
         <p:txBody>
           <a:bodyPr wrap="square" lIns="0" rIns="0" tIns="0" bIns="0">
-            <a:spAutoFit/>
+            <a:normAutofit/>
           </a:bodyPr>
           <a:lstStyle/>
           <a:p>
@@ -13376,7 +13424,7 @@
         </p:spPr>
         <p:txBody>
           <a:bodyPr wrap="square" lIns="0" rIns="0" tIns="0" bIns="0">
-            <a:spAutoFit/>
+            <a:normAutofit/>
           </a:bodyPr>
           <a:lstStyle/>
           <a:p>
@@ -13408,7 +13456,9 @@
             <a:avLst/>
           </a:prstGeom>
           <a:solidFill>
-            <a:srgbClr val="FFFFFF"/>
+            <a:srgbClr val="FFFFFF">
+              <a:alpha val="4000"/>
+            </a:srgbClr>
           </a:solidFill>
           <a:ln w="9525">
             <a:solidFill>
@@ -13470,7 +13520,7 @@
         </p:spPr>
         <p:txBody>
           <a:bodyPr wrap="square" lIns="0" rIns="0" tIns="0" bIns="0">
-            <a:spAutoFit/>
+            <a:normAutofit/>
           </a:bodyPr>
           <a:lstStyle/>
           <a:p>
@@ -13505,7 +13555,7 @@
         </p:spPr>
         <p:txBody>
           <a:bodyPr wrap="square" lIns="0" rIns="0" tIns="0" bIns="0">
-            <a:spAutoFit/>
+            <a:normAutofit/>
           </a:bodyPr>
           <a:lstStyle/>
           <a:p>
@@ -13540,7 +13590,7 @@
         </p:spPr>
         <p:txBody>
           <a:bodyPr wrap="square" lIns="0" rIns="0" tIns="0" bIns="0">
-            <a:spAutoFit/>
+            <a:normAutofit/>
           </a:bodyPr>
           <a:lstStyle/>
           <a:p>
@@ -13575,7 +13625,7 @@
         </p:spPr>
         <p:txBody>
           <a:bodyPr wrap="square" lIns="0" rIns="0" tIns="0" bIns="0">
-            <a:spAutoFit/>
+            <a:normAutofit/>
           </a:bodyPr>
           <a:lstStyle/>
           <a:p>
@@ -13607,7 +13657,9 @@
             <a:avLst/>
           </a:prstGeom>
           <a:solidFill>
-            <a:srgbClr val="FFFFFF"/>
+            <a:srgbClr val="FFFFFF">
+              <a:alpha val="4000"/>
+            </a:srgbClr>
           </a:solidFill>
           <a:ln w="9525">
             <a:solidFill>
@@ -13669,7 +13721,7 @@
         </p:spPr>
         <p:txBody>
           <a:bodyPr wrap="square" lIns="0" rIns="0" tIns="0" bIns="0">
-            <a:spAutoFit/>
+            <a:normAutofit/>
           </a:bodyPr>
           <a:lstStyle/>
           <a:p>
@@ -13704,7 +13756,7 @@
         </p:spPr>
         <p:txBody>
           <a:bodyPr wrap="square" lIns="0" rIns="0" tIns="0" bIns="0">
-            <a:spAutoFit/>
+            <a:normAutofit/>
           </a:bodyPr>
           <a:lstStyle/>
           <a:p>
@@ -13739,7 +13791,7 @@
         </p:spPr>
         <p:txBody>
           <a:bodyPr wrap="square" lIns="0" rIns="0" tIns="0" bIns="0">
-            <a:spAutoFit/>
+            <a:normAutofit/>
           </a:bodyPr>
           <a:lstStyle/>
           <a:p>
@@ -13774,7 +13826,7 @@
         </p:spPr>
         <p:txBody>
           <a:bodyPr wrap="square" lIns="0" rIns="0" tIns="0" bIns="0">
-            <a:spAutoFit/>
+            <a:normAutofit/>
           </a:bodyPr>
           <a:lstStyle/>
           <a:p>
@@ -13873,7 +13925,7 @@
         </p:spPr>
         <p:txBody>
           <a:bodyPr wrap="square" lIns="0" rIns="0" tIns="0" bIns="0">
-            <a:spAutoFit/>
+            <a:normAutofit/>
           </a:bodyPr>
           <a:lstStyle/>
           <a:p>
@@ -13926,7 +13978,7 @@
         </p:spPr>
         <p:txBody>
           <a:bodyPr wrap="square" lIns="0" rIns="0" tIns="0" bIns="0">
-            <a:spAutoFit/>
+            <a:normAutofit/>
           </a:bodyPr>
           <a:lstStyle/>
           <a:p>
@@ -13961,7 +14013,7 @@
         </p:spPr>
         <p:txBody>
           <a:bodyPr wrap="square" lIns="0" rIns="0" tIns="0" bIns="0">
-            <a:spAutoFit/>
+            <a:normAutofit/>
           </a:bodyPr>
           <a:lstStyle/>
           <a:p>
@@ -13996,7 +14048,7 @@
         </p:spPr>
         <p:txBody>
           <a:bodyPr wrap="square" lIns="0" rIns="0" tIns="0" bIns="0">
-            <a:spAutoFit/>
+            <a:normAutofit/>
           </a:bodyPr>
           <a:lstStyle/>
           <a:p>
@@ -14038,6 +14090,23 @@
           <p:nvPr/>
         </p:nvSpPr>
         <p:spPr>
+          <a:gradFill flip="none" rotWithShape="1">
+            <a:gsLst>
+              <a:gs pos="0">
+                <a:srgbClr val="4338CA"/>
+              </a:gs>
+              <a:gs pos="35000">
+                <a:srgbClr val="7C3AED"/>
+              </a:gs>
+              <a:gs pos="80000">
+                <a:srgbClr val="DB2777"/>
+              </a:gs>
+              <a:gs pos="100000">
+                <a:srgbClr val="DB2777"/>
+              </a:gs>
+            </a:gsLst>
+            <a:lin ang="2700000" scaled="0"/>
+          </a:gradFill>
           <a:xfrm>
             <a:off x="0" y="0"/>
             <a:ext cx="12192000" cy="6858000"/>
@@ -14045,7 +14114,6 @@
           <a:prstGeom prst="rect">
             <a:avLst/>
           </a:prstGeom>
-          <a:noFill/>
           <a:ln>
             <a:noFill/>
           </a:ln>
@@ -14082,16 +14150,19 @@
           <a:gradFill flip="none" rotWithShape="1">
             <a:gsLst>
               <a:gs pos="0">
-                <a:srgbClr val="4338CA"/>
+                <a:srgbClr val="FFFFFF">
+                  <a:alpha val="10000"/>
+                </a:srgbClr>
               </a:gs>
-              <a:gs pos="35000">
-                <a:srgbClr val="7C3AED"/>
-              </a:gs>
-              <a:gs pos="80000">
-                <a:srgbClr val="DB2777"/>
+              <a:gs pos="100000">
+                <a:srgbClr val="FFFFFF">
+                  <a:alpha val="10000"/>
+                </a:srgbClr>
               </a:gs>
             </a:gsLst>
-            <a:lin ang="2700000" scaled="0"/>
+            <a:path path="circle">
+              <a:fillToRect l="25000" t="25000" r="75000" b="75000"/>
+            </a:path>
           </a:gradFill>
           <a:xfrm>
             <a:off x="0" y="0"/>
@@ -14128,48 +14199,7 @@
       </p:sp>
       <p:sp>
         <p:nvSpPr>
-          <p:cNvPr id="4" name="Rectangle 3"/>
-          <p:cNvSpPr/>
-          <p:nvPr/>
-        </p:nvSpPr>
-        <p:spPr>
-          <a:xfrm>
-            <a:off x="0" y="0"/>
-            <a:ext cx="12192000" cy="6858000"/>
-          </a:xfrm>
-          <a:prstGeom prst="rect">
-            <a:avLst/>
-          </a:prstGeom>
-          <a:noFill/>
-          <a:ln>
-            <a:noFill/>
-          </a:ln>
-        </p:spPr>
-        <p:style>
-          <a:lnRef idx="1">
-            <a:schemeClr val="accent1"/>
-          </a:lnRef>
-          <a:fillRef idx="3">
-            <a:schemeClr val="accent1"/>
-          </a:fillRef>
-          <a:effectRef idx="2">
-            <a:schemeClr val="accent1"/>
-          </a:effectRef>
-          <a:fontRef idx="minor">
-            <a:schemeClr val="lt1"/>
-          </a:fontRef>
-        </p:style>
-        <p:txBody>
-          <a:bodyPr rtlCol="0" anchor="ctr"/>
-          <a:lstStyle/>
-          <a:p>
-            <a:pPr algn="ctr"/>
-          </a:p>
-        </p:txBody>
-      </p:sp>
-      <p:sp>
-        <p:nvSpPr>
-          <p:cNvPr id="5" name="TextBox 4"/>
+          <p:cNvPr id="4" name="TextBox 3"/>
           <p:cNvSpPr txBox="1"/>
           <p:nvPr/>
         </p:nvSpPr>
@@ -14185,7 +14215,7 @@
         </p:spPr>
         <p:txBody>
           <a:bodyPr wrap="square" lIns="0" rIns="0" tIns="0" bIns="0">
-            <a:spAutoFit/>
+            <a:normAutofit/>
           </a:bodyPr>
           <a:lstStyle/>
           <a:p>
@@ -14204,7 +14234,7 @@
       </p:sp>
       <p:sp>
         <p:nvSpPr>
-          <p:cNvPr id="6" name="TextBox 5"/>
+          <p:cNvPr id="5" name="TextBox 4"/>
           <p:cNvSpPr txBox="1"/>
           <p:nvPr/>
         </p:nvSpPr>
@@ -14220,7 +14250,7 @@
         </p:spPr>
         <p:txBody>
           <a:bodyPr wrap="square" lIns="0" rIns="0" tIns="0" bIns="0">
-            <a:spAutoFit/>
+            <a:normAutofit/>
           </a:bodyPr>
           <a:lstStyle/>
           <a:p>
@@ -14236,6 +14266,9 @@
             </a:r>
             <a:r>
               <a:rPr sz="3600" b="1" i="0" u="none">
+                <a:solidFill>
+                  <a:srgbClr val="FDE68A"/>
+                </a:solidFill>
                 <a:latin typeface="Inter"/>
               </a:rPr>
               <a:t>not the goal</a:t>
@@ -14254,7 +14287,7 @@
       </p:sp>
       <p:sp>
         <p:nvSpPr>
-          <p:cNvPr id="7" name="TextBox 6"/>
+          <p:cNvPr id="6" name="TextBox 5"/>
           <p:cNvSpPr txBox="1"/>
           <p:nvPr/>
         </p:nvSpPr>
@@ -14267,6 +14300,9 @@
               <a:gs pos="70000">
                 <a:srgbClr val="F472B6"/>
               </a:gs>
+              <a:gs pos="100000">
+                <a:srgbClr val="F472B6"/>
+              </a:gs>
             </a:gsLst>
             <a:lin ang="2700000" scaled="0"/>
           </a:gradFill>
@@ -14280,7 +14316,7 @@
         </p:spPr>
         <p:txBody>
           <a:bodyPr wrap="square" lIns="0" rIns="0" tIns="0" bIns="0">
-            <a:spAutoFit/>
+            <a:normAutofit/>
           </a:bodyPr>
           <a:lstStyle/>
           <a:p>
@@ -14299,7 +14335,7 @@
       </p:sp>
       <p:sp>
         <p:nvSpPr>
-          <p:cNvPr id="8" name="TextBox 7"/>
+          <p:cNvPr id="7" name="TextBox 6"/>
           <p:cNvSpPr txBox="1"/>
           <p:nvPr/>
         </p:nvSpPr>
@@ -14315,7 +14351,7 @@
         </p:spPr>
         <p:txBody>
           <a:bodyPr wrap="square" lIns="0" rIns="0" tIns="0" bIns="0">
-            <a:spAutoFit/>
+            <a:normAutofit/>
           </a:bodyPr>
           <a:lstStyle/>
           <a:p>
@@ -14334,7 +14370,7 @@
       </p:sp>
       <p:sp>
         <p:nvSpPr>
-          <p:cNvPr id="9" name="TextBox 8"/>
+          <p:cNvPr id="8" name="TextBox 7"/>
           <p:cNvSpPr txBox="1"/>
           <p:nvPr/>
         </p:nvSpPr>
@@ -14350,7 +14386,7 @@
         </p:spPr>
         <p:txBody>
           <a:bodyPr wrap="square" lIns="0" rIns="0" tIns="0" bIns="0">
-            <a:spAutoFit/>
+            <a:normAutofit/>
           </a:bodyPr>
           <a:lstStyle/>
           <a:p>
@@ -14369,7 +14405,7 @@
       </p:sp>
       <p:sp>
         <p:nvSpPr>
-          <p:cNvPr id="10" name="TextBox 9"/>
+          <p:cNvPr id="9" name="TextBox 8"/>
           <p:cNvSpPr txBox="1"/>
           <p:nvPr/>
         </p:nvSpPr>
@@ -14385,7 +14421,7 @@
         </p:spPr>
         <p:txBody>
           <a:bodyPr wrap="square" lIns="0" rIns="0" tIns="0" bIns="0">
-            <a:spAutoFit/>
+            <a:normAutofit/>
           </a:bodyPr>
           <a:lstStyle/>
           <a:p>
@@ -14404,7 +14440,7 @@
       </p:sp>
       <p:sp>
         <p:nvSpPr>
-          <p:cNvPr id="11" name="TextBox 10"/>
+          <p:cNvPr id="10" name="TextBox 9"/>
           <p:cNvSpPr txBox="1"/>
           <p:nvPr/>
         </p:nvSpPr>
@@ -14420,7 +14456,7 @@
         </p:spPr>
         <p:txBody>
           <a:bodyPr wrap="square" lIns="0" rIns="0" tIns="0" bIns="0">
-            <a:spAutoFit/>
+            <a:normAutofit/>
           </a:bodyPr>
           <a:lstStyle/>
           <a:p>
@@ -14516,7 +14552,7 @@
         </p:spPr>
         <p:txBody>
           <a:bodyPr wrap="square" lIns="0" rIns="0" tIns="0" bIns="0">
-            <a:spAutoFit/>
+            <a:normAutofit/>
           </a:bodyPr>
           <a:lstStyle/>
           <a:p>
@@ -14551,7 +14587,7 @@
         </p:spPr>
         <p:txBody>
           <a:bodyPr wrap="square" lIns="0" rIns="0" tIns="0" bIns="0">
-            <a:spAutoFit/>
+            <a:normAutofit/>
           </a:bodyPr>
           <a:lstStyle/>
           <a:p>
@@ -14583,7 +14619,9 @@
             <a:avLst/>
           </a:prstGeom>
           <a:solidFill>
-            <a:srgbClr val="FFFFFF"/>
+            <a:srgbClr val="FFFFFF">
+              <a:alpha val="4000"/>
+            </a:srgbClr>
           </a:solidFill>
           <a:ln w="9525">
             <a:solidFill>
@@ -14638,7 +14676,7 @@
         </p:spPr>
         <p:txBody>
           <a:bodyPr wrap="square" lIns="0" rIns="0" tIns="0" bIns="0">
-            <a:spAutoFit/>
+            <a:normAutofit/>
           </a:bodyPr>
           <a:lstStyle/>
           <a:p>
@@ -14673,7 +14711,7 @@
         </p:spPr>
         <p:txBody>
           <a:bodyPr wrap="square" lIns="0" rIns="0" tIns="0" bIns="0">
-            <a:spAutoFit/>
+            <a:normAutofit/>
           </a:bodyPr>
           <a:lstStyle/>
           <a:p>
@@ -14717,7 +14755,7 @@
         </p:spPr>
         <p:txBody>
           <a:bodyPr wrap="square" lIns="0" rIns="0" tIns="0" bIns="0">
-            <a:spAutoFit/>
+            <a:normAutofit/>
           </a:bodyPr>
           <a:lstStyle/>
           <a:p>
@@ -14752,7 +14790,7 @@
         </p:spPr>
         <p:txBody>
           <a:bodyPr wrap="square" lIns="0" rIns="0" tIns="0" bIns="0">
-            <a:spAutoFit/>
+            <a:normAutofit/>
           </a:bodyPr>
           <a:lstStyle/>
           <a:p>
@@ -14787,7 +14825,7 @@
         </p:spPr>
         <p:txBody>
           <a:bodyPr wrap="square" lIns="0" rIns="0" tIns="0" bIns="0">
-            <a:spAutoFit/>
+            <a:normAutofit/>
           </a:bodyPr>
           <a:lstStyle/>
           <a:p>
@@ -14822,7 +14860,7 @@
         </p:spPr>
         <p:txBody>
           <a:bodyPr wrap="square" lIns="0" rIns="0" tIns="0" bIns="0">
-            <a:spAutoFit/>
+            <a:normAutofit/>
           </a:bodyPr>
           <a:lstStyle/>
           <a:p>
@@ -14857,7 +14895,7 @@
         </p:spPr>
         <p:txBody>
           <a:bodyPr wrap="square" lIns="0" rIns="0" tIns="0" bIns="0">
-            <a:spAutoFit/>
+            <a:normAutofit/>
           </a:bodyPr>
           <a:lstStyle/>
           <a:p>
@@ -14892,7 +14930,7 @@
         </p:spPr>
         <p:txBody>
           <a:bodyPr wrap="square" lIns="0" rIns="0" tIns="0" bIns="0">
-            <a:spAutoFit/>
+            <a:normAutofit/>
           </a:bodyPr>
           <a:lstStyle/>
           <a:p>
@@ -14927,7 +14965,7 @@
         </p:spPr>
         <p:txBody>
           <a:bodyPr wrap="square" lIns="0" rIns="0" tIns="0" bIns="0">
-            <a:spAutoFit/>
+            <a:normAutofit/>
           </a:bodyPr>
           <a:lstStyle/>
           <a:p>
@@ -14962,7 +15000,7 @@
         </p:spPr>
         <p:txBody>
           <a:bodyPr wrap="square" lIns="0" rIns="0" tIns="0" bIns="0">
-            <a:spAutoFit/>
+            <a:normAutofit/>
           </a:bodyPr>
           <a:lstStyle/>
           <a:p>
@@ -14997,7 +15035,7 @@
         </p:spPr>
         <p:txBody>
           <a:bodyPr wrap="square" lIns="0" rIns="0" tIns="0" bIns="0">
-            <a:spAutoFit/>
+            <a:normAutofit/>
           </a:bodyPr>
           <a:lstStyle/>
           <a:p>
@@ -15029,12 +15067,14 @@
             <a:avLst/>
           </a:prstGeom>
           <a:solidFill>
-            <a:srgbClr val="FFFFFF"/>
+            <a:srgbClr val="FFFFFF">
+              <a:alpha val="6000"/>
+            </a:srgbClr>
           </a:solidFill>
         </p:spPr>
         <p:txBody>
           <a:bodyPr wrap="square" lIns="0" rIns="0" tIns="0" bIns="0">
-            <a:spAutoFit/>
+            <a:normAutofit/>
           </a:bodyPr>
           <a:lstStyle/>
           <a:p>
@@ -15143,7 +15183,7 @@
         </p:spPr>
         <p:txBody>
           <a:bodyPr wrap="square" lIns="0" rIns="0" tIns="0" bIns="0">
-            <a:spAutoFit/>
+            <a:normAutofit/>
           </a:bodyPr>
           <a:lstStyle/>
           <a:p>
@@ -15178,7 +15218,7 @@
         </p:spPr>
         <p:txBody>
           <a:bodyPr wrap="square" lIns="0" rIns="0" tIns="0" bIns="0">
-            <a:spAutoFit/>
+            <a:normAutofit/>
           </a:bodyPr>
           <a:lstStyle/>
           <a:p>
@@ -15213,7 +15253,7 @@
         </p:spPr>
         <p:txBody>
           <a:bodyPr wrap="square" lIns="0" rIns="0" tIns="0" bIns="0">
-            <a:spAutoFit/>
+            <a:normAutofit/>
           </a:bodyPr>
           <a:lstStyle/>
           <a:p>
@@ -15257,7 +15297,7 @@
         </p:spPr>
         <p:txBody>
           <a:bodyPr wrap="square" lIns="0" rIns="0" tIns="0" bIns="0">
-            <a:spAutoFit/>
+            <a:normAutofit/>
           </a:bodyPr>
           <a:lstStyle/>
           <a:p>
@@ -15292,7 +15332,7 @@
         </p:spPr>
         <p:txBody>
           <a:bodyPr wrap="square" lIns="0" rIns="0" tIns="0" bIns="0">
-            <a:spAutoFit/>
+            <a:normAutofit/>
           </a:bodyPr>
           <a:lstStyle/>
           <a:p>
@@ -15327,7 +15367,7 @@
         </p:spPr>
         <p:txBody>
           <a:bodyPr wrap="square" lIns="0" rIns="0" tIns="0" bIns="0">
-            <a:spAutoFit/>
+            <a:normAutofit/>
           </a:bodyPr>
           <a:lstStyle/>
           <a:p>
@@ -15362,7 +15402,7 @@
         </p:spPr>
         <p:txBody>
           <a:bodyPr wrap="square" lIns="0" rIns="0" tIns="0" bIns="0">
-            <a:spAutoFit/>
+            <a:normAutofit/>
           </a:bodyPr>
           <a:lstStyle/>
           <a:p>
@@ -15397,7 +15437,7 @@
         </p:spPr>
         <p:txBody>
           <a:bodyPr wrap="square" lIns="0" rIns="0" tIns="0" bIns="0">
-            <a:spAutoFit/>
+            <a:normAutofit/>
           </a:bodyPr>
           <a:lstStyle/>
           <a:p>
@@ -15432,7 +15472,7 @@
         </p:spPr>
         <p:txBody>
           <a:bodyPr wrap="square" lIns="0" rIns="0" tIns="0" bIns="0">
-            <a:spAutoFit/>
+            <a:normAutofit/>
           </a:bodyPr>
           <a:lstStyle/>
           <a:p>
@@ -15467,7 +15507,7 @@
         </p:spPr>
         <p:txBody>
           <a:bodyPr wrap="square" lIns="0" rIns="0" tIns="0" bIns="0">
-            <a:spAutoFit/>
+            <a:normAutofit/>
           </a:bodyPr>
           <a:lstStyle/>
           <a:p>
@@ -15502,7 +15542,7 @@
         </p:spPr>
         <p:txBody>
           <a:bodyPr wrap="square" lIns="0" rIns="0" tIns="0" bIns="0">
-            <a:spAutoFit/>
+            <a:normAutofit/>
           </a:bodyPr>
           <a:lstStyle/>
           <a:p>
@@ -15537,7 +15577,7 @@
         </p:spPr>
         <p:txBody>
           <a:bodyPr wrap="square" lIns="0" rIns="0" tIns="0" bIns="0">
-            <a:spAutoFit/>
+            <a:normAutofit/>
           </a:bodyPr>
           <a:lstStyle/>
           <a:p>
@@ -15572,7 +15612,7 @@
         </p:spPr>
         <p:txBody>
           <a:bodyPr wrap="square" lIns="0" rIns="0" tIns="0" bIns="0">
-            <a:spAutoFit/>
+            <a:normAutofit/>
           </a:bodyPr>
           <a:lstStyle/>
           <a:p>
@@ -15607,7 +15647,7 @@
         </p:spPr>
         <p:txBody>
           <a:bodyPr wrap="square" lIns="0" rIns="0" tIns="0" bIns="0">
-            <a:spAutoFit/>
+            <a:normAutofit/>
           </a:bodyPr>
           <a:lstStyle/>
           <a:p>
@@ -15644,7 +15684,7 @@
         </p:spPr>
         <p:txBody>
           <a:bodyPr wrap="square" lIns="0" rIns="0" tIns="0" bIns="0">
-            <a:spAutoFit/>
+            <a:normAutofit/>
           </a:bodyPr>
           <a:lstStyle/>
           <a:p>
@@ -15676,7 +15716,9 @@
             <a:avLst/>
           </a:prstGeom>
           <a:solidFill>
-            <a:srgbClr val="FFFFFF"/>
+            <a:srgbClr val="FFFFFF">
+              <a:alpha val="4000"/>
+            </a:srgbClr>
           </a:solidFill>
           <a:ln w="9525">
             <a:solidFill>
@@ -15731,7 +15773,7 @@
         </p:spPr>
         <p:txBody>
           <a:bodyPr wrap="square" lIns="0" rIns="0" tIns="0" bIns="0">
-            <a:spAutoFit/>
+            <a:normAutofit/>
           </a:bodyPr>
           <a:lstStyle/>
           <a:p>
@@ -15766,7 +15808,7 @@
         </p:spPr>
         <p:txBody>
           <a:bodyPr wrap="square" lIns="0" rIns="0" tIns="0" bIns="0">
-            <a:spAutoFit/>
+            <a:normAutofit/>
           </a:bodyPr>
           <a:lstStyle/>
           <a:p>
@@ -15801,7 +15843,7 @@
         </p:spPr>
         <p:txBody>
           <a:bodyPr wrap="square" lIns="0" rIns="0" tIns="0" bIns="0">
-            <a:spAutoFit/>
+            <a:normAutofit/>
           </a:bodyPr>
           <a:lstStyle/>
           <a:p>
@@ -15836,7 +15878,7 @@
         </p:spPr>
         <p:txBody>
           <a:bodyPr wrap="square" lIns="0" rIns="0" tIns="0" bIns="0">
-            <a:spAutoFit/>
+            <a:normAutofit/>
           </a:bodyPr>
           <a:lstStyle/>
           <a:p>
@@ -15871,7 +15913,7 @@
         </p:spPr>
         <p:txBody>
           <a:bodyPr wrap="square" lIns="0" rIns="0" tIns="0" bIns="0">
-            <a:spAutoFit/>
+            <a:normAutofit/>
           </a:bodyPr>
           <a:lstStyle/>
           <a:p>
@@ -15906,7 +15948,7 @@
         </p:spPr>
         <p:txBody>
           <a:bodyPr wrap="square" lIns="0" rIns="0" tIns="0" bIns="0">
-            <a:spAutoFit/>
+            <a:normAutofit/>
           </a:bodyPr>
           <a:lstStyle/>
           <a:p>
@@ -15941,7 +15983,7 @@
         </p:spPr>
         <p:txBody>
           <a:bodyPr wrap="square" lIns="0" rIns="0" tIns="0" bIns="0">
-            <a:spAutoFit/>
+            <a:normAutofit/>
           </a:bodyPr>
           <a:lstStyle/>
           <a:p>
@@ -15976,7 +16018,7 @@
         </p:spPr>
         <p:txBody>
           <a:bodyPr wrap="square" lIns="0" rIns="0" tIns="0" bIns="0">
-            <a:spAutoFit/>
+            <a:normAutofit/>
           </a:bodyPr>
           <a:lstStyle/>
           <a:p>
@@ -16011,7 +16053,7 @@
         </p:spPr>
         <p:txBody>
           <a:bodyPr wrap="square" lIns="0" rIns="0" tIns="0" bIns="0">
-            <a:spAutoFit/>
+            <a:normAutofit/>
           </a:bodyPr>
           <a:lstStyle/>
           <a:p>
@@ -16046,7 +16088,7 @@
         </p:spPr>
         <p:txBody>
           <a:bodyPr wrap="square" lIns="0" rIns="0" tIns="0" bIns="0">
-            <a:spAutoFit/>
+            <a:normAutofit/>
           </a:bodyPr>
           <a:lstStyle/>
           <a:p>
@@ -16081,7 +16123,7 @@
         </p:spPr>
         <p:txBody>
           <a:bodyPr wrap="square" lIns="0" rIns="0" tIns="0" bIns="0">
-            <a:spAutoFit/>
+            <a:normAutofit/>
           </a:bodyPr>
           <a:lstStyle/>
           <a:p>
@@ -16113,12 +16155,14 @@
             <a:avLst/>
           </a:prstGeom>
           <a:solidFill>
-            <a:srgbClr val="FFFFFF"/>
+            <a:srgbClr val="FFFFFF">
+              <a:alpha val="6000"/>
+            </a:srgbClr>
           </a:solidFill>
         </p:spPr>
         <p:txBody>
           <a:bodyPr wrap="square" lIns="0" rIns="0" tIns="0" bIns="0">
-            <a:spAutoFit/>
+            <a:normAutofit/>
           </a:bodyPr>
           <a:lstStyle/>
           <a:p>
@@ -16153,7 +16197,7 @@
         </p:spPr>
         <p:txBody>
           <a:bodyPr wrap="square" lIns="0" rIns="0" tIns="0" bIns="0">
-            <a:spAutoFit/>
+            <a:normAutofit/>
           </a:bodyPr>
           <a:lstStyle/>
           <a:p>
@@ -16188,7 +16232,7 @@
         </p:spPr>
         <p:txBody>
           <a:bodyPr wrap="square" lIns="0" rIns="0" tIns="0" bIns="0">
-            <a:spAutoFit/>
+            <a:normAutofit/>
           </a:bodyPr>
           <a:lstStyle/>
           <a:p>

--- a/examples/sophisticated/deck.pptx
+++ b/examples/sophisticated/deck.pptx
@@ -3352,16 +3352,16 @@
         <p:spPr>
           <a:xfrm>
             <a:off x="1371600" y="985838"/>
-            <a:ext cx="975420" cy="200025"/>
-          </a:xfrm>
-          <a:prstGeom prst="rect">
-            <a:avLst/>
-          </a:prstGeom>
-          <a:noFill/>
-        </p:spPr>
-        <p:txBody>
-          <a:bodyPr wrap="square" lIns="0" rIns="0" tIns="0" bIns="0">
-            <a:normAutofit/>
+            <a:ext cx="1268045" cy="200025"/>
+          </a:xfrm>
+          <a:prstGeom prst="rect">
+            <a:avLst/>
+          </a:prstGeom>
+          <a:noFill/>
+        </p:spPr>
+        <p:txBody>
+          <a:bodyPr wrap="square" lIns="0" rIns="0" tIns="0" bIns="0">
+            <a:spAutoFit/>
           </a:bodyPr>
           <a:lstStyle/>
           <a:p>
@@ -3409,7 +3409,7 @@
         </p:spPr>
         <p:txBody>
           <a:bodyPr wrap="square" lIns="0" rIns="0" tIns="0" bIns="0">
-            <a:normAutofit/>
+            <a:spAutoFit/>
           </a:bodyPr>
           <a:lstStyle/>
           <a:p>
@@ -3444,7 +3444,7 @@
         </p:spPr>
         <p:txBody>
           <a:bodyPr wrap="square" lIns="0" rIns="0" tIns="0" bIns="0">
-            <a:normAutofit/>
+            <a:spAutoFit/>
           </a:bodyPr>
           <a:lstStyle/>
           <a:p>
@@ -3567,7 +3567,7 @@
         </p:spPr>
         <p:txBody>
           <a:bodyPr wrap="square" lIns="0" rIns="0" tIns="0" bIns="0">
-            <a:normAutofit/>
+            <a:spAutoFit/>
           </a:bodyPr>
           <a:lstStyle/>
           <a:p>
@@ -3602,7 +3602,7 @@
         </p:spPr>
         <p:txBody>
           <a:bodyPr wrap="square" lIns="0" rIns="0" tIns="0" bIns="0">
-            <a:normAutofit/>
+            <a:spAutoFit/>
           </a:bodyPr>
           <a:lstStyle/>
           <a:p>
@@ -3698,7 +3698,7 @@
         </p:spPr>
         <p:txBody>
           <a:bodyPr wrap="square" lIns="0" rIns="0" tIns="0" bIns="0">
-            <a:normAutofit/>
+            <a:spAutoFit/>
           </a:bodyPr>
           <a:lstStyle/>
           <a:p>
@@ -3768,7 +3768,7 @@
         </p:spPr>
         <p:txBody>
           <a:bodyPr wrap="square" lIns="0" rIns="0" tIns="0" bIns="0">
-            <a:normAutofit/>
+            <a:spAutoFit/>
           </a:bodyPr>
           <a:lstStyle/>
           <a:p>
@@ -4027,7 +4027,7 @@
         </p:spPr>
         <p:txBody>
           <a:bodyPr wrap="square" lIns="0" rIns="0" tIns="0" bIns="0">
-            <a:normAutofit/>
+            <a:spAutoFit/>
           </a:bodyPr>
           <a:lstStyle/>
           <a:p>
@@ -4062,7 +4062,7 @@
         </p:spPr>
         <p:txBody>
           <a:bodyPr wrap="square" lIns="0" rIns="0" tIns="0" bIns="0">
-            <a:normAutofit/>
+            <a:spAutoFit/>
           </a:bodyPr>
           <a:lstStyle/>
           <a:p>
@@ -4097,7 +4097,7 @@
         </p:spPr>
         <p:txBody>
           <a:bodyPr wrap="square" lIns="0" rIns="0" tIns="0" bIns="0">
-            <a:normAutofit/>
+            <a:spAutoFit/>
           </a:bodyPr>
           <a:lstStyle/>
           <a:p>
@@ -4132,7 +4132,7 @@
         </p:spPr>
         <p:txBody>
           <a:bodyPr wrap="square" lIns="0" rIns="0" tIns="0" bIns="0">
-            <a:normAutofit/>
+            <a:spAutoFit/>
           </a:bodyPr>
           <a:lstStyle/>
           <a:p>
@@ -4167,7 +4167,7 @@
         </p:spPr>
         <p:txBody>
           <a:bodyPr wrap="square" lIns="0" rIns="0" tIns="0" bIns="0">
-            <a:normAutofit/>
+            <a:spAutoFit/>
           </a:bodyPr>
           <a:lstStyle/>
           <a:p>
@@ -4220,7 +4220,7 @@
         </p:spPr>
         <p:txBody>
           <a:bodyPr wrap="square" lIns="0" rIns="0" tIns="0" bIns="0">
-            <a:normAutofit/>
+            <a:spAutoFit/>
           </a:bodyPr>
           <a:lstStyle/>
           <a:p>
@@ -4273,7 +4273,7 @@
         </p:spPr>
         <p:txBody>
           <a:bodyPr wrap="square" lIns="0" rIns="0" tIns="0" bIns="0">
-            <a:normAutofit/>
+            <a:spAutoFit/>
           </a:bodyPr>
           <a:lstStyle/>
           <a:p>
@@ -4353,7 +4353,7 @@
         </p:spPr>
         <p:txBody>
           <a:bodyPr wrap="square" lIns="0" rIns="0" tIns="0" bIns="0">
-            <a:normAutofit/>
+            <a:spAutoFit/>
           </a:bodyPr>
           <a:lstStyle/>
           <a:p>
@@ -4406,7 +4406,7 @@
         </p:spPr>
         <p:txBody>
           <a:bodyPr wrap="square" lIns="0" rIns="0" tIns="0" bIns="0">
-            <a:normAutofit/>
+            <a:spAutoFit/>
           </a:bodyPr>
           <a:lstStyle/>
           <a:p>
@@ -4459,7 +4459,7 @@
         </p:spPr>
         <p:txBody>
           <a:bodyPr wrap="square" lIns="0" rIns="0" tIns="0" bIns="0">
-            <a:normAutofit/>
+            <a:spAutoFit/>
           </a:bodyPr>
           <a:lstStyle/>
           <a:p>
@@ -4568,7 +4568,7 @@
         </p:spPr>
         <p:txBody>
           <a:bodyPr wrap="square" lIns="0" rIns="0" tIns="0" bIns="0">
-            <a:normAutofit/>
+            <a:spAutoFit/>
           </a:bodyPr>
           <a:lstStyle/>
           <a:p>
@@ -4594,7 +4594,7 @@
         <p:spPr>
           <a:xfrm>
             <a:off x="7280225" y="3450729"/>
-            <a:ext cx="1708100" cy="342900"/>
+            <a:ext cx="2220531" cy="342900"/>
           </a:xfrm>
           <a:prstGeom prst="rect">
             <a:avLst/>
@@ -4694,7 +4694,7 @@
         </p:spPr>
         <p:txBody>
           <a:bodyPr wrap="square" lIns="0" rIns="0" tIns="0" bIns="0">
-            <a:normAutofit/>
+            <a:spAutoFit/>
           </a:bodyPr>
           <a:lstStyle/>
           <a:p>
@@ -4821,18 +4821,19 @@
         </p:spPr>
         <p:txBody>
           <a:bodyPr wrap="square" lIns="0" rIns="0" tIns="0" bIns="0">
-            <a:normAutofit/>
-          </a:bodyPr>
-          <a:lstStyle/>
-          <a:p>
-            <a:r>
-              <a:rPr sz="825" b="1">
+            <a:spAutoFit/>
+          </a:bodyPr>
+          <a:lstStyle/>
+          <a:p>
+            <a:pPr algn="l"/>
+            <a:r>
+              <a:rPr sz="825" b="1" i="0" u="none">
                 <a:solidFill>
                   <a:srgbClr val="C084FC"/>
                 </a:solidFill>
                 <a:latin typeface="Inter"/>
               </a:rPr>
-              <a:t>• No API key? No problem.</a:t>
+              <a:t>No API key? No problem.</a:t>
             </a:r>
           </a:p>
         </p:txBody>
@@ -4855,7 +4856,7 @@
         </p:spPr>
         <p:txBody>
           <a:bodyPr wrap="square" lIns="0" rIns="0" tIns="0" bIns="0">
-            <a:normAutofit/>
+            <a:spAutoFit/>
           </a:bodyPr>
           <a:lstStyle/>
           <a:p>
@@ -4937,18 +4938,19 @@
         </p:spPr>
         <p:txBody>
           <a:bodyPr wrap="square" lIns="0" rIns="0" tIns="0" bIns="0">
-            <a:normAutofit/>
-          </a:bodyPr>
-          <a:lstStyle/>
-          <a:p>
-            <a:r>
-              <a:rPr sz="825" b="1">
+            <a:spAutoFit/>
+          </a:bodyPr>
+          <a:lstStyle/>
+          <a:p>
+            <a:pPr algn="l"/>
+            <a:r>
+              <a:rPr sz="825" b="1" i="0" u="none">
                 <a:solidFill>
                   <a:srgbClr val="A1A1AA"/>
                 </a:solidFill>
                 <a:latin typeface="Inter"/>
               </a:rPr>
-              <a:t>• Backends</a:t>
+              <a:t>Backends</a:t>
             </a:r>
           </a:p>
         </p:txBody>
@@ -5006,7 +5008,7 @@
         </p:spPr>
         <p:txBody>
           <a:bodyPr wrap="square" lIns="0" rIns="0" tIns="0" bIns="0">
-            <a:normAutofit/>
+            <a:spAutoFit/>
           </a:bodyPr>
           <a:lstStyle/>
           <a:p>
@@ -5041,7 +5043,7 @@
         </p:spPr>
         <p:txBody>
           <a:bodyPr wrap="square" lIns="0" rIns="0" tIns="0" bIns="0">
-            <a:normAutofit/>
+            <a:spAutoFit/>
           </a:bodyPr>
           <a:lstStyle/>
           <a:p>
@@ -5076,7 +5078,7 @@
         </p:spPr>
         <p:txBody>
           <a:bodyPr wrap="square" lIns="0" rIns="0" tIns="0" bIns="0">
-            <a:normAutofit/>
+            <a:spAutoFit/>
           </a:bodyPr>
           <a:lstStyle/>
           <a:p>
@@ -5172,7 +5174,7 @@
         </p:spPr>
         <p:txBody>
           <a:bodyPr wrap="square" lIns="0" rIns="0" tIns="0" bIns="0">
-            <a:normAutofit/>
+            <a:spAutoFit/>
           </a:bodyPr>
           <a:lstStyle/>
           <a:p>
@@ -5296,7 +5298,7 @@
         </p:spPr>
         <p:txBody>
           <a:bodyPr wrap="square" lIns="0" rIns="0" tIns="0" bIns="0">
-            <a:normAutofit/>
+            <a:spAutoFit/>
           </a:bodyPr>
           <a:lstStyle/>
           <a:p>
@@ -5331,7 +5333,7 @@
         </p:spPr>
         <p:txBody>
           <a:bodyPr wrap="square" lIns="0" rIns="0" tIns="0" bIns="0">
-            <a:normAutofit/>
+            <a:spAutoFit/>
           </a:bodyPr>
           <a:lstStyle/>
           <a:p>
@@ -5370,7 +5372,7 @@
         </p:spPr>
         <p:txBody>
           <a:bodyPr wrap="square" lIns="0" rIns="0" tIns="0" bIns="0">
-            <a:normAutofit/>
+            <a:spAutoFit/>
           </a:bodyPr>
           <a:lstStyle/>
           <a:p>
@@ -5405,7 +5407,7 @@
         </p:spPr>
         <p:txBody>
           <a:bodyPr wrap="square" lIns="0" rIns="0" tIns="0" bIns="0">
-            <a:normAutofit/>
+            <a:spAutoFit/>
           </a:bodyPr>
           <a:lstStyle/>
           <a:p>
@@ -5440,7 +5442,7 @@
         </p:spPr>
         <p:txBody>
           <a:bodyPr wrap="square" lIns="0" rIns="0" tIns="0" bIns="0">
-            <a:normAutofit/>
+            <a:spAutoFit/>
           </a:bodyPr>
           <a:lstStyle/>
           <a:p>
@@ -5475,7 +5477,7 @@
         </p:spPr>
         <p:txBody>
           <a:bodyPr wrap="square" lIns="0" rIns="0" tIns="0" bIns="0">
-            <a:normAutofit/>
+            <a:spAutoFit/>
           </a:bodyPr>
           <a:lstStyle/>
           <a:p>
@@ -5510,7 +5512,7 @@
         </p:spPr>
         <p:txBody>
           <a:bodyPr wrap="square" lIns="0" rIns="0" tIns="0" bIns="0">
-            <a:normAutofit/>
+            <a:spAutoFit/>
           </a:bodyPr>
           <a:lstStyle/>
           <a:p>
@@ -5545,7 +5547,7 @@
         </p:spPr>
         <p:txBody>
           <a:bodyPr wrap="square" lIns="0" rIns="0" tIns="0" bIns="0">
-            <a:normAutofit/>
+            <a:spAutoFit/>
           </a:bodyPr>
           <a:lstStyle/>
           <a:p>
@@ -5580,7 +5582,7 @@
         </p:spPr>
         <p:txBody>
           <a:bodyPr wrap="square" lIns="0" rIns="0" tIns="0" bIns="0">
-            <a:normAutofit/>
+            <a:spAutoFit/>
           </a:bodyPr>
           <a:lstStyle/>
           <a:p>
@@ -5615,7 +5617,7 @@
         </p:spPr>
         <p:txBody>
           <a:bodyPr wrap="square" lIns="0" rIns="0" tIns="0" bIns="0">
-            <a:normAutofit/>
+            <a:spAutoFit/>
           </a:bodyPr>
           <a:lstStyle/>
           <a:p>
@@ -5650,7 +5652,7 @@
         </p:spPr>
         <p:txBody>
           <a:bodyPr wrap="square" lIns="0" rIns="0" tIns="0" bIns="0">
-            <a:normAutofit/>
+            <a:spAutoFit/>
           </a:bodyPr>
           <a:lstStyle/>
           <a:p>
@@ -5685,7 +5687,7 @@
         </p:spPr>
         <p:txBody>
           <a:bodyPr wrap="square" lIns="0" rIns="0" tIns="0" bIns="0">
-            <a:normAutofit/>
+            <a:spAutoFit/>
           </a:bodyPr>
           <a:lstStyle/>
           <a:p>
@@ -5784,7 +5786,7 @@
         </p:spPr>
         <p:txBody>
           <a:bodyPr wrap="square" lIns="0" rIns="0" tIns="0" bIns="0">
-            <a:normAutofit/>
+            <a:spAutoFit/>
           </a:bodyPr>
           <a:lstStyle/>
           <a:p>
@@ -5819,7 +5821,7 @@
         </p:spPr>
         <p:txBody>
           <a:bodyPr wrap="square" lIns="0" rIns="0" tIns="0" bIns="0">
-            <a:normAutofit/>
+            <a:spAutoFit/>
           </a:bodyPr>
           <a:lstStyle/>
           <a:p>
@@ -5864,7 +5866,7 @@
         </p:spPr>
         <p:txBody>
           <a:bodyPr wrap="square" lIns="0" rIns="0" tIns="0" bIns="0">
-            <a:normAutofit/>
+            <a:spAutoFit/>
           </a:bodyPr>
           <a:lstStyle/>
           <a:p>
@@ -5899,7 +5901,7 @@
         </p:spPr>
         <p:txBody>
           <a:bodyPr wrap="square" lIns="0" rIns="0" tIns="0" bIns="0">
-            <a:normAutofit/>
+            <a:spAutoFit/>
           </a:bodyPr>
           <a:lstStyle/>
           <a:p>
@@ -5934,7 +5936,7 @@
         </p:spPr>
         <p:txBody>
           <a:bodyPr wrap="square" lIns="0" rIns="0" tIns="0" bIns="0">
-            <a:normAutofit/>
+            <a:spAutoFit/>
           </a:bodyPr>
           <a:lstStyle/>
           <a:p>
@@ -5969,7 +5971,7 @@
         </p:spPr>
         <p:txBody>
           <a:bodyPr wrap="square" lIns="0" rIns="0" tIns="0" bIns="0">
-            <a:normAutofit/>
+            <a:spAutoFit/>
           </a:bodyPr>
           <a:lstStyle/>
           <a:p>
@@ -6004,7 +6006,7 @@
         </p:spPr>
         <p:txBody>
           <a:bodyPr wrap="square" lIns="0" rIns="0" tIns="0" bIns="0">
-            <a:normAutofit/>
+            <a:spAutoFit/>
           </a:bodyPr>
           <a:lstStyle/>
           <a:p>
@@ -6039,7 +6041,7 @@
         </p:spPr>
         <p:txBody>
           <a:bodyPr wrap="square" lIns="0" rIns="0" tIns="0" bIns="0">
-            <a:normAutofit/>
+            <a:spAutoFit/>
           </a:bodyPr>
           <a:lstStyle/>
           <a:p>
@@ -6074,7 +6076,7 @@
         </p:spPr>
         <p:txBody>
           <a:bodyPr wrap="square" lIns="0" rIns="0" tIns="0" bIns="0">
-            <a:normAutofit/>
+            <a:spAutoFit/>
           </a:bodyPr>
           <a:lstStyle/>
           <a:p>
@@ -6109,7 +6111,7 @@
         </p:spPr>
         <p:txBody>
           <a:bodyPr wrap="square" lIns="0" rIns="0" tIns="0" bIns="0">
-            <a:normAutofit/>
+            <a:spAutoFit/>
           </a:bodyPr>
           <a:lstStyle/>
           <a:p>
@@ -6144,7 +6146,7 @@
         </p:spPr>
         <p:txBody>
           <a:bodyPr wrap="square" lIns="0" rIns="0" tIns="0" bIns="0">
-            <a:normAutofit/>
+            <a:spAutoFit/>
           </a:bodyPr>
           <a:lstStyle/>
           <a:p>
@@ -6179,7 +6181,7 @@
         </p:spPr>
         <p:txBody>
           <a:bodyPr wrap="square" lIns="0" rIns="0" tIns="0" bIns="0">
-            <a:normAutofit/>
+            <a:spAutoFit/>
           </a:bodyPr>
           <a:lstStyle/>
           <a:p>
@@ -6268,7 +6270,7 @@
         </p:spPr>
         <p:txBody>
           <a:bodyPr wrap="square" lIns="0" rIns="0" tIns="0" bIns="0">
-            <a:normAutofit/>
+            <a:spAutoFit/>
           </a:bodyPr>
           <a:lstStyle/>
           <a:p>
@@ -6303,7 +6305,7 @@
         </p:spPr>
         <p:txBody>
           <a:bodyPr wrap="square" lIns="0" rIns="0" tIns="0" bIns="0">
-            <a:normAutofit/>
+            <a:spAutoFit/>
           </a:bodyPr>
           <a:lstStyle/>
           <a:p>
@@ -6342,7 +6344,7 @@
         </p:spPr>
         <p:txBody>
           <a:bodyPr wrap="square" lIns="0" rIns="0" tIns="0" bIns="0">
-            <a:normAutofit/>
+            <a:spAutoFit/>
           </a:bodyPr>
           <a:lstStyle/>
           <a:p>
@@ -6377,7 +6379,7 @@
         </p:spPr>
         <p:txBody>
           <a:bodyPr wrap="square" lIns="0" rIns="0" tIns="0" bIns="0">
-            <a:normAutofit/>
+            <a:spAutoFit/>
           </a:bodyPr>
           <a:lstStyle/>
           <a:p>
@@ -6412,7 +6414,7 @@
         </p:spPr>
         <p:txBody>
           <a:bodyPr wrap="square" lIns="0" rIns="0" tIns="0" bIns="0">
-            <a:normAutofit/>
+            <a:spAutoFit/>
           </a:bodyPr>
           <a:lstStyle/>
           <a:p>
@@ -6447,7 +6449,7 @@
         </p:spPr>
         <p:txBody>
           <a:bodyPr wrap="square" lIns="0" rIns="0" tIns="0" bIns="0">
-            <a:normAutofit/>
+            <a:spAutoFit/>
           </a:bodyPr>
           <a:lstStyle/>
           <a:p>
@@ -6482,7 +6484,7 @@
         </p:spPr>
         <p:txBody>
           <a:bodyPr wrap="square" lIns="0" rIns="0" tIns="0" bIns="0">
-            <a:normAutofit/>
+            <a:spAutoFit/>
           </a:bodyPr>
           <a:lstStyle/>
           <a:p>
@@ -6517,7 +6519,7 @@
         </p:spPr>
         <p:txBody>
           <a:bodyPr wrap="square" lIns="0" rIns="0" tIns="0" bIns="0">
-            <a:normAutofit/>
+            <a:spAutoFit/>
           </a:bodyPr>
           <a:lstStyle/>
           <a:p>
@@ -6552,7 +6554,7 @@
         </p:spPr>
         <p:txBody>
           <a:bodyPr wrap="square" lIns="0" rIns="0" tIns="0" bIns="0">
-            <a:normAutofit/>
+            <a:spAutoFit/>
           </a:bodyPr>
           <a:lstStyle/>
           <a:p>
@@ -6587,7 +6589,7 @@
         </p:spPr>
         <p:txBody>
           <a:bodyPr wrap="square" lIns="0" rIns="0" tIns="0" bIns="0">
-            <a:normAutofit/>
+            <a:spAutoFit/>
           </a:bodyPr>
           <a:lstStyle/>
           <a:p>
@@ -6622,7 +6624,7 @@
         </p:spPr>
         <p:txBody>
           <a:bodyPr wrap="square" lIns="0" rIns="0" tIns="0" bIns="0">
-            <a:normAutofit/>
+            <a:spAutoFit/>
           </a:bodyPr>
           <a:lstStyle/>
           <a:p>
@@ -6657,7 +6659,7 @@
         </p:spPr>
         <p:txBody>
           <a:bodyPr wrap="square" lIns="0" rIns="0" tIns="0" bIns="0">
-            <a:normAutofit/>
+            <a:spAutoFit/>
           </a:bodyPr>
           <a:lstStyle/>
           <a:p>
@@ -6746,7 +6748,7 @@
         </p:spPr>
         <p:txBody>
           <a:bodyPr wrap="square" lIns="0" rIns="0" tIns="0" bIns="0">
-            <a:normAutofit/>
+            <a:spAutoFit/>
           </a:bodyPr>
           <a:lstStyle/>
           <a:p>
@@ -6781,7 +6783,7 @@
         </p:spPr>
         <p:txBody>
           <a:bodyPr wrap="square" lIns="0" rIns="0" tIns="0" bIns="0">
-            <a:normAutofit/>
+            <a:spAutoFit/>
           </a:bodyPr>
           <a:lstStyle/>
           <a:p>
@@ -6820,7 +6822,7 @@
         </p:spPr>
         <p:txBody>
           <a:bodyPr wrap="square" lIns="0" rIns="0" tIns="0" bIns="0">
-            <a:normAutofit/>
+            <a:spAutoFit/>
           </a:bodyPr>
           <a:lstStyle/>
           <a:p>
@@ -6855,7 +6857,7 @@
         </p:spPr>
         <p:txBody>
           <a:bodyPr wrap="square" lIns="0" rIns="0" tIns="0" bIns="0">
-            <a:normAutofit/>
+            <a:spAutoFit/>
           </a:bodyPr>
           <a:lstStyle/>
           <a:p>
@@ -6890,7 +6892,7 @@
         </p:spPr>
         <p:txBody>
           <a:bodyPr wrap="square" lIns="0" rIns="0" tIns="0" bIns="0">
-            <a:normAutofit/>
+            <a:spAutoFit/>
           </a:bodyPr>
           <a:lstStyle/>
           <a:p>
@@ -6925,7 +6927,7 @@
         </p:spPr>
         <p:txBody>
           <a:bodyPr wrap="square" lIns="0" rIns="0" tIns="0" bIns="0">
-            <a:normAutofit/>
+            <a:spAutoFit/>
           </a:bodyPr>
           <a:lstStyle/>
           <a:p>
@@ -6960,7 +6962,7 @@
         </p:spPr>
         <p:txBody>
           <a:bodyPr wrap="square" lIns="0" rIns="0" tIns="0" bIns="0">
-            <a:normAutofit/>
+            <a:spAutoFit/>
           </a:bodyPr>
           <a:lstStyle/>
           <a:p>
@@ -6995,7 +6997,7 @@
         </p:spPr>
         <p:txBody>
           <a:bodyPr wrap="square" lIns="0" rIns="0" tIns="0" bIns="0">
-            <a:normAutofit/>
+            <a:spAutoFit/>
           </a:bodyPr>
           <a:lstStyle/>
           <a:p>
@@ -7030,7 +7032,7 @@
         </p:spPr>
         <p:txBody>
           <a:bodyPr wrap="square" lIns="0" rIns="0" tIns="0" bIns="0">
-            <a:normAutofit/>
+            <a:spAutoFit/>
           </a:bodyPr>
           <a:lstStyle/>
           <a:p>
@@ -7065,7 +7067,7 @@
         </p:spPr>
         <p:txBody>
           <a:bodyPr wrap="square" lIns="0" rIns="0" tIns="0" bIns="0">
-            <a:normAutofit/>
+            <a:spAutoFit/>
           </a:bodyPr>
           <a:lstStyle/>
           <a:p>
@@ -7100,7 +7102,7 @@
         </p:spPr>
         <p:txBody>
           <a:bodyPr wrap="square" lIns="0" rIns="0" tIns="0" bIns="0">
-            <a:normAutofit/>
+            <a:spAutoFit/>
           </a:bodyPr>
           <a:lstStyle/>
           <a:p>
@@ -7135,7 +7137,7 @@
         </p:spPr>
         <p:txBody>
           <a:bodyPr wrap="square" lIns="0" rIns="0" tIns="0" bIns="0">
-            <a:normAutofit/>
+            <a:spAutoFit/>
           </a:bodyPr>
           <a:lstStyle/>
           <a:p>
@@ -7170,7 +7172,7 @@
         </p:spPr>
         <p:txBody>
           <a:bodyPr wrap="square" lIns="0" rIns="0" tIns="0" bIns="0">
-            <a:normAutofit/>
+            <a:spAutoFit/>
           </a:bodyPr>
           <a:lstStyle/>
           <a:p>
@@ -7205,7 +7207,7 @@
         </p:spPr>
         <p:txBody>
           <a:bodyPr wrap="square" lIns="0" rIns="0" tIns="0" bIns="0">
-            <a:normAutofit/>
+            <a:spAutoFit/>
           </a:bodyPr>
           <a:lstStyle/>
           <a:p>
@@ -7439,7 +7441,7 @@
         </p:spPr>
         <p:txBody>
           <a:bodyPr wrap="square" lIns="0" rIns="0" tIns="0" bIns="0">
-            <a:normAutofit/>
+            <a:spAutoFit/>
           </a:bodyPr>
           <a:lstStyle/>
           <a:p>
@@ -7571,7 +7573,7 @@
         </p:spPr>
         <p:txBody>
           <a:bodyPr wrap="square" lIns="0" rIns="0" tIns="0" bIns="0">
-            <a:normAutofit/>
+            <a:spAutoFit/>
           </a:bodyPr>
           <a:lstStyle/>
           <a:p>
@@ -7610,7 +7612,7 @@
         </p:spPr>
         <p:txBody>
           <a:bodyPr wrap="square" lIns="0" rIns="0" tIns="0" bIns="0">
-            <a:normAutofit/>
+            <a:spAutoFit/>
           </a:bodyPr>
           <a:lstStyle/>
           <a:p>
@@ -7645,7 +7647,7 @@
         </p:spPr>
         <p:txBody>
           <a:bodyPr wrap="square" lIns="0" rIns="0" tIns="0" bIns="0">
-            <a:normAutofit/>
+            <a:spAutoFit/>
           </a:bodyPr>
           <a:lstStyle/>
           <a:p>
@@ -7684,7 +7686,7 @@
         </p:spPr>
         <p:txBody>
           <a:bodyPr wrap="square" lIns="0" rIns="0" tIns="0" bIns="0">
-            <a:normAutofit/>
+            <a:spAutoFit/>
           </a:bodyPr>
           <a:lstStyle/>
           <a:p>
@@ -7719,7 +7721,7 @@
         </p:spPr>
         <p:txBody>
           <a:bodyPr wrap="square" lIns="0" rIns="0" tIns="0" bIns="0">
-            <a:normAutofit/>
+            <a:spAutoFit/>
           </a:bodyPr>
           <a:lstStyle/>
           <a:p>
@@ -7754,7 +7756,7 @@
         </p:spPr>
         <p:txBody>
           <a:bodyPr wrap="square" lIns="0" rIns="0" tIns="0" bIns="0">
-            <a:normAutofit/>
+            <a:spAutoFit/>
           </a:bodyPr>
           <a:lstStyle/>
           <a:p>
@@ -7850,7 +7852,7 @@
         </p:spPr>
         <p:txBody>
           <a:bodyPr wrap="square" lIns="0" rIns="0" tIns="0" bIns="0">
-            <a:normAutofit/>
+            <a:spAutoFit/>
           </a:bodyPr>
           <a:lstStyle/>
           <a:p>
@@ -7920,7 +7922,7 @@
         </p:spPr>
         <p:txBody>
           <a:bodyPr wrap="square" lIns="0" rIns="0" tIns="0" bIns="0">
-            <a:normAutofit/>
+            <a:spAutoFit/>
           </a:bodyPr>
           <a:lstStyle/>
           <a:p>
@@ -7959,14 +7961,15 @@
           </a:bodyPr>
           <a:lstStyle/>
           <a:p>
-            <a:r>
-              <a:rPr sz="1650" b="1">
+            <a:pPr algn="l"/>
+            <a:r>
+              <a:rPr sz="1650" b="1" i="0" u="none">
                 <a:solidFill>
                   <a:srgbClr val="F5F5F7"/>
                 </a:solidFill>
                 <a:latin typeface="Inter"/>
               </a:rPr>
-              <a:t>• Why presentations are broken</a:t>
+              <a:t>Why presentations are broken</a:t>
             </a:r>
           </a:p>
         </p:txBody>
@@ -7989,7 +7992,7 @@
         </p:spPr>
         <p:txBody>
           <a:bodyPr wrap="square" lIns="0" rIns="0" tIns="0" bIns="0">
-            <a:normAutofit/>
+            <a:spAutoFit/>
           </a:bodyPr>
           <a:lstStyle/>
           <a:p>
@@ -8024,7 +8027,7 @@
         </p:spPr>
         <p:txBody>
           <a:bodyPr wrap="square" lIns="0" rIns="0" tIns="0" bIns="0">
-            <a:normAutofit/>
+            <a:spAutoFit/>
           </a:bodyPr>
           <a:lstStyle/>
           <a:p>
@@ -8063,14 +8066,15 @@
           </a:bodyPr>
           <a:lstStyle/>
           <a:p>
-            <a:r>
-              <a:rPr sz="1650" b="1">
+            <a:pPr algn="l"/>
+            <a:r>
+              <a:rPr sz="1650" b="1" i="0" u="none">
                 <a:solidFill>
                   <a:srgbClr val="F5F5F7"/>
                 </a:solidFill>
                 <a:latin typeface="Inter"/>
               </a:rPr>
-              <a:t>• The render-and-classify pipeline</a:t>
+              <a:t>The render-and-classify pipeline</a:t>
             </a:r>
           </a:p>
         </p:txBody>
@@ -8093,7 +8097,7 @@
         </p:spPr>
         <p:txBody>
           <a:bodyPr wrap="square" lIns="0" rIns="0" tIns="0" bIns="0">
-            <a:normAutofit/>
+            <a:spAutoFit/>
           </a:bodyPr>
           <a:lstStyle/>
           <a:p>
@@ -8128,7 +8132,7 @@
         </p:spPr>
         <p:txBody>
           <a:bodyPr wrap="square" lIns="0" rIns="0" tIns="0" bIns="0">
-            <a:normAutofit/>
+            <a:spAutoFit/>
           </a:bodyPr>
           <a:lstStyle/>
           <a:p>
@@ -8167,14 +8171,15 @@
           </a:bodyPr>
           <a:lstStyle/>
           <a:p>
-            <a:r>
-              <a:rPr sz="1650" b="1">
+            <a:pPr algn="l"/>
+            <a:r>
+              <a:rPr sz="1650" b="1" i="0" u="none">
                 <a:solidFill>
                   <a:srgbClr val="F5F5F7"/>
                 </a:solidFill>
                 <a:latin typeface="Inter"/>
               </a:rPr>
-              <a:t>• Native vs raster, by the numbers</a:t>
+              <a:t>Native vs raster, by the numbers</a:t>
             </a:r>
           </a:p>
         </p:txBody>
@@ -8197,7 +8202,7 @@
         </p:spPr>
         <p:txBody>
           <a:bodyPr wrap="square" lIns="0" rIns="0" tIns="0" bIns="0">
-            <a:normAutofit/>
+            <a:spAutoFit/>
           </a:bodyPr>
           <a:lstStyle/>
           <a:p>
@@ -8232,7 +8237,7 @@
         </p:spPr>
         <p:txBody>
           <a:bodyPr wrap="square" lIns="0" rIns="0" tIns="0" bIns="0">
-            <a:normAutofit/>
+            <a:spAutoFit/>
           </a:bodyPr>
           <a:lstStyle/>
           <a:p>
@@ -8271,14 +8276,15 @@
           </a:bodyPr>
           <a:lstStyle/>
           <a:p>
-            <a:r>
-              <a:rPr sz="1650" b="1">
+            <a:pPr algn="l"/>
+            <a:r>
+              <a:rPr sz="1650" b="1" i="0" u="none">
                 <a:solidFill>
                   <a:srgbClr val="F5F5F7"/>
                 </a:solidFill>
                 <a:latin typeface="Inter"/>
               </a:rPr>
-              <a:t>• Six pillars of editability</a:t>
+              <a:t>Six pillars of editability</a:t>
             </a:r>
           </a:p>
         </p:txBody>
@@ -8301,7 +8307,7 @@
         </p:spPr>
         <p:txBody>
           <a:bodyPr wrap="square" lIns="0" rIns="0" tIns="0" bIns="0">
-            <a:normAutofit/>
+            <a:spAutoFit/>
           </a:bodyPr>
           <a:lstStyle/>
           <a:p>
@@ -8336,7 +8342,7 @@
         </p:spPr>
         <p:txBody>
           <a:bodyPr wrap="square" lIns="0" rIns="0" tIns="0" bIns="0">
-            <a:normAutofit/>
+            <a:spAutoFit/>
           </a:bodyPr>
           <a:lstStyle/>
           <a:p>
@@ -8375,14 +8381,15 @@
           </a:bodyPr>
           <a:lstStyle/>
           <a:p>
-            <a:r>
-              <a:rPr sz="1650" b="1">
+            <a:pPr algn="l"/>
+            <a:r>
+              <a:rPr sz="1650" b="1" i="0" u="none">
                 <a:solidFill>
                   <a:srgbClr val="F5F5F7"/>
                 </a:solidFill>
                 <a:latin typeface="Inter"/>
               </a:rPr>
-              <a:t>• Pattern database deep-dive</a:t>
+              <a:t>Pattern database deep-dive</a:t>
             </a:r>
           </a:p>
         </p:txBody>
@@ -8405,7 +8412,7 @@
         </p:spPr>
         <p:txBody>
           <a:bodyPr wrap="square" lIns="0" rIns="0" tIns="0" bIns="0">
-            <a:normAutofit/>
+            <a:spAutoFit/>
           </a:bodyPr>
           <a:lstStyle/>
           <a:p>
@@ -8440,7 +8447,7 @@
         </p:spPr>
         <p:txBody>
           <a:bodyPr wrap="square" lIns="0" rIns="0" tIns="0" bIns="0">
-            <a:normAutofit/>
+            <a:spAutoFit/>
           </a:bodyPr>
           <a:lstStyle/>
           <a:p>
@@ -8479,14 +8486,15 @@
           </a:bodyPr>
           <a:lstStyle/>
           <a:p>
-            <a:r>
-              <a:rPr sz="1650" b="1">
+            <a:pPr algn="l"/>
+            <a:r>
+              <a:rPr sz="1650" b="1" i="0" u="none">
                 <a:solidFill>
                   <a:srgbClr val="F5F5F7"/>
                 </a:solidFill>
                 <a:latin typeface="Inter"/>
               </a:rPr>
-              <a:t>• Where we are on the roadmap</a:t>
+              <a:t>Where we are on the roadmap</a:t>
             </a:r>
           </a:p>
         </p:txBody>
@@ -8509,7 +8517,7 @@
         </p:spPr>
         <p:txBody>
           <a:bodyPr wrap="square" lIns="0" rIns="0" tIns="0" bIns="0">
-            <a:normAutofit/>
+            <a:spAutoFit/>
           </a:bodyPr>
           <a:lstStyle/>
           <a:p>
@@ -8544,7 +8552,7 @@
         </p:spPr>
         <p:txBody>
           <a:bodyPr wrap="square" lIns="0" rIns="0" tIns="0" bIns="0">
-            <a:normAutofit/>
+            <a:spAutoFit/>
           </a:bodyPr>
           <a:lstStyle/>
           <a:p>
@@ -8579,7 +8587,7 @@
         </p:spPr>
         <p:txBody>
           <a:bodyPr wrap="square" lIns="0" rIns="0" tIns="0" bIns="0">
-            <a:normAutofit/>
+            <a:spAutoFit/>
           </a:bodyPr>
           <a:lstStyle/>
           <a:p>
@@ -8675,7 +8683,7 @@
         </p:spPr>
         <p:txBody>
           <a:bodyPr wrap="square" lIns="0" rIns="0" tIns="0" bIns="0">
-            <a:normAutofit/>
+            <a:spAutoFit/>
           </a:bodyPr>
           <a:lstStyle/>
           <a:p>
@@ -8744,23 +8752,6 @@
           <p:nvPr/>
         </p:nvSpPr>
         <p:spPr>
-          <a:gradFill flip="none" rotWithShape="1">
-            <a:gsLst>
-              <a:gs pos="0">
-                <a:srgbClr val="F5F5F7"/>
-              </a:gs>
-              <a:gs pos="35000">
-                <a:srgbClr val="818CF8"/>
-              </a:gs>
-              <a:gs pos="65000">
-                <a:srgbClr val="C084FC"/>
-              </a:gs>
-              <a:gs pos="100000">
-                <a:srgbClr val="F472B6"/>
-              </a:gs>
-            </a:gsLst>
-            <a:lin ang="2700000" scaled="0"/>
-          </a:gradFill>
           <a:xfrm>
             <a:off x="914400" y="1638300"/>
             <a:ext cx="6324600" cy="1943100"/>
@@ -8768,6 +8759,7 @@
           <a:prstGeom prst="rect">
             <a:avLst/>
           </a:prstGeom>
+          <a:noFill/>
         </p:spPr>
         <p:txBody>
           <a:bodyPr wrap="square" lIns="0" rIns="0" tIns="0" bIns="0">
@@ -8850,7 +8842,7 @@
         </p:spPr>
         <p:txBody>
           <a:bodyPr wrap="square" lIns="0" rIns="0" tIns="0" bIns="0">
-            <a:normAutofit/>
+            <a:spAutoFit/>
           </a:bodyPr>
           <a:lstStyle/>
           <a:p>
@@ -8943,7 +8935,7 @@
         </p:spPr>
         <p:txBody>
           <a:bodyPr wrap="square" lIns="0" rIns="0" tIns="0" bIns="0">
-            <a:normAutofit/>
+            <a:spAutoFit/>
           </a:bodyPr>
           <a:lstStyle/>
           <a:p>
@@ -8978,7 +8970,7 @@
         </p:spPr>
         <p:txBody>
           <a:bodyPr wrap="square" lIns="0" rIns="0" tIns="0" bIns="0">
-            <a:normAutofit/>
+            <a:spAutoFit/>
           </a:bodyPr>
           <a:lstStyle/>
           <a:p>
@@ -9048,7 +9040,7 @@
         </p:spPr>
         <p:txBody>
           <a:bodyPr wrap="square" lIns="0" rIns="0" tIns="0" bIns="0">
-            <a:normAutofit/>
+            <a:spAutoFit/>
           </a:bodyPr>
           <a:lstStyle/>
           <a:p>
@@ -9083,7 +9075,7 @@
         </p:spPr>
         <p:txBody>
           <a:bodyPr wrap="square" lIns="0" rIns="0" tIns="0" bIns="0">
-            <a:normAutofit/>
+            <a:spAutoFit/>
           </a:bodyPr>
           <a:lstStyle/>
           <a:p>
@@ -9118,7 +9110,7 @@
         </p:spPr>
         <p:txBody>
           <a:bodyPr wrap="square" lIns="0" rIns="0" tIns="0" bIns="0">
-            <a:normAutofit/>
+            <a:spAutoFit/>
           </a:bodyPr>
           <a:lstStyle/>
           <a:p>
@@ -9214,7 +9206,7 @@
         </p:spPr>
         <p:txBody>
           <a:bodyPr wrap="square" lIns="0" rIns="0" tIns="0" bIns="0">
-            <a:normAutofit/>
+            <a:spAutoFit/>
           </a:bodyPr>
           <a:lstStyle/>
           <a:p>
@@ -9348,7 +9340,7 @@
         </p:spPr>
         <p:txBody>
           <a:bodyPr wrap="square" lIns="0" rIns="0" tIns="0" bIns="0">
-            <a:normAutofit/>
+            <a:spAutoFit/>
           </a:bodyPr>
           <a:lstStyle/>
           <a:p>
@@ -9431,7 +9423,7 @@
         </p:spPr>
         <p:txBody>
           <a:bodyPr wrap="square" lIns="0" rIns="0" tIns="0" bIns="0">
-            <a:normAutofit/>
+            <a:spAutoFit/>
           </a:bodyPr>
           <a:lstStyle/>
           <a:p>
@@ -9466,7 +9458,7 @@
         </p:spPr>
         <p:txBody>
           <a:bodyPr wrap="square" lIns="0" rIns="0" tIns="0" bIns="0">
-            <a:normAutofit/>
+            <a:spAutoFit/>
           </a:bodyPr>
           <a:lstStyle/>
           <a:p>
@@ -9501,7 +9493,7 @@
         </p:spPr>
         <p:txBody>
           <a:bodyPr wrap="square" lIns="0" rIns="0" tIns="0" bIns="0">
-            <a:normAutofit/>
+            <a:spAutoFit/>
           </a:bodyPr>
           <a:lstStyle/>
           <a:p>
@@ -9600,7 +9592,7 @@
         </p:spPr>
         <p:txBody>
           <a:bodyPr wrap="square" lIns="0" rIns="0" tIns="0" bIns="0">
-            <a:normAutofit/>
+            <a:spAutoFit/>
           </a:bodyPr>
           <a:lstStyle/>
           <a:p>
@@ -9683,7 +9675,7 @@
         </p:spPr>
         <p:txBody>
           <a:bodyPr wrap="square" lIns="0" rIns="0" tIns="0" bIns="0">
-            <a:normAutofit/>
+            <a:spAutoFit/>
           </a:bodyPr>
           <a:lstStyle/>
           <a:p>
@@ -9718,7 +9710,7 @@
         </p:spPr>
         <p:txBody>
           <a:bodyPr wrap="square" lIns="0" rIns="0" tIns="0" bIns="0">
-            <a:normAutofit/>
+            <a:spAutoFit/>
           </a:bodyPr>
           <a:lstStyle/>
           <a:p>
@@ -9753,7 +9745,7 @@
         </p:spPr>
         <p:txBody>
           <a:bodyPr wrap="square" lIns="0" rIns="0" tIns="0" bIns="0">
-            <a:normAutofit/>
+            <a:spAutoFit/>
           </a:bodyPr>
           <a:lstStyle/>
           <a:p>
@@ -9852,7 +9844,7 @@
         </p:spPr>
         <p:txBody>
           <a:bodyPr wrap="square" lIns="0" rIns="0" tIns="0" bIns="0">
-            <a:normAutofit/>
+            <a:spAutoFit/>
           </a:bodyPr>
           <a:lstStyle/>
           <a:p>
@@ -9926,7 +9918,7 @@
         </p:spPr>
         <p:txBody>
           <a:bodyPr wrap="square" lIns="0" rIns="0" tIns="0" bIns="0">
-            <a:normAutofit/>
+            <a:spAutoFit/>
           </a:bodyPr>
           <a:lstStyle/>
           <a:p>
@@ -9961,7 +9953,7 @@
         </p:spPr>
         <p:txBody>
           <a:bodyPr wrap="square" lIns="0" rIns="0" tIns="0" bIns="0">
-            <a:normAutofit/>
+            <a:spAutoFit/>
           </a:bodyPr>
           <a:lstStyle/>
           <a:p>
@@ -9996,7 +9988,7 @@
         </p:spPr>
         <p:txBody>
           <a:bodyPr wrap="square" lIns="0" rIns="0" tIns="0" bIns="0">
-            <a:normAutofit/>
+            <a:spAutoFit/>
           </a:bodyPr>
           <a:lstStyle/>
           <a:p>
@@ -10031,7 +10023,7 @@
         </p:spPr>
         <p:txBody>
           <a:bodyPr wrap="square" lIns="0" rIns="0" tIns="0" bIns="0">
-            <a:normAutofit/>
+            <a:spAutoFit/>
           </a:bodyPr>
           <a:lstStyle/>
           <a:p>
@@ -10066,7 +10058,7 @@
         </p:spPr>
         <p:txBody>
           <a:bodyPr wrap="square" lIns="0" rIns="0" tIns="0" bIns="0">
-            <a:normAutofit/>
+            <a:spAutoFit/>
           </a:bodyPr>
           <a:lstStyle/>
           <a:p>
@@ -10197,7 +10189,7 @@
         </p:spPr>
         <p:txBody>
           <a:bodyPr wrap="square" lIns="0" rIns="0" tIns="0" bIns="0">
-            <a:normAutofit/>
+            <a:spAutoFit/>
           </a:bodyPr>
           <a:lstStyle/>
           <a:p>
@@ -10331,7 +10323,7 @@
         </p:spPr>
         <p:txBody>
           <a:bodyPr wrap="square" lIns="0" rIns="0" tIns="0" bIns="0">
-            <a:normAutofit/>
+            <a:spAutoFit/>
           </a:bodyPr>
           <a:lstStyle/>
           <a:p>
@@ -10366,7 +10358,7 @@
         </p:spPr>
         <p:txBody>
           <a:bodyPr wrap="square" lIns="0" rIns="0" tIns="0" bIns="0">
-            <a:normAutofit/>
+            <a:spAutoFit/>
           </a:bodyPr>
           <a:lstStyle/>
           <a:p>
@@ -10401,7 +10393,7 @@
         </p:spPr>
         <p:txBody>
           <a:bodyPr wrap="square" lIns="0" rIns="0" tIns="0" bIns="0">
-            <a:normAutofit/>
+            <a:spAutoFit/>
           </a:bodyPr>
           <a:lstStyle/>
           <a:p>
@@ -10535,7 +10527,7 @@
         </p:spPr>
         <p:txBody>
           <a:bodyPr wrap="square" lIns="0" rIns="0" tIns="0" bIns="0">
-            <a:normAutofit/>
+            <a:spAutoFit/>
           </a:bodyPr>
           <a:lstStyle/>
           <a:p>
@@ -10570,7 +10562,7 @@
         </p:spPr>
         <p:txBody>
           <a:bodyPr wrap="square" lIns="0" rIns="0" tIns="0" bIns="0">
-            <a:normAutofit/>
+            <a:spAutoFit/>
           </a:bodyPr>
           <a:lstStyle/>
           <a:p>
@@ -10605,7 +10597,7 @@
         </p:spPr>
         <p:txBody>
           <a:bodyPr wrap="square" lIns="0" rIns="0" tIns="0" bIns="0">
-            <a:normAutofit/>
+            <a:spAutoFit/>
           </a:bodyPr>
           <a:lstStyle/>
           <a:p>
@@ -10739,7 +10731,7 @@
         </p:spPr>
         <p:txBody>
           <a:bodyPr wrap="square" lIns="0" rIns="0" tIns="0" bIns="0">
-            <a:normAutofit/>
+            <a:spAutoFit/>
           </a:bodyPr>
           <a:lstStyle/>
           <a:p>
@@ -10774,7 +10766,7 @@
         </p:spPr>
         <p:txBody>
           <a:bodyPr wrap="square" lIns="0" rIns="0" tIns="0" bIns="0">
-            <a:normAutofit/>
+            <a:spAutoFit/>
           </a:bodyPr>
           <a:lstStyle/>
           <a:p>
@@ -10809,7 +10801,7 @@
         </p:spPr>
         <p:txBody>
           <a:bodyPr wrap="square" lIns="0" rIns="0" tIns="0" bIns="0">
-            <a:normAutofit/>
+            <a:spAutoFit/>
           </a:bodyPr>
           <a:lstStyle/>
           <a:p>
@@ -10943,7 +10935,7 @@
         </p:spPr>
         <p:txBody>
           <a:bodyPr wrap="square" lIns="0" rIns="0" tIns="0" bIns="0">
-            <a:normAutofit/>
+            <a:spAutoFit/>
           </a:bodyPr>
           <a:lstStyle/>
           <a:p>
@@ -10978,7 +10970,7 @@
         </p:spPr>
         <p:txBody>
           <a:bodyPr wrap="square" lIns="0" rIns="0" tIns="0" bIns="0">
-            <a:normAutofit/>
+            <a:spAutoFit/>
           </a:bodyPr>
           <a:lstStyle/>
           <a:p>
@@ -11013,7 +11005,7 @@
         </p:spPr>
         <p:txBody>
           <a:bodyPr wrap="square" lIns="0" rIns="0" tIns="0" bIns="0">
-            <a:normAutofit/>
+            <a:spAutoFit/>
           </a:bodyPr>
           <a:lstStyle/>
           <a:p>
@@ -11147,7 +11139,7 @@
         </p:spPr>
         <p:txBody>
           <a:bodyPr wrap="square" lIns="0" rIns="0" tIns="0" bIns="0">
-            <a:normAutofit/>
+            <a:spAutoFit/>
           </a:bodyPr>
           <a:lstStyle/>
           <a:p>
@@ -11182,7 +11174,7 @@
         </p:spPr>
         <p:txBody>
           <a:bodyPr wrap="square" lIns="0" rIns="0" tIns="0" bIns="0">
-            <a:normAutofit/>
+            <a:spAutoFit/>
           </a:bodyPr>
           <a:lstStyle/>
           <a:p>
@@ -11217,7 +11209,7 @@
         </p:spPr>
         <p:txBody>
           <a:bodyPr wrap="square" lIns="0" rIns="0" tIns="0" bIns="0">
-            <a:normAutofit/>
+            <a:spAutoFit/>
           </a:bodyPr>
           <a:lstStyle/>
           <a:p>
@@ -11351,7 +11343,7 @@
         </p:spPr>
         <p:txBody>
           <a:bodyPr wrap="square" lIns="0" rIns="0" tIns="0" bIns="0">
-            <a:normAutofit/>
+            <a:spAutoFit/>
           </a:bodyPr>
           <a:lstStyle/>
           <a:p>
@@ -11386,7 +11378,7 @@
         </p:spPr>
         <p:txBody>
           <a:bodyPr wrap="square" lIns="0" rIns="0" tIns="0" bIns="0">
-            <a:normAutofit/>
+            <a:spAutoFit/>
           </a:bodyPr>
           <a:lstStyle/>
           <a:p>
@@ -11421,7 +11413,7 @@
         </p:spPr>
         <p:txBody>
           <a:bodyPr wrap="square" lIns="0" rIns="0" tIns="0" bIns="0">
-            <a:normAutofit/>
+            <a:spAutoFit/>
           </a:bodyPr>
           <a:lstStyle/>
           <a:p>
@@ -11456,7 +11448,7 @@
         </p:spPr>
         <p:txBody>
           <a:bodyPr wrap="square" lIns="0" rIns="0" tIns="0" bIns="0">
-            <a:normAutofit/>
+            <a:spAutoFit/>
           </a:bodyPr>
           <a:lstStyle/>
           <a:p>
@@ -11491,7 +11483,7 @@
         </p:spPr>
         <p:txBody>
           <a:bodyPr wrap="square" lIns="0" rIns="0" tIns="0" bIns="0">
-            <a:normAutofit/>
+            <a:spAutoFit/>
           </a:bodyPr>
           <a:lstStyle/>
           <a:p>
@@ -11587,7 +11579,7 @@
         </p:spPr>
         <p:txBody>
           <a:bodyPr wrap="square" lIns="0" rIns="0" tIns="0" bIns="0">
-            <a:normAutofit/>
+            <a:spAutoFit/>
           </a:bodyPr>
           <a:lstStyle/>
           <a:p>
@@ -11741,7 +11733,7 @@
         </p:spPr>
         <p:txBody>
           <a:bodyPr wrap="square" lIns="0" rIns="0" tIns="0" bIns="0">
-            <a:normAutofit/>
+            <a:spAutoFit/>
           </a:bodyPr>
           <a:lstStyle/>
           <a:p>
@@ -11780,7 +11772,7 @@
         </p:spPr>
         <p:txBody>
           <a:bodyPr wrap="square" lIns="0" rIns="0" tIns="0" bIns="0">
-            <a:normAutofit/>
+            <a:spAutoFit/>
           </a:bodyPr>
           <a:lstStyle/>
           <a:p>
@@ -11815,7 +11807,7 @@
         </p:spPr>
         <p:txBody>
           <a:bodyPr wrap="square" lIns="0" rIns="0" tIns="0" bIns="0">
-            <a:normAutofit/>
+            <a:spAutoFit/>
           </a:bodyPr>
           <a:lstStyle/>
           <a:p>
@@ -11854,7 +11846,7 @@
         </p:spPr>
         <p:txBody>
           <a:bodyPr wrap="square" lIns="0" rIns="0" tIns="0" bIns="0">
-            <a:normAutofit/>
+            <a:spAutoFit/>
           </a:bodyPr>
           <a:lstStyle/>
           <a:p>
@@ -11889,7 +11881,7 @@
         </p:spPr>
         <p:txBody>
           <a:bodyPr wrap="square" lIns="0" rIns="0" tIns="0" bIns="0">
-            <a:normAutofit/>
+            <a:spAutoFit/>
           </a:bodyPr>
           <a:lstStyle/>
           <a:p>
@@ -11928,7 +11920,7 @@
         </p:spPr>
         <p:txBody>
           <a:bodyPr wrap="square" lIns="0" rIns="0" tIns="0" bIns="0">
-            <a:normAutofit/>
+            <a:spAutoFit/>
           </a:bodyPr>
           <a:lstStyle/>
           <a:p>
@@ -11963,18 +11955,19 @@
         </p:spPr>
         <p:txBody>
           <a:bodyPr wrap="square" lIns="0" rIns="0" tIns="0" bIns="0">
-            <a:normAutofit/>
-          </a:bodyPr>
-          <a:lstStyle/>
-          <a:p>
-            <a:r>
-              <a:rPr sz="1125" b="0">
+            <a:spAutoFit/>
+          </a:bodyPr>
+          <a:lstStyle/>
+          <a:p>
+            <a:pPr algn="l"/>
+            <a:r>
+              <a:rPr sz="1125" b="0" i="0" u="none">
                 <a:solidFill>
                   <a:srgbClr val="A1A1AA"/>
                 </a:solidFill>
                 <a:latin typeface="Inter"/>
               </a:rPr>
-              <a:t>• Brand-color swap requires re-running the whole pipeline.</a:t>
+              <a:t>Brand-color swap requires re-running the whole pipeline.</a:t>
             </a:r>
           </a:p>
         </p:txBody>
@@ -12001,7 +11994,7 @@
         </p:spPr>
         <p:txBody>
           <a:bodyPr wrap="square" lIns="0" rIns="0" tIns="0" bIns="0">
-            <a:normAutofit/>
+            <a:spAutoFit/>
           </a:bodyPr>
           <a:lstStyle/>
           <a:p>
@@ -12036,7 +12029,7 @@
         </p:spPr>
         <p:txBody>
           <a:bodyPr wrap="square" lIns="0" rIns="0" tIns="0" bIns="0">
-            <a:normAutofit/>
+            <a:spAutoFit/>
           </a:bodyPr>
           <a:lstStyle/>
           <a:p>
@@ -12075,7 +12068,7 @@
         </p:spPr>
         <p:txBody>
           <a:bodyPr wrap="square" lIns="0" rIns="0" tIns="0" bIns="0">
-            <a:normAutofit/>
+            <a:spAutoFit/>
           </a:bodyPr>
           <a:lstStyle/>
           <a:p>
@@ -12110,18 +12103,19 @@
         </p:spPr>
         <p:txBody>
           <a:bodyPr wrap="square" lIns="0" rIns="0" tIns="0" bIns="0">
-            <a:normAutofit/>
-          </a:bodyPr>
-          <a:lstStyle/>
-          <a:p>
-            <a:r>
-              <a:rPr sz="1125" b="0">
+            <a:spAutoFit/>
+          </a:bodyPr>
+          <a:lstStyle/>
+          <a:p>
+            <a:pPr algn="l"/>
+            <a:r>
+              <a:rPr sz="1125" b="0" i="0" u="none">
                 <a:solidFill>
                   <a:srgbClr val="A1A1AA"/>
                 </a:solidFill>
                 <a:latin typeface="Inter"/>
               </a:rPr>
-              <a:t>• Translation requires a second model run plus paste-back.</a:t>
+              <a:t>Translation requires a second model run plus paste-back.</a:t>
             </a:r>
           </a:p>
         </p:txBody>
@@ -12253,7 +12247,7 @@
         </p:spPr>
         <p:txBody>
           <a:bodyPr wrap="square" lIns="0" rIns="0" tIns="0" bIns="0">
-            <a:normAutofit/>
+            <a:spAutoFit/>
           </a:bodyPr>
           <a:lstStyle/>
           <a:p>
@@ -12292,7 +12286,7 @@
         </p:spPr>
         <p:txBody>
           <a:bodyPr wrap="square" lIns="0" rIns="0" tIns="0" bIns="0">
-            <a:normAutofit/>
+            <a:spAutoFit/>
           </a:bodyPr>
           <a:lstStyle/>
           <a:p>
@@ -12327,18 +12321,19 @@
         </p:spPr>
         <p:txBody>
           <a:bodyPr wrap="square" lIns="0" rIns="0" tIns="0" bIns="0">
-            <a:normAutofit/>
-          </a:bodyPr>
-          <a:lstStyle/>
-          <a:p>
-            <a:r>
-              <a:rPr sz="1125" b="0">
+            <a:spAutoFit/>
+          </a:bodyPr>
+          <a:lstStyle/>
+          <a:p>
+            <a:pPr algn="l"/>
+            <a:r>
+              <a:rPr sz="1125" b="0" i="0" u="none">
                 <a:solidFill>
                   <a:srgbClr val="E4E4E7"/>
                 </a:solidFill>
                 <a:latin typeface="Inter"/>
               </a:rPr>
-              <a:t>• Headlines, body copy, and bullets are real text frames.</a:t>
+              <a:t>Headlines, body copy, and bullets are real text frames.</a:t>
             </a:r>
           </a:p>
         </p:txBody>
@@ -12365,7 +12360,7 @@
         </p:spPr>
         <p:txBody>
           <a:bodyPr wrap="square" lIns="0" rIns="0" tIns="0" bIns="0">
-            <a:normAutofit/>
+            <a:spAutoFit/>
           </a:bodyPr>
           <a:lstStyle/>
           <a:p>
@@ -12400,18 +12395,19 @@
         </p:spPr>
         <p:txBody>
           <a:bodyPr wrap="square" lIns="0" rIns="0" tIns="0" bIns="0">
-            <a:normAutofit/>
-          </a:bodyPr>
-          <a:lstStyle/>
-          <a:p>
-            <a:r>
-              <a:rPr sz="1125" b="0">
+            <a:spAutoFit/>
+          </a:bodyPr>
+          <a:lstStyle/>
+          <a:p>
+            <a:pPr algn="l"/>
+            <a:r>
+              <a:rPr sz="1125" b="0" i="0" u="none">
                 <a:solidFill>
                   <a:srgbClr val="E4E4E7"/>
                 </a:solidFill>
                 <a:latin typeface="Inter"/>
               </a:rPr>
-              <a:t>• Cards, dividers, badges are native rounded rectangles.</a:t>
+              <a:t>Cards, dividers, badges are native rounded rectangles.</a:t>
             </a:r>
           </a:p>
         </p:txBody>
@@ -12438,7 +12434,7 @@
         </p:spPr>
         <p:txBody>
           <a:bodyPr wrap="square" lIns="0" rIns="0" tIns="0" bIns="0">
-            <a:normAutofit/>
+            <a:spAutoFit/>
           </a:bodyPr>
           <a:lstStyle/>
           <a:p>
@@ -12473,18 +12469,19 @@
         </p:spPr>
         <p:txBody>
           <a:bodyPr wrap="square" lIns="0" rIns="0" tIns="0" bIns="0">
-            <a:normAutofit/>
-          </a:bodyPr>
-          <a:lstStyle/>
-          <a:p>
-            <a:r>
-              <a:rPr sz="1125" b="0">
+            <a:spAutoFit/>
+          </a:bodyPr>
+          <a:lstStyle/>
+          <a:p>
+            <a:pPr algn="l"/>
+            <a:r>
+              <a:rPr sz="1125" b="0" i="0" u="none">
                 <a:solidFill>
                   <a:srgbClr val="E4E4E7"/>
                 </a:solidFill>
                 <a:latin typeface="Inter"/>
               </a:rPr>
-              <a:t>• Designers edit fonts, colors, alignment in PowerPoint directly.</a:t>
+              <a:t>Designers edit fonts, colors, alignment in PowerPoint directly.</a:t>
             </a:r>
           </a:p>
         </p:txBody>
@@ -12511,7 +12508,7 @@
         </p:spPr>
         <p:txBody>
           <a:bodyPr wrap="square" lIns="0" rIns="0" tIns="0" bIns="0">
-            <a:normAutofit/>
+            <a:spAutoFit/>
           </a:bodyPr>
           <a:lstStyle/>
           <a:p>
@@ -12546,7 +12543,7 @@
         </p:spPr>
         <p:txBody>
           <a:bodyPr wrap="square" lIns="0" rIns="0" tIns="0" bIns="0">
-            <a:normAutofit/>
+            <a:spAutoFit/>
           </a:bodyPr>
           <a:lstStyle/>
           <a:p>
@@ -12585,7 +12582,7 @@
         </p:spPr>
         <p:txBody>
           <a:bodyPr wrap="square" lIns="0" rIns="0" tIns="0" bIns="0">
-            <a:normAutofit/>
+            <a:spAutoFit/>
           </a:bodyPr>
           <a:lstStyle/>
           <a:p>
@@ -12620,7 +12617,7 @@
         </p:spPr>
         <p:txBody>
           <a:bodyPr wrap="square" lIns="0" rIns="0" tIns="0" bIns="0">
-            <a:normAutofit/>
+            <a:spAutoFit/>
           </a:bodyPr>
           <a:lstStyle/>
           <a:p>
@@ -12655,7 +12652,7 @@
         </p:spPr>
         <p:txBody>
           <a:bodyPr wrap="square" lIns="0" rIns="0" tIns="0" bIns="0">
-            <a:normAutofit/>
+            <a:spAutoFit/>
           </a:bodyPr>
           <a:lstStyle/>
           <a:p>
@@ -12690,7 +12687,7 @@
         </p:spPr>
         <p:txBody>
           <a:bodyPr wrap="square" lIns="0" rIns="0" tIns="0" bIns="0">
-            <a:normAutofit/>
+            <a:spAutoFit/>
           </a:bodyPr>
           <a:lstStyle/>
           <a:p>
@@ -12786,7 +12783,7 @@
         </p:spPr>
         <p:txBody>
           <a:bodyPr wrap="square" lIns="0" rIns="0" tIns="0" bIns="0">
-            <a:normAutofit/>
+            <a:spAutoFit/>
           </a:bodyPr>
           <a:lstStyle/>
           <a:p>
@@ -12917,7 +12914,7 @@
         </p:spPr>
         <p:txBody>
           <a:bodyPr wrap="square" lIns="0" rIns="0" tIns="0" bIns="0">
-            <a:normAutofit/>
+            <a:spAutoFit/>
           </a:bodyPr>
           <a:lstStyle/>
           <a:p>
@@ -12952,7 +12949,7 @@
         </p:spPr>
         <p:txBody>
           <a:bodyPr wrap="square" lIns="0" rIns="0" tIns="0" bIns="0">
-            <a:normAutofit/>
+            <a:spAutoFit/>
           </a:bodyPr>
           <a:lstStyle/>
           <a:p>
@@ -12987,7 +12984,7 @@
         </p:spPr>
         <p:txBody>
           <a:bodyPr wrap="square" lIns="0" rIns="0" tIns="0" bIns="0">
-            <a:normAutofit/>
+            <a:spAutoFit/>
           </a:bodyPr>
           <a:lstStyle/>
           <a:p>
@@ -13022,7 +13019,7 @@
         </p:spPr>
         <p:txBody>
           <a:bodyPr wrap="square" lIns="0" rIns="0" tIns="0" bIns="0">
-            <a:normAutofit/>
+            <a:spAutoFit/>
           </a:bodyPr>
           <a:lstStyle/>
           <a:p>
@@ -13118,7 +13115,7 @@
         </p:spPr>
         <p:txBody>
           <a:bodyPr wrap="square" lIns="0" rIns="0" tIns="0" bIns="0">
-            <a:normAutofit/>
+            <a:spAutoFit/>
           </a:bodyPr>
           <a:lstStyle/>
           <a:p>
@@ -13153,7 +13150,7 @@
         </p:spPr>
         <p:txBody>
           <a:bodyPr wrap="square" lIns="0" rIns="0" tIns="0" bIns="0">
-            <a:normAutofit/>
+            <a:spAutoFit/>
           </a:bodyPr>
           <a:lstStyle/>
           <a:p>
@@ -13188,7 +13185,7 @@
         </p:spPr>
         <p:txBody>
           <a:bodyPr wrap="square" lIns="0" rIns="0" tIns="0" bIns="0">
-            <a:normAutofit/>
+            <a:spAutoFit/>
           </a:bodyPr>
           <a:lstStyle/>
           <a:p>
@@ -13223,7 +13220,7 @@
         </p:spPr>
         <p:txBody>
           <a:bodyPr wrap="square" lIns="0" rIns="0" tIns="0" bIns="0">
-            <a:normAutofit/>
+            <a:spAutoFit/>
           </a:bodyPr>
           <a:lstStyle/>
           <a:p>
@@ -13319,7 +13316,7 @@
         </p:spPr>
         <p:txBody>
           <a:bodyPr wrap="square" lIns="0" rIns="0" tIns="0" bIns="0">
-            <a:normAutofit/>
+            <a:spAutoFit/>
           </a:bodyPr>
           <a:lstStyle/>
           <a:p>
@@ -13354,7 +13351,7 @@
         </p:spPr>
         <p:txBody>
           <a:bodyPr wrap="square" lIns="0" rIns="0" tIns="0" bIns="0">
-            <a:normAutofit/>
+            <a:spAutoFit/>
           </a:bodyPr>
           <a:lstStyle/>
           <a:p>
@@ -13389,7 +13386,7 @@
         </p:spPr>
         <p:txBody>
           <a:bodyPr wrap="square" lIns="0" rIns="0" tIns="0" bIns="0">
-            <a:normAutofit/>
+            <a:spAutoFit/>
           </a:bodyPr>
           <a:lstStyle/>
           <a:p>
@@ -13424,7 +13421,7 @@
         </p:spPr>
         <p:txBody>
           <a:bodyPr wrap="square" lIns="0" rIns="0" tIns="0" bIns="0">
-            <a:normAutofit/>
+            <a:spAutoFit/>
           </a:bodyPr>
           <a:lstStyle/>
           <a:p>
@@ -13520,7 +13517,7 @@
         </p:spPr>
         <p:txBody>
           <a:bodyPr wrap="square" lIns="0" rIns="0" tIns="0" bIns="0">
-            <a:normAutofit/>
+            <a:spAutoFit/>
           </a:bodyPr>
           <a:lstStyle/>
           <a:p>
@@ -13555,7 +13552,7 @@
         </p:spPr>
         <p:txBody>
           <a:bodyPr wrap="square" lIns="0" rIns="0" tIns="0" bIns="0">
-            <a:normAutofit/>
+            <a:spAutoFit/>
           </a:bodyPr>
           <a:lstStyle/>
           <a:p>
@@ -13590,7 +13587,7 @@
         </p:spPr>
         <p:txBody>
           <a:bodyPr wrap="square" lIns="0" rIns="0" tIns="0" bIns="0">
-            <a:normAutofit/>
+            <a:spAutoFit/>
           </a:bodyPr>
           <a:lstStyle/>
           <a:p>
@@ -13625,7 +13622,7 @@
         </p:spPr>
         <p:txBody>
           <a:bodyPr wrap="square" lIns="0" rIns="0" tIns="0" bIns="0">
-            <a:normAutofit/>
+            <a:spAutoFit/>
           </a:bodyPr>
           <a:lstStyle/>
           <a:p>
@@ -13721,7 +13718,7 @@
         </p:spPr>
         <p:txBody>
           <a:bodyPr wrap="square" lIns="0" rIns="0" tIns="0" bIns="0">
-            <a:normAutofit/>
+            <a:spAutoFit/>
           </a:bodyPr>
           <a:lstStyle/>
           <a:p>
@@ -13756,7 +13753,7 @@
         </p:spPr>
         <p:txBody>
           <a:bodyPr wrap="square" lIns="0" rIns="0" tIns="0" bIns="0">
-            <a:normAutofit/>
+            <a:spAutoFit/>
           </a:bodyPr>
           <a:lstStyle/>
           <a:p>
@@ -13791,7 +13788,7 @@
         </p:spPr>
         <p:txBody>
           <a:bodyPr wrap="square" lIns="0" rIns="0" tIns="0" bIns="0">
-            <a:normAutofit/>
+            <a:spAutoFit/>
           </a:bodyPr>
           <a:lstStyle/>
           <a:p>
@@ -13826,7 +13823,7 @@
         </p:spPr>
         <p:txBody>
           <a:bodyPr wrap="square" lIns="0" rIns="0" tIns="0" bIns="0">
-            <a:normAutofit/>
+            <a:spAutoFit/>
           </a:bodyPr>
           <a:lstStyle/>
           <a:p>
@@ -13925,7 +13922,7 @@
         </p:spPr>
         <p:txBody>
           <a:bodyPr wrap="square" lIns="0" rIns="0" tIns="0" bIns="0">
-            <a:normAutofit/>
+            <a:spAutoFit/>
           </a:bodyPr>
           <a:lstStyle/>
           <a:p>
@@ -13978,7 +13975,7 @@
         </p:spPr>
         <p:txBody>
           <a:bodyPr wrap="square" lIns="0" rIns="0" tIns="0" bIns="0">
-            <a:normAutofit/>
+            <a:spAutoFit/>
           </a:bodyPr>
           <a:lstStyle/>
           <a:p>
@@ -14013,7 +14010,7 @@
         </p:spPr>
         <p:txBody>
           <a:bodyPr wrap="square" lIns="0" rIns="0" tIns="0" bIns="0">
-            <a:normAutofit/>
+            <a:spAutoFit/>
           </a:bodyPr>
           <a:lstStyle/>
           <a:p>
@@ -14048,7 +14045,7 @@
         </p:spPr>
         <p:txBody>
           <a:bodyPr wrap="square" lIns="0" rIns="0" tIns="0" bIns="0">
-            <a:normAutofit/>
+            <a:spAutoFit/>
           </a:bodyPr>
           <a:lstStyle/>
           <a:p>
@@ -14351,7 +14348,7 @@
         </p:spPr>
         <p:txBody>
           <a:bodyPr wrap="square" lIns="0" rIns="0" tIns="0" bIns="0">
-            <a:normAutofit/>
+            <a:spAutoFit/>
           </a:bodyPr>
           <a:lstStyle/>
           <a:p>
@@ -14386,7 +14383,7 @@
         </p:spPr>
         <p:txBody>
           <a:bodyPr wrap="square" lIns="0" rIns="0" tIns="0" bIns="0">
-            <a:normAutofit/>
+            <a:spAutoFit/>
           </a:bodyPr>
           <a:lstStyle/>
           <a:p>
@@ -14421,7 +14418,7 @@
         </p:spPr>
         <p:txBody>
           <a:bodyPr wrap="square" lIns="0" rIns="0" tIns="0" bIns="0">
-            <a:normAutofit/>
+            <a:spAutoFit/>
           </a:bodyPr>
           <a:lstStyle/>
           <a:p>
@@ -14456,7 +14453,7 @@
         </p:spPr>
         <p:txBody>
           <a:bodyPr wrap="square" lIns="0" rIns="0" tIns="0" bIns="0">
-            <a:normAutofit/>
+            <a:spAutoFit/>
           </a:bodyPr>
           <a:lstStyle/>
           <a:p>
@@ -14552,7 +14549,7 @@
         </p:spPr>
         <p:txBody>
           <a:bodyPr wrap="square" lIns="0" rIns="0" tIns="0" bIns="0">
-            <a:normAutofit/>
+            <a:spAutoFit/>
           </a:bodyPr>
           <a:lstStyle/>
           <a:p>
@@ -14676,7 +14673,7 @@
         </p:spPr>
         <p:txBody>
           <a:bodyPr wrap="square" lIns="0" rIns="0" tIns="0" bIns="0">
-            <a:normAutofit/>
+            <a:spAutoFit/>
           </a:bodyPr>
           <a:lstStyle/>
           <a:p>
@@ -14702,7 +14699,7 @@
         <p:spPr>
           <a:xfrm>
             <a:off x="1038225" y="2522041"/>
-            <a:ext cx="2889200" cy="457200"/>
+            <a:ext cx="3755961" cy="457200"/>
           </a:xfrm>
           <a:prstGeom prst="rect">
             <a:avLst/>
@@ -14755,7 +14752,7 @@
         </p:spPr>
         <p:txBody>
           <a:bodyPr wrap="square" lIns="0" rIns="0" tIns="0" bIns="0">
-            <a:normAutofit/>
+            <a:spAutoFit/>
           </a:bodyPr>
           <a:lstStyle/>
           <a:p>
@@ -14790,7 +14787,7 @@
         </p:spPr>
         <p:txBody>
           <a:bodyPr wrap="square" lIns="0" rIns="0" tIns="0" bIns="0">
-            <a:normAutofit/>
+            <a:spAutoFit/>
           </a:bodyPr>
           <a:lstStyle/>
           <a:p>
@@ -14825,7 +14822,7 @@
         </p:spPr>
         <p:txBody>
           <a:bodyPr wrap="square" lIns="0" rIns="0" tIns="0" bIns="0">
-            <a:normAutofit/>
+            <a:spAutoFit/>
           </a:bodyPr>
           <a:lstStyle/>
           <a:p>
@@ -14860,7 +14857,7 @@
         </p:spPr>
         <p:txBody>
           <a:bodyPr wrap="square" lIns="0" rIns="0" tIns="0" bIns="0">
-            <a:normAutofit/>
+            <a:spAutoFit/>
           </a:bodyPr>
           <a:lstStyle/>
           <a:p>
@@ -14895,7 +14892,7 @@
         </p:spPr>
         <p:txBody>
           <a:bodyPr wrap="square" lIns="0" rIns="0" tIns="0" bIns="0">
-            <a:normAutofit/>
+            <a:spAutoFit/>
           </a:bodyPr>
           <a:lstStyle/>
           <a:p>
@@ -14930,7 +14927,7 @@
         </p:spPr>
         <p:txBody>
           <a:bodyPr wrap="square" lIns="0" rIns="0" tIns="0" bIns="0">
-            <a:normAutofit/>
+            <a:spAutoFit/>
           </a:bodyPr>
           <a:lstStyle/>
           <a:p>
@@ -14965,7 +14962,7 @@
         </p:spPr>
         <p:txBody>
           <a:bodyPr wrap="square" lIns="0" rIns="0" tIns="0" bIns="0">
-            <a:normAutofit/>
+            <a:spAutoFit/>
           </a:bodyPr>
           <a:lstStyle/>
           <a:p>
@@ -15000,7 +14997,7 @@
         </p:spPr>
         <p:txBody>
           <a:bodyPr wrap="square" lIns="0" rIns="0" tIns="0" bIns="0">
-            <a:normAutofit/>
+            <a:spAutoFit/>
           </a:bodyPr>
           <a:lstStyle/>
           <a:p>
@@ -15035,7 +15032,7 @@
         </p:spPr>
         <p:txBody>
           <a:bodyPr wrap="square" lIns="0" rIns="0" tIns="0" bIns="0">
-            <a:normAutofit/>
+            <a:spAutoFit/>
           </a:bodyPr>
           <a:lstStyle/>
           <a:p>
@@ -15074,7 +15071,7 @@
         </p:spPr>
         <p:txBody>
           <a:bodyPr wrap="square" lIns="0" rIns="0" tIns="0" bIns="0">
-            <a:normAutofit/>
+            <a:spAutoFit/>
           </a:bodyPr>
           <a:lstStyle/>
           <a:p>
@@ -15183,7 +15180,7 @@
         </p:spPr>
         <p:txBody>
           <a:bodyPr wrap="square" lIns="0" rIns="0" tIns="0" bIns="0">
-            <a:normAutofit/>
+            <a:spAutoFit/>
           </a:bodyPr>
           <a:lstStyle/>
           <a:p>
@@ -15218,7 +15215,7 @@
         </p:spPr>
         <p:txBody>
           <a:bodyPr wrap="square" lIns="0" rIns="0" tIns="0" bIns="0">
-            <a:normAutofit/>
+            <a:spAutoFit/>
           </a:bodyPr>
           <a:lstStyle/>
           <a:p>
@@ -15244,7 +15241,7 @@
         <p:spPr>
           <a:xfrm>
             <a:off x="4651325" y="2522041"/>
-            <a:ext cx="2889200" cy="457200"/>
+            <a:ext cx="3755961" cy="457200"/>
           </a:xfrm>
           <a:prstGeom prst="rect">
             <a:avLst/>
@@ -15297,7 +15294,7 @@
         </p:spPr>
         <p:txBody>
           <a:bodyPr wrap="square" lIns="0" rIns="0" tIns="0" bIns="0">
-            <a:normAutofit/>
+            <a:spAutoFit/>
           </a:bodyPr>
           <a:lstStyle/>
           <a:p>
@@ -15332,7 +15329,7 @@
         </p:spPr>
         <p:txBody>
           <a:bodyPr wrap="square" lIns="0" rIns="0" tIns="0" bIns="0">
-            <a:normAutofit/>
+            <a:spAutoFit/>
           </a:bodyPr>
           <a:lstStyle/>
           <a:p>
@@ -15367,7 +15364,7 @@
         </p:spPr>
         <p:txBody>
           <a:bodyPr wrap="square" lIns="0" rIns="0" tIns="0" bIns="0">
-            <a:normAutofit/>
+            <a:spAutoFit/>
           </a:bodyPr>
           <a:lstStyle/>
           <a:p>
@@ -15402,7 +15399,7 @@
         </p:spPr>
         <p:txBody>
           <a:bodyPr wrap="square" lIns="0" rIns="0" tIns="0" bIns="0">
-            <a:normAutofit/>
+            <a:spAutoFit/>
           </a:bodyPr>
           <a:lstStyle/>
           <a:p>
@@ -15437,7 +15434,7 @@
         </p:spPr>
         <p:txBody>
           <a:bodyPr wrap="square" lIns="0" rIns="0" tIns="0" bIns="0">
-            <a:normAutofit/>
+            <a:spAutoFit/>
           </a:bodyPr>
           <a:lstStyle/>
           <a:p>
@@ -15472,7 +15469,7 @@
         </p:spPr>
         <p:txBody>
           <a:bodyPr wrap="square" lIns="0" rIns="0" tIns="0" bIns="0">
-            <a:normAutofit/>
+            <a:spAutoFit/>
           </a:bodyPr>
           <a:lstStyle/>
           <a:p>
@@ -15507,7 +15504,7 @@
         </p:spPr>
         <p:txBody>
           <a:bodyPr wrap="square" lIns="0" rIns="0" tIns="0" bIns="0">
-            <a:normAutofit/>
+            <a:spAutoFit/>
           </a:bodyPr>
           <a:lstStyle/>
           <a:p>
@@ -15542,7 +15539,7 @@
         </p:spPr>
         <p:txBody>
           <a:bodyPr wrap="square" lIns="0" rIns="0" tIns="0" bIns="0">
-            <a:normAutofit/>
+            <a:spAutoFit/>
           </a:bodyPr>
           <a:lstStyle/>
           <a:p>
@@ -15577,7 +15574,7 @@
         </p:spPr>
         <p:txBody>
           <a:bodyPr wrap="square" lIns="0" rIns="0" tIns="0" bIns="0">
-            <a:normAutofit/>
+            <a:spAutoFit/>
           </a:bodyPr>
           <a:lstStyle/>
           <a:p>
@@ -15612,7 +15609,7 @@
         </p:spPr>
         <p:txBody>
           <a:bodyPr wrap="square" lIns="0" rIns="0" tIns="0" bIns="0">
-            <a:normAutofit/>
+            <a:spAutoFit/>
           </a:bodyPr>
           <a:lstStyle/>
           <a:p>
@@ -15647,7 +15644,7 @@
         </p:spPr>
         <p:txBody>
           <a:bodyPr wrap="square" lIns="0" rIns="0" tIns="0" bIns="0">
-            <a:normAutofit/>
+            <a:spAutoFit/>
           </a:bodyPr>
           <a:lstStyle/>
           <a:p>
@@ -15684,7 +15681,7 @@
         </p:spPr>
         <p:txBody>
           <a:bodyPr wrap="square" lIns="0" rIns="0" tIns="0" bIns="0">
-            <a:normAutofit/>
+            <a:spAutoFit/>
           </a:bodyPr>
           <a:lstStyle/>
           <a:p>
@@ -15773,7 +15770,7 @@
         </p:spPr>
         <p:txBody>
           <a:bodyPr wrap="square" lIns="0" rIns="0" tIns="0" bIns="0">
-            <a:normAutofit/>
+            <a:spAutoFit/>
           </a:bodyPr>
           <a:lstStyle/>
           <a:p>
@@ -15843,7 +15840,7 @@
         </p:spPr>
         <p:txBody>
           <a:bodyPr wrap="square" lIns="0" rIns="0" tIns="0" bIns="0">
-            <a:normAutofit/>
+            <a:spAutoFit/>
           </a:bodyPr>
           <a:lstStyle/>
           <a:p>
@@ -15878,7 +15875,7 @@
         </p:spPr>
         <p:txBody>
           <a:bodyPr wrap="square" lIns="0" rIns="0" tIns="0" bIns="0">
-            <a:normAutofit/>
+            <a:spAutoFit/>
           </a:bodyPr>
           <a:lstStyle/>
           <a:p>
@@ -15913,7 +15910,7 @@
         </p:spPr>
         <p:txBody>
           <a:bodyPr wrap="square" lIns="0" rIns="0" tIns="0" bIns="0">
-            <a:normAutofit/>
+            <a:spAutoFit/>
           </a:bodyPr>
           <a:lstStyle/>
           <a:p>
@@ -15948,7 +15945,7 @@
         </p:spPr>
         <p:txBody>
           <a:bodyPr wrap="square" lIns="0" rIns="0" tIns="0" bIns="0">
-            <a:normAutofit/>
+            <a:spAutoFit/>
           </a:bodyPr>
           <a:lstStyle/>
           <a:p>
@@ -15983,7 +15980,7 @@
         </p:spPr>
         <p:txBody>
           <a:bodyPr wrap="square" lIns="0" rIns="0" tIns="0" bIns="0">
-            <a:normAutofit/>
+            <a:spAutoFit/>
           </a:bodyPr>
           <a:lstStyle/>
           <a:p>
@@ -16018,7 +16015,7 @@
         </p:spPr>
         <p:txBody>
           <a:bodyPr wrap="square" lIns="0" rIns="0" tIns="0" bIns="0">
-            <a:normAutofit/>
+            <a:spAutoFit/>
           </a:bodyPr>
           <a:lstStyle/>
           <a:p>
@@ -16053,7 +16050,7 @@
         </p:spPr>
         <p:txBody>
           <a:bodyPr wrap="square" lIns="0" rIns="0" tIns="0" bIns="0">
-            <a:normAutofit/>
+            <a:spAutoFit/>
           </a:bodyPr>
           <a:lstStyle/>
           <a:p>
@@ -16088,7 +16085,7 @@
         </p:spPr>
         <p:txBody>
           <a:bodyPr wrap="square" lIns="0" rIns="0" tIns="0" bIns="0">
-            <a:normAutofit/>
+            <a:spAutoFit/>
           </a:bodyPr>
           <a:lstStyle/>
           <a:p>
@@ -16123,7 +16120,7 @@
         </p:spPr>
         <p:txBody>
           <a:bodyPr wrap="square" lIns="0" rIns="0" tIns="0" bIns="0">
-            <a:normAutofit/>
+            <a:spAutoFit/>
           </a:bodyPr>
           <a:lstStyle/>
           <a:p>
@@ -16162,7 +16159,7 @@
         </p:spPr>
         <p:txBody>
           <a:bodyPr wrap="square" lIns="0" rIns="0" tIns="0" bIns="0">
-            <a:normAutofit/>
+            <a:spAutoFit/>
           </a:bodyPr>
           <a:lstStyle/>
           <a:p>
@@ -16197,7 +16194,7 @@
         </p:spPr>
         <p:txBody>
           <a:bodyPr wrap="square" lIns="0" rIns="0" tIns="0" bIns="0">
-            <a:normAutofit/>
+            <a:spAutoFit/>
           </a:bodyPr>
           <a:lstStyle/>
           <a:p>
@@ -16232,7 +16229,7 @@
         </p:spPr>
         <p:txBody>
           <a:bodyPr wrap="square" lIns="0" rIns="0" tIns="0" bIns="0">
-            <a:normAutofit/>
+            <a:spAutoFit/>
           </a:bodyPr>
           <a:lstStyle/>
           <a:p>

--- a/examples/sophisticated/deck.pptx
+++ b/examples/sophisticated/deck.pptx
@@ -20,6 +20,15 @@
   </p:sldIdLst>
   <p:sldSz cx="12192000" cy="6858000" type="screen4x3"/>
   <p:notesSz cx="6858000" cy="9144000"/>
+  <p:embeddedFontLst>
+    <p:embeddedFont>
+      <p:font typeface="Inter" panose="020B0604020202020204" charset="0"/>
+      <p:regular r:id="rIdSlidifyFont1"/>
+      <p:bold r:id="rIdSlidifyFont2"/>
+      <p:italic r:id="rIdSlidifyFont3"/>
+      <p:boldItalic r:id="rIdSlidifyFont4"/>
+    </p:embeddedFont>
+  </p:embeddedFontLst>
   <p:defaultTextStyle>
     <a:defPPr>
       <a:defRPr lang="en-US"/>
@@ -3152,6 +3161,7 @@
           <a:lstStyle/>
           <a:p>
             <a:pPr algn="ctr"/>
+            <a:endParaRPr lang="en-US"/>
           </a:p>
         </p:txBody>
       </p:sp>
@@ -3219,6 +3229,7 @@
           <a:lstStyle/>
           <a:p>
             <a:pPr algn="ctr"/>
+            <a:endParaRPr lang="en-US"/>
           </a:p>
         </p:txBody>
       </p:sp>
@@ -3286,6 +3297,7 @@
           <a:lstStyle/>
           <a:p>
             <a:pPr algn="ctr"/>
+            <a:endParaRPr lang="en-US"/>
           </a:p>
         </p:txBody>
       </p:sp>
@@ -3340,6 +3352,7 @@
           <a:lstStyle/>
           <a:p>
             <a:pPr algn="ctr"/>
+            <a:endParaRPr lang="en-US"/>
           </a:p>
         </p:txBody>
       </p:sp>
@@ -3421,7 +3434,7 @@
                 </a:solidFill>
                 <a:latin typeface="Inter"/>
               </a:rPr>
-              <a:t> shipping today</a:t>
+              <a:t xml:space="preserve"> shipping today</a:t>
             </a:r>
           </a:p>
         </p:txBody>
@@ -3491,13 +3504,24 @@
                 </a:solidFill>
                 <a:latin typeface="Inter"/>
               </a:rPr>
-              <a:t>A compiler for </a:t>
+              <a:t xml:space="preserve">A compiler for </a:t>
             </a:r>
             <a:r>
               <a:rPr sz="7800" b="1" i="0" u="none">
-                <a:solidFill>
-                  <a:srgbClr val="818CF8"/>
-                </a:solidFill>
+                <a:gradFill rotWithShape="1">
+                  <a:gsLst>
+                    <a:gs pos="0">
+                      <a:srgbClr val="818CF8"/>
+                    </a:gs>
+                    <a:gs pos="50000">
+                      <a:srgbClr val="C084FC"/>
+                    </a:gs>
+                    <a:gs pos="100000">
+                      <a:srgbClr val="F472B6"/>
+                    </a:gs>
+                  </a:gsLst>
+                  <a:lin ang="2700000" scaled="0"/>
+                </a:gradFill>
                 <a:latin typeface="Inter"/>
               </a:rPr>
               <a:t>presentations</a:t>
@@ -3677,6 +3701,7 @@
           <a:lstStyle/>
           <a:p>
             <a:pPr algn="ctr"/>
+            <a:endParaRPr lang="en-US"/>
           </a:p>
         </p:txBody>
       </p:sp>
@@ -3834,6 +3859,7 @@
           <a:lstStyle/>
           <a:p>
             <a:pPr algn="ctr"/>
+            <a:endParaRPr lang="en-US"/>
           </a:p>
         </p:txBody>
       </p:sp>
@@ -3877,6 +3903,7 @@
           <a:lstStyle/>
           <a:p>
             <a:pPr algn="ctr"/>
+            <a:endParaRPr lang="en-US"/>
           </a:p>
         </p:txBody>
       </p:sp>
@@ -3920,6 +3947,7 @@
           <a:lstStyle/>
           <a:p>
             <a:pPr algn="ctr"/>
+            <a:endParaRPr lang="en-US"/>
           </a:p>
         </p:txBody>
       </p:sp>
@@ -3963,6 +3991,7 @@
           <a:lstStyle/>
           <a:p>
             <a:pPr algn="ctr"/>
+            <a:endParaRPr lang="en-US"/>
           </a:p>
         </p:txBody>
       </p:sp>
@@ -4006,6 +4035,7 @@
           <a:lstStyle/>
           <a:p>
             <a:pPr algn="ctr"/>
+            <a:endParaRPr lang="en-US"/>
           </a:p>
         </p:txBody>
       </p:sp>
@@ -4179,7 +4209,7 @@
                 </a:solidFill>
                 <a:latin typeface="Jetbrains Mono"/>
               </a:rPr>
-              <a:t>  ✓ Splitting     ▏ </a:t>
+              <a:t xml:space="preserve">  ✓ Splitting     ▏ </a:t>
             </a:r>
             <a:r>
               <a:rPr sz="1050" b="1" i="0" u="none">
@@ -4197,7 +4227,7 @@
                 </a:solidFill>
                 <a:latin typeface="Jetbrains Mono"/>
               </a:rPr>
-              <a:t> slides</a:t>
+              <a:t xml:space="preserve"> slides</a:t>
             </a:r>
           </a:p>
         </p:txBody>
@@ -4232,7 +4262,7 @@
                 </a:solidFill>
                 <a:latin typeface="Jetbrains Mono"/>
               </a:rPr>
-              <a:t>  ✓ Rendering     ▏ </a:t>
+              <a:t xml:space="preserve">  ✓ Rendering     ▏ </a:t>
             </a:r>
             <a:r>
               <a:rPr sz="1050" b="1" i="0" u="none">
@@ -4250,7 +4280,7 @@
                 </a:solidFill>
                 <a:latin typeface="Jetbrains Mono"/>
               </a:rPr>
-              <a:t> · 4 parallel</a:t>
+              <a:t xml:space="preserve"> · 4 parallel</a:t>
             </a:r>
           </a:p>
         </p:txBody>
@@ -4285,7 +4315,7 @@
                 </a:solidFill>
                 <a:latin typeface="Jetbrains Mono"/>
               </a:rPr>
-              <a:t>  ✓ Classifying   ▏ tier0=</a:t>
+              <a:t xml:space="preserve">  ✓ Classifying   ▏ tier0=</a:t>
             </a:r>
             <a:r>
               <a:rPr sz="1050" b="1" i="0" u="none">
@@ -4303,7 +4333,7 @@
                 </a:solidFill>
                 <a:latin typeface="Jetbrains Mono"/>
               </a:rPr>
-              <a:t> tier1=</a:t>
+              <a:t xml:space="preserve"> tier1=</a:t>
             </a:r>
             <a:r>
               <a:rPr sz="1050" b="1" i="0" u="none">
@@ -4321,7 +4351,7 @@
                 </a:solidFill>
                 <a:latin typeface="Jetbrains Mono"/>
               </a:rPr>
-              <a:t> tier2=</a:t>
+              <a:t xml:space="preserve"> tier2=</a:t>
             </a:r>
             <a:r>
               <a:rPr sz="1050" b="1" i="0" u="none">
@@ -4365,7 +4395,7 @@
                 </a:solidFill>
                 <a:latin typeface="Jetbrains Mono"/>
               </a:rPr>
-              <a:t>  ✓ Emitting      ▏ </a:t>
+              <a:t xml:space="preserve">  ✓ Emitting      ▏ </a:t>
             </a:r>
             <a:r>
               <a:rPr sz="1050" b="1" i="0" u="none">
@@ -4383,7 +4413,7 @@
                 </a:solidFill>
                 <a:latin typeface="Jetbrains Mono"/>
               </a:rPr>
-              <a:t> output</a:t>
+              <a:t xml:space="preserve"> output</a:t>
             </a:r>
           </a:p>
         </p:txBody>
@@ -4418,7 +4448,7 @@
                 </a:solidFill>
                 <a:latin typeface="Jetbrains Mono"/>
               </a:rPr>
-              <a:t>  ✓ Validating    ▏ </a:t>
+              <a:t xml:space="preserve">  ✓ Validating    ▏ </a:t>
             </a:r>
             <a:r>
               <a:rPr sz="1050" b="1" i="0" u="none">
@@ -4436,7 +4466,7 @@
                 </a:solidFill>
                 <a:latin typeface="Jetbrains Mono"/>
               </a:rPr>
-              <a:t> passed</a:t>
+              <a:t xml:space="preserve"> passed</a:t>
             </a:r>
           </a:p>
         </p:txBody>
@@ -4471,7 +4501,7 @@
                 </a:solidFill>
                 <a:latin typeface="Jetbrains Mono"/>
               </a:rPr>
-              <a:t>native_area_ratio: </a:t>
+              <a:t xml:space="preserve">native_area_ratio: </a:t>
             </a:r>
             <a:r>
               <a:rPr sz="1050" b="1" i="0" u="none">
@@ -4489,7 +4519,7 @@
                 </a:solidFill>
                 <a:latin typeface="Jetbrains Mono"/>
               </a:rPr>
-              <a:t> · cost: </a:t>
+              <a:t xml:space="preserve"> · cost: </a:t>
             </a:r>
             <a:r>
               <a:rPr sz="1050" b="1" i="0" u="none">
@@ -4547,6 +4577,7 @@
           <a:lstStyle/>
           <a:p>
             <a:pPr algn="ctr"/>
+            <a:endParaRPr lang="en-US"/>
           </a:p>
         </p:txBody>
       </p:sp>
@@ -4673,6 +4704,7 @@
           <a:lstStyle/>
           <a:p>
             <a:pPr algn="ctr"/>
+            <a:endParaRPr lang="en-US"/>
           </a:p>
         </p:txBody>
       </p:sp>
@@ -4800,6 +4832,7 @@
           <a:lstStyle/>
           <a:p>
             <a:pPr algn="ctr"/>
+            <a:endParaRPr lang="en-US"/>
           </a:p>
         </p:txBody>
       </p:sp>
@@ -4917,6 +4950,7 @@
           <a:lstStyle/>
           <a:p>
             <a:pPr algn="ctr"/>
+            <a:endParaRPr lang="en-US"/>
           </a:p>
         </p:txBody>
       </p:sp>
@@ -5153,6 +5187,7 @@
           <a:lstStyle/>
           <a:p>
             <a:pPr algn="ctr"/>
+            <a:endParaRPr lang="en-US"/>
           </a:p>
         </p:txBody>
       </p:sp>
@@ -5277,6 +5312,7 @@
           <a:lstStyle/>
           <a:p>
             <a:pPr algn="ctr"/>
+            <a:endParaRPr lang="en-US"/>
           </a:p>
         </p:txBody>
       </p:sp>
@@ -5765,6 +5801,7 @@
           <a:lstStyle/>
           <a:p>
             <a:pPr algn="ctr"/>
+            <a:endParaRPr lang="en-US"/>
           </a:p>
         </p:txBody>
       </p:sp>
@@ -6249,6 +6286,7 @@
           <a:lstStyle/>
           <a:p>
             <a:pPr algn="ctr"/>
+            <a:endParaRPr lang="en-US"/>
           </a:p>
         </p:txBody>
       </p:sp>
@@ -6727,6 +6765,7 @@
           <a:lstStyle/>
           <a:p>
             <a:pPr algn="ctr"/>
+            <a:endParaRPr lang="en-US"/>
           </a:p>
         </p:txBody>
       </p:sp>
@@ -7298,6 +7337,7 @@
           <a:lstStyle/>
           <a:p>
             <a:pPr algn="ctr"/>
+            <a:endParaRPr lang="en-US"/>
           </a:p>
         </p:txBody>
       </p:sp>
@@ -7353,6 +7393,7 @@
           <a:lstStyle/>
           <a:p>
             <a:pPr algn="ctr"/>
+            <a:endParaRPr lang="en-US"/>
           </a:p>
         </p:txBody>
       </p:sp>
@@ -7420,6 +7461,7 @@
           <a:lstStyle/>
           <a:p>
             <a:pPr algn="ctr"/>
+            <a:endParaRPr lang="en-US"/>
           </a:p>
         </p:txBody>
       </p:sp>
@@ -7488,13 +7530,24 @@
                 </a:solidFill>
                 <a:latin typeface="Inter"/>
               </a:rPr>
-              <a:t>Ship decks that </a:t>
+              <a:t xml:space="preserve">Ship decks that </a:t>
             </a:r>
             <a:r>
               <a:rPr sz="6600" b="1" i="0" u="none">
-                <a:solidFill>
-                  <a:srgbClr val="818CF8"/>
-                </a:solidFill>
+                <a:gradFill rotWithShape="1">
+                  <a:gsLst>
+                    <a:gs pos="0">
+                      <a:srgbClr val="818CF8"/>
+                    </a:gs>
+                    <a:gs pos="50000">
+                      <a:srgbClr val="C084FC"/>
+                    </a:gs>
+                    <a:gs pos="100000">
+                      <a:srgbClr val="F472B6"/>
+                    </a:gs>
+                  </a:gsLst>
+                  <a:lin ang="2700000" scaled="0"/>
+                </a:gradFill>
                 <a:latin typeface="Inter"/>
               </a:rPr>
               <a:t>stay alive</a:t>
@@ -7506,7 +7559,7 @@
                 </a:solidFill>
                 <a:latin typeface="Inter"/>
               </a:rPr>
-              <a:t> after the meeting.</a:t>
+              <a:t xml:space="preserve"> after the meeting.</a:t>
             </a:r>
           </a:p>
         </p:txBody>
@@ -7698,7 +7751,7 @@
                 </a:solidFill>
                 <a:latin typeface="Inter"/>
               </a:rPr>
-              <a:t> v1.0 · shipping today</a:t>
+              <a:t xml:space="preserve"> v1.0 · shipping today</a:t>
             </a:r>
           </a:p>
         </p:txBody>
@@ -7831,6 +7884,7 @@
           <a:lstStyle/>
           <a:p>
             <a:pPr algn="ctr"/>
+            <a:endParaRPr lang="en-US"/>
           </a:p>
         </p:txBody>
       </p:sp>
@@ -8662,6 +8716,7 @@
           <a:lstStyle/>
           <a:p>
             <a:pPr algn="ctr"/>
+            <a:endParaRPr lang="en-US"/>
           </a:p>
         </p:txBody>
       </p:sp>
@@ -8742,6 +8797,7 @@
           <a:lstStyle/>
           <a:p>
             <a:pPr algn="ctr"/>
+            <a:endParaRPr lang="en-US"/>
           </a:p>
         </p:txBody>
       </p:sp>
@@ -8770,9 +8826,23 @@
             <a:pPr algn="l"/>
             <a:r>
               <a:rPr sz="18000" b="1" i="0" u="none">
-                <a:solidFill>
-                  <a:srgbClr val="F5F5F7"/>
-                </a:solidFill>
+                <a:gradFill rotWithShape="1">
+                  <a:gsLst>
+                    <a:gs pos="0">
+                      <a:srgbClr val="F5F5F7"/>
+                    </a:gs>
+                    <a:gs pos="35000">
+                      <a:srgbClr val="818CF8"/>
+                    </a:gs>
+                    <a:gs pos="65000">
+                      <a:srgbClr val="C084FC"/>
+                    </a:gs>
+                    <a:gs pos="100000">
+                      <a:srgbClr val="F472B6"/>
+                    </a:gs>
+                  </a:gsLst>
+                  <a:lin ang="2700000" scaled="0"/>
+                </a:gradFill>
                 <a:latin typeface="Inter"/>
               </a:rPr>
               <a:t>87</a:t>
@@ -8910,6 +8980,7 @@
           <a:lstStyle/>
           <a:p>
             <a:pPr algn="ctr"/>
+            <a:endParaRPr lang="en-US"/>
           </a:p>
         </p:txBody>
       </p:sp>
@@ -9185,6 +9256,7 @@
           <a:lstStyle/>
           <a:p>
             <a:pPr algn="ctr"/>
+            <a:endParaRPr lang="en-US"/>
           </a:p>
         </p:txBody>
       </p:sp>
@@ -9319,6 +9391,7 @@
           <a:lstStyle/>
           <a:p>
             <a:pPr algn="ctr"/>
+            <a:endParaRPr lang="en-US"/>
           </a:p>
         </p:txBody>
       </p:sp>
@@ -9571,6 +9644,7 @@
           <a:lstStyle/>
           <a:p>
             <a:pPr algn="ctr"/>
+            <a:endParaRPr lang="en-US"/>
           </a:p>
         </p:txBody>
       </p:sp>
@@ -9823,6 +9897,7 @@
           <a:lstStyle/>
           <a:p>
             <a:pPr algn="ctr"/>
+            <a:endParaRPr lang="en-US"/>
           </a:p>
         </p:txBody>
       </p:sp>
@@ -10133,6 +10208,7 @@
           <a:lstStyle/>
           <a:p>
             <a:pPr algn="ctr"/>
+            <a:endParaRPr lang="en-US"/>
           </a:p>
         </p:txBody>
       </p:sp>
@@ -10257,6 +10333,7 @@
           <a:lstStyle/>
           <a:p>
             <a:pPr algn="ctr"/>
+            <a:endParaRPr lang="en-US"/>
           </a:p>
         </p:txBody>
       </p:sp>
@@ -10461,6 +10538,7 @@
           <a:lstStyle/>
           <a:p>
             <a:pPr algn="ctr"/>
+            <a:endParaRPr lang="en-US"/>
           </a:p>
         </p:txBody>
       </p:sp>
@@ -10665,6 +10743,7 @@
           <a:lstStyle/>
           <a:p>
             <a:pPr algn="ctr"/>
+            <a:endParaRPr lang="en-US"/>
           </a:p>
         </p:txBody>
       </p:sp>
@@ -10869,6 +10948,7 @@
           <a:lstStyle/>
           <a:p>
             <a:pPr algn="ctr"/>
+            <a:endParaRPr lang="en-US"/>
           </a:p>
         </p:txBody>
       </p:sp>
@@ -11073,6 +11153,7 @@
           <a:lstStyle/>
           <a:p>
             <a:pPr algn="ctr"/>
+            <a:endParaRPr lang="en-US"/>
           </a:p>
         </p:txBody>
       </p:sp>
@@ -11277,6 +11358,7 @@
           <a:lstStyle/>
           <a:p>
             <a:pPr algn="ctr"/>
+            <a:endParaRPr lang="en-US"/>
           </a:p>
         </p:txBody>
       </p:sp>
@@ -11558,6 +11640,7 @@
           <a:lstStyle/>
           <a:p>
             <a:pPr algn="ctr"/>
+            <a:endParaRPr lang="en-US"/>
           </a:p>
         </p:txBody>
       </p:sp>
@@ -11675,6 +11758,7 @@
           <a:lstStyle/>
           <a:p>
             <a:pPr algn="ctr"/>
+            <a:endParaRPr lang="en-US"/>
           </a:p>
         </p:txBody>
       </p:sp>
@@ -12181,6 +12265,7 @@
           <a:lstStyle/>
           <a:p>
             <a:pPr algn="ctr"/>
+            <a:endParaRPr lang="en-US"/>
           </a:p>
         </p:txBody>
       </p:sp>
@@ -12762,6 +12847,7 @@
           <a:lstStyle/>
           <a:p>
             <a:pPr algn="ctr"/>
+            <a:endParaRPr lang="en-US"/>
           </a:p>
         </p:txBody>
       </p:sp>
@@ -12886,6 +12972,7 @@
           <a:lstStyle/>
           <a:p>
             <a:pPr algn="ctr"/>
+            <a:endParaRPr lang="en-US"/>
           </a:p>
         </p:txBody>
       </p:sp>
@@ -13087,6 +13174,7 @@
           <a:lstStyle/>
           <a:p>
             <a:pPr algn="ctr"/>
+            <a:endParaRPr lang="en-US"/>
           </a:p>
         </p:txBody>
       </p:sp>
@@ -13288,6 +13376,7 @@
           <a:lstStyle/>
           <a:p>
             <a:pPr algn="ctr"/>
+            <a:endParaRPr lang="en-US"/>
           </a:p>
         </p:txBody>
       </p:sp>
@@ -13489,6 +13578,7 @@
           <a:lstStyle/>
           <a:p>
             <a:pPr algn="ctr"/>
+            <a:endParaRPr lang="en-US"/>
           </a:p>
         </p:txBody>
       </p:sp>
@@ -13690,6 +13780,7 @@
           <a:lstStyle/>
           <a:p>
             <a:pPr algn="ctr"/>
+            <a:endParaRPr lang="en-US"/>
           </a:p>
         </p:txBody>
       </p:sp>
@@ -13901,6 +13992,7 @@
           <a:lstStyle/>
           <a:p>
             <a:pPr algn="ctr"/>
+            <a:endParaRPr lang="en-US"/>
           </a:p>
         </p:txBody>
       </p:sp>
@@ -13934,7 +14026,7 @@
                 </a:solidFill>
                 <a:latin typeface="Inter"/>
               </a:rPr>
-              <a:t>Total budget · </a:t>
+              <a:t xml:space="preserve">Total budget · </a:t>
             </a:r>
             <a:r>
               <a:rPr sz="1350" b="1" i="0" u="none">
@@ -13952,7 +14044,7 @@
                 </a:solidFill>
                 <a:latin typeface="Inter"/>
               </a:rPr>
-              <a:t> for a 10-slide deck</a:t>
+              <a:t xml:space="preserve"> for a 10-slide deck</a:t>
             </a:r>
           </a:p>
         </p:txBody>
@@ -14134,6 +14226,7 @@
           <a:lstStyle/>
           <a:p>
             <a:pPr algn="ctr"/>
+            <a:endParaRPr lang="en-US"/>
           </a:p>
         </p:txBody>
       </p:sp>
@@ -14191,6 +14284,7 @@
           <a:lstStyle/>
           <a:p>
             <a:pPr algn="ctr"/>
+            <a:endParaRPr lang="en-US"/>
           </a:p>
         </p:txBody>
       </p:sp>
@@ -14259,13 +14353,21 @@
                 </a:solidFill>
                 <a:latin typeface="Inter"/>
               </a:rPr>
-              <a:t>Rasterization is the failure mode, </a:t>
+              <a:t xml:space="preserve">Rasterization is the failure mode, </a:t>
             </a:r>
             <a:r>
               <a:rPr sz="3600" b="1" i="0" u="none">
-                <a:solidFill>
-                  <a:srgbClr val="FDE68A"/>
-                </a:solidFill>
+                <a:gradFill rotWithShape="1">
+                  <a:gsLst>
+                    <a:gs pos="0">
+                      <a:srgbClr val="FDE68A"/>
+                    </a:gs>
+                    <a:gs pos="100000">
+                      <a:srgbClr val="F0ABFC"/>
+                    </a:gs>
+                  </a:gsLst>
+                  <a:lin ang="2700000" scaled="0"/>
+                </a:gradFill>
                 <a:latin typeface="Inter"/>
               </a:rPr>
               <a:t>not the goal</a:t>
@@ -14528,6 +14630,7 @@
           <a:lstStyle/>
           <a:p>
             <a:pPr algn="ctr"/>
+            <a:endParaRPr lang="en-US"/>
           </a:p>
         </p:txBody>
       </p:sp>
@@ -14652,6 +14755,7 @@
           <a:lstStyle/>
           <a:p>
             <a:pPr algn="ctr"/>
+            <a:endParaRPr lang="en-US"/>
           </a:p>
         </p:txBody>
       </p:sp>
@@ -15149,6 +15253,7 @@
           <a:lstStyle/>
           <a:p>
             <a:pPr algn="ctr"/>
+            <a:endParaRPr lang="en-US"/>
           </a:p>
         </p:txBody>
       </p:sp>
@@ -15749,6 +15854,7 @@
           <a:lstStyle/>
           <a:p>
             <a:pPr algn="ctr"/>
+            <a:endParaRPr lang="en-US"/>
           </a:p>
         </p:txBody>
       </p:sp>
@@ -16271,22 +16377,22 @@
         <a:srgbClr val="EEECE1"/>
       </a:lt2>
       <a:accent1>
-        <a:srgbClr val="4F81BD"/>
+        <a:srgbClr val="F5F5F7"/>
       </a:accent1>
       <a:accent2>
-        <a:srgbClr val="C0504D"/>
+        <a:srgbClr val="52525B"/>
       </a:accent2>
       <a:accent3>
-        <a:srgbClr val="9BBB59"/>
+        <a:srgbClr val="A1A1AA"/>
       </a:accent3>
       <a:accent4>
-        <a:srgbClr val="8064A2"/>
+        <a:srgbClr val="E4E4E7"/>
       </a:accent4>
       <a:accent5>
-        <a:srgbClr val="4BACC6"/>
+        <a:srgbClr val="A78BFA"/>
       </a:accent5>
       <a:accent6>
-        <a:srgbClr val="F79646"/>
+        <a:srgbClr val="86EFAC"/>
       </a:accent6>
       <a:hlink>
         <a:srgbClr val="0000FF"/>

--- a/examples/sophisticated/deck.pptx
+++ b/examples/sophisticated/deck.pptx
@@ -3120,8 +3120,38 @@
               <a:gs pos="0">
                 <a:srgbClr val="1E1B4B"/>
               </a:gs>
+              <a:gs pos="9167">
+                <a:srgbClr val="1B1841"/>
+              </a:gs>
+              <a:gs pos="18333">
+                <a:srgbClr val="171538"/>
+              </a:gs>
+              <a:gs pos="27500">
+                <a:srgbClr val="14132E"/>
+              </a:gs>
+              <a:gs pos="36667">
+                <a:srgbClr val="101025"/>
+              </a:gs>
+              <a:gs pos="45833">
+                <a:srgbClr val="0D0D1C"/>
+              </a:gs>
               <a:gs pos="55000">
                 <a:srgbClr val="0A0A14"/>
+              </a:gs>
+              <a:gs pos="62500">
+                <a:srgbClr val="090913"/>
+              </a:gs>
+              <a:gs pos="70000">
+                <a:srgbClr val="080813"/>
+              </a:gs>
+              <a:gs pos="77500">
+                <a:srgbClr val="070712"/>
+              </a:gs>
+              <a:gs pos="85000">
+                <a:srgbClr val="060611"/>
+              </a:gs>
+              <a:gs pos="92500">
+                <a:srgbClr val="060611"/>
               </a:gs>
               <a:gs pos="100000">
                 <a:srgbClr val="050510"/>
@@ -3167,7 +3197,7 @@
       </p:sp>
       <p:sp>
         <p:nvSpPr>
-          <p:cNvPr id="3" name="Rectangle 2"/>
+          <p:cNvPr id="3" name="Oval 2"/>
           <p:cNvSpPr/>
           <p:nvPr/>
         </p:nvSpPr>
@@ -3203,7 +3233,7 @@
             <a:off x="-1143000" y="-2095500"/>
             <a:ext cx="7429500" cy="7429500"/>
           </a:xfrm>
-          <a:prstGeom prst="rect">
+          <a:prstGeom prst="ellipse">
             <a:avLst/>
           </a:prstGeom>
           <a:ln>
@@ -3235,7 +3265,7 @@
       </p:sp>
       <p:sp>
         <p:nvSpPr>
-          <p:cNvPr id="4" name="Rectangle 3"/>
+          <p:cNvPr id="4" name="Oval 3"/>
           <p:cNvSpPr/>
           <p:nvPr/>
         </p:nvSpPr>
@@ -3271,7 +3301,7 @@
             <a:off x="5143500" y="571500"/>
             <a:ext cx="8763000" cy="8763000"/>
           </a:xfrm>
-          <a:prstGeom prst="rect">
+          <a:prstGeom prst="ellipse">
             <a:avLst/>
           </a:prstGeom>
           <a:ln>
@@ -3313,8 +3343,38 @@
               <a:gs pos="0">
                 <a:srgbClr val="818CF8"/>
               </a:gs>
+              <a:gs pos="8333">
+                <a:srgbClr val="8C8BFB"/>
+              </a:gs>
+              <a:gs pos="16667">
+                <a:srgbClr val="978AFC"/>
+              </a:gs>
+              <a:gs pos="25000">
+                <a:srgbClr val="A188FD"/>
+              </a:gs>
+              <a:gs pos="33333">
+                <a:srgbClr val="AC87FE"/>
+              </a:gs>
+              <a:gs pos="41667">
+                <a:srgbClr val="B685FD"/>
+              </a:gs>
               <a:gs pos="50000">
                 <a:srgbClr val="C084FC"/>
+              </a:gs>
+              <a:gs pos="58333">
+                <a:srgbClr val="CB80F3"/>
+              </a:gs>
+              <a:gs pos="66667">
+                <a:srgbClr val="D57CE9"/>
+              </a:gs>
+              <a:gs pos="75000">
+                <a:srgbClr val="DE79DD"/>
+              </a:gs>
+              <a:gs pos="83333">
+                <a:srgbClr val="E776D1"/>
+              </a:gs>
+              <a:gs pos="91667">
+                <a:srgbClr val="EE74C4"/>
               </a:gs>
               <a:gs pos="100000">
                 <a:srgbClr val="F472B6"/>
@@ -3909,7 +3969,7 @@
       </p:sp>
       <p:sp>
         <p:nvSpPr>
-          <p:cNvPr id="8" name="Oval 7"/>
+          <p:cNvPr id="8" name="Rounded Rectangle 7"/>
           <p:cNvSpPr/>
           <p:nvPr/>
         </p:nvSpPr>
@@ -3918,7 +3978,7 @@
             <a:off x="923925" y="3226891"/>
             <a:ext cx="95250" cy="95250"/>
           </a:xfrm>
-          <a:prstGeom prst="ellipse">
+          <a:prstGeom prst="roundRect">
             <a:avLst/>
           </a:prstGeom>
           <a:solidFill>
@@ -3953,7 +4013,7 @@
       </p:sp>
       <p:sp>
         <p:nvSpPr>
-          <p:cNvPr id="9" name="Oval 8"/>
+          <p:cNvPr id="9" name="Rounded Rectangle 8"/>
           <p:cNvSpPr/>
           <p:nvPr/>
         </p:nvSpPr>
@@ -3962,7 +4022,7 @@
             <a:off x="1095375" y="3226891"/>
             <a:ext cx="95250" cy="95250"/>
           </a:xfrm>
-          <a:prstGeom prst="ellipse">
+          <a:prstGeom prst="roundRect">
             <a:avLst/>
           </a:prstGeom>
           <a:solidFill>
@@ -3997,7 +4057,7 @@
       </p:sp>
       <p:sp>
         <p:nvSpPr>
-          <p:cNvPr id="10" name="Oval 9"/>
+          <p:cNvPr id="10" name="Rounded Rectangle 9"/>
           <p:cNvSpPr/>
           <p:nvPr/>
         </p:nvSpPr>
@@ -4006,7 +4066,7 @@
             <a:off x="1266825" y="3226891"/>
             <a:ext cx="95250" cy="95250"/>
           </a:xfrm>
-          <a:prstGeom prst="ellipse">
+          <a:prstGeom prst="roundRect">
             <a:avLst/>
           </a:prstGeom>
           <a:solidFill>
@@ -4790,6 +4850,31 @@
               <a:gs pos="0">
                 <a:srgbClr val="6366F1">
                   <a:alpha val="16000"/>
+                </a:srgbClr>
+              </a:gs>
+              <a:gs pos="16667">
+                <a:srgbClr val="825FEE">
+                  <a:alpha val="15000"/>
+                </a:srgbClr>
+              </a:gs>
+              <a:gs pos="33333">
+                <a:srgbClr val="9D59E6">
+                  <a:alpha val="14000"/>
+                </a:srgbClr>
+              </a:gs>
+              <a:gs pos="50000">
+                <a:srgbClr val="B554D9">
+                  <a:alpha val="13000"/>
+                </a:srgbClr>
+              </a:gs>
+              <a:gs pos="66667">
+                <a:srgbClr val="CA4EC7">
+                  <a:alpha val="12000"/>
+                </a:srgbClr>
+              </a:gs>
+              <a:gs pos="83333">
+                <a:srgbClr val="DC4AB2">
+                  <a:alpha val="11000"/>
                 </a:srgbClr>
               </a:gs>
               <a:gs pos="100000">
@@ -5754,6 +5839,31 @@
                   <a:alpha val="18000"/>
                 </a:srgbClr>
               </a:gs>
+              <a:gs pos="16667">
+                <a:srgbClr val="825FEE">
+                  <a:alpha val="16667"/>
+                </a:srgbClr>
+              </a:gs>
+              <a:gs pos="33333">
+                <a:srgbClr val="9D59E6">
+                  <a:alpha val="15333"/>
+                </a:srgbClr>
+              </a:gs>
+              <a:gs pos="50000">
+                <a:srgbClr val="B554D9">
+                  <a:alpha val="14000"/>
+                </a:srgbClr>
+              </a:gs>
+              <a:gs pos="66667">
+                <a:srgbClr val="CA4EC7">
+                  <a:alpha val="12667"/>
+                </a:srgbClr>
+              </a:gs>
+              <a:gs pos="83333">
+                <a:srgbClr val="DC4AB2">
+                  <a:alpha val="11333"/>
+                </a:srgbClr>
+              </a:gs>
               <a:gs pos="100000">
                 <a:srgbClr val="EC4899">
                   <a:alpha val="10000"/>
@@ -5886,6 +5996,21 @@
             <a:gsLst>
               <a:gs pos="0">
                 <a:srgbClr val="A78BFA"/>
+              </a:gs>
+              <a:gs pos="16667">
+                <a:srgbClr val="B580F2"/>
+              </a:gs>
+              <a:gs pos="33333">
+                <a:srgbClr val="C276E7"/>
+              </a:gs>
+              <a:gs pos="50000">
+                <a:srgbClr val="CF6BD9"/>
+              </a:gs>
+              <a:gs pos="66667">
+                <a:srgbClr val="DA5FC7"/>
+              </a:gs>
+              <a:gs pos="83333">
+                <a:srgbClr val="E454B1"/>
               </a:gs>
               <a:gs pos="100000">
                 <a:srgbClr val="EC4899"/>
@@ -7399,7 +7524,7 @@
       </p:sp>
       <p:sp>
         <p:nvSpPr>
-          <p:cNvPr id="4" name="Rectangle 3"/>
+          <p:cNvPr id="4" name="Oval 3"/>
           <p:cNvSpPr/>
           <p:nvPr/>
         </p:nvSpPr>
@@ -7435,7 +7560,7 @@
             <a:off x="381000" y="3367980"/>
             <a:ext cx="11430000" cy="5334000"/>
           </a:xfrm>
-          <a:prstGeom prst="rect">
+          <a:prstGeom prst="ellipse">
             <a:avLst/>
           </a:prstGeom>
           <a:ln>
@@ -9344,6 +9469,31 @@
                   <a:alpha val="5000"/>
                 </a:srgbClr>
               </a:gs>
+              <a:gs pos="16667">
+                <a:srgbClr val="FFFFFF">
+                  <a:alpha val="4500"/>
+                </a:srgbClr>
+              </a:gs>
+              <a:gs pos="33333">
+                <a:srgbClr val="FFFFFF">
+                  <a:alpha val="4000"/>
+                </a:srgbClr>
+              </a:gs>
+              <a:gs pos="50000">
+                <a:srgbClr val="FFFFFF">
+                  <a:alpha val="3500"/>
+                </a:srgbClr>
+              </a:gs>
+              <a:gs pos="66667">
+                <a:srgbClr val="FFFFFF">
+                  <a:alpha val="3000"/>
+                </a:srgbClr>
+              </a:gs>
+              <a:gs pos="83333">
+                <a:srgbClr val="FFFFFF">
+                  <a:alpha val="2500"/>
+                </a:srgbClr>
+              </a:gs>
               <a:gs pos="100000">
                 <a:srgbClr val="FFFFFF">
                   <a:alpha val="2000"/>
@@ -9597,6 +9747,31 @@
                   <a:alpha val="5000"/>
                 </a:srgbClr>
               </a:gs>
+              <a:gs pos="16667">
+                <a:srgbClr val="FFFFFF">
+                  <a:alpha val="4500"/>
+                </a:srgbClr>
+              </a:gs>
+              <a:gs pos="33333">
+                <a:srgbClr val="FFFFFF">
+                  <a:alpha val="4000"/>
+                </a:srgbClr>
+              </a:gs>
+              <a:gs pos="50000">
+                <a:srgbClr val="FFFFFF">
+                  <a:alpha val="3500"/>
+                </a:srgbClr>
+              </a:gs>
+              <a:gs pos="66667">
+                <a:srgbClr val="FFFFFF">
+                  <a:alpha val="3000"/>
+                </a:srgbClr>
+              </a:gs>
+              <a:gs pos="83333">
+                <a:srgbClr val="FFFFFF">
+                  <a:alpha val="2500"/>
+                </a:srgbClr>
+              </a:gs>
               <a:gs pos="100000">
                 <a:srgbClr val="FFFFFF">
                   <a:alpha val="2000"/>
@@ -9848,6 +10023,31 @@
               <a:gs pos="0">
                 <a:srgbClr val="FFFFFF">
                   <a:alpha val="5000"/>
+                </a:srgbClr>
+              </a:gs>
+              <a:gs pos="16667">
+                <a:srgbClr val="FFFFFF">
+                  <a:alpha val="4500"/>
+                </a:srgbClr>
+              </a:gs>
+              <a:gs pos="33333">
+                <a:srgbClr val="FFFFFF">
+                  <a:alpha val="4000"/>
+                </a:srgbClr>
+              </a:gs>
+              <a:gs pos="50000">
+                <a:srgbClr val="FFFFFF">
+                  <a:alpha val="3500"/>
+                </a:srgbClr>
+              </a:gs>
+              <a:gs pos="66667">
+                <a:srgbClr val="FFFFFF">
+                  <a:alpha val="3000"/>
+                </a:srgbClr>
+              </a:gs>
+              <a:gs pos="83333">
+                <a:srgbClr val="FFFFFF">
+                  <a:alpha val="2500"/>
                 </a:srgbClr>
               </a:gs>
               <a:gs pos="100000">
@@ -10349,6 +10549,21 @@
               <a:gs pos="0">
                 <a:srgbClr val="6366F1"/>
               </a:gs>
+              <a:gs pos="16667">
+                <a:srgbClr val="6A64F3"/>
+              </a:gs>
+              <a:gs pos="33333">
+                <a:srgbClr val="7163F4"/>
+              </a:gs>
+              <a:gs pos="50000">
+                <a:srgbClr val="7861F5"/>
+              </a:gs>
+              <a:gs pos="66667">
+                <a:srgbClr val="7E60F5"/>
+              </a:gs>
+              <a:gs pos="83333">
+                <a:srgbClr val="855EF6"/>
+              </a:gs>
               <a:gs pos="100000">
                 <a:srgbClr val="8B5CF6"/>
               </a:gs>
@@ -10554,6 +10769,21 @@
               <a:gs pos="0">
                 <a:srgbClr val="8B5CF6"/>
               </a:gs>
+              <a:gs pos="16667">
+                <a:srgbClr val="A057ED"/>
+              </a:gs>
+              <a:gs pos="33333">
+                <a:srgbClr val="B352E1"/>
+              </a:gs>
+              <a:gs pos="50000">
+                <a:srgbClr val="C44ED2"/>
+              </a:gs>
+              <a:gs pos="66667">
+                <a:srgbClr val="D44BC1"/>
+              </a:gs>
+              <a:gs pos="83333">
+                <a:srgbClr val="E149AE"/>
+              </a:gs>
               <a:gs pos="100000">
                 <a:srgbClr val="EC4899"/>
               </a:gs>
@@ -10759,6 +10989,21 @@
               <a:gs pos="0">
                 <a:srgbClr val="EC4899"/>
               </a:gs>
+              <a:gs pos="16667">
+                <a:srgbClr val="F34B87"/>
+              </a:gs>
+              <a:gs pos="33333">
+                <a:srgbClr val="F85074"/>
+              </a:gs>
+              <a:gs pos="50000">
+                <a:srgbClr val="FB5761"/>
+              </a:gs>
+              <a:gs pos="66667">
+                <a:srgbClr val="FC5F4C"/>
+              </a:gs>
+              <a:gs pos="83333">
+                <a:srgbClr val="FC6936"/>
+              </a:gs>
               <a:gs pos="100000">
                 <a:srgbClr val="F97316"/>
               </a:gs>
@@ -10964,6 +11209,21 @@
               <a:gs pos="0">
                 <a:srgbClr val="06B6D4"/>
               </a:gs>
+              <a:gs pos="16667">
+                <a:srgbClr val="00ADDD"/>
+              </a:gs>
+              <a:gs pos="33333">
+                <a:srgbClr val="00A2E5"/>
+              </a:gs>
+              <a:gs pos="50000">
+                <a:srgbClr val="0D95EC"/>
+              </a:gs>
+              <a:gs pos="66667">
+                <a:srgbClr val="3587F1"/>
+              </a:gs>
+              <a:gs pos="83333">
+                <a:srgbClr val="4E77F3"/>
+              </a:gs>
               <a:gs pos="100000">
                 <a:srgbClr val="6366F1"/>
               </a:gs>
@@ -11169,6 +11429,21 @@
               <a:gs pos="0">
                 <a:srgbClr val="22C55E"/>
               </a:gs>
+              <a:gs pos="16667">
+                <a:srgbClr val="00C67E"/>
+              </a:gs>
+              <a:gs pos="33333">
+                <a:srgbClr val="00C597"/>
+              </a:gs>
+              <a:gs pos="50000">
+                <a:srgbClr val="00C3AC"/>
+              </a:gs>
+              <a:gs pos="66667">
+                <a:srgbClr val="00BFBE"/>
+              </a:gs>
+              <a:gs pos="83333">
+                <a:srgbClr val="00BBCB"/>
+              </a:gs>
               <a:gs pos="100000">
                 <a:srgbClr val="06B6D4"/>
               </a:gs>
@@ -11373,6 +11648,21 @@
             <a:gsLst>
               <a:gs pos="0">
                 <a:srgbClr val="F97316"/>
+              </a:gs>
+              <a:gs pos="16667">
+                <a:srgbClr val="FD8200"/>
+              </a:gs>
+              <a:gs pos="33333">
+                <a:srgbClr val="FF9000"/>
+              </a:gs>
+              <a:gs pos="50000">
+                <a:srgbClr val="FF9F00"/>
+              </a:gs>
+              <a:gs pos="66667">
+                <a:srgbClr val="FFAE00"/>
+              </a:gs>
+              <a:gs pos="83333">
+                <a:srgbClr val="FDBD00"/>
               </a:gs>
               <a:gs pos="100000">
                 <a:srgbClr val="FACC15"/>
@@ -12218,6 +12508,31 @@
                   <a:alpha val="18000"/>
                 </a:srgbClr>
               </a:gs>
+              <a:gs pos="16667">
+                <a:srgbClr val="825FEE">
+                  <a:alpha val="16667"/>
+                </a:srgbClr>
+              </a:gs>
+              <a:gs pos="33333">
+                <a:srgbClr val="9D59E6">
+                  <a:alpha val="15333"/>
+                </a:srgbClr>
+              </a:gs>
+              <a:gs pos="50000">
+                <a:srgbClr val="B554D9">
+                  <a:alpha val="14000"/>
+                </a:srgbClr>
+              </a:gs>
+              <a:gs pos="66667">
+                <a:srgbClr val="CA4EC7">
+                  <a:alpha val="12667"/>
+                </a:srgbClr>
+              </a:gs>
+              <a:gs pos="83333">
+                <a:srgbClr val="DC4AB2">
+                  <a:alpha val="11333"/>
+                </a:srgbClr>
+              </a:gs>
               <a:gs pos="100000">
                 <a:srgbClr val="EC4899">
                   <a:alpha val="10000"/>
@@ -12315,6 +12630,21 @@
             <a:gsLst>
               <a:gs pos="0">
                 <a:srgbClr val="818CF8"/>
+              </a:gs>
+              <a:gs pos="16667">
+                <a:srgbClr val="9987F7"/>
+              </a:gs>
+              <a:gs pos="33333">
+                <a:srgbClr val="AF81F1"/>
+              </a:gs>
+              <a:gs pos="50000">
+                <a:srgbClr val="C37CE8"/>
+              </a:gs>
+              <a:gs pos="66667">
+                <a:srgbClr val="D678DA"/>
+              </a:gs>
+              <a:gs pos="83333">
+                <a:srgbClr val="E674CA"/>
               </a:gs>
               <a:gs pos="100000">
                 <a:srgbClr val="F472B6"/>
@@ -13945,6 +14275,31 @@
                   <a:alpha val="14000"/>
                 </a:srgbClr>
               </a:gs>
+              <a:gs pos="16667">
+                <a:srgbClr val="825FEE">
+                  <a:alpha val="13333"/>
+                </a:srgbClr>
+              </a:gs>
+              <a:gs pos="33333">
+                <a:srgbClr val="9D59E6">
+                  <a:alpha val="12667"/>
+                </a:srgbClr>
+              </a:gs>
+              <a:gs pos="50000">
+                <a:srgbClr val="B554D9">
+                  <a:alpha val="12000"/>
+                </a:srgbClr>
+              </a:gs>
+              <a:gs pos="66667">
+                <a:srgbClr val="CA4EC7">
+                  <a:alpha val="11333"/>
+                </a:srgbClr>
+              </a:gs>
+              <a:gs pos="83333">
+                <a:srgbClr val="DC4AB2">
+                  <a:alpha val="10667"/>
+                </a:srgbClr>
+              </a:gs>
               <a:gs pos="100000">
                 <a:srgbClr val="EC4899">
                   <a:alpha val="10000"/>
@@ -14396,6 +14751,21 @@
               <a:gs pos="0">
                 <a:srgbClr val="FDE68A"/>
               </a:gs>
+              <a:gs pos="11667">
+                <a:srgbClr val="FFD176"/>
+              </a:gs>
+              <a:gs pos="23333">
+                <a:srgbClr val="FFBA70"/>
+              </a:gs>
+              <a:gs pos="35000">
+                <a:srgbClr val="FFA477"/>
+              </a:gs>
+              <a:gs pos="46667">
+                <a:srgbClr val="FF9087"/>
+              </a:gs>
+              <a:gs pos="58333">
+                <a:srgbClr val="FF7F9E"/>
+              </a:gs>
               <a:gs pos="70000">
                 <a:srgbClr val="F472B6"/>
               </a:gs>
@@ -15206,6 +15576,31 @@
                   <a:alpha val="20000"/>
                 </a:srgbClr>
               </a:gs>
+              <a:gs pos="16667">
+                <a:srgbClr val="825FEE">
+                  <a:alpha val="18333"/>
+                </a:srgbClr>
+              </a:gs>
+              <a:gs pos="33333">
+                <a:srgbClr val="9D59E6">
+                  <a:alpha val="16667"/>
+                </a:srgbClr>
+              </a:gs>
+              <a:gs pos="50000">
+                <a:srgbClr val="B554D9">
+                  <a:alpha val="15000"/>
+                </a:srgbClr>
+              </a:gs>
+              <a:gs pos="66667">
+                <a:srgbClr val="CA4EC7">
+                  <a:alpha val="13333"/>
+                </a:srgbClr>
+              </a:gs>
+              <a:gs pos="83333">
+                <a:srgbClr val="DC4AB2">
+                  <a:alpha val="11667"/>
+                </a:srgbClr>
+              </a:gs>
               <a:gs pos="100000">
                 <a:srgbClr val="EC4899">
                   <a:alpha val="10000"/>
@@ -15268,6 +15663,21 @@
             <a:gsLst>
               <a:gs pos="0">
                 <a:srgbClr val="A78BFA"/>
+              </a:gs>
+              <a:gs pos="16667">
+                <a:srgbClr val="B580F2"/>
+              </a:gs>
+              <a:gs pos="33333">
+                <a:srgbClr val="C276E7"/>
+              </a:gs>
+              <a:gs pos="50000">
+                <a:srgbClr val="CF6BD9"/>
+              </a:gs>
+              <a:gs pos="66667">
+                <a:srgbClr val="DA5FC7"/>
+              </a:gs>
+              <a:gs pos="83333">
+                <a:srgbClr val="E454B1"/>
               </a:gs>
               <a:gs pos="100000">
                 <a:srgbClr val="EC4899"/>

--- a/examples/sophisticated/deck.pptx
+++ b/examples/sophisticated/deck.pptx
@@ -3470,7 +3470,7 @@
         <p:spPr>
           <a:xfrm>
             <a:off x="9966573" y="923925"/>
-            <a:ext cx="1311027" cy="323850"/>
+            <a:ext cx="1027175" cy="323850"/>
           </a:xfrm>
           <a:prstGeom prst="rect">
             <a:avLst/>
@@ -3553,7 +3553,7 @@
         </p:spPr>
         <p:txBody>
           <a:bodyPr wrap="square" lIns="0" rIns="0" tIns="0" bIns="0">
-            <a:normAutofit/>
+            <a:normAutofit fontScale="50000" lnSpcReduction="0"/>
           </a:bodyPr>
           <a:lstStyle/>
           <a:p>
@@ -3617,7 +3617,7 @@
         </p:spPr>
         <p:txBody>
           <a:bodyPr wrap="square" lIns="0" rIns="0" tIns="0" bIns="0">
-            <a:normAutofit/>
+            <a:normAutofit fontScale="51300" lnSpcReduction="0"/>
           </a:bodyPr>
           <a:lstStyle/>
           <a:p>
@@ -3819,7 +3819,7 @@
         </p:spPr>
         <p:txBody>
           <a:bodyPr wrap="square" lIns="0" rIns="0" tIns="0" bIns="0">
-            <a:normAutofit/>
+            <a:normAutofit fontScale="79583" lnSpcReduction="0"/>
           </a:bodyPr>
           <a:lstStyle/>
           <a:p>
@@ -3854,7 +3854,7 @@
         </p:spPr>
         <p:txBody>
           <a:bodyPr wrap="square" lIns="0" rIns="0" tIns="0" bIns="0">
-            <a:spAutoFit/>
+            <a:normAutofit fontScale="95774" lnSpcReduction="0"/>
           </a:bodyPr>
           <a:lstStyle/>
           <a:p>
@@ -4975,7 +4975,7 @@
         </p:spPr>
         <p:txBody>
           <a:bodyPr wrap="square" lIns="0" rIns="0" tIns="0" bIns="0">
-            <a:spAutoFit/>
+            <a:normAutofit fontScale="51882" lnSpcReduction="0"/>
           </a:bodyPr>
           <a:lstStyle/>
           <a:p>
@@ -5128,7 +5128,7 @@
         </p:spPr>
         <p:txBody>
           <a:bodyPr wrap="square" lIns="0" rIns="0" tIns="0" bIns="0">
-            <a:spAutoFit/>
+            <a:normAutofit fontScale="94397" lnSpcReduction="0"/>
           </a:bodyPr>
           <a:lstStyle/>
           <a:p>
@@ -6344,7 +6344,7 @@
         </p:spPr>
         <p:txBody>
           <a:bodyPr wrap="square" lIns="0" rIns="0" tIns="0" bIns="0">
-            <a:spAutoFit/>
+            <a:normAutofit fontScale="94784" lnSpcReduction="0"/>
           </a:bodyPr>
           <a:lstStyle/>
           <a:p>
@@ -6648,7 +6648,7 @@
         </p:spPr>
         <p:txBody>
           <a:bodyPr wrap="square" lIns="0" rIns="0" tIns="0" bIns="0">
-            <a:spAutoFit/>
+            <a:normAutofit fontScale="98378" lnSpcReduction="0"/>
           </a:bodyPr>
           <a:lstStyle/>
           <a:p>
@@ -7644,7 +7644,7 @@
         </p:spPr>
         <p:txBody>
           <a:bodyPr wrap="square" lIns="0" rIns="0" tIns="0" bIns="0">
-            <a:normAutofit/>
+            <a:normAutofit fontScale="62662" lnSpcReduction="0"/>
           </a:bodyPr>
           <a:lstStyle/>
           <a:p>
@@ -7708,7 +7708,7 @@
         </p:spPr>
         <p:txBody>
           <a:bodyPr wrap="square" lIns="0" rIns="0" tIns="0" bIns="0">
-            <a:normAutofit/>
+            <a:normAutofit fontScale="59916" lnSpcReduction="0"/>
           </a:bodyPr>
           <a:lstStyle/>
           <a:p>
@@ -7852,7 +7852,7 @@
         <p:spPr>
           <a:xfrm>
             <a:off x="5249912" y="5688657"/>
-            <a:ext cx="1692027" cy="323850"/>
+            <a:ext cx="1371260" cy="323850"/>
           </a:xfrm>
           <a:prstGeom prst="rect">
             <a:avLst/>
@@ -7977,6 +7977,37 @@
           <p:nvPr/>
         </p:nvSpPr>
         <p:spPr>
+          <a:gradFill flip="none" rotWithShape="1">
+            <a:gsLst>
+              <a:gs pos="0">
+                <a:srgbClr val="1E1B4B"/>
+              </a:gs>
+              <a:gs pos="11667">
+                <a:srgbClr val="191740"/>
+              </a:gs>
+              <a:gs pos="23333">
+                <a:srgbClr val="151336"/>
+              </a:gs>
+              <a:gs pos="35000">
+                <a:srgbClr val="100F2C"/>
+              </a:gs>
+              <a:gs pos="46667">
+                <a:srgbClr val="0C0B22"/>
+              </a:gs>
+              <a:gs pos="58333">
+                <a:srgbClr val="080819"/>
+              </a:gs>
+              <a:gs pos="70000">
+                <a:srgbClr val="050510"/>
+              </a:gs>
+              <a:gs pos="100000">
+                <a:srgbClr val="050510"/>
+              </a:gs>
+            </a:gsLst>
+            <a:path path="circle">
+              <a:fillToRect l="30000" t="30000" r="70000" b="70000"/>
+            </a:path>
+          </a:gradFill>
           <a:xfrm>
             <a:off x="0" y="0"/>
             <a:ext cx="12192000" cy="6858000"/>
@@ -7984,7 +8015,6 @@
           <a:prstGeom prst="rect">
             <a:avLst/>
           </a:prstGeom>
-          <a:noFill/>
           <a:ln>
             <a:noFill/>
           </a:ln>
@@ -8014,57 +8044,93 @@
       </p:sp>
       <p:sp>
         <p:nvSpPr>
-          <p:cNvPr id="3" name="Freeform 2"/>
+          <p:cNvPr id="3" name="TextBox 2"/>
+          <p:cNvSpPr txBox="1"/>
+          <p:nvPr/>
+        </p:nvSpPr>
+        <p:spPr>
+          <a:xfrm>
+            <a:off x="914400" y="609600"/>
+            <a:ext cx="10363200" cy="152400"/>
+          </a:xfrm>
+          <a:prstGeom prst="rect">
+            <a:avLst/>
+          </a:prstGeom>
+          <a:noFill/>
+        </p:spPr>
+        <p:txBody>
+          <a:bodyPr wrap="square" lIns="0" rIns="0" tIns="0" bIns="0">
+            <a:spAutoFit/>
+          </a:bodyPr>
+          <a:lstStyle/>
+          <a:p>
+            <a:pPr algn="l"/>
+            <a:r>
+              <a:rPr sz="975" b="1" i="0" u="none">
+                <a:solidFill>
+                  <a:srgbClr val="A78BFA"/>
+                </a:solidFill>
+                <a:latin typeface="Inter"/>
+              </a:rPr>
+              <a:t>Decoration system</a:t>
+            </a:r>
+          </a:p>
+        </p:txBody>
+      </p:sp>
+      <p:sp>
+        <p:nvSpPr>
+          <p:cNvPr id="4" name="TextBox 3"/>
+          <p:cNvSpPr txBox="1"/>
+          <p:nvPr/>
+        </p:nvSpPr>
+        <p:spPr>
+          <a:xfrm>
+            <a:off x="914400" y="838200"/>
+            <a:ext cx="10363200" cy="800100"/>
+          </a:xfrm>
+          <a:prstGeom prst="rect">
+            <a:avLst/>
+          </a:prstGeom>
+          <a:noFill/>
+        </p:spPr>
+        <p:txBody>
+          <a:bodyPr wrap="square" lIns="0" rIns="0" tIns="0" bIns="0">
+            <a:normAutofit fontScale="80727" lnSpcReduction="0"/>
+          </a:bodyPr>
+          <a:lstStyle/>
+          <a:p>
+            <a:pPr algn="l"/>
+            <a:r>
+              <a:rPr sz="3150" b="1" i="0" u="none">
+                <a:solidFill>
+                  <a:srgbClr val="F5F5F7"/>
+                </a:solidFill>
+                <a:latin typeface="Inter"/>
+              </a:rPr>
+              <a:t>Six layered styles — each row of cards uses a different decoration hint.</a:t>
+            </a:r>
+          </a:p>
+        </p:txBody>
+      </p:sp>
+      <p:sp>
+        <p:nvSpPr>
+          <p:cNvPr id="5" name="Rounded Rectangle 4"/>
           <p:cNvSpPr/>
           <p:nvPr/>
         </p:nvSpPr>
         <p:spPr>
-          <a:custGeom>
-            <a:avLst/>
-            <a:gdLst/>
-            <a:ahLst/>
-            <a:cxnLst/>
-            <a:rect l="0" t="0" r="100000" b="100000"/>
-            <a:pathLst>
-              <a:path w="100000" h="100000">
-                <a:moveTo>
-                  <a:pt x="50000" y="0"/>
-                </a:moveTo>
-                <a:quadBezTo>
-                  <a:pt x="61111" y="35294"/>
-                  <a:pt x="100000" y="35294"/>
-                </a:quadBezTo>
-                <a:quadBezTo>
-                  <a:pt x="66667" y="58824"/>
-                  <a:pt x="83333" y="100000"/>
-                </a:quadBezTo>
-                <a:quadBezTo>
-                  <a:pt x="50000" y="76471"/>
-                  <a:pt x="16667" y="100000"/>
-                </a:quadBezTo>
-                <a:quadBezTo>
-                  <a:pt x="33333" y="58824"/>
-                  <a:pt x="0" y="35294"/>
-                </a:quadBezTo>
-                <a:quadBezTo>
-                  <a:pt x="38889" y="35294"/>
-                  <a:pt x="50000" y="0"/>
-                </a:quadBezTo>
-                <a:close/>
-              </a:path>
-            </a:pathLst>
-          </a:custGeom>
-          <a:xfrm>
-            <a:off x="10791825" y="6334125"/>
-            <a:ext cx="857250" cy="809625"/>
-          </a:xfrm>
+          <a:xfrm>
+            <a:off x="914400" y="1905000"/>
+            <a:ext cx="3301901" cy="2286000"/>
+          </a:xfrm>
+          <a:prstGeom prst="roundRect">
+            <a:avLst/>
+          </a:prstGeom>
           <a:solidFill>
-            <a:srgbClr val="FBBF24"/>
+            <a:srgbClr val="0F0F1F"/>
           </a:solidFill>
-          <a:ln w="9525">
-            <a:solidFill>
-              <a:srgbClr val="FDE68A"/>
-            </a:solidFill>
+          <a:ln>
+            <a:noFill/>
           </a:ln>
         </p:spPr>
         <p:style>
@@ -8087,6 +8153,968 @@
           <a:p>
             <a:pPr algn="ctr"/>
             <a:endParaRPr lang="en-US"/>
+          </a:p>
+        </p:txBody>
+      </p:sp>
+      <p:sp>
+        <p:nvSpPr>
+          <p:cNvPr id="6" name="TextBox 5"/>
+          <p:cNvSpPr txBox="1"/>
+          <p:nvPr/>
+        </p:nvSpPr>
+        <p:spPr>
+          <a:xfrm>
+            <a:off x="1123950" y="2095500"/>
+            <a:ext cx="2882801" cy="133350"/>
+          </a:xfrm>
+          <a:prstGeom prst="rect">
+            <a:avLst/>
+          </a:prstGeom>
+          <a:noFill/>
+        </p:spPr>
+        <p:txBody>
+          <a:bodyPr wrap="square" lIns="0" rIns="0" tIns="0" bIns="0">
+            <a:spAutoFit/>
+          </a:bodyPr>
+          <a:lstStyle/>
+          <a:p>
+            <a:pPr algn="l"/>
+            <a:r>
+              <a:rPr sz="825" b="1" i="0" u="none">
+                <a:solidFill>
+                  <a:srgbClr val="A78BFA"/>
+                </a:solidFill>
+                <a:latin typeface="Inter"/>
+              </a:rPr>
+              <a:t>Hero</a:t>
+            </a:r>
+          </a:p>
+        </p:txBody>
+      </p:sp>
+      <p:sp>
+        <p:nvSpPr>
+          <p:cNvPr id="7" name="TextBox 6"/>
+          <p:cNvSpPr txBox="1"/>
+          <p:nvPr/>
+        </p:nvSpPr>
+        <p:spPr>
+          <a:xfrm>
+            <a:off x="1123950" y="2305050"/>
+            <a:ext cx="2882801" cy="230386"/>
+          </a:xfrm>
+          <a:prstGeom prst="rect">
+            <a:avLst/>
+          </a:prstGeom>
+          <a:noFill/>
+        </p:spPr>
+        <p:txBody>
+          <a:bodyPr wrap="square" lIns="0" rIns="0" tIns="0" bIns="0">
+            <a:normAutofit/>
+          </a:bodyPr>
+          <a:lstStyle/>
+          <a:p>
+            <a:pPr algn="l"/>
+            <a:r>
+              <a:rPr sz="1650" b="1" i="0" u="none">
+                <a:solidFill>
+                  <a:srgbClr val="F5F5F7"/>
+                </a:solidFill>
+                <a:latin typeface="Inter"/>
+              </a:rPr>
+              <a:t>4-corner mesh glow</a:t>
+            </a:r>
+          </a:p>
+        </p:txBody>
+      </p:sp>
+      <p:sp>
+        <p:nvSpPr>
+          <p:cNvPr id="8" name="TextBox 7"/>
+          <p:cNvSpPr txBox="1"/>
+          <p:nvPr/>
+        </p:nvSpPr>
+        <p:spPr>
+          <a:xfrm>
+            <a:off x="1123950" y="2630686"/>
+            <a:ext cx="2882801" cy="371475"/>
+          </a:xfrm>
+          <a:prstGeom prst="rect">
+            <a:avLst/>
+          </a:prstGeom>
+          <a:noFill/>
+        </p:spPr>
+        <p:txBody>
+          <a:bodyPr wrap="square" lIns="0" rIns="0" tIns="0" bIns="0">
+            <a:normAutofit fontScale="62500" lnSpcReduction="0"/>
+          </a:bodyPr>
+          <a:lstStyle/>
+          <a:p>
+            <a:pPr algn="l"/>
+            <a:r>
+              <a:rPr sz="975" b="0" i="0" u="none">
+                <a:solidFill>
+                  <a:srgbClr val="A1A1AA"/>
+                </a:solidFill>
+                <a:latin typeface="Inter"/>
+              </a:rPr>
+              <a:t>Stripe / Vercel hero look. Brand palette → 4 translucent radial blobs at the corners.</a:t>
+            </a:r>
+          </a:p>
+        </p:txBody>
+      </p:sp>
+      <p:sp>
+        <p:nvSpPr>
+          <p:cNvPr id="9" name="Rounded Rectangle 8"/>
+          <p:cNvSpPr/>
+          <p:nvPr/>
+        </p:nvSpPr>
+        <p:spPr>
+          <a:xfrm>
+            <a:off x="4444901" y="1905000"/>
+            <a:ext cx="3302050" cy="2286000"/>
+          </a:xfrm>
+          <a:prstGeom prst="roundRect">
+            <a:avLst/>
+          </a:prstGeom>
+          <a:solidFill>
+            <a:srgbClr val="0F0F1F"/>
+          </a:solidFill>
+          <a:ln>
+            <a:noFill/>
+          </a:ln>
+        </p:spPr>
+        <p:style>
+          <a:lnRef idx="1">
+            <a:schemeClr val="accent1"/>
+          </a:lnRef>
+          <a:fillRef idx="3">
+            <a:schemeClr val="accent1"/>
+          </a:fillRef>
+          <a:effectRef idx="2">
+            <a:schemeClr val="accent1"/>
+          </a:effectRef>
+          <a:fontRef idx="minor">
+            <a:schemeClr val="lt1"/>
+          </a:fontRef>
+        </p:style>
+        <p:txBody>
+          <a:bodyPr rtlCol="0" anchor="ctr"/>
+          <a:lstStyle/>
+          <a:p>
+            <a:pPr algn="ctr"/>
+            <a:endParaRPr lang="en-US"/>
+          </a:p>
+        </p:txBody>
+      </p:sp>
+      <p:sp>
+        <p:nvSpPr>
+          <p:cNvPr id="10" name="TextBox 9"/>
+          <p:cNvSpPr txBox="1"/>
+          <p:nvPr/>
+        </p:nvSpPr>
+        <p:spPr>
+          <a:xfrm>
+            <a:off x="4654451" y="2095500"/>
+            <a:ext cx="2882950" cy="133350"/>
+          </a:xfrm>
+          <a:prstGeom prst="rect">
+            <a:avLst/>
+          </a:prstGeom>
+          <a:noFill/>
+        </p:spPr>
+        <p:txBody>
+          <a:bodyPr wrap="square" lIns="0" rIns="0" tIns="0" bIns="0">
+            <a:spAutoFit/>
+          </a:bodyPr>
+          <a:lstStyle/>
+          <a:p>
+            <a:pPr algn="l"/>
+            <a:r>
+              <a:rPr sz="825" b="1" i="0" u="none">
+                <a:solidFill>
+                  <a:srgbClr val="A78BFA"/>
+                </a:solidFill>
+                <a:latin typeface="Inter"/>
+              </a:rPr>
+              <a:t>Spotlight</a:t>
+            </a:r>
+          </a:p>
+        </p:txBody>
+      </p:sp>
+      <p:sp>
+        <p:nvSpPr>
+          <p:cNvPr id="11" name="TextBox 10"/>
+          <p:cNvSpPr txBox="1"/>
+          <p:nvPr/>
+        </p:nvSpPr>
+        <p:spPr>
+          <a:xfrm>
+            <a:off x="4654451" y="2305050"/>
+            <a:ext cx="2882950" cy="230386"/>
+          </a:xfrm>
+          <a:prstGeom prst="rect">
+            <a:avLst/>
+          </a:prstGeom>
+          <a:noFill/>
+        </p:spPr>
+        <p:txBody>
+          <a:bodyPr wrap="square" lIns="0" rIns="0" tIns="0" bIns="0">
+            <a:normAutofit/>
+          </a:bodyPr>
+          <a:lstStyle/>
+          <a:p>
+            <a:pPr algn="l"/>
+            <a:r>
+              <a:rPr sz="1650" b="1" i="0" u="none">
+                <a:solidFill>
+                  <a:srgbClr val="F5F5F7"/>
+                </a:solidFill>
+                <a:latin typeface="Inter"/>
+              </a:rPr>
+              <a:t>1 huge centered blob</a:t>
+            </a:r>
+          </a:p>
+        </p:txBody>
+      </p:sp>
+      <p:sp>
+        <p:nvSpPr>
+          <p:cNvPr id="12" name="TextBox 11"/>
+          <p:cNvSpPr txBox="1"/>
+          <p:nvPr/>
+        </p:nvSpPr>
+        <p:spPr>
+          <a:xfrm>
+            <a:off x="4654451" y="2630686"/>
+            <a:ext cx="2882950" cy="371475"/>
+          </a:xfrm>
+          <a:prstGeom prst="rect">
+            <a:avLst/>
+          </a:prstGeom>
+          <a:noFill/>
+        </p:spPr>
+        <p:txBody>
+          <a:bodyPr wrap="square" lIns="0" rIns="0" tIns="0" bIns="0">
+            <a:normAutofit fontScale="71421" lnSpcReduction="0"/>
+          </a:bodyPr>
+          <a:lstStyle/>
+          <a:p>
+            <a:pPr algn="l"/>
+            <a:r>
+              <a:rPr sz="975" b="0" i="0" u="none">
+                <a:solidFill>
+                  <a:srgbClr val="A1A1AA"/>
+                </a:solidFill>
+                <a:latin typeface="Inter"/>
+              </a:rPr>
+              <a:t>For dramatic CTA backgrounds — a single glow centered in the surface.</a:t>
+            </a:r>
+          </a:p>
+        </p:txBody>
+      </p:sp>
+      <p:sp>
+        <p:nvSpPr>
+          <p:cNvPr id="13" name="Rounded Rectangle 12"/>
+          <p:cNvSpPr/>
+          <p:nvPr/>
+        </p:nvSpPr>
+        <p:spPr>
+          <a:xfrm>
+            <a:off x="7975550" y="1905000"/>
+            <a:ext cx="3301901" cy="2286000"/>
+          </a:xfrm>
+          <a:prstGeom prst="roundRect">
+            <a:avLst/>
+          </a:prstGeom>
+          <a:solidFill>
+            <a:srgbClr val="0F0F1F"/>
+          </a:solidFill>
+          <a:ln>
+            <a:noFill/>
+          </a:ln>
+        </p:spPr>
+        <p:style>
+          <a:lnRef idx="1">
+            <a:schemeClr val="accent1"/>
+          </a:lnRef>
+          <a:fillRef idx="3">
+            <a:schemeClr val="accent1"/>
+          </a:fillRef>
+          <a:effectRef idx="2">
+            <a:schemeClr val="accent1"/>
+          </a:effectRef>
+          <a:fontRef idx="minor">
+            <a:schemeClr val="lt1"/>
+          </a:fontRef>
+        </p:style>
+        <p:txBody>
+          <a:bodyPr rtlCol="0" anchor="ctr"/>
+          <a:lstStyle/>
+          <a:p>
+            <a:pPr algn="ctr"/>
+            <a:endParaRPr lang="en-US"/>
+          </a:p>
+        </p:txBody>
+      </p:sp>
+      <p:sp>
+        <p:nvSpPr>
+          <p:cNvPr id="14" name="TextBox 13"/>
+          <p:cNvSpPr txBox="1"/>
+          <p:nvPr/>
+        </p:nvSpPr>
+        <p:spPr>
+          <a:xfrm>
+            <a:off x="8185100" y="2095500"/>
+            <a:ext cx="2882801" cy="133350"/>
+          </a:xfrm>
+          <a:prstGeom prst="rect">
+            <a:avLst/>
+          </a:prstGeom>
+          <a:noFill/>
+        </p:spPr>
+        <p:txBody>
+          <a:bodyPr wrap="square" lIns="0" rIns="0" tIns="0" bIns="0">
+            <a:spAutoFit/>
+          </a:bodyPr>
+          <a:lstStyle/>
+          <a:p>
+            <a:pPr algn="l"/>
+            <a:r>
+              <a:rPr sz="825" b="1" i="0" u="none">
+                <a:solidFill>
+                  <a:srgbClr val="A78BFA"/>
+                </a:solidFill>
+                <a:latin typeface="Inter"/>
+              </a:rPr>
+              <a:t>Aurora</a:t>
+            </a:r>
+          </a:p>
+        </p:txBody>
+      </p:sp>
+      <p:sp>
+        <p:nvSpPr>
+          <p:cNvPr id="15" name="TextBox 14"/>
+          <p:cNvSpPr txBox="1"/>
+          <p:nvPr/>
+        </p:nvSpPr>
+        <p:spPr>
+          <a:xfrm>
+            <a:off x="8185100" y="2305050"/>
+            <a:ext cx="2882801" cy="230386"/>
+          </a:xfrm>
+          <a:prstGeom prst="rect">
+            <a:avLst/>
+          </a:prstGeom>
+          <a:noFill/>
+        </p:spPr>
+        <p:txBody>
+          <a:bodyPr wrap="square" lIns="0" rIns="0" tIns="0" bIns="0">
+            <a:normAutofit/>
+          </a:bodyPr>
+          <a:lstStyle/>
+          <a:p>
+            <a:pPr algn="l"/>
+            <a:r>
+              <a:rPr sz="1650" b="1" i="0" u="none">
+                <a:solidFill>
+                  <a:srgbClr val="F5F5F7"/>
+                </a:solidFill>
+                <a:latin typeface="Inter"/>
+              </a:rPr>
+              <a:t>3 horizontal bands</a:t>
+            </a:r>
+          </a:p>
+        </p:txBody>
+      </p:sp>
+      <p:sp>
+        <p:nvSpPr>
+          <p:cNvPr id="16" name="TextBox 15"/>
+          <p:cNvSpPr txBox="1"/>
+          <p:nvPr/>
+        </p:nvSpPr>
+        <p:spPr>
+          <a:xfrm>
+            <a:off x="8185100" y="2630686"/>
+            <a:ext cx="2882801" cy="371475"/>
+          </a:xfrm>
+          <a:prstGeom prst="rect">
+            <a:avLst/>
+          </a:prstGeom>
+          <a:noFill/>
+        </p:spPr>
+        <p:txBody>
+          <a:bodyPr wrap="square" lIns="0" rIns="0" tIns="0" bIns="0">
+            <a:normAutofit fontScale="70441" lnSpcReduction="0"/>
+          </a:bodyPr>
+          <a:lstStyle/>
+          <a:p>
+            <a:pPr algn="l"/>
+            <a:r>
+              <a:rPr sz="975" b="0" i="0" u="none">
+                <a:solidFill>
+                  <a:srgbClr val="A1A1AA"/>
+                </a:solidFill>
+                <a:latin typeface="Inter"/>
+              </a:rPr>
+              <a:t>Northern-lights effect — three blobs stacked vertically across the surface.</a:t>
+            </a:r>
+          </a:p>
+        </p:txBody>
+      </p:sp>
+      <p:sp>
+        <p:nvSpPr>
+          <p:cNvPr id="17" name="Rounded Rectangle 16"/>
+          <p:cNvSpPr/>
+          <p:nvPr/>
+        </p:nvSpPr>
+        <p:spPr>
+          <a:xfrm>
+            <a:off x="914400" y="4095750"/>
+            <a:ext cx="3301901" cy="2286000"/>
+          </a:xfrm>
+          <a:prstGeom prst="roundRect">
+            <a:avLst/>
+          </a:prstGeom>
+          <a:solidFill>
+            <a:srgbClr val="0F0F1F"/>
+          </a:solidFill>
+          <a:ln>
+            <a:noFill/>
+          </a:ln>
+        </p:spPr>
+        <p:style>
+          <a:lnRef idx="1">
+            <a:schemeClr val="accent1"/>
+          </a:lnRef>
+          <a:fillRef idx="3">
+            <a:schemeClr val="accent1"/>
+          </a:fillRef>
+          <a:effectRef idx="2">
+            <a:schemeClr val="accent1"/>
+          </a:effectRef>
+          <a:fontRef idx="minor">
+            <a:schemeClr val="lt1"/>
+          </a:fontRef>
+        </p:style>
+        <p:txBody>
+          <a:bodyPr rtlCol="0" anchor="ctr"/>
+          <a:lstStyle/>
+          <a:p>
+            <a:pPr algn="ctr"/>
+            <a:endParaRPr lang="en-US"/>
+          </a:p>
+        </p:txBody>
+      </p:sp>
+      <p:sp>
+        <p:nvSpPr>
+          <p:cNvPr id="18" name="TextBox 17"/>
+          <p:cNvSpPr txBox="1"/>
+          <p:nvPr/>
+        </p:nvSpPr>
+        <p:spPr>
+          <a:xfrm>
+            <a:off x="1123950" y="4286250"/>
+            <a:ext cx="2882801" cy="133350"/>
+          </a:xfrm>
+          <a:prstGeom prst="rect">
+            <a:avLst/>
+          </a:prstGeom>
+          <a:noFill/>
+        </p:spPr>
+        <p:txBody>
+          <a:bodyPr wrap="square" lIns="0" rIns="0" tIns="0" bIns="0">
+            <a:spAutoFit/>
+          </a:bodyPr>
+          <a:lstStyle/>
+          <a:p>
+            <a:pPr algn="l"/>
+            <a:r>
+              <a:rPr sz="825" b="1" i="0" u="none">
+                <a:solidFill>
+                  <a:srgbClr val="A78BFA"/>
+                </a:solidFill>
+                <a:latin typeface="Inter"/>
+              </a:rPr>
+              <a:t>Glass</a:t>
+            </a:r>
+          </a:p>
+        </p:txBody>
+      </p:sp>
+      <p:sp>
+        <p:nvSpPr>
+          <p:cNvPr id="19" name="TextBox 18"/>
+          <p:cNvSpPr txBox="1"/>
+          <p:nvPr/>
+        </p:nvSpPr>
+        <p:spPr>
+          <a:xfrm>
+            <a:off x="1123950" y="4495800"/>
+            <a:ext cx="2882801" cy="230386"/>
+          </a:xfrm>
+          <a:prstGeom prst="rect">
+            <a:avLst/>
+          </a:prstGeom>
+          <a:noFill/>
+        </p:spPr>
+        <p:txBody>
+          <a:bodyPr wrap="square" lIns="0" rIns="0" tIns="0" bIns="0">
+            <a:normAutofit/>
+          </a:bodyPr>
+          <a:lstStyle/>
+          <a:p>
+            <a:pPr algn="l"/>
+            <a:r>
+              <a:rPr sz="1650" b="1" i="0" u="none">
+                <a:solidFill>
+                  <a:srgbClr val="F5F5F7"/>
+                </a:solidFill>
+                <a:latin typeface="Inter"/>
+              </a:rPr>
+              <a:t>Frosted depth</a:t>
+            </a:r>
+          </a:p>
+        </p:txBody>
+      </p:sp>
+      <p:sp>
+        <p:nvSpPr>
+          <p:cNvPr id="20" name="TextBox 19"/>
+          <p:cNvSpPr txBox="1"/>
+          <p:nvPr/>
+        </p:nvSpPr>
+        <p:spPr>
+          <a:xfrm>
+            <a:off x="1123950" y="4821436"/>
+            <a:ext cx="2882801" cy="371475"/>
+          </a:xfrm>
+          <a:prstGeom prst="rect">
+            <a:avLst/>
+          </a:prstGeom>
+          <a:noFill/>
+        </p:spPr>
+        <p:txBody>
+          <a:bodyPr wrap="square" lIns="0" rIns="0" tIns="0" bIns="0">
+            <a:normAutofit fontScale="66335" lnSpcReduction="0"/>
+          </a:bodyPr>
+          <a:lstStyle/>
+          <a:p>
+            <a:pPr algn="l"/>
+            <a:r>
+              <a:rPr sz="975" b="0" i="0" u="none">
+                <a:solidFill>
+                  <a:srgbClr val="A1A1AA"/>
+                </a:solidFill>
+                <a:latin typeface="Inter"/>
+              </a:rPr>
+              <a:t>Rim highlight + hairline + inset glow. Looks like brushed glass on a dark base.</a:t>
+            </a:r>
+          </a:p>
+        </p:txBody>
+      </p:sp>
+      <p:sp>
+        <p:nvSpPr>
+          <p:cNvPr id="21" name="Rounded Rectangle 20"/>
+          <p:cNvSpPr/>
+          <p:nvPr/>
+        </p:nvSpPr>
+        <p:spPr>
+          <a:xfrm>
+            <a:off x="4444901" y="4095750"/>
+            <a:ext cx="3302050" cy="2286000"/>
+          </a:xfrm>
+          <a:prstGeom prst="roundRect">
+            <a:avLst/>
+          </a:prstGeom>
+          <a:solidFill>
+            <a:srgbClr val="0F0F1F"/>
+          </a:solidFill>
+          <a:ln>
+            <a:noFill/>
+          </a:ln>
+        </p:spPr>
+        <p:style>
+          <a:lnRef idx="1">
+            <a:schemeClr val="accent1"/>
+          </a:lnRef>
+          <a:fillRef idx="3">
+            <a:schemeClr val="accent1"/>
+          </a:fillRef>
+          <a:effectRef idx="2">
+            <a:schemeClr val="accent1"/>
+          </a:effectRef>
+          <a:fontRef idx="minor">
+            <a:schemeClr val="lt1"/>
+          </a:fontRef>
+        </p:style>
+        <p:txBody>
+          <a:bodyPr rtlCol="0" anchor="ctr"/>
+          <a:lstStyle/>
+          <a:p>
+            <a:pPr algn="ctr"/>
+            <a:endParaRPr lang="en-US"/>
+          </a:p>
+        </p:txBody>
+      </p:sp>
+      <p:sp>
+        <p:nvSpPr>
+          <p:cNvPr id="22" name="TextBox 21"/>
+          <p:cNvSpPr txBox="1"/>
+          <p:nvPr/>
+        </p:nvSpPr>
+        <p:spPr>
+          <a:xfrm>
+            <a:off x="4654451" y="4286250"/>
+            <a:ext cx="2882950" cy="133350"/>
+          </a:xfrm>
+          <a:prstGeom prst="rect">
+            <a:avLst/>
+          </a:prstGeom>
+          <a:noFill/>
+        </p:spPr>
+        <p:txBody>
+          <a:bodyPr wrap="square" lIns="0" rIns="0" tIns="0" bIns="0">
+            <a:spAutoFit/>
+          </a:bodyPr>
+          <a:lstStyle/>
+          <a:p>
+            <a:pPr algn="l"/>
+            <a:r>
+              <a:rPr sz="825" b="1" i="0" u="none">
+                <a:solidFill>
+                  <a:srgbClr val="A78BFA"/>
+                </a:solidFill>
+                <a:latin typeface="Inter"/>
+              </a:rPr>
+              <a:t>Tactile</a:t>
+            </a:r>
+          </a:p>
+        </p:txBody>
+      </p:sp>
+      <p:sp>
+        <p:nvSpPr>
+          <p:cNvPr id="23" name="TextBox 22"/>
+          <p:cNvSpPr txBox="1"/>
+          <p:nvPr/>
+        </p:nvSpPr>
+        <p:spPr>
+          <a:xfrm>
+            <a:off x="4654451" y="4495800"/>
+            <a:ext cx="2882950" cy="230386"/>
+          </a:xfrm>
+          <a:prstGeom prst="rect">
+            <a:avLst/>
+          </a:prstGeom>
+          <a:noFill/>
+        </p:spPr>
+        <p:txBody>
+          <a:bodyPr wrap="square" lIns="0" rIns="0" tIns="0" bIns="0">
+            <a:normAutofit/>
+          </a:bodyPr>
+          <a:lstStyle/>
+          <a:p>
+            <a:pPr algn="l"/>
+            <a:r>
+              <a:rPr sz="1650" b="1" i="0" u="none">
+                <a:solidFill>
+                  <a:srgbClr val="F5F5F7"/>
+                </a:solidFill>
+                <a:latin typeface="Inter"/>
+              </a:rPr>
+              <a:t>Button-like surface</a:t>
+            </a:r>
+          </a:p>
+        </p:txBody>
+      </p:sp>
+      <p:sp>
+        <p:nvSpPr>
+          <p:cNvPr id="24" name="TextBox 23"/>
+          <p:cNvSpPr txBox="1"/>
+          <p:nvPr/>
+        </p:nvSpPr>
+        <p:spPr>
+          <a:xfrm>
+            <a:off x="4654451" y="4821436"/>
+            <a:ext cx="2882950" cy="371475"/>
+          </a:xfrm>
+          <a:prstGeom prst="rect">
+            <a:avLst/>
+          </a:prstGeom>
+          <a:noFill/>
+        </p:spPr>
+        <p:txBody>
+          <a:bodyPr wrap="square" lIns="0" rIns="0" tIns="0" bIns="0">
+            <a:normAutofit fontScale="71856" lnSpcReduction="0"/>
+          </a:bodyPr>
+          <a:lstStyle/>
+          <a:p>
+            <a:pPr algn="l"/>
+            <a:r>
+              <a:rPr sz="975" b="0" i="0" u="none">
+                <a:solidFill>
+                  <a:srgbClr val="A1A1AA"/>
+                </a:solidFill>
+                <a:latin typeface="Inter"/>
+              </a:rPr>
+              <a:t>Strong rim highlight + thin border. Implies a clickable, raised affordance.</a:t>
+            </a:r>
+          </a:p>
+        </p:txBody>
+      </p:sp>
+      <p:sp>
+        <p:nvSpPr>
+          <p:cNvPr id="25" name="Rounded Rectangle 24"/>
+          <p:cNvSpPr/>
+          <p:nvPr/>
+        </p:nvSpPr>
+        <p:spPr>
+          <a:xfrm>
+            <a:off x="7975550" y="4095750"/>
+            <a:ext cx="3301901" cy="2286000"/>
+          </a:xfrm>
+          <a:prstGeom prst="roundRect">
+            <a:avLst/>
+          </a:prstGeom>
+          <a:solidFill>
+            <a:srgbClr val="0F0F1F"/>
+          </a:solidFill>
+          <a:ln>
+            <a:noFill/>
+          </a:ln>
+        </p:spPr>
+        <p:style>
+          <a:lnRef idx="1">
+            <a:schemeClr val="accent1"/>
+          </a:lnRef>
+          <a:fillRef idx="3">
+            <a:schemeClr val="accent1"/>
+          </a:fillRef>
+          <a:effectRef idx="2">
+            <a:schemeClr val="accent1"/>
+          </a:effectRef>
+          <a:fontRef idx="minor">
+            <a:schemeClr val="lt1"/>
+          </a:fontRef>
+        </p:style>
+        <p:txBody>
+          <a:bodyPr rtlCol="0" anchor="ctr"/>
+          <a:lstStyle/>
+          <a:p>
+            <a:pPr algn="ctr"/>
+            <a:endParaRPr lang="en-US"/>
+          </a:p>
+        </p:txBody>
+      </p:sp>
+      <p:sp>
+        <p:nvSpPr>
+          <p:cNvPr id="26" name="TextBox 25"/>
+          <p:cNvSpPr txBox="1"/>
+          <p:nvPr/>
+        </p:nvSpPr>
+        <p:spPr>
+          <a:xfrm>
+            <a:off x="8185100" y="4286250"/>
+            <a:ext cx="2882801" cy="133350"/>
+          </a:xfrm>
+          <a:prstGeom prst="rect">
+            <a:avLst/>
+          </a:prstGeom>
+          <a:noFill/>
+        </p:spPr>
+        <p:txBody>
+          <a:bodyPr wrap="square" lIns="0" rIns="0" tIns="0" bIns="0">
+            <a:spAutoFit/>
+          </a:bodyPr>
+          <a:lstStyle/>
+          <a:p>
+            <a:pPr algn="l"/>
+            <a:r>
+              <a:rPr sz="825" b="1" i="0" u="none">
+                <a:solidFill>
+                  <a:srgbClr val="A78BFA"/>
+                </a:solidFill>
+                <a:latin typeface="Inter"/>
+              </a:rPr>
+              <a:t>Recessed</a:t>
+            </a:r>
+          </a:p>
+        </p:txBody>
+      </p:sp>
+      <p:sp>
+        <p:nvSpPr>
+          <p:cNvPr id="27" name="TextBox 26"/>
+          <p:cNvSpPr txBox="1"/>
+          <p:nvPr/>
+        </p:nvSpPr>
+        <p:spPr>
+          <a:xfrm>
+            <a:off x="8185100" y="4495800"/>
+            <a:ext cx="2882801" cy="230386"/>
+          </a:xfrm>
+          <a:prstGeom prst="rect">
+            <a:avLst/>
+          </a:prstGeom>
+          <a:noFill/>
+        </p:spPr>
+        <p:txBody>
+          <a:bodyPr wrap="square" lIns="0" rIns="0" tIns="0" bIns="0">
+            <a:normAutofit/>
+          </a:bodyPr>
+          <a:lstStyle/>
+          <a:p>
+            <a:pPr algn="l"/>
+            <a:r>
+              <a:rPr sz="1650" b="1" i="0" u="none">
+                <a:solidFill>
+                  <a:srgbClr val="F5F5F7"/>
+                </a:solidFill>
+                <a:latin typeface="Inter"/>
+              </a:rPr>
+              <a:t>Inset depression</a:t>
+            </a:r>
+          </a:p>
+        </p:txBody>
+      </p:sp>
+      <p:sp>
+        <p:nvSpPr>
+          <p:cNvPr id="28" name="TextBox 27"/>
+          <p:cNvSpPr txBox="1"/>
+          <p:nvPr/>
+        </p:nvSpPr>
+        <p:spPr>
+          <a:xfrm>
+            <a:off x="8185100" y="4821436"/>
+            <a:ext cx="2882801" cy="371475"/>
+          </a:xfrm>
+          <a:prstGeom prst="rect">
+            <a:avLst/>
+          </a:prstGeom>
+          <a:noFill/>
+        </p:spPr>
+        <p:txBody>
+          <a:bodyPr wrap="square" lIns="0" rIns="0" tIns="0" bIns="0">
+            <a:normAutofit fontScale="69247" lnSpcReduction="0"/>
+          </a:bodyPr>
+          <a:lstStyle/>
+          <a:p>
+            <a:pPr algn="l"/>
+            <a:r>
+              <a:rPr sz="975" b="0" i="0" u="none">
+                <a:solidFill>
+                  <a:srgbClr val="A1A1AA"/>
+                </a:solidFill>
+                <a:latin typeface="Inter"/>
+              </a:rPr>
+              <a:t>Inset shadow only — gives the impression of a sunken or pressed surface.</a:t>
+            </a:r>
+          </a:p>
+        </p:txBody>
+      </p:sp>
+      <p:sp>
+        <p:nvSpPr>
+          <p:cNvPr id="29" name="Rectangle 28"/>
+          <p:cNvSpPr/>
+          <p:nvPr/>
+        </p:nvSpPr>
+        <p:spPr>
+          <a:xfrm>
+            <a:off x="10744200" y="6286500"/>
+            <a:ext cx="533400" cy="533400"/>
+          </a:xfrm>
+          <a:prstGeom prst="rect">
+            <a:avLst/>
+          </a:prstGeom>
+          <a:noFill/>
+          <a:ln>
+            <a:noFill/>
+          </a:ln>
+        </p:spPr>
+        <p:style>
+          <a:lnRef idx="1">
+            <a:schemeClr val="accent1"/>
+          </a:lnRef>
+          <a:fillRef idx="3">
+            <a:schemeClr val="accent1"/>
+          </a:fillRef>
+          <a:effectRef idx="2">
+            <a:schemeClr val="accent1"/>
+          </a:effectRef>
+          <a:fontRef idx="minor">
+            <a:schemeClr val="lt1"/>
+          </a:fontRef>
+        </p:style>
+        <p:txBody>
+          <a:bodyPr rtlCol="0" anchor="ctr"/>
+          <a:lstStyle/>
+          <a:p>
+            <a:pPr algn="ctr"/>
+            <a:endParaRPr lang="en-US"/>
+          </a:p>
+        </p:txBody>
+      </p:sp>
+      <p:sp>
+        <p:nvSpPr>
+          <p:cNvPr id="30" name="TextBox 29"/>
+          <p:cNvSpPr txBox="1"/>
+          <p:nvPr/>
+        </p:nvSpPr>
+        <p:spPr>
+          <a:xfrm>
+            <a:off x="914400" y="6400800"/>
+            <a:ext cx="3146227" cy="152400"/>
+          </a:xfrm>
+          <a:prstGeom prst="rect">
+            <a:avLst/>
+          </a:prstGeom>
+          <a:noFill/>
+        </p:spPr>
+        <p:txBody>
+          <a:bodyPr wrap="square" lIns="0" rIns="0" tIns="0" bIns="0">
+            <a:spAutoFit/>
+          </a:bodyPr>
+          <a:lstStyle/>
+          <a:p>
+            <a:pPr algn="l"/>
+            <a:r>
+              <a:rPr sz="975" b="1" i="0" u="none">
+                <a:solidFill>
+                  <a:srgbClr val="52525B"/>
+                </a:solidFill>
+                <a:latin typeface="Inter"/>
+              </a:rPr>
+              <a:t>PIXELPITCH LABS · DECORATION DEMO</a:t>
+            </a:r>
+          </a:p>
+        </p:txBody>
+      </p:sp>
+      <p:sp>
+        <p:nvSpPr>
+          <p:cNvPr id="31" name="TextBox 30"/>
+          <p:cNvSpPr txBox="1"/>
+          <p:nvPr/>
+        </p:nvSpPr>
+        <p:spPr>
+          <a:xfrm>
+            <a:off x="10255448" y="6400800"/>
+            <a:ext cx="1022152" cy="152400"/>
+          </a:xfrm>
+          <a:prstGeom prst="rect">
+            <a:avLst/>
+          </a:prstGeom>
+          <a:noFill/>
+        </p:spPr>
+        <p:txBody>
+          <a:bodyPr wrap="square" lIns="0" rIns="0" tIns="0" bIns="0">
+            <a:spAutoFit/>
+          </a:bodyPr>
+          <a:lstStyle/>
+          <a:p>
+            <a:pPr algn="l"/>
+            <a:r>
+              <a:rPr sz="975" b="1" i="0" u="none">
+                <a:solidFill>
+                  <a:srgbClr val="52525B"/>
+                </a:solidFill>
+                <a:latin typeface="Inter"/>
+              </a:rPr>
+              <a:t>13 / 13 · END</a:t>
+            </a:r>
           </a:p>
         </p:txBody>
       </p:sp>
@@ -9141,7 +10169,7 @@
         </p:spPr>
         <p:txBody>
           <a:bodyPr wrap="square" lIns="0" rIns="0" tIns="0" bIns="0">
-            <a:normAutofit/>
+            <a:normAutofit fontScale="87976" lnSpcReduction="0"/>
           </a:bodyPr>
           <a:lstStyle/>
           <a:p>
@@ -9176,7 +10204,7 @@
         </p:spPr>
         <p:txBody>
           <a:bodyPr wrap="square" lIns="0" rIns="0" tIns="0" bIns="0">
-            <a:spAutoFit/>
+            <a:normAutofit fontScale="55942" lnSpcReduction="0"/>
           </a:bodyPr>
           <a:lstStyle/>
           <a:p>
@@ -9375,7 +10403,7 @@
         </p:spPr>
         <p:txBody>
           <a:bodyPr wrap="square" lIns="0" rIns="0" tIns="0" bIns="0">
-            <a:spAutoFit/>
+            <a:normAutofit fontScale="55767" lnSpcReduction="0"/>
           </a:bodyPr>
           <a:lstStyle/>
           <a:p>
@@ -9577,7 +10605,7 @@
         </p:spPr>
         <p:txBody>
           <a:bodyPr wrap="square" lIns="0" rIns="0" tIns="0" bIns="0">
-            <a:normAutofit/>
+            <a:normAutofit fontScale="76376" lnSpcReduction="0"/>
           </a:bodyPr>
           <a:lstStyle/>
           <a:p>
@@ -9855,7 +10883,7 @@
         </p:spPr>
         <p:txBody>
           <a:bodyPr wrap="square" lIns="0" rIns="0" tIns="0" bIns="0">
-            <a:spAutoFit/>
+            <a:normAutofit fontScale="50000" lnSpcReduction="0"/>
           </a:bodyPr>
           <a:lstStyle/>
           <a:p>
@@ -10133,7 +11161,7 @@
         </p:spPr>
         <p:txBody>
           <a:bodyPr wrap="square" lIns="0" rIns="0" tIns="0" bIns="0">
-            <a:spAutoFit/>
+            <a:normAutofit fontScale="50000" lnSpcReduction="0"/>
           </a:bodyPr>
           <a:lstStyle/>
           <a:p>
@@ -10402,7 +11430,7 @@
         </p:spPr>
         <p:txBody>
           <a:bodyPr wrap="square" lIns="0" rIns="0" tIns="0" bIns="0">
-            <a:spAutoFit/>
+            <a:normAutofit fontScale="50000" lnSpcReduction="0"/>
           </a:bodyPr>
           <a:lstStyle/>
           <a:p>
@@ -10789,7 +11817,7 @@
         </p:spPr>
         <p:txBody>
           <a:bodyPr wrap="square" lIns="0" rIns="0" tIns="0" bIns="0">
-            <a:spAutoFit/>
+            <a:normAutofit fontScale="55508" lnSpcReduction="0"/>
           </a:bodyPr>
           <a:lstStyle/>
           <a:p>
@@ -11009,7 +12037,7 @@
         </p:spPr>
         <p:txBody>
           <a:bodyPr wrap="square" lIns="0" rIns="0" tIns="0" bIns="0">
-            <a:spAutoFit/>
+            <a:normAutofit fontScale="55802" lnSpcReduction="0"/>
           </a:bodyPr>
           <a:lstStyle/>
           <a:p>
@@ -11229,7 +12257,7 @@
         </p:spPr>
         <p:txBody>
           <a:bodyPr wrap="square" lIns="0" rIns="0" tIns="0" bIns="0">
-            <a:spAutoFit/>
+            <a:normAutofit fontScale="59614" lnSpcReduction="0"/>
           </a:bodyPr>
           <a:lstStyle/>
           <a:p>
@@ -11449,7 +12477,7 @@
         </p:spPr>
         <p:txBody>
           <a:bodyPr wrap="square" lIns="0" rIns="0" tIns="0" bIns="0">
-            <a:spAutoFit/>
+            <a:normAutofit fontScale="58067" lnSpcReduction="0"/>
           </a:bodyPr>
           <a:lstStyle/>
           <a:p>
@@ -11669,7 +12697,7 @@
         </p:spPr>
         <p:txBody>
           <a:bodyPr wrap="square" lIns="0" rIns="0" tIns="0" bIns="0">
-            <a:spAutoFit/>
+            <a:normAutofit fontScale="56530" lnSpcReduction="0"/>
           </a:bodyPr>
           <a:lstStyle/>
           <a:p>
@@ -11889,7 +12917,7 @@
         </p:spPr>
         <p:txBody>
           <a:bodyPr wrap="square" lIns="0" rIns="0" tIns="0" bIns="0">
-            <a:spAutoFit/>
+            <a:normAutofit fontScale="59910" lnSpcReduction="0"/>
           </a:bodyPr>
           <a:lstStyle/>
           <a:p>
@@ -13540,7 +14568,7 @@
         </p:spPr>
         <p:txBody>
           <a:bodyPr wrap="square" lIns="0" rIns="0" tIns="0" bIns="0">
-            <a:spAutoFit/>
+            <a:normAutofit fontScale="50000" lnSpcReduction="0"/>
           </a:bodyPr>
           <a:lstStyle/>
           <a:p>
@@ -13742,7 +14770,7 @@
         </p:spPr>
         <p:txBody>
           <a:bodyPr wrap="square" lIns="0" rIns="0" tIns="0" bIns="0">
-            <a:spAutoFit/>
+            <a:normAutofit fontScale="50000" lnSpcReduction="0"/>
           </a:bodyPr>
           <a:lstStyle/>
           <a:p>
@@ -13944,7 +14972,7 @@
         </p:spPr>
         <p:txBody>
           <a:bodyPr wrap="square" lIns="0" rIns="0" tIns="0" bIns="0">
-            <a:spAutoFit/>
+            <a:normAutofit fontScale="50000" lnSpcReduction="0"/>
           </a:bodyPr>
           <a:lstStyle/>
           <a:p>
@@ -14146,7 +15174,7 @@
         </p:spPr>
         <p:txBody>
           <a:bodyPr wrap="square" lIns="0" rIns="0" tIns="0" bIns="0">
-            <a:spAutoFit/>
+            <a:normAutofit fontScale="50000" lnSpcReduction="0"/>
           </a:bodyPr>
           <a:lstStyle/>
           <a:p>
@@ -14348,7 +15376,7 @@
         </p:spPr>
         <p:txBody>
           <a:bodyPr wrap="square" lIns="0" rIns="0" tIns="0" bIns="0">
-            <a:spAutoFit/>
+            <a:normAutofit fontScale="50000" lnSpcReduction="0"/>
           </a:bodyPr>
           <a:lstStyle/>
           <a:p>
@@ -14561,7 +15589,7 @@
         </p:spPr>
         <p:txBody>
           <a:bodyPr wrap="square" lIns="0" rIns="0" tIns="0" bIns="0">
-            <a:spAutoFit/>
+            <a:normAutofit fontScale="77542" lnSpcReduction="0"/>
           </a:bodyPr>
           <a:lstStyle/>
           <a:p>
@@ -14835,7 +15863,7 @@
         </p:spPr>
         <p:txBody>
           <a:bodyPr wrap="square" lIns="0" rIns="0" tIns="0" bIns="0">
-            <a:normAutofit/>
+            <a:normAutofit fontScale="50000" lnSpcReduction="0"/>
           </a:bodyPr>
           <a:lstStyle/>
           <a:p>
@@ -15196,7 +16224,7 @@
         </p:spPr>
         <p:txBody>
           <a:bodyPr wrap="square" lIns="0" rIns="0" tIns="0" bIns="0">
-            <a:normAutofit/>
+            <a:normAutofit fontScale="95556" lnSpcReduction="0"/>
           </a:bodyPr>
           <a:lstStyle/>
           <a:p>
@@ -15365,7 +16393,7 @@
         </p:spPr>
         <p:txBody>
           <a:bodyPr wrap="square" lIns="0" rIns="0" tIns="0" bIns="0">
-            <a:spAutoFit/>
+            <a:normAutofit fontScale="90257" lnSpcReduction="0"/>
           </a:bodyPr>
           <a:lstStyle/>
           <a:p>
@@ -15948,7 +16976,7 @@
         </p:spPr>
         <p:txBody>
           <a:bodyPr wrap="square" lIns="0" rIns="0" tIns="0" bIns="0">
-            <a:spAutoFit/>
+            <a:normAutofit fontScale="75934" lnSpcReduction="0"/>
           </a:bodyPr>
           <a:lstStyle/>
           <a:p>
@@ -16495,7 +17523,7 @@
         </p:spPr>
         <p:txBody>
           <a:bodyPr wrap="square" lIns="0" rIns="0" tIns="0" bIns="0">
-            <a:spAutoFit/>
+            <a:normAutofit fontScale="75793" lnSpcReduction="0"/>
           </a:bodyPr>
           <a:lstStyle/>
           <a:p>
